--- a/Презентация1.pptx
+++ b/Презентация1.pptx
@@ -5,7 +5,7 @@
     <p:sldMasterId id="2147483648" r:id="rId1"/>
   </p:sldMasterIdLst>
   <p:notesMasterIdLst>
-    <p:notesMasterId r:id="rId14"/>
+    <p:notesMasterId r:id="rId15"/>
   </p:notesMasterIdLst>
   <p:sldIdLst>
     <p:sldId id="256" r:id="rId4"/>
@@ -18,6 +18,7 @@
     <p:sldId id="263" r:id="rId11"/>
     <p:sldId id="264" r:id="rId12"/>
     <p:sldId id="265" r:id="rId13"/>
+    <p:sldId id="266" r:id="rId14"/>
   </p:sldIdLst>
   <p:sldSz cx="12192000" cy="6858000"/>
   <p:notesSz cx="6858000" cy="9144000"/>
@@ -143,7 +144,7 @@
       </p:grpSpPr>
       <p:sp>
         <p:nvSpPr>
-          <p:cNvPr id="1346329031" name="Верхний колонтитул 1"/>
+          <p:cNvPr id="1425460420" name="Верхний колонтитул 1"/>
           <p:cNvSpPr>
             <a:spLocks noGrp="1"/>
           </p:cNvSpPr>
@@ -177,7 +178,7 @@
       </p:sp>
       <p:sp>
         <p:nvSpPr>
-          <p:cNvPr id="1824865230" name="Дата 2"/>
+          <p:cNvPr id="383163220" name="Дата 2"/>
           <p:cNvSpPr>
             <a:spLocks noGrp="1"/>
           </p:cNvSpPr>
@@ -215,7 +216,7 @@
       </p:sp>
       <p:sp>
         <p:nvSpPr>
-          <p:cNvPr id="1728743519" name="Рисунок 3"/>
+          <p:cNvPr id="1731575604" name="Рисунок 3"/>
           <p:cNvSpPr>
             <a:spLocks noChangeAspect="1" noGrp="1" noRot="1"/>
           </p:cNvSpPr>
@@ -251,7 +252,7 @@
       </p:sp>
       <p:sp>
         <p:nvSpPr>
-          <p:cNvPr id="2092630771" name="Заметка 4"/>
+          <p:cNvPr id="35747242" name="Заметка 4"/>
           <p:cNvSpPr>
             <a:spLocks noGrp="1"/>
           </p:cNvSpPr>
@@ -325,7 +326,7 @@
       </p:sp>
       <p:sp>
         <p:nvSpPr>
-          <p:cNvPr id="510267566" name="Нижний колонтитул 5"/>
+          <p:cNvPr id="359218914" name="Нижний колонтитул 5"/>
           <p:cNvSpPr>
             <a:spLocks noGrp="1"/>
           </p:cNvSpPr>
@@ -359,7 +360,7 @@
       </p:sp>
       <p:sp>
         <p:nvSpPr>
-          <p:cNvPr id="10800225" name="Номер слайда 6"/>
+          <p:cNvPr id="1028622891" name="Номер слайда 6"/>
           <p:cNvSpPr>
             <a:spLocks noGrp="1"/>
           </p:cNvSpPr>
@@ -512,7 +513,7 @@
       </p:grpSpPr>
       <p:sp>
         <p:nvSpPr>
-          <p:cNvPr id="1057449144" name="Рисунок 1"/>
+          <p:cNvPr id="1624316532" name="Рисунок 1"/>
           <p:cNvSpPr>
             <a:spLocks noChangeAspect="1" noGrp="1" noRot="1"/>
           </p:cNvSpPr>
@@ -529,7 +530,7 @@
       </p:sp>
       <p:sp>
         <p:nvSpPr>
-          <p:cNvPr id="412996768" name="Текст 2"/>
+          <p:cNvPr id="1071231540" name="Текст 2"/>
           <p:cNvSpPr>
             <a:spLocks noGrp="1"/>
           </p:cNvSpPr>
@@ -554,7 +555,7 @@
       </p:sp>
       <p:sp>
         <p:nvSpPr>
-          <p:cNvPr id="458998983" name="Номер слайда 3"/>
+          <p:cNvPr id="1829079233" name="Номер слайда 3"/>
           <p:cNvSpPr>
             <a:spLocks noGrp="1"/>
           </p:cNvSpPr>
@@ -605,7 +606,7 @@
       </p:grpSpPr>
       <p:sp>
         <p:nvSpPr>
-          <p:cNvPr id="2" name="Slide Image Placeholder 1"/>
+          <p:cNvPr id="1437055400" name="Slide Image Placeholder 1"/>
           <p:cNvSpPr>
             <a:spLocks noChangeAspect="1" noGrp="1" noRot="1"/>
           </p:cNvSpPr>
@@ -617,7 +618,7 @@
       </p:sp>
       <p:sp>
         <p:nvSpPr>
-          <p:cNvPr id="3" name="Notes Placeholder 2"/>
+          <p:cNvPr id="2047024309" name="Notes Placeholder 2"/>
           <p:cNvSpPr>
             <a:spLocks noGrp="1"/>
           </p:cNvSpPr>
@@ -639,7 +640,92 @@
       </p:sp>
       <p:sp>
         <p:nvSpPr>
-          <p:cNvPr id="4" name="Slide Number Placeholder 3"/>
+          <p:cNvPr id="1749358557" name="Slide Number Placeholder 3"/>
+          <p:cNvSpPr>
+            <a:spLocks noGrp="1"/>
+          </p:cNvSpPr>
+          <p:nvPr>
+            <p:ph type="sldNum" sz="quarter" idx="10"/>
+          </p:nvPr>
+        </p:nvSpPr>
+        <p:spPr bwMode="auto"/>
+        <p:txBody>
+          <a:bodyPr/>
+          <a:lstStyle/>
+          <a:p>
+            <a:pPr>
+              <a:defRPr/>
+            </a:pPr>
+            <a:fld id="{B6C88546-EFC0-61EF-AD32-8C9475D6F065}" type="slidenum">
+              <a:rPr/>
+              <a:t/>
+            </a:fld>
+            <a:endParaRPr/>
+          </a:p>
+        </p:txBody>
+      </p:sp>
+    </p:spTree>
+  </p:cSld>
+  <p:clrMapOvr>
+    <a:masterClrMapping/>
+  </p:clrMapOvr>
+</p:notes>
+</file>
+
+<file path=ppt/notesSlides/notesSlide11.xml><?xml version="1.0" encoding="utf-8"?>
+<p:notes xmlns:a="http://schemas.openxmlformats.org/drawingml/2006/main" xmlns:r="http://schemas.openxmlformats.org/officeDocument/2006/relationships" xmlns:p="http://schemas.openxmlformats.org/presentationml/2006/main" xmlns:m="http://schemas.openxmlformats.org/officeDocument/2006/math" xmlns:w="http://schemas.openxmlformats.org/wordprocessingml/2006/main">
+  <p:cSld name="">
+    <p:spTree>
+      <p:nvGrpSpPr>
+        <p:cNvPr id="1" name=""/>
+        <p:cNvGrpSpPr/>
+        <p:nvPr/>
+      </p:nvGrpSpPr>
+      <p:grpSpPr bwMode="auto">
+        <a:xfrm>
+          <a:off x="0" y="0"/>
+          <a:ext cx="0" cy="0"/>
+          <a:chOff x="0" y="0"/>
+          <a:chExt cx="0" cy="0"/>
+        </a:xfrm>
+      </p:grpSpPr>
+      <p:sp>
+        <p:nvSpPr>
+          <p:cNvPr id="714740819" name="Slide Image Placeholder 1"/>
+          <p:cNvSpPr>
+            <a:spLocks noChangeAspect="1" noGrp="1" noRot="1"/>
+          </p:cNvSpPr>
+          <p:nvPr>
+            <p:ph type="sldImg"/>
+          </p:nvPr>
+        </p:nvSpPr>
+        <p:spPr bwMode="auto"/>
+      </p:sp>
+      <p:sp>
+        <p:nvSpPr>
+          <p:cNvPr id="206953928" name="Notes Placeholder 2"/>
+          <p:cNvSpPr>
+            <a:spLocks noGrp="1"/>
+          </p:cNvSpPr>
+          <p:nvPr>
+            <p:ph type="body" idx="1"/>
+          </p:nvPr>
+        </p:nvSpPr>
+        <p:spPr bwMode="auto"/>
+        <p:txBody>
+          <a:bodyPr/>
+          <a:lstStyle/>
+          <a:p>
+            <a:pPr>
+              <a:defRPr/>
+            </a:pPr>
+            <a:endParaRPr/>
+          </a:p>
+        </p:txBody>
+      </p:sp>
+      <p:sp>
+        <p:nvSpPr>
+          <p:cNvPr id="1195362470" name="Slide Number Placeholder 3"/>
           <p:cNvSpPr>
             <a:spLocks noGrp="1"/>
           </p:cNvSpPr>
@@ -690,7 +776,7 @@
       </p:grpSpPr>
       <p:sp>
         <p:nvSpPr>
-          <p:cNvPr id="2" name="Slide Image Placeholder 1"/>
+          <p:cNvPr id="1659037698" name="Slide Image Placeholder 1"/>
           <p:cNvSpPr>
             <a:spLocks noChangeAspect="1" noGrp="1" noRot="1"/>
           </p:cNvSpPr>
@@ -702,7 +788,7 @@
       </p:sp>
       <p:sp>
         <p:nvSpPr>
-          <p:cNvPr id="3" name="Notes Placeholder 2"/>
+          <p:cNvPr id="632508215" name="Notes Placeholder 2"/>
           <p:cNvSpPr>
             <a:spLocks noGrp="1"/>
           </p:cNvSpPr>
@@ -724,7 +810,7 @@
       </p:sp>
       <p:sp>
         <p:nvSpPr>
-          <p:cNvPr id="4" name="Slide Number Placeholder 3"/>
+          <p:cNvPr id="1821169329" name="Slide Number Placeholder 3"/>
           <p:cNvSpPr>
             <a:spLocks noGrp="1"/>
           </p:cNvSpPr>
@@ -775,7 +861,7 @@
       </p:grpSpPr>
       <p:sp>
         <p:nvSpPr>
-          <p:cNvPr id="1734122516" name="Slide Image Placeholder 1"/>
+          <p:cNvPr id="472483655" name="Slide Image Placeholder 1"/>
           <p:cNvSpPr>
             <a:spLocks noChangeAspect="1" noGrp="1" noRot="1"/>
           </p:cNvSpPr>
@@ -787,7 +873,7 @@
       </p:sp>
       <p:sp>
         <p:nvSpPr>
-          <p:cNvPr id="1062860753" name="Notes Placeholder 2"/>
+          <p:cNvPr id="94751551" name="Notes Placeholder 2"/>
           <p:cNvSpPr>
             <a:spLocks noGrp="1"/>
           </p:cNvSpPr>
@@ -809,7 +895,7 @@
       </p:sp>
       <p:sp>
         <p:nvSpPr>
-          <p:cNvPr id="1372116191" name="Slide Number Placeholder 3"/>
+          <p:cNvPr id="1152024946" name="Slide Number Placeholder 3"/>
           <p:cNvSpPr>
             <a:spLocks noGrp="1"/>
           </p:cNvSpPr>
@@ -860,7 +946,7 @@
       </p:grpSpPr>
       <p:sp>
         <p:nvSpPr>
-          <p:cNvPr id="464436080" name="Slide Image Placeholder 1"/>
+          <p:cNvPr id="2144143617" name="Slide Image Placeholder 1"/>
           <p:cNvSpPr>
             <a:spLocks noChangeAspect="1" noGrp="1" noRot="1"/>
           </p:cNvSpPr>
@@ -872,7 +958,7 @@
       </p:sp>
       <p:sp>
         <p:nvSpPr>
-          <p:cNvPr id="617321616" name="Notes Placeholder 2"/>
+          <p:cNvPr id="835184605" name="Notes Placeholder 2"/>
           <p:cNvSpPr>
             <a:spLocks noGrp="1"/>
           </p:cNvSpPr>
@@ -894,7 +980,7 @@
       </p:sp>
       <p:sp>
         <p:nvSpPr>
-          <p:cNvPr id="1334293163" name="Slide Number Placeholder 3"/>
+          <p:cNvPr id="817339905" name="Slide Number Placeholder 3"/>
           <p:cNvSpPr>
             <a:spLocks noGrp="1"/>
           </p:cNvSpPr>
@@ -945,7 +1031,7 @@
       </p:grpSpPr>
       <p:sp>
         <p:nvSpPr>
-          <p:cNvPr id="1131754809" name="Slide Image Placeholder 1"/>
+          <p:cNvPr id="2088625820" name="Slide Image Placeholder 1"/>
           <p:cNvSpPr>
             <a:spLocks noChangeAspect="1" noGrp="1" noRot="1"/>
           </p:cNvSpPr>
@@ -957,7 +1043,7 @@
       </p:sp>
       <p:sp>
         <p:nvSpPr>
-          <p:cNvPr id="1195373052" name="Notes Placeholder 2"/>
+          <p:cNvPr id="1891885159" name="Notes Placeholder 2"/>
           <p:cNvSpPr>
             <a:spLocks noGrp="1"/>
           </p:cNvSpPr>
@@ -979,7 +1065,7 @@
       </p:sp>
       <p:sp>
         <p:nvSpPr>
-          <p:cNvPr id="145587861" name="Slide Number Placeholder 3"/>
+          <p:cNvPr id="1984114616" name="Slide Number Placeholder 3"/>
           <p:cNvSpPr>
             <a:spLocks noGrp="1"/>
           </p:cNvSpPr>
@@ -1030,7 +1116,7 @@
       </p:grpSpPr>
       <p:sp>
         <p:nvSpPr>
-          <p:cNvPr id="549360387" name="Slide Image Placeholder 1"/>
+          <p:cNvPr id="2043470096" name="Slide Image Placeholder 1"/>
           <p:cNvSpPr>
             <a:spLocks noChangeAspect="1" noGrp="1" noRot="1"/>
           </p:cNvSpPr>
@@ -1042,7 +1128,7 @@
       </p:sp>
       <p:sp>
         <p:nvSpPr>
-          <p:cNvPr id="2125090087" name="Notes Placeholder 2"/>
+          <p:cNvPr id="1598885970" name="Notes Placeholder 2"/>
           <p:cNvSpPr>
             <a:spLocks noGrp="1"/>
           </p:cNvSpPr>
@@ -1064,7 +1150,7 @@
       </p:sp>
       <p:sp>
         <p:nvSpPr>
-          <p:cNvPr id="5058094" name="Slide Number Placeholder 3"/>
+          <p:cNvPr id="1762993648" name="Slide Number Placeholder 3"/>
           <p:cNvSpPr>
             <a:spLocks noGrp="1"/>
           </p:cNvSpPr>
@@ -1115,7 +1201,7 @@
       </p:grpSpPr>
       <p:sp>
         <p:nvSpPr>
-          <p:cNvPr id="1973087446" name="Slide Image Placeholder 1"/>
+          <p:cNvPr id="513946105" name="Slide Image Placeholder 1"/>
           <p:cNvSpPr>
             <a:spLocks noChangeAspect="1" noGrp="1" noRot="1"/>
           </p:cNvSpPr>
@@ -1127,7 +1213,7 @@
       </p:sp>
       <p:sp>
         <p:nvSpPr>
-          <p:cNvPr id="922803814" name="Notes Placeholder 2"/>
+          <p:cNvPr id="1921954288" name="Notes Placeholder 2"/>
           <p:cNvSpPr>
             <a:spLocks noGrp="1"/>
           </p:cNvSpPr>
@@ -1149,7 +1235,7 @@
       </p:sp>
       <p:sp>
         <p:nvSpPr>
-          <p:cNvPr id="1543574221" name="Slide Number Placeholder 3"/>
+          <p:cNvPr id="293337556" name="Slide Number Placeholder 3"/>
           <p:cNvSpPr>
             <a:spLocks noGrp="1"/>
           </p:cNvSpPr>
@@ -1200,7 +1286,7 @@
       </p:grpSpPr>
       <p:sp>
         <p:nvSpPr>
-          <p:cNvPr id="1900823333" name="Slide Image Placeholder 1"/>
+          <p:cNvPr id="1236688931" name="Slide Image Placeholder 1"/>
           <p:cNvSpPr>
             <a:spLocks noChangeAspect="1" noGrp="1" noRot="1"/>
           </p:cNvSpPr>
@@ -1212,7 +1298,7 @@
       </p:sp>
       <p:sp>
         <p:nvSpPr>
-          <p:cNvPr id="1542777861" name="Notes Placeholder 2"/>
+          <p:cNvPr id="4467095" name="Notes Placeholder 2"/>
           <p:cNvSpPr>
             <a:spLocks noGrp="1"/>
           </p:cNvSpPr>
@@ -1234,7 +1320,7 @@
       </p:sp>
       <p:sp>
         <p:nvSpPr>
-          <p:cNvPr id="577405457" name="Slide Number Placeholder 3"/>
+          <p:cNvPr id="148478384" name="Slide Number Placeholder 3"/>
           <p:cNvSpPr>
             <a:spLocks noGrp="1"/>
           </p:cNvSpPr>
@@ -1285,7 +1371,7 @@
       </p:grpSpPr>
       <p:sp>
         <p:nvSpPr>
-          <p:cNvPr id="1093105869" name="Slide Image Placeholder 1"/>
+          <p:cNvPr id="1704575285" name="Slide Image Placeholder 1"/>
           <p:cNvSpPr>
             <a:spLocks noChangeAspect="1" noGrp="1" noRot="1"/>
           </p:cNvSpPr>
@@ -1297,7 +1383,7 @@
       </p:sp>
       <p:sp>
         <p:nvSpPr>
-          <p:cNvPr id="1883679496" name="Notes Placeholder 2"/>
+          <p:cNvPr id="440897753" name="Notes Placeholder 2"/>
           <p:cNvSpPr>
             <a:spLocks noGrp="1"/>
           </p:cNvSpPr>
@@ -1319,7 +1405,7 @@
       </p:sp>
       <p:sp>
         <p:nvSpPr>
-          <p:cNvPr id="1529158302" name="Slide Number Placeholder 3"/>
+          <p:cNvPr id="37899898" name="Slide Number Placeholder 3"/>
           <p:cNvSpPr>
             <a:spLocks noGrp="1"/>
           </p:cNvSpPr>
@@ -1370,7 +1456,7 @@
       </p:grpSpPr>
       <p:sp>
         <p:nvSpPr>
-          <p:cNvPr id="146289614" name="Заголовок 1"/>
+          <p:cNvPr id="1418792625" name="Заголовок 1"/>
           <p:cNvSpPr>
             <a:spLocks noGrp="1"/>
           </p:cNvSpPr>
@@ -1405,7 +1491,7 @@
       </p:sp>
       <p:sp>
         <p:nvSpPr>
-          <p:cNvPr id="1564036790" name="Подзаголовок 2"/>
+          <p:cNvPr id="1703434712" name="Подзаголовок 2"/>
           <p:cNvSpPr>
             <a:spLocks noGrp="1"/>
           </p:cNvSpPr>
@@ -1473,7 +1559,7 @@
       </p:sp>
       <p:sp>
         <p:nvSpPr>
-          <p:cNvPr id="2129095089" name="Дата 3"/>
+          <p:cNvPr id="408033308" name="Дата 3"/>
           <p:cNvSpPr>
             <a:spLocks noGrp="1"/>
           </p:cNvSpPr>
@@ -1499,7 +1585,7 @@
       </p:sp>
       <p:sp>
         <p:nvSpPr>
-          <p:cNvPr id="739033128" name="Нижний колонтитул 4"/>
+          <p:cNvPr id="1712404737" name="Нижний колонтитул 4"/>
           <p:cNvSpPr>
             <a:spLocks noGrp="1"/>
           </p:cNvSpPr>
@@ -1521,7 +1607,7 @@
       </p:sp>
       <p:sp>
         <p:nvSpPr>
-          <p:cNvPr id="141810608" name="Номер слайда 5"/>
+          <p:cNvPr id="424467416" name="Номер слайда 5"/>
           <p:cNvSpPr>
             <a:spLocks noGrp="1"/>
           </p:cNvSpPr>
@@ -1572,7 +1658,7 @@
       </p:grpSpPr>
       <p:sp>
         <p:nvSpPr>
-          <p:cNvPr id="1529423211" name="Заголовок 1"/>
+          <p:cNvPr id="1180872582" name="Заголовок 1"/>
           <p:cNvSpPr>
             <a:spLocks noGrp="1"/>
           </p:cNvSpPr>
@@ -1598,7 +1684,7 @@
       </p:sp>
       <p:sp>
         <p:nvSpPr>
-          <p:cNvPr id="742472838" name="Вертикальный текст 2"/>
+          <p:cNvPr id="521935716" name="Вертикальный текст 2"/>
           <p:cNvSpPr>
             <a:spLocks noGrp="1"/>
           </p:cNvSpPr>
@@ -1664,7 +1750,7 @@
       </p:sp>
       <p:sp>
         <p:nvSpPr>
-          <p:cNvPr id="977211966" name="Дата 3"/>
+          <p:cNvPr id="1255630797" name="Дата 3"/>
           <p:cNvSpPr>
             <a:spLocks noGrp="1"/>
           </p:cNvSpPr>
@@ -1690,7 +1776,7 @@
       </p:sp>
       <p:sp>
         <p:nvSpPr>
-          <p:cNvPr id="1060738886" name="Нижний колонтитул 4"/>
+          <p:cNvPr id="2100537937" name="Нижний колонтитул 4"/>
           <p:cNvSpPr>
             <a:spLocks noGrp="1"/>
           </p:cNvSpPr>
@@ -1712,7 +1798,7 @@
       </p:sp>
       <p:sp>
         <p:nvSpPr>
-          <p:cNvPr id="1934014736" name="Номер слайда 5"/>
+          <p:cNvPr id="1555608390" name="Номер слайда 5"/>
           <p:cNvSpPr>
             <a:spLocks noGrp="1"/>
           </p:cNvSpPr>
@@ -1763,7 +1849,7 @@
       </p:grpSpPr>
       <p:sp>
         <p:nvSpPr>
-          <p:cNvPr id="650286569" name="Вертикальный заголовок 1"/>
+          <p:cNvPr id="1803633926" name="Вертикальный заголовок 1"/>
           <p:cNvSpPr>
             <a:spLocks noGrp="1"/>
           </p:cNvSpPr>
@@ -1794,7 +1880,7 @@
       </p:sp>
       <p:sp>
         <p:nvSpPr>
-          <p:cNvPr id="1300858952" name="Вертикальный текст 2"/>
+          <p:cNvPr id="2113678106" name="Вертикальный текст 2"/>
           <p:cNvSpPr>
             <a:spLocks noGrp="1"/>
           </p:cNvSpPr>
@@ -1865,7 +1951,7 @@
       </p:sp>
       <p:sp>
         <p:nvSpPr>
-          <p:cNvPr id="517152102" name="Дата 3"/>
+          <p:cNvPr id="23209079" name="Дата 3"/>
           <p:cNvSpPr>
             <a:spLocks noGrp="1"/>
           </p:cNvSpPr>
@@ -1891,7 +1977,7 @@
       </p:sp>
       <p:sp>
         <p:nvSpPr>
-          <p:cNvPr id="1240777523" name="Нижний колонтитул 4"/>
+          <p:cNvPr id="1605052668" name="Нижний колонтитул 4"/>
           <p:cNvSpPr>
             <a:spLocks noGrp="1"/>
           </p:cNvSpPr>
@@ -1913,7 +1999,7 @@
       </p:sp>
       <p:sp>
         <p:nvSpPr>
-          <p:cNvPr id="499165662" name="Номер слайда 5"/>
+          <p:cNvPr id="1033116542" name="Номер слайда 5"/>
           <p:cNvSpPr>
             <a:spLocks noGrp="1"/>
           </p:cNvSpPr>
@@ -1964,7 +2050,7 @@
       </p:grpSpPr>
       <p:sp>
         <p:nvSpPr>
-          <p:cNvPr id="1738147091" name="Заголовок 1"/>
+          <p:cNvPr id="1351493924" name="Заголовок 1"/>
           <p:cNvSpPr>
             <a:spLocks noGrp="1"/>
           </p:cNvSpPr>
@@ -1990,7 +2076,7 @@
       </p:sp>
       <p:sp>
         <p:nvSpPr>
-          <p:cNvPr id="338623754" name="Объект 2"/>
+          <p:cNvPr id="739590536" name="Объект 2"/>
           <p:cNvSpPr>
             <a:spLocks noGrp="1"/>
           </p:cNvSpPr>
@@ -2056,7 +2142,7 @@
       </p:sp>
       <p:sp>
         <p:nvSpPr>
-          <p:cNvPr id="2007938390" name="Дата 3"/>
+          <p:cNvPr id="1469490568" name="Дата 3"/>
           <p:cNvSpPr>
             <a:spLocks noGrp="1"/>
           </p:cNvSpPr>
@@ -2082,7 +2168,7 @@
       </p:sp>
       <p:sp>
         <p:nvSpPr>
-          <p:cNvPr id="341004542" name="Нижний колонтитул 4"/>
+          <p:cNvPr id="264651584" name="Нижний колонтитул 4"/>
           <p:cNvSpPr>
             <a:spLocks noGrp="1"/>
           </p:cNvSpPr>
@@ -2104,7 +2190,7 @@
       </p:sp>
       <p:sp>
         <p:nvSpPr>
-          <p:cNvPr id="1106651582" name="Номер слайда 5"/>
+          <p:cNvPr id="1584040539" name="Номер слайда 5"/>
           <p:cNvSpPr>
             <a:spLocks noGrp="1"/>
           </p:cNvSpPr>
@@ -2155,7 +2241,7 @@
       </p:grpSpPr>
       <p:sp>
         <p:nvSpPr>
-          <p:cNvPr id="1564959270" name="Заголовок 1"/>
+          <p:cNvPr id="931055746" name="Заголовок 1"/>
           <p:cNvSpPr>
             <a:spLocks noGrp="1"/>
           </p:cNvSpPr>
@@ -2190,7 +2276,7 @@
       </p:sp>
       <p:sp>
         <p:nvSpPr>
-          <p:cNvPr id="879930134" name="Текст 2"/>
+          <p:cNvPr id="418094658" name="Текст 2"/>
           <p:cNvSpPr>
             <a:spLocks noGrp="1"/>
           </p:cNvSpPr>
@@ -2312,7 +2398,7 @@
       </p:sp>
       <p:sp>
         <p:nvSpPr>
-          <p:cNvPr id="1961113945" name="Дата 3"/>
+          <p:cNvPr id="1917856349" name="Дата 3"/>
           <p:cNvSpPr>
             <a:spLocks noGrp="1"/>
           </p:cNvSpPr>
@@ -2338,7 +2424,7 @@
       </p:sp>
       <p:sp>
         <p:nvSpPr>
-          <p:cNvPr id="1934009818" name="Нижний колонтитул 4"/>
+          <p:cNvPr id="1494368496" name="Нижний колонтитул 4"/>
           <p:cNvSpPr>
             <a:spLocks noGrp="1"/>
           </p:cNvSpPr>
@@ -2360,7 +2446,7 @@
       </p:sp>
       <p:sp>
         <p:nvSpPr>
-          <p:cNvPr id="1535271146" name="Номер слайда 5"/>
+          <p:cNvPr id="785630557" name="Номер слайда 5"/>
           <p:cNvSpPr>
             <a:spLocks noGrp="1"/>
           </p:cNvSpPr>
@@ -2411,7 +2497,7 @@
       </p:grpSpPr>
       <p:sp>
         <p:nvSpPr>
-          <p:cNvPr id="840383978" name="Заголовок 1"/>
+          <p:cNvPr id="1654946030" name="Заголовок 1"/>
           <p:cNvSpPr>
             <a:spLocks noGrp="1"/>
           </p:cNvSpPr>
@@ -2437,7 +2523,7 @@
       </p:sp>
       <p:sp>
         <p:nvSpPr>
-          <p:cNvPr id="1470285235" name="Объект 2"/>
+          <p:cNvPr id="1796571760" name="Объект 2"/>
           <p:cNvSpPr>
             <a:spLocks noGrp="1"/>
           </p:cNvSpPr>
@@ -2508,7 +2594,7 @@
       </p:sp>
       <p:sp>
         <p:nvSpPr>
-          <p:cNvPr id="722250757" name="Объект 3"/>
+          <p:cNvPr id="529277383" name="Объект 3"/>
           <p:cNvSpPr>
             <a:spLocks noGrp="1"/>
           </p:cNvSpPr>
@@ -2579,7 +2665,7 @@
       </p:sp>
       <p:sp>
         <p:nvSpPr>
-          <p:cNvPr id="68300028" name="Дата 4"/>
+          <p:cNvPr id="668029058" name="Дата 4"/>
           <p:cNvSpPr>
             <a:spLocks noGrp="1"/>
           </p:cNvSpPr>
@@ -2605,7 +2691,7 @@
       </p:sp>
       <p:sp>
         <p:nvSpPr>
-          <p:cNvPr id="2004439465" name="Нижний колонтитул 5"/>
+          <p:cNvPr id="325821271" name="Нижний колонтитул 5"/>
           <p:cNvSpPr>
             <a:spLocks noGrp="1"/>
           </p:cNvSpPr>
@@ -2627,7 +2713,7 @@
       </p:sp>
       <p:sp>
         <p:nvSpPr>
-          <p:cNvPr id="166686796" name="Номер слайда 6"/>
+          <p:cNvPr id="536516521" name="Номер слайда 6"/>
           <p:cNvSpPr>
             <a:spLocks noGrp="1"/>
           </p:cNvSpPr>
@@ -2678,7 +2764,7 @@
       </p:grpSpPr>
       <p:sp>
         <p:nvSpPr>
-          <p:cNvPr id="1632716487" name="Заголовок 1"/>
+          <p:cNvPr id="1077317430" name="Заголовок 1"/>
           <p:cNvSpPr>
             <a:spLocks noGrp="1"/>
           </p:cNvSpPr>
@@ -2709,7 +2795,7 @@
       </p:sp>
       <p:sp>
         <p:nvSpPr>
-          <p:cNvPr id="1066108679" name="Текст 2"/>
+          <p:cNvPr id="244442546" name="Текст 2"/>
           <p:cNvSpPr>
             <a:spLocks noGrp="1"/>
           </p:cNvSpPr>
@@ -2777,7 +2863,7 @@
       </p:sp>
       <p:sp>
         <p:nvSpPr>
-          <p:cNvPr id="1244045250" name="Объект 3"/>
+          <p:cNvPr id="615976213" name="Объект 3"/>
           <p:cNvSpPr>
             <a:spLocks noGrp="1"/>
           </p:cNvSpPr>
@@ -2848,7 +2934,7 @@
       </p:sp>
       <p:sp>
         <p:nvSpPr>
-          <p:cNvPr id="149057011" name="Текст 4"/>
+          <p:cNvPr id="520982575" name="Текст 4"/>
           <p:cNvSpPr>
             <a:spLocks noGrp="1"/>
           </p:cNvSpPr>
@@ -2916,7 +3002,7 @@
       </p:sp>
       <p:sp>
         <p:nvSpPr>
-          <p:cNvPr id="94596751" name="Объект 5"/>
+          <p:cNvPr id="744956751" name="Объект 5"/>
           <p:cNvSpPr>
             <a:spLocks noGrp="1"/>
           </p:cNvSpPr>
@@ -2987,7 +3073,7 @@
       </p:sp>
       <p:sp>
         <p:nvSpPr>
-          <p:cNvPr id="147522008" name="Дата 6"/>
+          <p:cNvPr id="2136186473" name="Дата 6"/>
           <p:cNvSpPr>
             <a:spLocks noGrp="1"/>
           </p:cNvSpPr>
@@ -3013,7 +3099,7 @@
       </p:sp>
       <p:sp>
         <p:nvSpPr>
-          <p:cNvPr id="497027878" name="Нижний колонтитул 7"/>
+          <p:cNvPr id="1174568020" name="Нижний колонтитул 7"/>
           <p:cNvSpPr>
             <a:spLocks noGrp="1"/>
           </p:cNvSpPr>
@@ -3035,7 +3121,7 @@
       </p:sp>
       <p:sp>
         <p:nvSpPr>
-          <p:cNvPr id="6839134" name="Номер слайда 8"/>
+          <p:cNvPr id="475016445" name="Номер слайда 8"/>
           <p:cNvSpPr>
             <a:spLocks noGrp="1"/>
           </p:cNvSpPr>
@@ -3086,7 +3172,7 @@
       </p:grpSpPr>
       <p:sp>
         <p:nvSpPr>
-          <p:cNvPr id="1349705001" name="Заголовок 1"/>
+          <p:cNvPr id="936422242" name="Заголовок 1"/>
           <p:cNvSpPr>
             <a:spLocks noGrp="1"/>
           </p:cNvSpPr>
@@ -3112,7 +3198,7 @@
       </p:sp>
       <p:sp>
         <p:nvSpPr>
-          <p:cNvPr id="1179044922" name="Дата 2"/>
+          <p:cNvPr id="595554867" name="Дата 2"/>
           <p:cNvSpPr>
             <a:spLocks noGrp="1"/>
           </p:cNvSpPr>
@@ -3138,7 +3224,7 @@
       </p:sp>
       <p:sp>
         <p:nvSpPr>
-          <p:cNvPr id="759794191" name="Нижний колонтитул 3"/>
+          <p:cNvPr id="826833281" name="Нижний колонтитул 3"/>
           <p:cNvSpPr>
             <a:spLocks noGrp="1"/>
           </p:cNvSpPr>
@@ -3160,7 +3246,7 @@
       </p:sp>
       <p:sp>
         <p:nvSpPr>
-          <p:cNvPr id="2072777653" name="Номер слайда 4"/>
+          <p:cNvPr id="1912652146" name="Номер слайда 4"/>
           <p:cNvSpPr>
             <a:spLocks noGrp="1"/>
           </p:cNvSpPr>
@@ -3211,7 +3297,7 @@
       </p:grpSpPr>
       <p:sp>
         <p:nvSpPr>
-          <p:cNvPr id="398989484" name="Дата 1"/>
+          <p:cNvPr id="943154328" name="Дата 1"/>
           <p:cNvSpPr>
             <a:spLocks noGrp="1"/>
           </p:cNvSpPr>
@@ -3237,7 +3323,7 @@
       </p:sp>
       <p:sp>
         <p:nvSpPr>
-          <p:cNvPr id="2017256199" name="Нижний колонтитул 2"/>
+          <p:cNvPr id="718668553" name="Нижний колонтитул 2"/>
           <p:cNvSpPr>
             <a:spLocks noGrp="1"/>
           </p:cNvSpPr>
@@ -3259,7 +3345,7 @@
       </p:sp>
       <p:sp>
         <p:nvSpPr>
-          <p:cNvPr id="904097379" name="Номер слайда 3"/>
+          <p:cNvPr id="1024706205" name="Номер слайда 3"/>
           <p:cNvSpPr>
             <a:spLocks noGrp="1"/>
           </p:cNvSpPr>
@@ -3310,7 +3396,7 @@
       </p:grpSpPr>
       <p:sp>
         <p:nvSpPr>
-          <p:cNvPr id="1640206596" name="Заголовок 1"/>
+          <p:cNvPr id="1818420878" name="Заголовок 1"/>
           <p:cNvSpPr>
             <a:spLocks noGrp="1"/>
           </p:cNvSpPr>
@@ -3345,7 +3431,7 @@
       </p:sp>
       <p:sp>
         <p:nvSpPr>
-          <p:cNvPr id="43530637" name="Объект 2"/>
+          <p:cNvPr id="1376846013" name="Объект 2"/>
           <p:cNvSpPr>
             <a:spLocks noGrp="1"/>
           </p:cNvSpPr>
@@ -3444,7 +3530,7 @@
       </p:sp>
       <p:sp>
         <p:nvSpPr>
-          <p:cNvPr id="1595294726" name="Текст 3"/>
+          <p:cNvPr id="1373557324" name="Текст 3"/>
           <p:cNvSpPr>
             <a:spLocks noGrp="1"/>
           </p:cNvSpPr>
@@ -3512,7 +3598,7 @@
       </p:sp>
       <p:sp>
         <p:nvSpPr>
-          <p:cNvPr id="1074747772" name="Дата 4"/>
+          <p:cNvPr id="1209123332" name="Дата 4"/>
           <p:cNvSpPr>
             <a:spLocks noGrp="1"/>
           </p:cNvSpPr>
@@ -3538,7 +3624,7 @@
       </p:sp>
       <p:sp>
         <p:nvSpPr>
-          <p:cNvPr id="1190536884" name="Нижний колонтитул 5"/>
+          <p:cNvPr id="889519883" name="Нижний колонтитул 5"/>
           <p:cNvSpPr>
             <a:spLocks noGrp="1"/>
           </p:cNvSpPr>
@@ -3560,7 +3646,7 @@
       </p:sp>
       <p:sp>
         <p:nvSpPr>
-          <p:cNvPr id="777071831" name="Номер слайда 6"/>
+          <p:cNvPr id="157864151" name="Номер слайда 6"/>
           <p:cNvSpPr>
             <a:spLocks noGrp="1"/>
           </p:cNvSpPr>
@@ -3611,7 +3697,7 @@
       </p:grpSpPr>
       <p:sp>
         <p:nvSpPr>
-          <p:cNvPr id="427236121" name="Заголовок 1"/>
+          <p:cNvPr id="288379863" name="Заголовок 1"/>
           <p:cNvSpPr>
             <a:spLocks noGrp="1"/>
           </p:cNvSpPr>
@@ -3646,7 +3732,7 @@
       </p:sp>
       <p:sp>
         <p:nvSpPr>
-          <p:cNvPr id="249647151" name="Рисунок 2"/>
+          <p:cNvPr id="271764688" name="Рисунок 2"/>
           <p:cNvSpPr>
             <a:spLocks noChangeAspect="1" noGrp="1"/>
           </p:cNvSpPr>
@@ -3714,7 +3800,7 @@
       </p:sp>
       <p:sp>
         <p:nvSpPr>
-          <p:cNvPr id="307111629" name="Текст 3"/>
+          <p:cNvPr id="1834994140" name="Текст 3"/>
           <p:cNvSpPr>
             <a:spLocks noGrp="1"/>
           </p:cNvSpPr>
@@ -3782,7 +3868,7 @@
       </p:sp>
       <p:sp>
         <p:nvSpPr>
-          <p:cNvPr id="858578158" name="Дата 4"/>
+          <p:cNvPr id="934298013" name="Дата 4"/>
           <p:cNvSpPr>
             <a:spLocks noGrp="1"/>
           </p:cNvSpPr>
@@ -3808,7 +3894,7 @@
       </p:sp>
       <p:sp>
         <p:nvSpPr>
-          <p:cNvPr id="719270057" name="Нижний колонтитул 5"/>
+          <p:cNvPr id="1916451866" name="Нижний колонтитул 5"/>
           <p:cNvSpPr>
             <a:spLocks noGrp="1"/>
           </p:cNvSpPr>
@@ -3830,7 +3916,7 @@
       </p:sp>
       <p:sp>
         <p:nvSpPr>
-          <p:cNvPr id="1919805461" name="Номер слайда 6"/>
+          <p:cNvPr id="67316281" name="Номер слайда 6"/>
           <p:cNvSpPr>
             <a:spLocks noGrp="1"/>
           </p:cNvSpPr>
@@ -3886,7 +3972,7 @@
       </p:grpSpPr>
       <p:sp>
         <p:nvSpPr>
-          <p:cNvPr id="2065780549" name="Заголовок 1"/>
+          <p:cNvPr id="922511637" name="Заголовок 1"/>
           <p:cNvSpPr>
             <a:spLocks noGrp="1"/>
           </p:cNvSpPr>
@@ -3922,7 +4008,7 @@
       </p:sp>
       <p:sp>
         <p:nvSpPr>
-          <p:cNvPr id="1128397226" name="Текст 2"/>
+          <p:cNvPr id="786781438" name="Текст 2"/>
           <p:cNvSpPr>
             <a:spLocks noGrp="1"/>
           </p:cNvSpPr>
@@ -3998,7 +4084,7 @@
       </p:sp>
       <p:sp>
         <p:nvSpPr>
-          <p:cNvPr id="355427133" name="Дата 3"/>
+          <p:cNvPr id="1752207390" name="Дата 3"/>
           <p:cNvSpPr>
             <a:spLocks noGrp="1"/>
           </p:cNvSpPr>
@@ -4042,7 +4128,7 @@
       </p:sp>
       <p:sp>
         <p:nvSpPr>
-          <p:cNvPr id="2042579607" name="Нижний колонтитул 4"/>
+          <p:cNvPr id="643487549" name="Нижний колонтитул 4"/>
           <p:cNvSpPr>
             <a:spLocks noGrp="1"/>
           </p:cNvSpPr>
@@ -4082,7 +4168,7 @@
       </p:sp>
       <p:sp>
         <p:nvSpPr>
-          <p:cNvPr id="265265926" name="Номер слайда 5"/>
+          <p:cNvPr id="2056534721" name="Номер слайда 5"/>
           <p:cNvSpPr>
             <a:spLocks noGrp="1"/>
           </p:cNvSpPr>
@@ -4442,7 +4528,7 @@
       </p:grpSpPr>
       <p:sp>
         <p:nvSpPr>
-          <p:cNvPr id="2037469494" name="Title 1"/>
+          <p:cNvPr id="1376213697" name="Title 1"/>
           <p:cNvSpPr>
             <a:spLocks noGrp="1"/>
           </p:cNvSpPr>
@@ -4464,7 +4550,7 @@
       </p:sp>
       <p:sp>
         <p:nvSpPr>
-          <p:cNvPr id="62773205" name="Subtitle 2"/>
+          <p:cNvPr id="2000082057" name="Subtitle 2"/>
           <p:cNvSpPr>
             <a:spLocks noGrp="1"/>
           </p:cNvSpPr>
@@ -4486,7 +4572,7 @@
       </p:sp>
       <p:pic>
         <p:nvPicPr>
-          <p:cNvPr id="1458368893" name=""/>
+          <p:cNvPr id="1435320899" name=""/>
           <p:cNvPicPr>
             <a:picLocks noChangeAspect="1"/>
           </p:cNvPicPr>
@@ -4508,7 +4594,7 @@
       </p:pic>
       <p:sp>
         <p:nvSpPr>
-          <p:cNvPr id="215671031" name=""/>
+          <p:cNvPr id="811173374" name=""/>
           <p:cNvSpPr txBox="1"/>
           <p:nvPr/>
         </p:nvSpPr>
@@ -4607,7 +4693,7 @@
       </p:grpSpPr>
       <p:sp>
         <p:nvSpPr>
-          <p:cNvPr id="2078366351" name="Заголовок 1"/>
+          <p:cNvPr id="1576639567" name="Заголовок 1"/>
           <p:cNvSpPr>
             <a:spLocks noGrp="1"/>
           </p:cNvSpPr>
@@ -4629,7 +4715,341 @@
       </p:sp>
       <p:pic>
         <p:nvPicPr>
-          <p:cNvPr id="1550594693" name=""/>
+          <p:cNvPr id="1241158103" name=""/>
+          <p:cNvPicPr>
+            <a:picLocks noChangeAspect="1"/>
+          </p:cNvPicPr>
+          <p:nvPr/>
+        </p:nvPicPr>
+        <p:blipFill>
+          <a:blip r:embed="rId3"/>
+          <a:stretch/>
+        </p:blipFill>
+        <p:spPr bwMode="auto">
+          <a:xfrm flipH="0" flipV="0">
+            <a:off x="-1572" y="6265"/>
+            <a:ext cx="12195146" cy="6861758"/>
+          </a:xfrm>
+          <a:prstGeom prst="rect">
+            <a:avLst/>
+          </a:prstGeom>
+        </p:spPr>
+      </p:pic>
+      <p:sp>
+        <p:nvSpPr>
+          <p:cNvPr id="1866555560" name=""/>
+          <p:cNvSpPr txBox="1"/>
+          <p:nvPr/>
+        </p:nvSpPr>
+        <p:spPr bwMode="auto">
+          <a:xfrm rot="0" flipH="0" flipV="0">
+            <a:off x="464357" y="244390"/>
+            <a:ext cx="6430095" cy="640440"/>
+          </a:xfrm>
+          <a:prstGeom prst="rect">
+            <a:avLst/>
+          </a:prstGeom>
+          <a:noFill/>
+        </p:spPr>
+        <p:txBody>
+          <a:bodyPr vertOverflow="overflow" horzOverflow="overflow" vert="horz" wrap="square" lIns="91440" tIns="45720" rIns="91440" bIns="45720" numCol="1" spcCol="0" rtlCol="0" fromWordArt="0" anchor="t" anchorCtr="0" forceAA="0" upright="0" compatLnSpc="0">
+            <a:spAutoFit/>
+          </a:bodyPr>
+          <a:p>
+            <a:pPr marL="0" marR="0" indent="0" algn="l">
+              <a:lnSpc>
+                <a:spcPct val="100000"/>
+              </a:lnSpc>
+              <a:spcBef>
+                <a:spcPts val="0"/>
+              </a:spcBef>
+              <a:spcAft>
+                <a:spcPts val="0"/>
+              </a:spcAft>
+              <a:defRPr/>
+            </a:pPr>
+            <a:r>
+              <a:rPr lang="ru-RU" sz="3600" b="0" i="0" u="none" strike="noStrike" cap="none" spc="0">
+                <a:solidFill>
+                  <a:schemeClr val="bg1"/>
+                </a:solidFill>
+                <a:latin typeface="Segoe UI Semibold"/>
+                <a:ea typeface="Segoe UI Semibold"/>
+                <a:cs typeface="Segoe UI Semibold"/>
+              </a:rPr>
+              <a:t>Заповеди </a:t>
+            </a:r>
+            <a:endParaRPr/>
+          </a:p>
+        </p:txBody>
+      </p:sp>
+      <p:sp>
+        <p:nvSpPr>
+          <p:cNvPr id="273931542" name=""/>
+          <p:cNvSpPr txBox="1"/>
+          <p:nvPr/>
+        </p:nvSpPr>
+        <p:spPr bwMode="auto">
+          <a:xfrm rot="0" flipH="0" flipV="0">
+            <a:off x="608485" y="2216776"/>
+            <a:ext cx="6674487" cy="3932280"/>
+          </a:xfrm>
+          <a:prstGeom prst="rect">
+            <a:avLst/>
+          </a:prstGeom>
+          <a:noFill/>
+        </p:spPr>
+        <p:txBody>
+          <a:bodyPr vertOverflow="overflow" horzOverflow="overflow" vert="horz" wrap="square" lIns="91440" tIns="45720" rIns="91440" bIns="45720" numCol="1" spcCol="0" rtlCol="0" fromWordArt="0" anchor="t" anchorCtr="0" forceAA="0" upright="0" compatLnSpc="0">
+            <a:spAutoFit/>
+          </a:bodyPr>
+          <a:p>
+            <a:pPr marL="0" marR="0" indent="0" algn="l">
+              <a:lnSpc>
+                <a:spcPct val="100000"/>
+              </a:lnSpc>
+              <a:spcBef>
+                <a:spcPts val="0"/>
+              </a:spcBef>
+              <a:spcAft>
+                <a:spcPts val="0"/>
+              </a:spcAft>
+              <a:defRPr/>
+            </a:pPr>
+            <a:r>
+              <a:rPr lang="ru-RU" sz="1800" b="0" i="0" u="none" strike="noStrike" cap="none" spc="0">
+                <a:solidFill>
+                  <a:schemeClr val="bg1"/>
+                </a:solidFill>
+                <a:latin typeface="Segoe UI Semibold"/>
+                <a:ea typeface="Segoe UI Semibold"/>
+                <a:cs typeface="Segoe UI Semibold"/>
+              </a:rPr>
+              <a:t>1.</a:t>
+            </a:r>
+            <a:r>
+              <a:rPr lang="ru-RU" sz="1800" b="0" i="0" u="none" strike="noStrike" cap="none" spc="0">
+                <a:solidFill>
+                  <a:schemeClr val="bg1"/>
+                </a:solidFill>
+                <a:latin typeface="Segoe UI Semibold"/>
+                <a:ea typeface="Segoe UI Semibold"/>
+                <a:cs typeface="Segoe UI Semibold"/>
+              </a:rPr>
+              <a:t> Не трогай, пока работает. Руки чешутся нажать «обновить всё» в пятницу в 17:30? Привяжи руки к стулу скотчем. Потерпи до понедельника.</a:t>
+            </a:r>
+            <a:br>
+              <a:rPr lang="ru-RU" sz="1800" b="0" i="0" u="none" strike="noStrike" cap="none" spc="0">
+                <a:solidFill>
+                  <a:schemeClr val="bg1"/>
+                </a:solidFill>
+                <a:latin typeface="Segoe UI Semibold"/>
+                <a:ea typeface="Segoe UI Semibold"/>
+                <a:cs typeface="Segoe UI Semibold"/>
+              </a:rPr>
+            </a:br>
+            <a:endParaRPr lang="ru-RU" sz="1800" b="0" i="0" u="none" strike="noStrike" cap="none" spc="0">
+              <a:solidFill>
+                <a:schemeClr val="bg1"/>
+              </a:solidFill>
+              <a:latin typeface="Segoe UI Semibold"/>
+              <a:cs typeface="Segoe UI Semibold"/>
+            </a:endParaRPr>
+          </a:p>
+          <a:p>
+            <a:pPr marL="0" marR="0" indent="0" algn="l">
+              <a:lnSpc>
+                <a:spcPct val="100000"/>
+              </a:lnSpc>
+              <a:spcBef>
+                <a:spcPts val="0"/>
+              </a:spcBef>
+              <a:spcAft>
+                <a:spcPts val="0"/>
+              </a:spcAft>
+              <a:defRPr/>
+            </a:pPr>
+            <a:r>
+              <a:rPr lang="ru-RU" sz="1800" b="0" i="0" u="none" strike="noStrike" cap="none" spc="0">
+                <a:solidFill>
+                  <a:schemeClr val="bg1"/>
+                </a:solidFill>
+                <a:latin typeface="Segoe UI Semibold"/>
+                <a:ea typeface="Segoe UI Semibold"/>
+                <a:cs typeface="Segoe UI Semibold"/>
+              </a:rPr>
+              <a:t>2.</a:t>
+            </a:r>
+            <a:r>
+              <a:rPr lang="ru-RU" sz="1800" b="0" i="0" u="none" strike="noStrike" cap="none" spc="0">
+                <a:solidFill>
+                  <a:schemeClr val="bg1"/>
+                </a:solidFill>
+                <a:latin typeface="Segoe UI Semibold"/>
+                <a:ea typeface="Segoe UI Semibold"/>
+                <a:cs typeface="Segoe UI Semibold"/>
+              </a:rPr>
+              <a:t> Делай бэкапы. Админы делятся на две категории: те, кто ещё не делают бэкапы, и те, кто теперь делают бэкапы даже для бэкапов. В виртуалке роутера бэкапься хотя бы локальным экспортом XML-конфига раз в неделю.</a:t>
+            </a:r>
+            <a:br>
+              <a:rPr lang="ru-RU" sz="1800" b="0" i="0" u="none" strike="noStrike" cap="none" spc="0">
+                <a:solidFill>
+                  <a:schemeClr val="bg1"/>
+                </a:solidFill>
+                <a:latin typeface="Segoe UI Semibold"/>
+                <a:ea typeface="Segoe UI Semibold"/>
+                <a:cs typeface="Segoe UI Semibold"/>
+              </a:rPr>
+            </a:br>
+            <a:endParaRPr lang="ru-RU" sz="1800" b="0" i="0" u="none" strike="noStrike" cap="none" spc="0">
+              <a:solidFill>
+                <a:schemeClr val="bg1"/>
+              </a:solidFill>
+              <a:latin typeface="Segoe UI Semibold"/>
+              <a:cs typeface="Segoe UI Semibold"/>
+            </a:endParaRPr>
+          </a:p>
+          <a:p>
+            <a:pPr marL="0" marR="0" indent="0" algn="l">
+              <a:lnSpc>
+                <a:spcPct val="100000"/>
+              </a:lnSpc>
+              <a:spcBef>
+                <a:spcPts val="0"/>
+              </a:spcBef>
+              <a:spcAft>
+                <a:spcPts val="0"/>
+              </a:spcAft>
+              <a:defRPr/>
+            </a:pPr>
+            <a:r>
+              <a:rPr lang="ru-RU" sz="1800" b="0" i="0" u="none" strike="noStrike" cap="none" spc="0">
+                <a:solidFill>
+                  <a:schemeClr val="bg1"/>
+                </a:solidFill>
+                <a:latin typeface="Segoe UI Semibold"/>
+                <a:ea typeface="Segoe UI Semibold"/>
+                <a:cs typeface="Segoe UI Semibold"/>
+              </a:rPr>
+              <a:t>3.</a:t>
+            </a:r>
+            <a:r>
+              <a:rPr lang="ru-RU" sz="1800" b="0" i="0" u="none" strike="noStrike" cap="none" spc="0">
+                <a:solidFill>
+                  <a:schemeClr val="bg1"/>
+                </a:solidFill>
+                <a:latin typeface="Segoe UI Semibold"/>
+                <a:ea typeface="Segoe UI Semibold"/>
+                <a:cs typeface="Segoe UI Semibold"/>
+              </a:rPr>
+              <a:t> Если всё всё-таки сломалось - у тебя всегда есть универсальная мантра сисадмина: «Это не я, это у провайдера авария на магистрали». Даёт примерно 40 минут форы, пока сотрудники пьют кофе, а ты с горящими глазами поднимаешь упавшую ноду.</a:t>
+            </a:r>
+            <a:endParaRPr/>
+          </a:p>
+        </p:txBody>
+      </p:sp>
+      <p:pic>
+        <p:nvPicPr>
+          <p:cNvPr id="1170211058" name=""/>
+          <p:cNvPicPr>
+            <a:picLocks noChangeAspect="1"/>
+          </p:cNvPicPr>
+          <p:nvPr/>
+        </p:nvPicPr>
+        <p:blipFill>
+          <a:blip r:embed="rId4"/>
+          <a:stretch/>
+        </p:blipFill>
+        <p:spPr bwMode="auto">
+          <a:xfrm flipH="0" flipV="0">
+            <a:off x="7175723" y="157291"/>
+            <a:ext cx="4850229" cy="2546370"/>
+          </a:xfrm>
+          <a:prstGeom prst="rect">
+            <a:avLst/>
+          </a:prstGeom>
+        </p:spPr>
+      </p:pic>
+      <p:pic>
+        <p:nvPicPr>
+          <p:cNvPr id="1620315827" name=""/>
+          <p:cNvPicPr>
+            <a:picLocks noChangeAspect="1"/>
+          </p:cNvPicPr>
+          <p:nvPr/>
+        </p:nvPicPr>
+        <p:blipFill>
+          <a:blip r:embed="rId5"/>
+          <a:stretch/>
+        </p:blipFill>
+        <p:spPr bwMode="auto">
+          <a:xfrm flipH="0" flipV="0">
+            <a:off x="7951251" y="2703662"/>
+            <a:ext cx="3698715" cy="4077377"/>
+          </a:xfrm>
+          <a:prstGeom prst="rect">
+            <a:avLst/>
+          </a:prstGeom>
+        </p:spPr>
+      </p:pic>
+    </p:spTree>
+  </p:cSld>
+  <p:clrMapOvr>
+    <a:masterClrMapping/>
+  </p:clrMapOvr>
+  <mc:AlternateContent xmlns:mc="http://schemas.openxmlformats.org/markup-compatibility/2006">
+    <mc:Choice xmlns:p159="http://schemas.microsoft.com/office/powerpoint/2015/09/main" xmlns:p14="http://schemas.microsoft.com/office/powerpoint/2010/main" Requires="p159">
+      <p:transition p14:dur="2000" advClick="1"/>
+    </mc:Choice>
+    <mc:Fallback>
+      <p:transition advClick="1"/>
+    </mc:Fallback>
+  </mc:AlternateContent>
+</p:sld>
+</file>
+
+<file path=ppt/slides/slide11.xml><?xml version="1.0" encoding="utf-8"?>
+<p:sld xmlns:a="http://schemas.openxmlformats.org/drawingml/2006/main" xmlns:r="http://schemas.openxmlformats.org/officeDocument/2006/relationships" xmlns:p="http://schemas.openxmlformats.org/presentationml/2006/main" xmlns:m="http://schemas.openxmlformats.org/officeDocument/2006/math" xmlns:w="http://schemas.openxmlformats.org/wordprocessingml/2006/main" xmlns:mc="http://schemas.openxmlformats.org/markup-compatibility/2006" showMasterPhAnim="0" showMasterSp="1" show="1">
+  <p:cSld name="">
+    <p:spTree>
+      <p:nvGrpSpPr>
+        <p:cNvPr id="1" name=""/>
+        <p:cNvGrpSpPr/>
+        <p:nvPr/>
+      </p:nvGrpSpPr>
+      <p:grpSpPr bwMode="auto">
+        <a:xfrm>
+          <a:off x="0" y="0"/>
+          <a:ext cx="0" cy="0"/>
+          <a:chOff x="0" y="0"/>
+          <a:chExt cx="0" cy="0"/>
+        </a:xfrm>
+      </p:grpSpPr>
+      <p:sp>
+        <p:nvSpPr>
+          <p:cNvPr id="405639433" name="Заголовок 1"/>
+          <p:cNvSpPr>
+            <a:spLocks noGrp="1"/>
+          </p:cNvSpPr>
+          <p:nvPr>
+            <p:ph type="title"/>
+          </p:nvPr>
+        </p:nvSpPr>
+        <p:spPr bwMode="auto"/>
+        <p:txBody>
+          <a:bodyPr/>
+          <a:lstStyle/>
+          <a:p>
+            <a:pPr>
+              <a:defRPr/>
+            </a:pPr>
+            <a:endParaRPr/>
+          </a:p>
+        </p:txBody>
+      </p:sp>
+      <p:pic>
+        <p:nvPicPr>
+          <p:cNvPr id="420889522" name=""/>
           <p:cNvPicPr>
             <a:picLocks noChangeAspect="1"/>
           </p:cNvPicPr>
@@ -4651,7 +5071,7 @@
       </p:pic>
       <p:pic>
         <p:nvPicPr>
-          <p:cNvPr id="1500243387" name=""/>
+          <p:cNvPr id="1944508818" name=""/>
           <p:cNvPicPr>
             <a:picLocks noChangeAspect="1"/>
           </p:cNvPicPr>
@@ -4673,7 +5093,7 @@
       </p:pic>
       <p:sp>
         <p:nvSpPr>
-          <p:cNvPr id="397653103" name=""/>
+          <p:cNvPr id="492230" name=""/>
           <p:cNvSpPr txBox="1"/>
           <p:nvPr/>
         </p:nvSpPr>
@@ -4751,7 +5171,7 @@
       </p:grpSpPr>
       <p:sp>
         <p:nvSpPr>
-          <p:cNvPr id="583231448" name="Заголовок 1"/>
+          <p:cNvPr id="258764173" name="Заголовок 1"/>
           <p:cNvSpPr>
             <a:spLocks noGrp="1"/>
           </p:cNvSpPr>
@@ -4773,7 +5193,7 @@
       </p:sp>
       <p:pic>
         <p:nvPicPr>
-          <p:cNvPr id="1498147597" name=""/>
+          <p:cNvPr id="2078824084" name=""/>
           <p:cNvPicPr>
             <a:picLocks noChangeAspect="1"/>
           </p:cNvPicPr>
@@ -4795,13 +5215,13 @@
       </p:pic>
       <p:sp>
         <p:nvSpPr>
-          <p:cNvPr id="606085156" name=""/>
+          <p:cNvPr id="1216073389" name=""/>
           <p:cNvSpPr txBox="1"/>
           <p:nvPr/>
         </p:nvSpPr>
         <p:spPr bwMode="auto">
           <a:xfrm rot="0" flipH="0" flipV="0">
-            <a:off x="464358" y="244391"/>
+            <a:off x="464358" y="244390"/>
             <a:ext cx="8661017" cy="640440"/>
           </a:xfrm>
           <a:prstGeom prst="rect">
@@ -4845,7 +5265,7 @@
       </p:sp>
       <p:sp>
         <p:nvSpPr>
-          <p:cNvPr id="1752470253" name=""/>
+          <p:cNvPr id="208346454" name=""/>
           <p:cNvSpPr txBox="1"/>
           <p:nvPr/>
         </p:nvSpPr>
@@ -5209,7 +5629,7 @@
       </p:sp>
       <p:pic>
         <p:nvPicPr>
-          <p:cNvPr id="1975315532" name=""/>
+          <p:cNvPr id="392072051" name=""/>
           <p:cNvPicPr>
             <a:picLocks noChangeAspect="1"/>
           </p:cNvPicPr>
@@ -5222,7 +5642,7 @@
         <p:spPr bwMode="auto">
           <a:xfrm>
             <a:off x="6973873" y="1794459"/>
-            <a:ext cx="5219699" cy="3467099"/>
+            <a:ext cx="5219699" cy="3467098"/>
           </a:xfrm>
           <a:prstGeom prst="rect">
             <a:avLst/>
@@ -5264,7 +5684,7 @@
       </p:grpSpPr>
       <p:sp>
         <p:nvSpPr>
-          <p:cNvPr id="1344524390" name="Заголовок 1"/>
+          <p:cNvPr id="1610404126" name="Заголовок 1"/>
           <p:cNvSpPr>
             <a:spLocks noGrp="1"/>
           </p:cNvSpPr>
@@ -5286,7 +5706,7 @@
       </p:sp>
       <p:pic>
         <p:nvPicPr>
-          <p:cNvPr id="86345817" name=""/>
+          <p:cNvPr id="1430237427" name=""/>
           <p:cNvPicPr>
             <a:picLocks noChangeAspect="1"/>
           </p:cNvPicPr>
@@ -5308,13 +5728,13 @@
       </p:pic>
       <p:sp>
         <p:nvSpPr>
-          <p:cNvPr id="823936770" name=""/>
+          <p:cNvPr id="718921" name=""/>
           <p:cNvSpPr txBox="1"/>
           <p:nvPr/>
         </p:nvSpPr>
         <p:spPr bwMode="auto">
           <a:xfrm rot="0" flipH="0" flipV="0">
-            <a:off x="464358" y="244391"/>
+            <a:off x="464358" y="244390"/>
             <a:ext cx="8664977" cy="640440"/>
           </a:xfrm>
           <a:prstGeom prst="rect">
@@ -5347,7 +5767,7 @@
       </p:sp>
       <p:sp>
         <p:nvSpPr>
-          <p:cNvPr id="1052803850" name=""/>
+          <p:cNvPr id="856210980" name=""/>
           <p:cNvSpPr txBox="1"/>
           <p:nvPr/>
         </p:nvSpPr>
@@ -5691,7 +6111,7 @@
       </p:grpSpPr>
       <p:sp>
         <p:nvSpPr>
-          <p:cNvPr id="381360895" name="Заголовок 1"/>
+          <p:cNvPr id="1446459856" name="Заголовок 1"/>
           <p:cNvSpPr>
             <a:spLocks noGrp="1"/>
           </p:cNvSpPr>
@@ -5713,7 +6133,7 @@
       </p:sp>
       <p:pic>
         <p:nvPicPr>
-          <p:cNvPr id="245239618" name=""/>
+          <p:cNvPr id="1395436766" name=""/>
           <p:cNvPicPr>
             <a:picLocks noChangeAspect="1"/>
           </p:cNvPicPr>
@@ -5735,13 +6155,13 @@
       </p:pic>
       <p:sp>
         <p:nvSpPr>
-          <p:cNvPr id="453633371" name=""/>
+          <p:cNvPr id="743601758" name=""/>
           <p:cNvSpPr txBox="1"/>
           <p:nvPr/>
         </p:nvSpPr>
         <p:spPr bwMode="auto">
           <a:xfrm rot="0" flipH="0" flipV="0">
-            <a:off x="464358" y="244391"/>
+            <a:off x="464358" y="244390"/>
             <a:ext cx="8652377" cy="1189079"/>
           </a:xfrm>
           <a:prstGeom prst="rect">
@@ -5787,7 +6207,7 @@
       </p:sp>
       <p:sp>
         <p:nvSpPr>
-          <p:cNvPr id="707858355" name=""/>
+          <p:cNvPr id="1581584488" name=""/>
           <p:cNvSpPr txBox="1"/>
           <p:nvPr/>
         </p:nvSpPr>
@@ -5882,9 +6302,18 @@
                 <a:ea typeface="Segoe UI Semibold"/>
                 <a:cs typeface="Segoe UI Semibold"/>
               </a:rPr>
-              <a:t>.../pve-enterprise.list
-</a:t>
-            </a:r>
+              <a:t>.../pve-enterprise.list</a:t>
+            </a:r>
+            <a:br>
+              <a:rPr lang="ru-RU" sz="2400" b="0" i="0" u="none" strike="noStrike" cap="none" spc="0">
+                <a:solidFill>
+                  <a:schemeClr val="bg1"/>
+                </a:solidFill>
+                <a:latin typeface="Segoe UI Semibold"/>
+                <a:ea typeface="Segoe UI Semibold"/>
+                <a:cs typeface="Segoe UI Semibold"/>
+              </a:rPr>
+            </a:br>
             <a:endParaRPr lang="ru-RU" sz="2400" b="0" i="0" u="none" strike="noStrike" cap="none" spc="0">
               <a:solidFill>
                 <a:schemeClr val="bg1"/>
@@ -5927,9 +6356,18 @@
                 <a:ea typeface="Segoe UI Semibold"/>
                 <a:cs typeface="Segoe UI Semibold"/>
               </a:rPr>
-              <a:t> Подключаем бесплатный: pve-no-subscription
-</a:t>
-            </a:r>
+              <a:t> Подключаем бесплатный: pve-no-subscription</a:t>
+            </a:r>
+            <a:br>
+              <a:rPr lang="ru-RU" sz="2400" b="0" i="0" u="none" strike="noStrike" cap="none" spc="0">
+                <a:solidFill>
+                  <a:schemeClr val="bg1"/>
+                </a:solidFill>
+                <a:latin typeface="Segoe UI Semibold"/>
+                <a:ea typeface="Segoe UI Semibold"/>
+                <a:cs typeface="Segoe UI Semibold"/>
+              </a:rPr>
+            </a:br>
             <a:endParaRPr lang="ru-RU" sz="2400" b="0" i="0" u="none" strike="noStrike" cap="none" spc="0">
               <a:solidFill>
                 <a:schemeClr val="bg1"/>
@@ -5972,9 +6410,28 @@
                 <a:ea typeface="Segoe UI Semibold"/>
                 <a:cs typeface="Segoe UI Semibold"/>
               </a:rPr>
-              <a:t> Глушим окно подписки: скрипт sed в один клик
-</a:t>
-            </a:r>
+              <a:t> Глушим окно подписки: скрипт sed в один клик</a:t>
+            </a:r>
+            <a:br>
+              <a:rPr lang="ru-RU" sz="2400" b="0" i="0" u="none" strike="noStrike" cap="none" spc="0">
+                <a:solidFill>
+                  <a:schemeClr val="bg1"/>
+                </a:solidFill>
+                <a:latin typeface="Segoe UI Semibold"/>
+                <a:ea typeface="Segoe UI Semibold"/>
+                <a:cs typeface="Segoe UI Semibold"/>
+              </a:rPr>
+            </a:br>
+            <a:br>
+              <a:rPr lang="ru-RU" sz="2400" b="0" i="0" u="none" strike="noStrike" cap="none" spc="0">
+                <a:solidFill>
+                  <a:schemeClr val="bg1"/>
+                </a:solidFill>
+                <a:latin typeface="Segoe UI Semibold"/>
+                <a:ea typeface="Segoe UI Semibold"/>
+                <a:cs typeface="Segoe UI Semibold"/>
+              </a:rPr>
+            </a:br>
             <a:endParaRPr lang="ru-RU" sz="2400" b="0" i="0" u="none" strike="noStrike" cap="none" spc="0">
               <a:solidFill>
                 <a:schemeClr val="bg1"/>
@@ -6141,7 +6598,7 @@
       </p:sp>
       <p:pic>
         <p:nvPicPr>
-          <p:cNvPr id="1228739423" name=""/>
+          <p:cNvPr id="279396751" name=""/>
           <p:cNvPicPr>
             <a:picLocks noChangeAspect="1"/>
           </p:cNvPicPr>
@@ -6153,7 +6610,7 @@
         </p:blipFill>
         <p:spPr bwMode="auto">
           <a:xfrm>
-            <a:off x="7294144" y="838931"/>
+            <a:off x="7294144" y="838930"/>
             <a:ext cx="4762499" cy="5438774"/>
           </a:xfrm>
           <a:prstGeom prst="rect">
@@ -6196,7 +6653,7 @@
       </p:grpSpPr>
       <p:sp>
         <p:nvSpPr>
-          <p:cNvPr id="1164874082" name="Заголовок 1"/>
+          <p:cNvPr id="1486378456" name="Заголовок 1"/>
           <p:cNvSpPr>
             <a:spLocks noGrp="1"/>
           </p:cNvSpPr>
@@ -6218,7 +6675,7 @@
       </p:sp>
       <p:pic>
         <p:nvPicPr>
-          <p:cNvPr id="117270655" name=""/>
+          <p:cNvPr id="2106891192" name=""/>
           <p:cNvPicPr>
             <a:picLocks noChangeAspect="1"/>
           </p:cNvPicPr>
@@ -6240,13 +6697,13 @@
       </p:pic>
       <p:sp>
         <p:nvSpPr>
-          <p:cNvPr id="1703649694" name=""/>
+          <p:cNvPr id="1507413696" name=""/>
           <p:cNvSpPr txBox="1"/>
           <p:nvPr/>
         </p:nvSpPr>
         <p:spPr bwMode="auto">
           <a:xfrm rot="0" flipH="0" flipV="0">
-            <a:off x="464358" y="244391"/>
+            <a:off x="464358" y="244390"/>
             <a:ext cx="8652017" cy="1189079"/>
           </a:xfrm>
           <a:prstGeom prst="rect">
@@ -6288,7 +6745,7 @@
       </p:sp>
       <p:sp>
         <p:nvSpPr>
-          <p:cNvPr id="885822198" name=""/>
+          <p:cNvPr id="913788398" name=""/>
           <p:cNvSpPr txBox="1"/>
           <p:nvPr/>
         </p:nvSpPr>
@@ -6788,7 +7245,7 @@
       </p:sp>
       <p:sp>
         <p:nvSpPr>
-          <p:cNvPr id="1400811250" name=""/>
+          <p:cNvPr id="1478534322" name=""/>
           <p:cNvSpPr txBox="1"/>
           <p:nvPr/>
         </p:nvSpPr>
@@ -7000,6 +7457,28 @@
           </a:p>
         </p:txBody>
       </p:sp>
+      <p:pic>
+        <p:nvPicPr>
+          <p:cNvPr id="1215127001" name=""/>
+          <p:cNvPicPr>
+            <a:picLocks noChangeAspect="1"/>
+          </p:cNvPicPr>
+          <p:nvPr/>
+        </p:nvPicPr>
+        <p:blipFill>
+          <a:blip r:embed="rId4"/>
+          <a:stretch/>
+        </p:blipFill>
+        <p:spPr bwMode="auto">
+          <a:xfrm flipH="0" flipV="0">
+            <a:off x="7446074" y="3446207"/>
+            <a:ext cx="4325713" cy="2865499"/>
+          </a:xfrm>
+          <a:prstGeom prst="rect">
+            <a:avLst/>
+          </a:prstGeom>
+        </p:spPr>
+      </p:pic>
     </p:spTree>
   </p:cSld>
   <p:clrMapOvr>
@@ -7035,7 +7514,7 @@
       </p:grpSpPr>
       <p:sp>
         <p:nvSpPr>
-          <p:cNvPr id="1630532099" name="Заголовок 1"/>
+          <p:cNvPr id="680850521" name="Заголовок 1"/>
           <p:cNvSpPr>
             <a:spLocks noGrp="1"/>
           </p:cNvSpPr>
@@ -7057,7 +7536,7 @@
       </p:sp>
       <p:pic>
         <p:nvPicPr>
-          <p:cNvPr id="1347619875" name=""/>
+          <p:cNvPr id="1778503868" name=""/>
           <p:cNvPicPr>
             <a:picLocks noChangeAspect="1"/>
           </p:cNvPicPr>
@@ -7079,13 +7558,13 @@
       </p:pic>
       <p:sp>
         <p:nvSpPr>
-          <p:cNvPr id="313487136" name=""/>
+          <p:cNvPr id="468973679" name=""/>
           <p:cNvSpPr txBox="1"/>
           <p:nvPr/>
         </p:nvSpPr>
         <p:spPr bwMode="auto">
           <a:xfrm rot="0" flipH="0" flipV="0">
-            <a:off x="464358" y="244391"/>
+            <a:off x="464358" y="244390"/>
             <a:ext cx="8653817" cy="1189079"/>
           </a:xfrm>
           <a:prstGeom prst="rect">
@@ -7131,7 +7610,7 @@
       </p:sp>
       <p:sp>
         <p:nvSpPr>
-          <p:cNvPr id="1440051753" name=""/>
+          <p:cNvPr id="1298836921" name=""/>
           <p:cNvSpPr txBox="1"/>
           <p:nvPr/>
         </p:nvSpPr>
@@ -7453,7 +7932,7 @@
       </p:sp>
       <p:sp>
         <p:nvSpPr>
-          <p:cNvPr id="849505479" name=""/>
+          <p:cNvPr id="635571759" name=""/>
           <p:cNvSpPr txBox="1"/>
           <p:nvPr/>
         </p:nvSpPr>
@@ -7481,7 +7960,7 @@
       </p:sp>
       <p:sp>
         <p:nvSpPr>
-          <p:cNvPr id="1428054389" name=""/>
+          <p:cNvPr id="1398111944" name=""/>
           <p:cNvSpPr/>
           <p:nvPr/>
         </p:nvSpPr>
@@ -7763,7 +8242,7 @@
       </p:grpSpPr>
       <p:sp>
         <p:nvSpPr>
-          <p:cNvPr id="2100895501" name="Заголовок 1"/>
+          <p:cNvPr id="1582233496" name="Заголовок 1"/>
           <p:cNvSpPr>
             <a:spLocks noGrp="1"/>
           </p:cNvSpPr>
@@ -7785,7 +8264,7 @@
       </p:sp>
       <p:pic>
         <p:nvPicPr>
-          <p:cNvPr id="375514705" name=""/>
+          <p:cNvPr id="2047618653" name=""/>
           <p:cNvPicPr>
             <a:picLocks noChangeAspect="1"/>
           </p:cNvPicPr>
@@ -7807,13 +8286,13 @@
       </p:pic>
       <p:sp>
         <p:nvSpPr>
-          <p:cNvPr id="1616602292" name=""/>
+          <p:cNvPr id="1416534852" name=""/>
           <p:cNvSpPr txBox="1"/>
           <p:nvPr/>
         </p:nvSpPr>
         <p:spPr bwMode="auto">
           <a:xfrm rot="0" flipH="0" flipV="0">
-            <a:off x="464358" y="244391"/>
+            <a:off x="464358" y="244390"/>
             <a:ext cx="8654177" cy="1189079"/>
           </a:xfrm>
           <a:prstGeom prst="rect">
@@ -7855,7 +8334,7 @@
       </p:sp>
       <p:sp>
         <p:nvSpPr>
-          <p:cNvPr id="1587395954" name=""/>
+          <p:cNvPr id="1334405894" name=""/>
           <p:cNvSpPr txBox="1"/>
           <p:nvPr/>
         </p:nvSpPr>
@@ -8253,7 +8732,7 @@
       </p:sp>
       <p:pic>
         <p:nvPicPr>
-          <p:cNvPr id="187413173" name=""/>
+          <p:cNvPr id="938387843" name=""/>
           <p:cNvPicPr>
             <a:picLocks noChangeAspect="1"/>
           </p:cNvPicPr>
@@ -8308,7 +8787,7 @@
       </p:grpSpPr>
       <p:sp>
         <p:nvSpPr>
-          <p:cNvPr id="776112491" name="Заголовок 1"/>
+          <p:cNvPr id="310153311" name="Заголовок 1"/>
           <p:cNvSpPr>
             <a:spLocks noGrp="1"/>
           </p:cNvSpPr>
@@ -8330,7 +8809,7 @@
       </p:sp>
       <p:pic>
         <p:nvPicPr>
-          <p:cNvPr id="1007416586" name=""/>
+          <p:cNvPr id="1456079345" name=""/>
           <p:cNvPicPr>
             <a:picLocks noChangeAspect="1"/>
           </p:cNvPicPr>
@@ -8352,13 +8831,13 @@
       </p:pic>
       <p:sp>
         <p:nvSpPr>
-          <p:cNvPr id="967649598" name=""/>
+          <p:cNvPr id="263333424" name=""/>
           <p:cNvSpPr txBox="1"/>
           <p:nvPr/>
         </p:nvSpPr>
         <p:spPr bwMode="auto">
           <a:xfrm rot="0" flipH="0" flipV="0">
-            <a:off x="464358" y="244391"/>
+            <a:off x="464358" y="244390"/>
             <a:ext cx="8653457" cy="1189079"/>
           </a:xfrm>
           <a:prstGeom prst="rect">
@@ -8406,7 +8885,7 @@
       </p:sp>
       <p:sp>
         <p:nvSpPr>
-          <p:cNvPr id="2120059750" name=""/>
+          <p:cNvPr id="1088996587" name=""/>
           <p:cNvSpPr txBox="1"/>
           <p:nvPr/>
         </p:nvSpPr>
@@ -9121,7 +9600,7 @@
       </p:grpSpPr>
       <p:sp>
         <p:nvSpPr>
-          <p:cNvPr id="1653495578" name="Заголовок 1"/>
+          <p:cNvPr id="478448870" name="Заголовок 1"/>
           <p:cNvSpPr>
             <a:spLocks noGrp="1"/>
           </p:cNvSpPr>
@@ -9143,7 +9622,7 @@
       </p:sp>
       <p:pic>
         <p:nvPicPr>
-          <p:cNvPr id="1996230784" name=""/>
+          <p:cNvPr id="1907412919" name=""/>
           <p:cNvPicPr>
             <a:picLocks noChangeAspect="1"/>
           </p:cNvPicPr>
@@ -9165,13 +9644,13 @@
       </p:pic>
       <p:sp>
         <p:nvSpPr>
-          <p:cNvPr id="127071460" name=""/>
+          <p:cNvPr id="778770773" name=""/>
           <p:cNvSpPr txBox="1"/>
           <p:nvPr/>
         </p:nvSpPr>
         <p:spPr bwMode="auto">
           <a:xfrm rot="0" flipH="0" flipV="0">
-            <a:off x="464358" y="244391"/>
+            <a:off x="464358" y="244390"/>
             <a:ext cx="8652377" cy="1189079"/>
           </a:xfrm>
           <a:prstGeom prst="rect">
@@ -9217,7 +9696,7 @@
       </p:sp>
       <p:sp>
         <p:nvSpPr>
-          <p:cNvPr id="1015028150" name=""/>
+          <p:cNvPr id="69261195" name=""/>
           <p:cNvSpPr txBox="1"/>
           <p:nvPr/>
         </p:nvSpPr>

--- a/Презентация1.pptx
+++ b/Презентация1.pptx
@@ -5,7 +5,7 @@
     <p:sldMasterId id="2147483648" r:id="rId1"/>
   </p:sldMasterIdLst>
   <p:notesMasterIdLst>
-    <p:notesMasterId r:id="rId15"/>
+    <p:notesMasterId r:id="rId16"/>
   </p:notesMasterIdLst>
   <p:sldIdLst>
     <p:sldId id="256" r:id="rId4"/>
@@ -19,6 +19,7 @@
     <p:sldId id="264" r:id="rId12"/>
     <p:sldId id="265" r:id="rId13"/>
     <p:sldId id="266" r:id="rId14"/>
+    <p:sldId id="267" r:id="rId15"/>
   </p:sldIdLst>
   <p:sldSz cx="12192000" cy="6858000"/>
   <p:notesSz cx="6858000" cy="9144000"/>
@@ -144,7 +145,7 @@
       </p:grpSpPr>
       <p:sp>
         <p:nvSpPr>
-          <p:cNvPr id="1425460420" name="Верхний колонтитул 1"/>
+          <p:cNvPr id="587212593" name="Верхний колонтитул 1"/>
           <p:cNvSpPr>
             <a:spLocks noGrp="1"/>
           </p:cNvSpPr>
@@ -178,7 +179,7 @@
       </p:sp>
       <p:sp>
         <p:nvSpPr>
-          <p:cNvPr id="383163220" name="Дата 2"/>
+          <p:cNvPr id="124661132" name="Дата 2"/>
           <p:cNvSpPr>
             <a:spLocks noGrp="1"/>
           </p:cNvSpPr>
@@ -216,7 +217,7 @@
       </p:sp>
       <p:sp>
         <p:nvSpPr>
-          <p:cNvPr id="1731575604" name="Рисунок 3"/>
+          <p:cNvPr id="383514162" name="Рисунок 3"/>
           <p:cNvSpPr>
             <a:spLocks noChangeAspect="1" noGrp="1" noRot="1"/>
           </p:cNvSpPr>
@@ -252,7 +253,7 @@
       </p:sp>
       <p:sp>
         <p:nvSpPr>
-          <p:cNvPr id="35747242" name="Заметка 4"/>
+          <p:cNvPr id="1296702935" name="Заметка 4"/>
           <p:cNvSpPr>
             <a:spLocks noGrp="1"/>
           </p:cNvSpPr>
@@ -326,7 +327,7 @@
       </p:sp>
       <p:sp>
         <p:nvSpPr>
-          <p:cNvPr id="359218914" name="Нижний колонтитул 5"/>
+          <p:cNvPr id="680804605" name="Нижний колонтитул 5"/>
           <p:cNvSpPr>
             <a:spLocks noGrp="1"/>
           </p:cNvSpPr>
@@ -360,7 +361,7 @@
       </p:sp>
       <p:sp>
         <p:nvSpPr>
-          <p:cNvPr id="1028622891" name="Номер слайда 6"/>
+          <p:cNvPr id="562931074" name="Номер слайда 6"/>
           <p:cNvSpPr>
             <a:spLocks noGrp="1"/>
           </p:cNvSpPr>
@@ -513,7 +514,7 @@
       </p:grpSpPr>
       <p:sp>
         <p:nvSpPr>
-          <p:cNvPr id="1624316532" name="Рисунок 1"/>
+          <p:cNvPr id="694093938" name="Рисунок 1"/>
           <p:cNvSpPr>
             <a:spLocks noChangeAspect="1" noGrp="1" noRot="1"/>
           </p:cNvSpPr>
@@ -530,7 +531,7 @@
       </p:sp>
       <p:sp>
         <p:nvSpPr>
-          <p:cNvPr id="1071231540" name="Текст 2"/>
+          <p:cNvPr id="715088937" name="Текст 2"/>
           <p:cNvSpPr>
             <a:spLocks noGrp="1"/>
           </p:cNvSpPr>
@@ -555,7 +556,7 @@
       </p:sp>
       <p:sp>
         <p:nvSpPr>
-          <p:cNvPr id="1829079233" name="Номер слайда 3"/>
+          <p:cNvPr id="743542164" name="Номер слайда 3"/>
           <p:cNvSpPr>
             <a:spLocks noGrp="1"/>
           </p:cNvSpPr>
@@ -606,7 +607,7 @@
       </p:grpSpPr>
       <p:sp>
         <p:nvSpPr>
-          <p:cNvPr id="1437055400" name="Slide Image Placeholder 1"/>
+          <p:cNvPr id="1608355214" name="Slide Image Placeholder 1"/>
           <p:cNvSpPr>
             <a:spLocks noChangeAspect="1" noGrp="1" noRot="1"/>
           </p:cNvSpPr>
@@ -618,7 +619,7 @@
       </p:sp>
       <p:sp>
         <p:nvSpPr>
-          <p:cNvPr id="2047024309" name="Notes Placeholder 2"/>
+          <p:cNvPr id="1854266363" name="Notes Placeholder 2"/>
           <p:cNvSpPr>
             <a:spLocks noGrp="1"/>
           </p:cNvSpPr>
@@ -640,7 +641,7 @@
       </p:sp>
       <p:sp>
         <p:nvSpPr>
-          <p:cNvPr id="1749358557" name="Slide Number Placeholder 3"/>
+          <p:cNvPr id="523760408" name="Slide Number Placeholder 3"/>
           <p:cNvSpPr>
             <a:spLocks noGrp="1"/>
           </p:cNvSpPr>
@@ -656,7 +657,7 @@
             <a:pPr>
               <a:defRPr/>
             </a:pPr>
-            <a:fld id="{B6C88546-EFC0-61EF-AD32-8C9475D6F065}" type="slidenum">
+            <a:fld id="{384C17E2-504D-2950-9C0A-0AB7823C15DE}" type="slidenum">
               <a:rPr/>
               <a:t/>
             </a:fld>
@@ -691,7 +692,7 @@
       </p:grpSpPr>
       <p:sp>
         <p:nvSpPr>
-          <p:cNvPr id="714740819" name="Slide Image Placeholder 1"/>
+          <p:cNvPr id="526129580" name="Slide Image Placeholder 1"/>
           <p:cNvSpPr>
             <a:spLocks noChangeAspect="1" noGrp="1" noRot="1"/>
           </p:cNvSpPr>
@@ -703,7 +704,7 @@
       </p:sp>
       <p:sp>
         <p:nvSpPr>
-          <p:cNvPr id="206953928" name="Notes Placeholder 2"/>
+          <p:cNvPr id="14874910" name="Notes Placeholder 2"/>
           <p:cNvSpPr>
             <a:spLocks noGrp="1"/>
           </p:cNvSpPr>
@@ -725,7 +726,92 @@
       </p:sp>
       <p:sp>
         <p:nvSpPr>
-          <p:cNvPr id="1195362470" name="Slide Number Placeholder 3"/>
+          <p:cNvPr id="1315004497" name="Slide Number Placeholder 3"/>
+          <p:cNvSpPr>
+            <a:spLocks noGrp="1"/>
+          </p:cNvSpPr>
+          <p:nvPr>
+            <p:ph type="sldNum" sz="quarter" idx="10"/>
+          </p:nvPr>
+        </p:nvSpPr>
+        <p:spPr bwMode="auto"/>
+        <p:txBody>
+          <a:bodyPr/>
+          <a:lstStyle/>
+          <a:p>
+            <a:pPr>
+              <a:defRPr/>
+            </a:pPr>
+            <a:fld id="{B6C88546-EFC0-61EF-AD32-8C9475D6F065}" type="slidenum">
+              <a:rPr/>
+              <a:t/>
+            </a:fld>
+            <a:endParaRPr/>
+          </a:p>
+        </p:txBody>
+      </p:sp>
+    </p:spTree>
+  </p:cSld>
+  <p:clrMapOvr>
+    <a:masterClrMapping/>
+  </p:clrMapOvr>
+</p:notes>
+</file>
+
+<file path=ppt/notesSlides/notesSlide12.xml><?xml version="1.0" encoding="utf-8"?>
+<p:notes xmlns:a="http://schemas.openxmlformats.org/drawingml/2006/main" xmlns:r="http://schemas.openxmlformats.org/officeDocument/2006/relationships" xmlns:p="http://schemas.openxmlformats.org/presentationml/2006/main" xmlns:m="http://schemas.openxmlformats.org/officeDocument/2006/math" xmlns:w="http://schemas.openxmlformats.org/wordprocessingml/2006/main">
+  <p:cSld name="">
+    <p:spTree>
+      <p:nvGrpSpPr>
+        <p:cNvPr id="1" name=""/>
+        <p:cNvGrpSpPr/>
+        <p:nvPr/>
+      </p:nvGrpSpPr>
+      <p:grpSpPr bwMode="auto">
+        <a:xfrm>
+          <a:off x="0" y="0"/>
+          <a:ext cx="0" cy="0"/>
+          <a:chOff x="0" y="0"/>
+          <a:chExt cx="0" cy="0"/>
+        </a:xfrm>
+      </p:grpSpPr>
+      <p:sp>
+        <p:nvSpPr>
+          <p:cNvPr id="1785256277" name="Slide Image Placeholder 1"/>
+          <p:cNvSpPr>
+            <a:spLocks noChangeAspect="1" noGrp="1" noRot="1"/>
+          </p:cNvSpPr>
+          <p:nvPr>
+            <p:ph type="sldImg"/>
+          </p:nvPr>
+        </p:nvSpPr>
+        <p:spPr bwMode="auto"/>
+      </p:sp>
+      <p:sp>
+        <p:nvSpPr>
+          <p:cNvPr id="1232079245" name="Notes Placeholder 2"/>
+          <p:cNvSpPr>
+            <a:spLocks noGrp="1"/>
+          </p:cNvSpPr>
+          <p:nvPr>
+            <p:ph type="body" idx="1"/>
+          </p:nvPr>
+        </p:nvSpPr>
+        <p:spPr bwMode="auto"/>
+        <p:txBody>
+          <a:bodyPr/>
+          <a:lstStyle/>
+          <a:p>
+            <a:pPr>
+              <a:defRPr/>
+            </a:pPr>
+            <a:endParaRPr/>
+          </a:p>
+        </p:txBody>
+      </p:sp>
+      <p:sp>
+        <p:nvSpPr>
+          <p:cNvPr id="718498255" name="Slide Number Placeholder 3"/>
           <p:cNvSpPr>
             <a:spLocks noGrp="1"/>
           </p:cNvSpPr>
@@ -776,7 +862,7 @@
       </p:grpSpPr>
       <p:sp>
         <p:nvSpPr>
-          <p:cNvPr id="1659037698" name="Slide Image Placeholder 1"/>
+          <p:cNvPr id="1100506801" name="Slide Image Placeholder 1"/>
           <p:cNvSpPr>
             <a:spLocks noChangeAspect="1" noGrp="1" noRot="1"/>
           </p:cNvSpPr>
@@ -788,7 +874,7 @@
       </p:sp>
       <p:sp>
         <p:nvSpPr>
-          <p:cNvPr id="632508215" name="Notes Placeholder 2"/>
+          <p:cNvPr id="1005867436" name="Notes Placeholder 2"/>
           <p:cNvSpPr>
             <a:spLocks noGrp="1"/>
           </p:cNvSpPr>
@@ -810,7 +896,7 @@
       </p:sp>
       <p:sp>
         <p:nvSpPr>
-          <p:cNvPr id="1821169329" name="Slide Number Placeholder 3"/>
+          <p:cNvPr id="2142464901" name="Slide Number Placeholder 3"/>
           <p:cNvSpPr>
             <a:spLocks noGrp="1"/>
           </p:cNvSpPr>
@@ -861,7 +947,7 @@
       </p:grpSpPr>
       <p:sp>
         <p:nvSpPr>
-          <p:cNvPr id="472483655" name="Slide Image Placeholder 1"/>
+          <p:cNvPr id="1485809167" name="Slide Image Placeholder 1"/>
           <p:cNvSpPr>
             <a:spLocks noChangeAspect="1" noGrp="1" noRot="1"/>
           </p:cNvSpPr>
@@ -873,7 +959,7 @@
       </p:sp>
       <p:sp>
         <p:nvSpPr>
-          <p:cNvPr id="94751551" name="Notes Placeholder 2"/>
+          <p:cNvPr id="348625783" name="Notes Placeholder 2"/>
           <p:cNvSpPr>
             <a:spLocks noGrp="1"/>
           </p:cNvSpPr>
@@ -895,7 +981,7 @@
       </p:sp>
       <p:sp>
         <p:nvSpPr>
-          <p:cNvPr id="1152024946" name="Slide Number Placeholder 3"/>
+          <p:cNvPr id="762340350" name="Slide Number Placeholder 3"/>
           <p:cNvSpPr>
             <a:spLocks noGrp="1"/>
           </p:cNvSpPr>
@@ -946,7 +1032,7 @@
       </p:grpSpPr>
       <p:sp>
         <p:nvSpPr>
-          <p:cNvPr id="2144143617" name="Slide Image Placeholder 1"/>
+          <p:cNvPr id="1312566941" name="Slide Image Placeholder 1"/>
           <p:cNvSpPr>
             <a:spLocks noChangeAspect="1" noGrp="1" noRot="1"/>
           </p:cNvSpPr>
@@ -958,7 +1044,7 @@
       </p:sp>
       <p:sp>
         <p:nvSpPr>
-          <p:cNvPr id="835184605" name="Notes Placeholder 2"/>
+          <p:cNvPr id="786748320" name="Notes Placeholder 2"/>
           <p:cNvSpPr>
             <a:spLocks noGrp="1"/>
           </p:cNvSpPr>
@@ -980,7 +1066,7 @@
       </p:sp>
       <p:sp>
         <p:nvSpPr>
-          <p:cNvPr id="817339905" name="Slide Number Placeholder 3"/>
+          <p:cNvPr id="1193516223" name="Slide Number Placeholder 3"/>
           <p:cNvSpPr>
             <a:spLocks noGrp="1"/>
           </p:cNvSpPr>
@@ -1031,7 +1117,7 @@
       </p:grpSpPr>
       <p:sp>
         <p:nvSpPr>
-          <p:cNvPr id="2088625820" name="Slide Image Placeholder 1"/>
+          <p:cNvPr id="187369826" name="Slide Image Placeholder 1"/>
           <p:cNvSpPr>
             <a:spLocks noChangeAspect="1" noGrp="1" noRot="1"/>
           </p:cNvSpPr>
@@ -1043,7 +1129,7 @@
       </p:sp>
       <p:sp>
         <p:nvSpPr>
-          <p:cNvPr id="1891885159" name="Notes Placeholder 2"/>
+          <p:cNvPr id="1444260039" name="Notes Placeholder 2"/>
           <p:cNvSpPr>
             <a:spLocks noGrp="1"/>
           </p:cNvSpPr>
@@ -1065,7 +1151,7 @@
       </p:sp>
       <p:sp>
         <p:nvSpPr>
-          <p:cNvPr id="1984114616" name="Slide Number Placeholder 3"/>
+          <p:cNvPr id="417872948" name="Slide Number Placeholder 3"/>
           <p:cNvSpPr>
             <a:spLocks noGrp="1"/>
           </p:cNvSpPr>
@@ -1081,7 +1167,7 @@
             <a:pPr>
               <a:defRPr/>
             </a:pPr>
-            <a:fld id="{694ACEF0-4363-2BD5-DB29-4ADD11A58BE3}" type="slidenum">
+            <a:fld id="{50F1E52B-2A68-CC4C-ACD0-CD1F014C13BB}" type="slidenum">
               <a:rPr/>
               <a:t/>
             </a:fld>
@@ -1116,7 +1202,7 @@
       </p:grpSpPr>
       <p:sp>
         <p:nvSpPr>
-          <p:cNvPr id="2043470096" name="Slide Image Placeholder 1"/>
+          <p:cNvPr id="643052068" name="Slide Image Placeholder 1"/>
           <p:cNvSpPr>
             <a:spLocks noChangeAspect="1" noGrp="1" noRot="1"/>
           </p:cNvSpPr>
@@ -1128,7 +1214,7 @@
       </p:sp>
       <p:sp>
         <p:nvSpPr>
-          <p:cNvPr id="1598885970" name="Notes Placeholder 2"/>
+          <p:cNvPr id="62725731" name="Notes Placeholder 2"/>
           <p:cNvSpPr>
             <a:spLocks noGrp="1"/>
           </p:cNvSpPr>
@@ -1150,7 +1236,7 @@
       </p:sp>
       <p:sp>
         <p:nvSpPr>
-          <p:cNvPr id="1762993648" name="Slide Number Placeholder 3"/>
+          <p:cNvPr id="1383242339" name="Slide Number Placeholder 3"/>
           <p:cNvSpPr>
             <a:spLocks noGrp="1"/>
           </p:cNvSpPr>
@@ -1166,7 +1252,7 @@
             <a:pPr>
               <a:defRPr/>
             </a:pPr>
-            <a:fld id="{702955EE-1521-0BAF-0824-65CE8C625D3C}" type="slidenum">
+            <a:fld id="{694ACEF0-4363-2BD5-DB29-4ADD11A58BE3}" type="slidenum">
               <a:rPr/>
               <a:t/>
             </a:fld>
@@ -1201,7 +1287,7 @@
       </p:grpSpPr>
       <p:sp>
         <p:nvSpPr>
-          <p:cNvPr id="513946105" name="Slide Image Placeholder 1"/>
+          <p:cNvPr id="160310466" name="Slide Image Placeholder 1"/>
           <p:cNvSpPr>
             <a:spLocks noChangeAspect="1" noGrp="1" noRot="1"/>
           </p:cNvSpPr>
@@ -1213,7 +1299,7 @@
       </p:sp>
       <p:sp>
         <p:nvSpPr>
-          <p:cNvPr id="1921954288" name="Notes Placeholder 2"/>
+          <p:cNvPr id="732138098" name="Notes Placeholder 2"/>
           <p:cNvSpPr>
             <a:spLocks noGrp="1"/>
           </p:cNvSpPr>
@@ -1235,7 +1321,7 @@
       </p:sp>
       <p:sp>
         <p:nvSpPr>
-          <p:cNvPr id="293337556" name="Slide Number Placeholder 3"/>
+          <p:cNvPr id="374138364" name="Slide Number Placeholder 3"/>
           <p:cNvSpPr>
             <a:spLocks noGrp="1"/>
           </p:cNvSpPr>
@@ -1251,7 +1337,7 @@
             <a:pPr>
               <a:defRPr/>
             </a:pPr>
-            <a:fld id="{55E44246-2DB5-1C19-6E18-689335ED530E}" type="slidenum">
+            <a:fld id="{702955EE-1521-0BAF-0824-65CE8C625D3C}" type="slidenum">
               <a:rPr/>
               <a:t/>
             </a:fld>
@@ -1286,7 +1372,7 @@
       </p:grpSpPr>
       <p:sp>
         <p:nvSpPr>
-          <p:cNvPr id="1236688931" name="Slide Image Placeholder 1"/>
+          <p:cNvPr id="259719697" name="Slide Image Placeholder 1"/>
           <p:cNvSpPr>
             <a:spLocks noChangeAspect="1" noGrp="1" noRot="1"/>
           </p:cNvSpPr>
@@ -1298,7 +1384,7 @@
       </p:sp>
       <p:sp>
         <p:nvSpPr>
-          <p:cNvPr id="4467095" name="Notes Placeholder 2"/>
+          <p:cNvPr id="1331557972" name="Notes Placeholder 2"/>
           <p:cNvSpPr>
             <a:spLocks noGrp="1"/>
           </p:cNvSpPr>
@@ -1320,7 +1406,7 @@
       </p:sp>
       <p:sp>
         <p:nvSpPr>
-          <p:cNvPr id="148478384" name="Slide Number Placeholder 3"/>
+          <p:cNvPr id="1636312002" name="Slide Number Placeholder 3"/>
           <p:cNvSpPr>
             <a:spLocks noGrp="1"/>
           </p:cNvSpPr>
@@ -1336,7 +1422,7 @@
             <a:pPr>
               <a:defRPr/>
             </a:pPr>
-            <a:fld id="{F08BE2A3-6787-C254-5F63-08915A5FB78F}" type="slidenum">
+            <a:fld id="{55E44246-2DB5-1C19-6E18-689335ED530E}" type="slidenum">
               <a:rPr/>
               <a:t/>
             </a:fld>
@@ -1371,7 +1457,7 @@
       </p:grpSpPr>
       <p:sp>
         <p:nvSpPr>
-          <p:cNvPr id="1704575285" name="Slide Image Placeholder 1"/>
+          <p:cNvPr id="1835949929" name="Slide Image Placeholder 1"/>
           <p:cNvSpPr>
             <a:spLocks noChangeAspect="1" noGrp="1" noRot="1"/>
           </p:cNvSpPr>
@@ -1383,7 +1469,7 @@
       </p:sp>
       <p:sp>
         <p:nvSpPr>
-          <p:cNvPr id="440897753" name="Notes Placeholder 2"/>
+          <p:cNvPr id="1154179043" name="Notes Placeholder 2"/>
           <p:cNvSpPr>
             <a:spLocks noGrp="1"/>
           </p:cNvSpPr>
@@ -1405,7 +1491,7 @@
       </p:sp>
       <p:sp>
         <p:nvSpPr>
-          <p:cNvPr id="37899898" name="Slide Number Placeholder 3"/>
+          <p:cNvPr id="1193875055" name="Slide Number Placeholder 3"/>
           <p:cNvSpPr>
             <a:spLocks noGrp="1"/>
           </p:cNvSpPr>
@@ -1421,7 +1507,7 @@
             <a:pPr>
               <a:defRPr/>
             </a:pPr>
-            <a:fld id="{384C17E2-504D-2950-9C0A-0AB7823C15DE}" type="slidenum">
+            <a:fld id="{F08BE2A3-6787-C254-5F63-08915A5FB78F}" type="slidenum">
               <a:rPr/>
               <a:t/>
             </a:fld>
@@ -1456,7 +1542,7 @@
       </p:grpSpPr>
       <p:sp>
         <p:nvSpPr>
-          <p:cNvPr id="1418792625" name="Заголовок 1"/>
+          <p:cNvPr id="539921742" name="Заголовок 1"/>
           <p:cNvSpPr>
             <a:spLocks noGrp="1"/>
           </p:cNvSpPr>
@@ -1491,7 +1577,7 @@
       </p:sp>
       <p:sp>
         <p:nvSpPr>
-          <p:cNvPr id="1703434712" name="Подзаголовок 2"/>
+          <p:cNvPr id="629693937" name="Подзаголовок 2"/>
           <p:cNvSpPr>
             <a:spLocks noGrp="1"/>
           </p:cNvSpPr>
@@ -1559,7 +1645,7 @@
       </p:sp>
       <p:sp>
         <p:nvSpPr>
-          <p:cNvPr id="408033308" name="Дата 3"/>
+          <p:cNvPr id="575556859" name="Дата 3"/>
           <p:cNvSpPr>
             <a:spLocks noGrp="1"/>
           </p:cNvSpPr>
@@ -1585,7 +1671,7 @@
       </p:sp>
       <p:sp>
         <p:nvSpPr>
-          <p:cNvPr id="1712404737" name="Нижний колонтитул 4"/>
+          <p:cNvPr id="1286163907" name="Нижний колонтитул 4"/>
           <p:cNvSpPr>
             <a:spLocks noGrp="1"/>
           </p:cNvSpPr>
@@ -1607,7 +1693,7 @@
       </p:sp>
       <p:sp>
         <p:nvSpPr>
-          <p:cNvPr id="424467416" name="Номер слайда 5"/>
+          <p:cNvPr id="382427535" name="Номер слайда 5"/>
           <p:cNvSpPr>
             <a:spLocks noGrp="1"/>
           </p:cNvSpPr>
@@ -1658,7 +1744,7 @@
       </p:grpSpPr>
       <p:sp>
         <p:nvSpPr>
-          <p:cNvPr id="1180872582" name="Заголовок 1"/>
+          <p:cNvPr id="2043648404" name="Заголовок 1"/>
           <p:cNvSpPr>
             <a:spLocks noGrp="1"/>
           </p:cNvSpPr>
@@ -1684,7 +1770,7 @@
       </p:sp>
       <p:sp>
         <p:nvSpPr>
-          <p:cNvPr id="521935716" name="Вертикальный текст 2"/>
+          <p:cNvPr id="886230833" name="Вертикальный текст 2"/>
           <p:cNvSpPr>
             <a:spLocks noGrp="1"/>
           </p:cNvSpPr>
@@ -1750,7 +1836,7 @@
       </p:sp>
       <p:sp>
         <p:nvSpPr>
-          <p:cNvPr id="1255630797" name="Дата 3"/>
+          <p:cNvPr id="1890504908" name="Дата 3"/>
           <p:cNvSpPr>
             <a:spLocks noGrp="1"/>
           </p:cNvSpPr>
@@ -1776,7 +1862,7 @@
       </p:sp>
       <p:sp>
         <p:nvSpPr>
-          <p:cNvPr id="2100537937" name="Нижний колонтитул 4"/>
+          <p:cNvPr id="1963602204" name="Нижний колонтитул 4"/>
           <p:cNvSpPr>
             <a:spLocks noGrp="1"/>
           </p:cNvSpPr>
@@ -1798,7 +1884,7 @@
       </p:sp>
       <p:sp>
         <p:nvSpPr>
-          <p:cNvPr id="1555608390" name="Номер слайда 5"/>
+          <p:cNvPr id="168829472" name="Номер слайда 5"/>
           <p:cNvSpPr>
             <a:spLocks noGrp="1"/>
           </p:cNvSpPr>
@@ -1849,7 +1935,7 @@
       </p:grpSpPr>
       <p:sp>
         <p:nvSpPr>
-          <p:cNvPr id="1803633926" name="Вертикальный заголовок 1"/>
+          <p:cNvPr id="257263923" name="Вертикальный заголовок 1"/>
           <p:cNvSpPr>
             <a:spLocks noGrp="1"/>
           </p:cNvSpPr>
@@ -1880,7 +1966,7 @@
       </p:sp>
       <p:sp>
         <p:nvSpPr>
-          <p:cNvPr id="2113678106" name="Вертикальный текст 2"/>
+          <p:cNvPr id="1546250711" name="Вертикальный текст 2"/>
           <p:cNvSpPr>
             <a:spLocks noGrp="1"/>
           </p:cNvSpPr>
@@ -1951,7 +2037,7 @@
       </p:sp>
       <p:sp>
         <p:nvSpPr>
-          <p:cNvPr id="23209079" name="Дата 3"/>
+          <p:cNvPr id="88810781" name="Дата 3"/>
           <p:cNvSpPr>
             <a:spLocks noGrp="1"/>
           </p:cNvSpPr>
@@ -1977,7 +2063,7 @@
       </p:sp>
       <p:sp>
         <p:nvSpPr>
-          <p:cNvPr id="1605052668" name="Нижний колонтитул 4"/>
+          <p:cNvPr id="1393464176" name="Нижний колонтитул 4"/>
           <p:cNvSpPr>
             <a:spLocks noGrp="1"/>
           </p:cNvSpPr>
@@ -1999,7 +2085,7 @@
       </p:sp>
       <p:sp>
         <p:nvSpPr>
-          <p:cNvPr id="1033116542" name="Номер слайда 5"/>
+          <p:cNvPr id="316750711" name="Номер слайда 5"/>
           <p:cNvSpPr>
             <a:spLocks noGrp="1"/>
           </p:cNvSpPr>
@@ -2050,7 +2136,7 @@
       </p:grpSpPr>
       <p:sp>
         <p:nvSpPr>
-          <p:cNvPr id="1351493924" name="Заголовок 1"/>
+          <p:cNvPr id="71729568" name="Заголовок 1"/>
           <p:cNvSpPr>
             <a:spLocks noGrp="1"/>
           </p:cNvSpPr>
@@ -2076,7 +2162,7 @@
       </p:sp>
       <p:sp>
         <p:nvSpPr>
-          <p:cNvPr id="739590536" name="Объект 2"/>
+          <p:cNvPr id="1347931187" name="Объект 2"/>
           <p:cNvSpPr>
             <a:spLocks noGrp="1"/>
           </p:cNvSpPr>
@@ -2142,7 +2228,7 @@
       </p:sp>
       <p:sp>
         <p:nvSpPr>
-          <p:cNvPr id="1469490568" name="Дата 3"/>
+          <p:cNvPr id="1176517695" name="Дата 3"/>
           <p:cNvSpPr>
             <a:spLocks noGrp="1"/>
           </p:cNvSpPr>
@@ -2168,7 +2254,7 @@
       </p:sp>
       <p:sp>
         <p:nvSpPr>
-          <p:cNvPr id="264651584" name="Нижний колонтитул 4"/>
+          <p:cNvPr id="445914424" name="Нижний колонтитул 4"/>
           <p:cNvSpPr>
             <a:spLocks noGrp="1"/>
           </p:cNvSpPr>
@@ -2190,7 +2276,7 @@
       </p:sp>
       <p:sp>
         <p:nvSpPr>
-          <p:cNvPr id="1584040539" name="Номер слайда 5"/>
+          <p:cNvPr id="1959874959" name="Номер слайда 5"/>
           <p:cNvSpPr>
             <a:spLocks noGrp="1"/>
           </p:cNvSpPr>
@@ -2241,7 +2327,7 @@
       </p:grpSpPr>
       <p:sp>
         <p:nvSpPr>
-          <p:cNvPr id="931055746" name="Заголовок 1"/>
+          <p:cNvPr id="2017065391" name="Заголовок 1"/>
           <p:cNvSpPr>
             <a:spLocks noGrp="1"/>
           </p:cNvSpPr>
@@ -2276,7 +2362,7 @@
       </p:sp>
       <p:sp>
         <p:nvSpPr>
-          <p:cNvPr id="418094658" name="Текст 2"/>
+          <p:cNvPr id="1989152199" name="Текст 2"/>
           <p:cNvSpPr>
             <a:spLocks noGrp="1"/>
           </p:cNvSpPr>
@@ -2398,7 +2484,7 @@
       </p:sp>
       <p:sp>
         <p:nvSpPr>
-          <p:cNvPr id="1917856349" name="Дата 3"/>
+          <p:cNvPr id="1425763527" name="Дата 3"/>
           <p:cNvSpPr>
             <a:spLocks noGrp="1"/>
           </p:cNvSpPr>
@@ -2424,7 +2510,7 @@
       </p:sp>
       <p:sp>
         <p:nvSpPr>
-          <p:cNvPr id="1494368496" name="Нижний колонтитул 4"/>
+          <p:cNvPr id="1567911689" name="Нижний колонтитул 4"/>
           <p:cNvSpPr>
             <a:spLocks noGrp="1"/>
           </p:cNvSpPr>
@@ -2446,7 +2532,7 @@
       </p:sp>
       <p:sp>
         <p:nvSpPr>
-          <p:cNvPr id="785630557" name="Номер слайда 5"/>
+          <p:cNvPr id="1122297778" name="Номер слайда 5"/>
           <p:cNvSpPr>
             <a:spLocks noGrp="1"/>
           </p:cNvSpPr>
@@ -2497,7 +2583,7 @@
       </p:grpSpPr>
       <p:sp>
         <p:nvSpPr>
-          <p:cNvPr id="1654946030" name="Заголовок 1"/>
+          <p:cNvPr id="1248551011" name="Заголовок 1"/>
           <p:cNvSpPr>
             <a:spLocks noGrp="1"/>
           </p:cNvSpPr>
@@ -2523,7 +2609,7 @@
       </p:sp>
       <p:sp>
         <p:nvSpPr>
-          <p:cNvPr id="1796571760" name="Объект 2"/>
+          <p:cNvPr id="1119070589" name="Объект 2"/>
           <p:cNvSpPr>
             <a:spLocks noGrp="1"/>
           </p:cNvSpPr>
@@ -2594,7 +2680,7 @@
       </p:sp>
       <p:sp>
         <p:nvSpPr>
-          <p:cNvPr id="529277383" name="Объект 3"/>
+          <p:cNvPr id="245594997" name="Объект 3"/>
           <p:cNvSpPr>
             <a:spLocks noGrp="1"/>
           </p:cNvSpPr>
@@ -2665,7 +2751,7 @@
       </p:sp>
       <p:sp>
         <p:nvSpPr>
-          <p:cNvPr id="668029058" name="Дата 4"/>
+          <p:cNvPr id="2036195491" name="Дата 4"/>
           <p:cNvSpPr>
             <a:spLocks noGrp="1"/>
           </p:cNvSpPr>
@@ -2691,7 +2777,7 @@
       </p:sp>
       <p:sp>
         <p:nvSpPr>
-          <p:cNvPr id="325821271" name="Нижний колонтитул 5"/>
+          <p:cNvPr id="1391853405" name="Нижний колонтитул 5"/>
           <p:cNvSpPr>
             <a:spLocks noGrp="1"/>
           </p:cNvSpPr>
@@ -2713,7 +2799,7 @@
       </p:sp>
       <p:sp>
         <p:nvSpPr>
-          <p:cNvPr id="536516521" name="Номер слайда 6"/>
+          <p:cNvPr id="314070160" name="Номер слайда 6"/>
           <p:cNvSpPr>
             <a:spLocks noGrp="1"/>
           </p:cNvSpPr>
@@ -2764,7 +2850,7 @@
       </p:grpSpPr>
       <p:sp>
         <p:nvSpPr>
-          <p:cNvPr id="1077317430" name="Заголовок 1"/>
+          <p:cNvPr id="616426921" name="Заголовок 1"/>
           <p:cNvSpPr>
             <a:spLocks noGrp="1"/>
           </p:cNvSpPr>
@@ -2795,7 +2881,7 @@
       </p:sp>
       <p:sp>
         <p:nvSpPr>
-          <p:cNvPr id="244442546" name="Текст 2"/>
+          <p:cNvPr id="1088251634" name="Текст 2"/>
           <p:cNvSpPr>
             <a:spLocks noGrp="1"/>
           </p:cNvSpPr>
@@ -2863,7 +2949,7 @@
       </p:sp>
       <p:sp>
         <p:nvSpPr>
-          <p:cNvPr id="615976213" name="Объект 3"/>
+          <p:cNvPr id="1399943760" name="Объект 3"/>
           <p:cNvSpPr>
             <a:spLocks noGrp="1"/>
           </p:cNvSpPr>
@@ -2934,7 +3020,7 @@
       </p:sp>
       <p:sp>
         <p:nvSpPr>
-          <p:cNvPr id="520982575" name="Текст 4"/>
+          <p:cNvPr id="819214892" name="Текст 4"/>
           <p:cNvSpPr>
             <a:spLocks noGrp="1"/>
           </p:cNvSpPr>
@@ -3002,7 +3088,7 @@
       </p:sp>
       <p:sp>
         <p:nvSpPr>
-          <p:cNvPr id="744956751" name="Объект 5"/>
+          <p:cNvPr id="1313288625" name="Объект 5"/>
           <p:cNvSpPr>
             <a:spLocks noGrp="1"/>
           </p:cNvSpPr>
@@ -3073,7 +3159,7 @@
       </p:sp>
       <p:sp>
         <p:nvSpPr>
-          <p:cNvPr id="2136186473" name="Дата 6"/>
+          <p:cNvPr id="320420727" name="Дата 6"/>
           <p:cNvSpPr>
             <a:spLocks noGrp="1"/>
           </p:cNvSpPr>
@@ -3099,7 +3185,7 @@
       </p:sp>
       <p:sp>
         <p:nvSpPr>
-          <p:cNvPr id="1174568020" name="Нижний колонтитул 7"/>
+          <p:cNvPr id="910744771" name="Нижний колонтитул 7"/>
           <p:cNvSpPr>
             <a:spLocks noGrp="1"/>
           </p:cNvSpPr>
@@ -3121,7 +3207,7 @@
       </p:sp>
       <p:sp>
         <p:nvSpPr>
-          <p:cNvPr id="475016445" name="Номер слайда 8"/>
+          <p:cNvPr id="962637058" name="Номер слайда 8"/>
           <p:cNvSpPr>
             <a:spLocks noGrp="1"/>
           </p:cNvSpPr>
@@ -3172,7 +3258,7 @@
       </p:grpSpPr>
       <p:sp>
         <p:nvSpPr>
-          <p:cNvPr id="936422242" name="Заголовок 1"/>
+          <p:cNvPr id="1551802294" name="Заголовок 1"/>
           <p:cNvSpPr>
             <a:spLocks noGrp="1"/>
           </p:cNvSpPr>
@@ -3198,7 +3284,7 @@
       </p:sp>
       <p:sp>
         <p:nvSpPr>
-          <p:cNvPr id="595554867" name="Дата 2"/>
+          <p:cNvPr id="1321638057" name="Дата 2"/>
           <p:cNvSpPr>
             <a:spLocks noGrp="1"/>
           </p:cNvSpPr>
@@ -3224,7 +3310,7 @@
       </p:sp>
       <p:sp>
         <p:nvSpPr>
-          <p:cNvPr id="826833281" name="Нижний колонтитул 3"/>
+          <p:cNvPr id="1704905800" name="Нижний колонтитул 3"/>
           <p:cNvSpPr>
             <a:spLocks noGrp="1"/>
           </p:cNvSpPr>
@@ -3246,7 +3332,7 @@
       </p:sp>
       <p:sp>
         <p:nvSpPr>
-          <p:cNvPr id="1912652146" name="Номер слайда 4"/>
+          <p:cNvPr id="475266902" name="Номер слайда 4"/>
           <p:cNvSpPr>
             <a:spLocks noGrp="1"/>
           </p:cNvSpPr>
@@ -3297,7 +3383,7 @@
       </p:grpSpPr>
       <p:sp>
         <p:nvSpPr>
-          <p:cNvPr id="943154328" name="Дата 1"/>
+          <p:cNvPr id="555001828" name="Дата 1"/>
           <p:cNvSpPr>
             <a:spLocks noGrp="1"/>
           </p:cNvSpPr>
@@ -3323,7 +3409,7 @@
       </p:sp>
       <p:sp>
         <p:nvSpPr>
-          <p:cNvPr id="718668553" name="Нижний колонтитул 2"/>
+          <p:cNvPr id="1815306304" name="Нижний колонтитул 2"/>
           <p:cNvSpPr>
             <a:spLocks noGrp="1"/>
           </p:cNvSpPr>
@@ -3345,7 +3431,7 @@
       </p:sp>
       <p:sp>
         <p:nvSpPr>
-          <p:cNvPr id="1024706205" name="Номер слайда 3"/>
+          <p:cNvPr id="612108687" name="Номер слайда 3"/>
           <p:cNvSpPr>
             <a:spLocks noGrp="1"/>
           </p:cNvSpPr>
@@ -3396,7 +3482,7 @@
       </p:grpSpPr>
       <p:sp>
         <p:nvSpPr>
-          <p:cNvPr id="1818420878" name="Заголовок 1"/>
+          <p:cNvPr id="168563429" name="Заголовок 1"/>
           <p:cNvSpPr>
             <a:spLocks noGrp="1"/>
           </p:cNvSpPr>
@@ -3431,7 +3517,7 @@
       </p:sp>
       <p:sp>
         <p:nvSpPr>
-          <p:cNvPr id="1376846013" name="Объект 2"/>
+          <p:cNvPr id="1431555311" name="Объект 2"/>
           <p:cNvSpPr>
             <a:spLocks noGrp="1"/>
           </p:cNvSpPr>
@@ -3530,7 +3616,7 @@
       </p:sp>
       <p:sp>
         <p:nvSpPr>
-          <p:cNvPr id="1373557324" name="Текст 3"/>
+          <p:cNvPr id="1082648619" name="Текст 3"/>
           <p:cNvSpPr>
             <a:spLocks noGrp="1"/>
           </p:cNvSpPr>
@@ -3598,7 +3684,7 @@
       </p:sp>
       <p:sp>
         <p:nvSpPr>
-          <p:cNvPr id="1209123332" name="Дата 4"/>
+          <p:cNvPr id="661247266" name="Дата 4"/>
           <p:cNvSpPr>
             <a:spLocks noGrp="1"/>
           </p:cNvSpPr>
@@ -3624,7 +3710,7 @@
       </p:sp>
       <p:sp>
         <p:nvSpPr>
-          <p:cNvPr id="889519883" name="Нижний колонтитул 5"/>
+          <p:cNvPr id="1422622887" name="Нижний колонтитул 5"/>
           <p:cNvSpPr>
             <a:spLocks noGrp="1"/>
           </p:cNvSpPr>
@@ -3646,7 +3732,7 @@
       </p:sp>
       <p:sp>
         <p:nvSpPr>
-          <p:cNvPr id="157864151" name="Номер слайда 6"/>
+          <p:cNvPr id="469778834" name="Номер слайда 6"/>
           <p:cNvSpPr>
             <a:spLocks noGrp="1"/>
           </p:cNvSpPr>
@@ -3697,7 +3783,7 @@
       </p:grpSpPr>
       <p:sp>
         <p:nvSpPr>
-          <p:cNvPr id="288379863" name="Заголовок 1"/>
+          <p:cNvPr id="1169056319" name="Заголовок 1"/>
           <p:cNvSpPr>
             <a:spLocks noGrp="1"/>
           </p:cNvSpPr>
@@ -3732,7 +3818,7 @@
       </p:sp>
       <p:sp>
         <p:nvSpPr>
-          <p:cNvPr id="271764688" name="Рисунок 2"/>
+          <p:cNvPr id="1727183405" name="Рисунок 2"/>
           <p:cNvSpPr>
             <a:spLocks noChangeAspect="1" noGrp="1"/>
           </p:cNvSpPr>
@@ -3800,7 +3886,7 @@
       </p:sp>
       <p:sp>
         <p:nvSpPr>
-          <p:cNvPr id="1834994140" name="Текст 3"/>
+          <p:cNvPr id="2060641831" name="Текст 3"/>
           <p:cNvSpPr>
             <a:spLocks noGrp="1"/>
           </p:cNvSpPr>
@@ -3868,7 +3954,7 @@
       </p:sp>
       <p:sp>
         <p:nvSpPr>
-          <p:cNvPr id="934298013" name="Дата 4"/>
+          <p:cNvPr id="1049860958" name="Дата 4"/>
           <p:cNvSpPr>
             <a:spLocks noGrp="1"/>
           </p:cNvSpPr>
@@ -3894,7 +3980,7 @@
       </p:sp>
       <p:sp>
         <p:nvSpPr>
-          <p:cNvPr id="1916451866" name="Нижний колонтитул 5"/>
+          <p:cNvPr id="62197180" name="Нижний колонтитул 5"/>
           <p:cNvSpPr>
             <a:spLocks noGrp="1"/>
           </p:cNvSpPr>
@@ -3916,7 +4002,7 @@
       </p:sp>
       <p:sp>
         <p:nvSpPr>
-          <p:cNvPr id="67316281" name="Номер слайда 6"/>
+          <p:cNvPr id="18847240" name="Номер слайда 6"/>
           <p:cNvSpPr>
             <a:spLocks noGrp="1"/>
           </p:cNvSpPr>
@@ -3972,7 +4058,7 @@
       </p:grpSpPr>
       <p:sp>
         <p:nvSpPr>
-          <p:cNvPr id="922511637" name="Заголовок 1"/>
+          <p:cNvPr id="1805546619" name="Заголовок 1"/>
           <p:cNvSpPr>
             <a:spLocks noGrp="1"/>
           </p:cNvSpPr>
@@ -4008,7 +4094,7 @@
       </p:sp>
       <p:sp>
         <p:nvSpPr>
-          <p:cNvPr id="786781438" name="Текст 2"/>
+          <p:cNvPr id="2085731333" name="Текст 2"/>
           <p:cNvSpPr>
             <a:spLocks noGrp="1"/>
           </p:cNvSpPr>
@@ -4084,7 +4170,7 @@
       </p:sp>
       <p:sp>
         <p:nvSpPr>
-          <p:cNvPr id="1752207390" name="Дата 3"/>
+          <p:cNvPr id="1427391746" name="Дата 3"/>
           <p:cNvSpPr>
             <a:spLocks noGrp="1"/>
           </p:cNvSpPr>
@@ -4128,7 +4214,7 @@
       </p:sp>
       <p:sp>
         <p:nvSpPr>
-          <p:cNvPr id="643487549" name="Нижний колонтитул 4"/>
+          <p:cNvPr id="1278616381" name="Нижний колонтитул 4"/>
           <p:cNvSpPr>
             <a:spLocks noGrp="1"/>
           </p:cNvSpPr>
@@ -4168,7 +4254,7 @@
       </p:sp>
       <p:sp>
         <p:nvSpPr>
-          <p:cNvPr id="2056534721" name="Номер слайда 5"/>
+          <p:cNvPr id="786507235" name="Номер слайда 5"/>
           <p:cNvSpPr>
             <a:spLocks noGrp="1"/>
           </p:cNvSpPr>
@@ -4528,7 +4614,7 @@
       </p:grpSpPr>
       <p:sp>
         <p:nvSpPr>
-          <p:cNvPr id="1376213697" name="Title 1"/>
+          <p:cNvPr id="1605986073" name="Title 1"/>
           <p:cNvSpPr>
             <a:spLocks noGrp="1"/>
           </p:cNvSpPr>
@@ -4550,7 +4636,7 @@
       </p:sp>
       <p:sp>
         <p:nvSpPr>
-          <p:cNvPr id="2000082057" name="Subtitle 2"/>
+          <p:cNvPr id="1976178140" name="Subtitle 2"/>
           <p:cNvSpPr>
             <a:spLocks noGrp="1"/>
           </p:cNvSpPr>
@@ -4572,13 +4658,13 @@
       </p:sp>
       <p:pic>
         <p:nvPicPr>
-          <p:cNvPr id="1435320899" name=""/>
+          <p:cNvPr id="682759242" name=""/>
           <p:cNvPicPr>
             <a:picLocks noChangeAspect="1"/>
           </p:cNvPicPr>
           <p:nvPr/>
         </p:nvPicPr>
-        <p:blipFill>
+        <p:blipFill rotWithShape="1">
           <a:blip r:embed="rId3"/>
           <a:stretch/>
         </p:blipFill>
@@ -4594,7 +4680,7 @@
       </p:pic>
       <p:sp>
         <p:nvSpPr>
-          <p:cNvPr id="811173374" name=""/>
+          <p:cNvPr id="1166907716" name=""/>
           <p:cNvSpPr txBox="1"/>
           <p:nvPr/>
         </p:nvSpPr>
@@ -4693,7 +4779,7 @@
       </p:grpSpPr>
       <p:sp>
         <p:nvSpPr>
-          <p:cNvPr id="1576639567" name="Заголовок 1"/>
+          <p:cNvPr id="472962400" name="Заголовок 1"/>
           <p:cNvSpPr>
             <a:spLocks noGrp="1"/>
           </p:cNvSpPr>
@@ -4715,20 +4801,20 @@
       </p:sp>
       <p:pic>
         <p:nvPicPr>
-          <p:cNvPr id="1241158103" name=""/>
+          <p:cNvPr id="16914876" name=""/>
           <p:cNvPicPr>
             <a:picLocks noChangeAspect="1"/>
           </p:cNvPicPr>
           <p:nvPr/>
         </p:nvPicPr>
-        <p:blipFill>
+        <p:blipFill rotWithShape="1">
           <a:blip r:embed="rId3"/>
           <a:stretch/>
         </p:blipFill>
         <p:spPr bwMode="auto">
           <a:xfrm flipH="0" flipV="0">
-            <a:off x="-1572" y="6265"/>
-            <a:ext cx="12195146" cy="6861758"/>
+            <a:off x="-1573" y="6266"/>
+            <a:ext cx="12195147" cy="6861759"/>
           </a:xfrm>
           <a:prstGeom prst="rect">
             <a:avLst/>
@@ -4737,14 +4823,14 @@
       </p:pic>
       <p:sp>
         <p:nvSpPr>
-          <p:cNvPr id="1866555560" name=""/>
+          <p:cNvPr id="332397993" name=""/>
           <p:cNvSpPr txBox="1"/>
           <p:nvPr/>
         </p:nvSpPr>
         <p:spPr bwMode="auto">
           <a:xfrm rot="0" flipH="0" flipV="0">
-            <a:off x="464357" y="244390"/>
-            <a:ext cx="6430095" cy="640440"/>
+            <a:off x="464358" y="244390"/>
+            <a:ext cx="8652377" cy="1189079"/>
           </a:xfrm>
           <a:prstGeom prst="rect">
             <a:avLst/>
@@ -4777,7 +4863,11 @@
                 <a:ea typeface="Segoe UI Semibold"/>
                 <a:cs typeface="Segoe UI Semibold"/>
               </a:rPr>
-              <a:t>Заповеди </a:t>
+              <a:t>Автоматизация: Шаблоны VM и магия Linked Clone</a:t>
+            </a:r>
+            <a:r>
+              <a:rPr/>
+              <a:t> </a:t>
             </a:r>
             <a:endParaRPr/>
           </a:p>
@@ -4785,14 +4875,14 @@
       </p:sp>
       <p:sp>
         <p:nvSpPr>
-          <p:cNvPr id="273931542" name=""/>
+          <p:cNvPr id="811874063" name=""/>
           <p:cNvSpPr txBox="1"/>
           <p:nvPr/>
         </p:nvSpPr>
         <p:spPr bwMode="auto">
           <a:xfrm rot="0" flipH="0" flipV="0">
-            <a:off x="608485" y="2216776"/>
-            <a:ext cx="6674487" cy="3932280"/>
+            <a:off x="608486" y="1433471"/>
+            <a:ext cx="11234513" cy="4755240"/>
           </a:xfrm>
           <a:prstGeom prst="rect">
             <a:avLst/>
@@ -4825,18 +4915,7 @@
                 <a:ea typeface="Segoe UI Semibold"/>
                 <a:cs typeface="Segoe UI Semibold"/>
               </a:rPr>
-              <a:t>1.</a:t>
-            </a:r>
-            <a:r>
-              <a:rPr lang="ru-RU" sz="1800" b="0" i="0" u="none" strike="noStrike" cap="none" spc="0">
-                <a:solidFill>
-                  <a:schemeClr val="bg1"/>
-                </a:solidFill>
-                <a:latin typeface="Segoe UI Semibold"/>
-                <a:ea typeface="Segoe UI Semibold"/>
-                <a:cs typeface="Segoe UI Semibold"/>
-              </a:rPr>
-              <a:t> Не трогай, пока работает. Руки чешутся нажать «обновить всё» в пятницу в 17:30? Привяжи руки к стулу скотчем. Потерпи до понедельника.</a:t>
+              <a:t>Зачем нужны шаблоны (Templates)?</a:t>
             </a:r>
             <a:br>
               <a:rPr lang="ru-RU" sz="1800" b="0" i="0" u="none" strike="noStrike" cap="none" spc="0">
@@ -4848,7 +4927,18 @@
                 <a:cs typeface="Segoe UI Semibold"/>
               </a:rPr>
             </a:br>
-            <a:endParaRPr lang="ru-RU" sz="1800" b="0" i="0" u="none" strike="noStrike" cap="none" spc="0">
+            <a:r>
+              <a:rPr lang="ru-RU" sz="1800" b="0" i="0" u="none" strike="noStrike" cap="none" spc="0">
+                <a:solidFill>
+                  <a:schemeClr val="bg1"/>
+                </a:solidFill>
+                <a:latin typeface="Segoe UI Semibold"/>
+                <a:ea typeface="Segoe UI Semibold"/>
+                <a:cs typeface="Segoe UI Semibold"/>
+              </a:rPr>
+              <a:t>Конец ручной установке ОС через ISO. Чистый образ настраивается один раз, превращается в шаблон, а дальше новые серверы клонируются за секунды.</a:t>
+            </a:r>
+            <a:endParaRPr sz="1800" b="0" i="0" u="none" strike="noStrike" cap="none" spc="0">
               <a:solidFill>
                 <a:schemeClr val="bg1"/>
               </a:solidFill>
@@ -4878,30 +4968,9 @@
                 <a:ea typeface="Segoe UI Semibold"/>
                 <a:cs typeface="Segoe UI Semibold"/>
               </a:rPr>
-              <a:t>2.</a:t>
-            </a:r>
-            <a:r>
-              <a:rPr lang="ru-RU" sz="1800" b="0" i="0" u="none" strike="noStrike" cap="none" spc="0">
-                <a:solidFill>
-                  <a:schemeClr val="bg1"/>
-                </a:solidFill>
-                <a:latin typeface="Segoe UI Semibold"/>
-                <a:ea typeface="Segoe UI Semibold"/>
-                <a:cs typeface="Segoe UI Semibold"/>
-              </a:rPr>
-              <a:t> Делай бэкапы. Админы делятся на две категории: те, кто ещё не делают бэкапы, и те, кто теперь делают бэкапы даже для бэкапов. В виртуалке роутера бэкапься хотя бы локальным экспортом XML-конфига раз в неделю.</a:t>
-            </a:r>
-            <a:br>
-              <a:rPr lang="ru-RU" sz="1800" b="0" i="0" u="none" strike="noStrike" cap="none" spc="0">
-                <a:solidFill>
-                  <a:schemeClr val="bg1"/>
-                </a:solidFill>
-                <a:latin typeface="Segoe UI Semibold"/>
-                <a:ea typeface="Segoe UI Semibold"/>
-                <a:cs typeface="Segoe UI Semibold"/>
-              </a:rPr>
-            </a:br>
-            <a:endParaRPr lang="ru-RU" sz="1800" b="0" i="0" u="none" strike="noStrike" cap="none" spc="0">
+              <a:t>Связанный клон (Linked Clone) против Полного (Full Clone):</a:t>
+            </a:r>
+            <a:endParaRPr sz="1800" b="0" i="0" u="none" strike="noStrike" cap="none" spc="0">
               <a:solidFill>
                 <a:schemeClr val="bg1"/>
               </a:solidFill>
@@ -4931,7 +5000,7 @@
                 <a:ea typeface="Segoe UI Semibold"/>
                 <a:cs typeface="Segoe UI Semibold"/>
               </a:rPr>
-              <a:t>3.</a:t>
+              <a:t>Full Clone:</a:t>
             </a:r>
             <a:r>
               <a:rPr lang="ru-RU" sz="1800" b="0" i="0" u="none" strike="noStrike" cap="none" spc="0">
@@ -4942,56 +5011,350 @@
                 <a:ea typeface="Segoe UI Semibold"/>
                 <a:cs typeface="Segoe UI Semibold"/>
               </a:rPr>
-              <a:t> Если всё всё-таки сломалось - у тебя всегда есть универсальная мантра сисадмина: «Это не я, это у провайдера авария на магистрали». Даёт примерно 40 минут форы, пока сотрудники пьют кофе, а ты с горящими глазами поднимаешь упавшую ноду.</a:t>
-            </a:r>
-            <a:endParaRPr/>
-          </a:p>
-        </p:txBody>
-      </p:sp>
-      <p:pic>
-        <p:nvPicPr>
-          <p:cNvPr id="1170211058" name=""/>
-          <p:cNvPicPr>
-            <a:picLocks noChangeAspect="1"/>
-          </p:cNvPicPr>
-          <p:nvPr/>
-        </p:nvPicPr>
-        <p:blipFill>
-          <a:blip r:embed="rId4"/>
-          <a:stretch/>
-        </p:blipFill>
-        <p:spPr bwMode="auto">
-          <a:xfrm flipH="0" flipV="0">
-            <a:off x="7175723" y="157291"/>
-            <a:ext cx="4850229" cy="2546370"/>
-          </a:xfrm>
-          <a:prstGeom prst="rect">
-            <a:avLst/>
-          </a:prstGeom>
-        </p:spPr>
-      </p:pic>
-      <p:pic>
-        <p:nvPicPr>
-          <p:cNvPr id="1620315827" name=""/>
-          <p:cNvPicPr>
-            <a:picLocks noChangeAspect="1"/>
-          </p:cNvPicPr>
-          <p:nvPr/>
-        </p:nvPicPr>
-        <p:blipFill>
-          <a:blip r:embed="rId5"/>
-          <a:stretch/>
-        </p:blipFill>
-        <p:spPr bwMode="auto">
-          <a:xfrm flipH="0" flipV="0">
-            <a:off x="7951251" y="2703662"/>
-            <a:ext cx="3698715" cy="4077377"/>
-          </a:xfrm>
-          <a:prstGeom prst="rect">
-            <a:avLst/>
-          </a:prstGeom>
-        </p:spPr>
-      </p:pic>
+              <a:t> Независимая копия диска. Клонируется дольше, дублирует размер оригинала (жрёт место на LVM-Thin).</a:t>
+            </a:r>
+            <a:endParaRPr sz="1800" b="0" i="0" u="none" strike="noStrike" cap="none" spc="0">
+              <a:solidFill>
+                <a:schemeClr val="bg1"/>
+              </a:solidFill>
+              <a:latin typeface="Segoe UI Semibold"/>
+              <a:cs typeface="Segoe UI Semibold"/>
+            </a:endParaRPr>
+          </a:p>
+          <a:p>
+            <a:pPr marL="0" marR="0" indent="0" algn="l">
+              <a:lnSpc>
+                <a:spcPct val="100000"/>
+              </a:lnSpc>
+              <a:spcBef>
+                <a:spcPts val="0"/>
+              </a:spcBef>
+              <a:spcAft>
+                <a:spcPts val="0"/>
+              </a:spcAft>
+              <a:defRPr/>
+            </a:pPr>
+            <a:r>
+              <a:rPr lang="ru-RU" sz="1800" b="0" i="0" u="none" strike="noStrike" cap="none" spc="0">
+                <a:solidFill>
+                  <a:schemeClr val="bg1"/>
+                </a:solidFill>
+                <a:latin typeface="Segoe UI Semibold"/>
+                <a:ea typeface="Segoe UI Semibold"/>
+                <a:cs typeface="Segoe UI Semibold"/>
+              </a:rPr>
+              <a:t>Linked Clone:</a:t>
+            </a:r>
+            <a:r>
+              <a:rPr lang="ru-RU" sz="1800" b="0" i="0" u="none" strike="noStrike" cap="none" spc="0">
+                <a:solidFill>
+                  <a:schemeClr val="bg1"/>
+                </a:solidFill>
+                <a:latin typeface="Segoe UI Semibold"/>
+                <a:ea typeface="Segoe UI Semibold"/>
+                <a:cs typeface="Segoe UI Semibold"/>
+              </a:rPr>
+              <a:t> Базируется на механизме </a:t>
+            </a:r>
+            <a:r>
+              <a:rPr lang="ru-RU" sz="1800" b="0" i="0" u="none" strike="noStrike" cap="none" spc="0">
+                <a:solidFill>
+                  <a:schemeClr val="bg1"/>
+                </a:solidFill>
+                <a:latin typeface="Segoe UI Semibold"/>
+                <a:ea typeface="Segoe UI Semibold"/>
+                <a:cs typeface="Segoe UI Semibold"/>
+              </a:rPr>
+              <a:t>Copy-on-Write</a:t>
+            </a:r>
+            <a:r>
+              <a:rPr lang="ru-RU" sz="1800" b="0" i="0" u="none" strike="noStrike" cap="none" spc="0">
+                <a:solidFill>
+                  <a:schemeClr val="bg1"/>
+                </a:solidFill>
+                <a:latin typeface="Segoe UI Semibold"/>
+                <a:ea typeface="Segoe UI Semibold"/>
+                <a:cs typeface="Segoe UI Semibold"/>
+              </a:rPr>
+              <a:t>. Клон создаётся ровно за </a:t>
+            </a:r>
+            <a:r>
+              <a:rPr lang="ru-RU" sz="1800" b="0" i="0" u="none" strike="noStrike" cap="none" spc="0">
+                <a:solidFill>
+                  <a:schemeClr val="bg1"/>
+                </a:solidFill>
+                <a:latin typeface="Segoe UI Semibold"/>
+                <a:ea typeface="Segoe UI Semibold"/>
+                <a:cs typeface="Segoe UI Semibold"/>
+              </a:rPr>
+              <a:t>2 секунды</a:t>
+            </a:r>
+            <a:r>
+              <a:rPr lang="ru-RU" sz="1800" b="0" i="0" u="none" strike="noStrike" cap="none" spc="0">
+                <a:solidFill>
+                  <a:schemeClr val="bg1"/>
+                </a:solidFill>
+                <a:latin typeface="Segoe UI Semibold"/>
+                <a:ea typeface="Segoe UI Semibold"/>
+                <a:cs typeface="Segoe UI Semibold"/>
+              </a:rPr>
+              <a:t>!</a:t>
+            </a:r>
+            <a:br>
+              <a:rPr lang="ru-RU" sz="1800" b="0" i="0" u="none" strike="noStrike" cap="none" spc="0">
+                <a:solidFill>
+                  <a:schemeClr val="bg1"/>
+                </a:solidFill>
+                <a:latin typeface="Segoe UI Semibold"/>
+                <a:ea typeface="Segoe UI Semibold"/>
+                <a:cs typeface="Segoe UI Semibold"/>
+              </a:rPr>
+            </a:br>
+            <a:r>
+              <a:rPr lang="ru-RU" sz="1800" b="0" i="0" u="none" strike="noStrike" cap="none" spc="0">
+                <a:solidFill>
+                  <a:schemeClr val="bg1"/>
+                </a:solidFill>
+                <a:latin typeface="Segoe UI Semibold"/>
+                <a:ea typeface="Segoe UI Semibold"/>
+                <a:cs typeface="Segoe UI Semibold"/>
+              </a:rPr>
+              <a:t>Виртуалка читает базовую ОС из шаблона, а пишет только изменения. 10 серверов занимают не 200 ГБ, а всего 5–10 ГБ.</a:t>
+            </a:r>
+            <a:endParaRPr sz="1800" b="0" i="0" u="none" strike="noStrike" cap="none" spc="0">
+              <a:solidFill>
+                <a:schemeClr val="bg1"/>
+              </a:solidFill>
+              <a:latin typeface="Segoe UI Semibold"/>
+              <a:cs typeface="Segoe UI Semibold"/>
+            </a:endParaRPr>
+          </a:p>
+          <a:p>
+            <a:pPr marL="0" marR="0" indent="0" algn="l">
+              <a:lnSpc>
+                <a:spcPct val="100000"/>
+              </a:lnSpc>
+              <a:spcBef>
+                <a:spcPts val="0"/>
+              </a:spcBef>
+              <a:spcAft>
+                <a:spcPts val="0"/>
+              </a:spcAft>
+              <a:defRPr/>
+            </a:pPr>
+            <a:r>
+              <a:rPr lang="ru-RU" sz="1800" b="0" i="0" u="none" strike="noStrike" cap="none" spc="0">
+                <a:solidFill>
+                  <a:schemeClr val="bg1"/>
+                </a:solidFill>
+                <a:latin typeface="Segoe UI Semibold"/>
+                <a:ea typeface="Segoe UI Semibold"/>
+                <a:cs typeface="Segoe UI Semibold"/>
+              </a:rPr>
+              <a:t>Магия Cloud-Init (Автоконфигурация на лету):</a:t>
+            </a:r>
+            <a:br>
+              <a:rPr lang="ru-RU" sz="1800" b="0" i="0" u="none" strike="noStrike" cap="none" spc="0">
+                <a:solidFill>
+                  <a:schemeClr val="bg1"/>
+                </a:solidFill>
+                <a:latin typeface="Segoe UI Semibold"/>
+                <a:ea typeface="Segoe UI Semibold"/>
+                <a:cs typeface="Segoe UI Semibold"/>
+              </a:rPr>
+            </a:br>
+            <a:r>
+              <a:rPr lang="ru-RU" sz="1800" b="0" i="0" u="none" strike="noStrike" cap="none" spc="0">
+                <a:solidFill>
+                  <a:schemeClr val="bg1"/>
+                </a:solidFill>
+                <a:latin typeface="Segoe UI Semibold"/>
+                <a:ea typeface="Segoe UI Semibold"/>
+                <a:cs typeface="Segoe UI Semibold"/>
+              </a:rPr>
+              <a:t>Прямо из веб-интерфейса Proxmox без входа в виртуалку нарезаются:</a:t>
+            </a:r>
+            <a:endParaRPr sz="1800" b="0" i="0" u="none" strike="noStrike" cap="none" spc="0">
+              <a:solidFill>
+                <a:schemeClr val="bg1"/>
+              </a:solidFill>
+              <a:latin typeface="Segoe UI Semibold"/>
+              <a:cs typeface="Segoe UI Semibold"/>
+            </a:endParaRPr>
+          </a:p>
+          <a:p>
+            <a:pPr marL="0" marR="0" indent="0" algn="l">
+              <a:lnSpc>
+                <a:spcPct val="100000"/>
+              </a:lnSpc>
+              <a:spcBef>
+                <a:spcPts val="0"/>
+              </a:spcBef>
+              <a:spcAft>
+                <a:spcPts val="0"/>
+              </a:spcAft>
+              <a:defRPr/>
+            </a:pPr>
+            <a:r>
+              <a:rPr lang="ru-RU" sz="1800" b="0" i="0" u="none" strike="noStrike" cap="none" spc="0">
+                <a:solidFill>
+                  <a:schemeClr val="bg1"/>
+                </a:solidFill>
+                <a:latin typeface="Segoe UI Semibold"/>
+                <a:ea typeface="Segoe UI Semibold"/>
+                <a:cs typeface="Segoe UI Semibold"/>
+              </a:rPr>
+              <a:t>Имя хоста и пользователь.</a:t>
+            </a:r>
+            <a:endParaRPr sz="1800" b="0" i="0" u="none" strike="noStrike" cap="none" spc="0">
+              <a:solidFill>
+                <a:schemeClr val="bg1"/>
+              </a:solidFill>
+              <a:latin typeface="Segoe UI Semibold"/>
+              <a:cs typeface="Segoe UI Semibold"/>
+            </a:endParaRPr>
+          </a:p>
+          <a:p>
+            <a:pPr marL="0" marR="0" indent="0" algn="l">
+              <a:lnSpc>
+                <a:spcPct val="100000"/>
+              </a:lnSpc>
+              <a:spcBef>
+                <a:spcPts val="0"/>
+              </a:spcBef>
+              <a:spcAft>
+                <a:spcPts val="0"/>
+              </a:spcAft>
+              <a:defRPr/>
+            </a:pPr>
+            <a:r>
+              <a:rPr lang="ru-RU" sz="1800" b="0" i="0" u="none" strike="noStrike" cap="none" spc="0">
+                <a:solidFill>
+                  <a:schemeClr val="bg1"/>
+                </a:solidFill>
+                <a:latin typeface="Segoe UI Semibold"/>
+                <a:ea typeface="Segoe UI Semibold"/>
+                <a:cs typeface="Segoe UI Semibold"/>
+              </a:rPr>
+              <a:t>Пароли и SSH-ключи.</a:t>
+            </a:r>
+            <a:endParaRPr sz="1800" b="0" i="0" u="none" strike="noStrike" cap="none" spc="0">
+              <a:solidFill>
+                <a:schemeClr val="bg1"/>
+              </a:solidFill>
+              <a:latin typeface="Segoe UI Semibold"/>
+              <a:cs typeface="Segoe UI Semibold"/>
+            </a:endParaRPr>
+          </a:p>
+          <a:p>
+            <a:pPr marL="0" marR="0" indent="0" algn="l">
+              <a:lnSpc>
+                <a:spcPct val="100000"/>
+              </a:lnSpc>
+              <a:spcBef>
+                <a:spcPts val="0"/>
+              </a:spcBef>
+              <a:spcAft>
+                <a:spcPts val="0"/>
+              </a:spcAft>
+              <a:defRPr/>
+            </a:pPr>
+            <a:r>
+              <a:rPr lang="ru-RU" sz="1800" b="0" i="0" u="none" strike="noStrike" cap="none" spc="0">
+                <a:solidFill>
+                  <a:schemeClr val="bg1"/>
+                </a:solidFill>
+                <a:latin typeface="Segoe UI Semibold"/>
+                <a:ea typeface="Segoe UI Semibold"/>
+                <a:cs typeface="Segoe UI Semibold"/>
+              </a:rPr>
+              <a:t>Статическая сеть или DHCP.</a:t>
+            </a:r>
+            <a:endParaRPr sz="1800" b="0" i="0" u="none" strike="noStrike" cap="none" spc="0">
+              <a:solidFill>
+                <a:schemeClr val="bg1"/>
+              </a:solidFill>
+              <a:latin typeface="Segoe UI Semibold"/>
+              <a:cs typeface="Segoe UI Semibold"/>
+            </a:endParaRPr>
+          </a:p>
+          <a:p>
+            <a:pPr marL="0" marR="0" indent="0" algn="l">
+              <a:lnSpc>
+                <a:spcPct val="100000"/>
+              </a:lnSpc>
+              <a:spcBef>
+                <a:spcPts val="0"/>
+              </a:spcBef>
+              <a:spcAft>
+                <a:spcPts val="0"/>
+              </a:spcAft>
+              <a:defRPr/>
+            </a:pPr>
+            <a:r>
+              <a:rPr lang="ru-RU" sz="1800" b="0" i="0" u="none" strike="noStrike" cap="none" spc="0">
+                <a:solidFill>
+                  <a:schemeClr val="bg1"/>
+                </a:solidFill>
+                <a:latin typeface="Segoe UI Semibold"/>
+                <a:ea typeface="Segoe UI Semibold"/>
+                <a:cs typeface="Segoe UI Semibold"/>
+              </a:rPr>
+              <a:t>Результат:</a:t>
+            </a:r>
+            <a:r>
+              <a:rPr lang="ru-RU" sz="1800" b="0" i="0" u="none" strike="noStrike" cap="none" spc="0">
+                <a:solidFill>
+                  <a:schemeClr val="bg1"/>
+                </a:solidFill>
+                <a:latin typeface="Segoe UI Semibold"/>
+                <a:ea typeface="Segoe UI Semibold"/>
+                <a:cs typeface="Segoe UI Semibold"/>
+              </a:rPr>
+              <a:t> Развёртывание нового боевого сервера с Docker или базой данных занимает меньше </a:t>
+            </a:r>
+            <a:r>
+              <a:rPr lang="ru-RU" sz="1800" b="0" i="0" u="none" strike="noStrike" cap="none" spc="0">
+                <a:solidFill>
+                  <a:schemeClr val="bg1"/>
+                </a:solidFill>
+                <a:latin typeface="Segoe UI Semibold"/>
+                <a:ea typeface="Segoe UI Semibold"/>
+                <a:cs typeface="Segoe UI Semibold"/>
+              </a:rPr>
+              <a:t>10 секунд</a:t>
+            </a:r>
+            <a:r>
+              <a:rPr lang="ru-RU" sz="1800" b="0" i="0" u="none" strike="noStrike" cap="none" spc="0">
+                <a:solidFill>
+                  <a:schemeClr val="bg1"/>
+                </a:solidFill>
+                <a:latin typeface="Segoe UI Semibold"/>
+                <a:ea typeface="Segoe UI Semibold"/>
+                <a:cs typeface="Segoe UI Semibold"/>
+              </a:rPr>
+              <a:t> в пару кликов мыши.</a:t>
+            </a:r>
+            <a:br>
+              <a:rPr lang="ru-RU" sz="1800" b="0" i="0" u="none" strike="noStrike" cap="none" spc="0">
+                <a:solidFill>
+                  <a:schemeClr val="bg1"/>
+                </a:solidFill>
+                <a:latin typeface="Segoe UI Semibold"/>
+                <a:ea typeface="Segoe UI Semibold"/>
+                <a:cs typeface="Segoe UI Semibold"/>
+              </a:rPr>
+            </a:br>
+            <a:endParaRPr sz="1800" b="0" i="0" u="none" strike="noStrike" cap="none" spc="0">
+              <a:solidFill>
+                <a:schemeClr val="bg1"/>
+              </a:solidFill>
+              <a:latin typeface="Segoe UI Semibold"/>
+              <a:cs typeface="Segoe UI Semibold"/>
+            </a:endParaRPr>
+          </a:p>
+        </p:txBody>
+      </p:sp>
     </p:spTree>
   </p:cSld>
   <p:clrMapOvr>
@@ -5027,7 +5390,7 @@
       </p:grpSpPr>
       <p:sp>
         <p:nvSpPr>
-          <p:cNvPr id="405639433" name="Заголовок 1"/>
+          <p:cNvPr id="1538312881" name="Заголовок 1"/>
           <p:cNvSpPr>
             <a:spLocks noGrp="1"/>
           </p:cNvSpPr>
@@ -5049,13 +5412,347 @@
       </p:sp>
       <p:pic>
         <p:nvPicPr>
-          <p:cNvPr id="420889522" name=""/>
+          <p:cNvPr id="1374218087" name=""/>
           <p:cNvPicPr>
             <a:picLocks noChangeAspect="1"/>
           </p:cNvPicPr>
           <p:nvPr/>
         </p:nvPicPr>
-        <p:blipFill>
+        <p:blipFill rotWithShape="1">
+          <a:blip r:embed="rId3"/>
+          <a:stretch/>
+        </p:blipFill>
+        <p:spPr bwMode="auto">
+          <a:xfrm flipH="0" flipV="0">
+            <a:off x="-1572" y="6265"/>
+            <a:ext cx="12195146" cy="6861758"/>
+          </a:xfrm>
+          <a:prstGeom prst="rect">
+            <a:avLst/>
+          </a:prstGeom>
+        </p:spPr>
+      </p:pic>
+      <p:sp>
+        <p:nvSpPr>
+          <p:cNvPr id="1809669906" name=""/>
+          <p:cNvSpPr txBox="1"/>
+          <p:nvPr/>
+        </p:nvSpPr>
+        <p:spPr bwMode="auto">
+          <a:xfrm rot="0" flipH="0" flipV="0">
+            <a:off x="464357" y="244390"/>
+            <a:ext cx="6430095" cy="640440"/>
+          </a:xfrm>
+          <a:prstGeom prst="rect">
+            <a:avLst/>
+          </a:prstGeom>
+          <a:noFill/>
+        </p:spPr>
+        <p:txBody>
+          <a:bodyPr vertOverflow="overflow" horzOverflow="overflow" vert="horz" wrap="square" lIns="91440" tIns="45720" rIns="91440" bIns="45720" numCol="1" spcCol="0" rtlCol="0" fromWordArt="0" anchor="t" anchorCtr="0" forceAA="0" upright="0" compatLnSpc="0">
+            <a:spAutoFit/>
+          </a:bodyPr>
+          <a:p>
+            <a:pPr marL="0" marR="0" indent="0" algn="l">
+              <a:lnSpc>
+                <a:spcPct val="100000"/>
+              </a:lnSpc>
+              <a:spcBef>
+                <a:spcPts val="0"/>
+              </a:spcBef>
+              <a:spcAft>
+                <a:spcPts val="0"/>
+              </a:spcAft>
+              <a:defRPr/>
+            </a:pPr>
+            <a:r>
+              <a:rPr lang="ru-RU" sz="3600" b="0" i="0" u="none" strike="noStrike" cap="none" spc="0">
+                <a:solidFill>
+                  <a:schemeClr val="bg1"/>
+                </a:solidFill>
+                <a:latin typeface="Segoe UI Semibold"/>
+                <a:ea typeface="Segoe UI Semibold"/>
+                <a:cs typeface="Segoe UI Semibold"/>
+              </a:rPr>
+              <a:t>Заповеди </a:t>
+            </a:r>
+            <a:endParaRPr/>
+          </a:p>
+        </p:txBody>
+      </p:sp>
+      <p:sp>
+        <p:nvSpPr>
+          <p:cNvPr id="1841520021" name=""/>
+          <p:cNvSpPr txBox="1"/>
+          <p:nvPr/>
+        </p:nvSpPr>
+        <p:spPr bwMode="auto">
+          <a:xfrm rot="0" flipH="0" flipV="0">
+            <a:off x="608485" y="2216776"/>
+            <a:ext cx="6674486" cy="3932280"/>
+          </a:xfrm>
+          <a:prstGeom prst="rect">
+            <a:avLst/>
+          </a:prstGeom>
+          <a:noFill/>
+        </p:spPr>
+        <p:txBody>
+          <a:bodyPr vertOverflow="overflow" horzOverflow="overflow" vert="horz" wrap="square" lIns="91440" tIns="45720" rIns="91440" bIns="45720" numCol="1" spcCol="0" rtlCol="0" fromWordArt="0" anchor="t" anchorCtr="0" forceAA="0" upright="0" compatLnSpc="0">
+            <a:spAutoFit/>
+          </a:bodyPr>
+          <a:p>
+            <a:pPr marL="0" marR="0" indent="0" algn="l">
+              <a:lnSpc>
+                <a:spcPct val="100000"/>
+              </a:lnSpc>
+              <a:spcBef>
+                <a:spcPts val="0"/>
+              </a:spcBef>
+              <a:spcAft>
+                <a:spcPts val="0"/>
+              </a:spcAft>
+              <a:defRPr/>
+            </a:pPr>
+            <a:r>
+              <a:rPr lang="ru-RU" sz="1800" b="0" i="0" u="none" strike="noStrike" cap="none" spc="0">
+                <a:solidFill>
+                  <a:schemeClr val="bg1"/>
+                </a:solidFill>
+                <a:latin typeface="Segoe UI Semibold"/>
+                <a:ea typeface="Segoe UI Semibold"/>
+                <a:cs typeface="Segoe UI Semibold"/>
+              </a:rPr>
+              <a:t>1.</a:t>
+            </a:r>
+            <a:r>
+              <a:rPr lang="ru-RU" sz="1800" b="0" i="0" u="none" strike="noStrike" cap="none" spc="0">
+                <a:solidFill>
+                  <a:schemeClr val="bg1"/>
+                </a:solidFill>
+                <a:latin typeface="Segoe UI Semibold"/>
+                <a:ea typeface="Segoe UI Semibold"/>
+                <a:cs typeface="Segoe UI Semibold"/>
+              </a:rPr>
+              <a:t> Не трогай, пока работает. Руки чешутся нажать «обновить всё» в пятницу в 17:30? Привяжи руки к стулу скотчем. Потерпи до понедельника.</a:t>
+            </a:r>
+            <a:br>
+              <a:rPr lang="ru-RU" sz="1800" b="0" i="0" u="none" strike="noStrike" cap="none" spc="0">
+                <a:solidFill>
+                  <a:schemeClr val="bg1"/>
+                </a:solidFill>
+                <a:latin typeface="Segoe UI Semibold"/>
+                <a:ea typeface="Segoe UI Semibold"/>
+                <a:cs typeface="Segoe UI Semibold"/>
+              </a:rPr>
+            </a:br>
+            <a:endParaRPr lang="ru-RU" sz="1800" b="0" i="0" u="none" strike="noStrike" cap="none" spc="0">
+              <a:solidFill>
+                <a:schemeClr val="bg1"/>
+              </a:solidFill>
+              <a:latin typeface="Segoe UI Semibold"/>
+              <a:cs typeface="Segoe UI Semibold"/>
+            </a:endParaRPr>
+          </a:p>
+          <a:p>
+            <a:pPr marL="0" marR="0" indent="0" algn="l">
+              <a:lnSpc>
+                <a:spcPct val="100000"/>
+              </a:lnSpc>
+              <a:spcBef>
+                <a:spcPts val="0"/>
+              </a:spcBef>
+              <a:spcAft>
+                <a:spcPts val="0"/>
+              </a:spcAft>
+              <a:defRPr/>
+            </a:pPr>
+            <a:r>
+              <a:rPr lang="ru-RU" sz="1800" b="0" i="0" u="none" strike="noStrike" cap="none" spc="0">
+                <a:solidFill>
+                  <a:schemeClr val="bg1"/>
+                </a:solidFill>
+                <a:latin typeface="Segoe UI Semibold"/>
+                <a:ea typeface="Segoe UI Semibold"/>
+                <a:cs typeface="Segoe UI Semibold"/>
+              </a:rPr>
+              <a:t>2.</a:t>
+            </a:r>
+            <a:r>
+              <a:rPr lang="ru-RU" sz="1800" b="0" i="0" u="none" strike="noStrike" cap="none" spc="0">
+                <a:solidFill>
+                  <a:schemeClr val="bg1"/>
+                </a:solidFill>
+                <a:latin typeface="Segoe UI Semibold"/>
+                <a:ea typeface="Segoe UI Semibold"/>
+                <a:cs typeface="Segoe UI Semibold"/>
+              </a:rPr>
+              <a:t> Делай бэкапы. Админы делятся на две категории: те, кто ещё не делают бэкапы, и те, кто теперь делают бэкапы даже для бэкапов. В виртуалке роутера бэкапься хотя бы локальным экспортом XML-конфига раз в неделю.</a:t>
+            </a:r>
+            <a:br>
+              <a:rPr lang="ru-RU" sz="1800" b="0" i="0" u="none" strike="noStrike" cap="none" spc="0">
+                <a:solidFill>
+                  <a:schemeClr val="bg1"/>
+                </a:solidFill>
+                <a:latin typeface="Segoe UI Semibold"/>
+                <a:ea typeface="Segoe UI Semibold"/>
+                <a:cs typeface="Segoe UI Semibold"/>
+              </a:rPr>
+            </a:br>
+            <a:endParaRPr lang="ru-RU" sz="1800" b="0" i="0" u="none" strike="noStrike" cap="none" spc="0">
+              <a:solidFill>
+                <a:schemeClr val="bg1"/>
+              </a:solidFill>
+              <a:latin typeface="Segoe UI Semibold"/>
+              <a:cs typeface="Segoe UI Semibold"/>
+            </a:endParaRPr>
+          </a:p>
+          <a:p>
+            <a:pPr marL="0" marR="0" indent="0" algn="l">
+              <a:lnSpc>
+                <a:spcPct val="100000"/>
+              </a:lnSpc>
+              <a:spcBef>
+                <a:spcPts val="0"/>
+              </a:spcBef>
+              <a:spcAft>
+                <a:spcPts val="0"/>
+              </a:spcAft>
+              <a:defRPr/>
+            </a:pPr>
+            <a:r>
+              <a:rPr lang="ru-RU" sz="1800" b="0" i="0" u="none" strike="noStrike" cap="none" spc="0">
+                <a:solidFill>
+                  <a:schemeClr val="bg1"/>
+                </a:solidFill>
+                <a:latin typeface="Segoe UI Semibold"/>
+                <a:ea typeface="Segoe UI Semibold"/>
+                <a:cs typeface="Segoe UI Semibold"/>
+              </a:rPr>
+              <a:t>3.</a:t>
+            </a:r>
+            <a:r>
+              <a:rPr lang="ru-RU" sz="1800" b="0" i="0" u="none" strike="noStrike" cap="none" spc="0">
+                <a:solidFill>
+                  <a:schemeClr val="bg1"/>
+                </a:solidFill>
+                <a:latin typeface="Segoe UI Semibold"/>
+                <a:ea typeface="Segoe UI Semibold"/>
+                <a:cs typeface="Segoe UI Semibold"/>
+              </a:rPr>
+              <a:t> Если всё всё-таки сломалось - у тебя всегда есть универсальная мантра сисадмина: «Это не я, это у провайдера авария на магистрали». Даёт примерно 40 минут форы, пока сотрудники пьют кофе, а ты с горящими глазами поднимаешь упавшую ноду.</a:t>
+            </a:r>
+            <a:endParaRPr/>
+          </a:p>
+        </p:txBody>
+      </p:sp>
+      <p:pic>
+        <p:nvPicPr>
+          <p:cNvPr id="1805918506" name=""/>
+          <p:cNvPicPr>
+            <a:picLocks noChangeAspect="1"/>
+          </p:cNvPicPr>
+          <p:nvPr/>
+        </p:nvPicPr>
+        <p:blipFill rotWithShape="1">
+          <a:blip r:embed="rId4"/>
+          <a:stretch/>
+        </p:blipFill>
+        <p:spPr bwMode="auto">
+          <a:xfrm flipH="0" flipV="0">
+            <a:off x="7175722" y="157291"/>
+            <a:ext cx="4850229" cy="2546370"/>
+          </a:xfrm>
+          <a:prstGeom prst="rect">
+            <a:avLst/>
+          </a:prstGeom>
+        </p:spPr>
+      </p:pic>
+      <p:pic>
+        <p:nvPicPr>
+          <p:cNvPr id="1718401319" name=""/>
+          <p:cNvPicPr>
+            <a:picLocks noChangeAspect="1"/>
+          </p:cNvPicPr>
+          <p:nvPr/>
+        </p:nvPicPr>
+        <p:blipFill rotWithShape="1">
+          <a:blip r:embed="rId5"/>
+          <a:stretch/>
+        </p:blipFill>
+        <p:spPr bwMode="auto">
+          <a:xfrm flipH="0" flipV="0">
+            <a:off x="7951251" y="2703662"/>
+            <a:ext cx="3698714" cy="4077377"/>
+          </a:xfrm>
+          <a:prstGeom prst="rect">
+            <a:avLst/>
+          </a:prstGeom>
+        </p:spPr>
+      </p:pic>
+    </p:spTree>
+  </p:cSld>
+  <p:clrMapOvr>
+    <a:masterClrMapping/>
+  </p:clrMapOvr>
+  <mc:AlternateContent xmlns:mc="http://schemas.openxmlformats.org/markup-compatibility/2006">
+    <mc:Choice xmlns:p159="http://schemas.microsoft.com/office/powerpoint/2015/09/main" xmlns:p14="http://schemas.microsoft.com/office/powerpoint/2010/main" Requires="p159">
+      <p:transition p14:dur="2000" advClick="1"/>
+    </mc:Choice>
+    <mc:Fallback>
+      <p:transition advClick="1"/>
+    </mc:Fallback>
+  </mc:AlternateContent>
+</p:sld>
+</file>
+
+<file path=ppt/slides/slide12.xml><?xml version="1.0" encoding="utf-8"?>
+<p:sld xmlns:a="http://schemas.openxmlformats.org/drawingml/2006/main" xmlns:r="http://schemas.openxmlformats.org/officeDocument/2006/relationships" xmlns:p="http://schemas.openxmlformats.org/presentationml/2006/main" xmlns:m="http://schemas.openxmlformats.org/officeDocument/2006/math" xmlns:w="http://schemas.openxmlformats.org/wordprocessingml/2006/main" xmlns:mc="http://schemas.openxmlformats.org/markup-compatibility/2006" showMasterPhAnim="0" showMasterSp="1" show="1">
+  <p:cSld name="">
+    <p:spTree>
+      <p:nvGrpSpPr>
+        <p:cNvPr id="1" name=""/>
+        <p:cNvGrpSpPr/>
+        <p:nvPr/>
+      </p:nvGrpSpPr>
+      <p:grpSpPr bwMode="auto">
+        <a:xfrm>
+          <a:off x="0" y="0"/>
+          <a:ext cx="0" cy="0"/>
+          <a:chOff x="0" y="0"/>
+          <a:chExt cx="0" cy="0"/>
+        </a:xfrm>
+      </p:grpSpPr>
+      <p:sp>
+        <p:nvSpPr>
+          <p:cNvPr id="1829240268" name="Заголовок 1"/>
+          <p:cNvSpPr>
+            <a:spLocks noGrp="1"/>
+          </p:cNvSpPr>
+          <p:nvPr>
+            <p:ph type="title"/>
+          </p:nvPr>
+        </p:nvSpPr>
+        <p:spPr bwMode="auto"/>
+        <p:txBody>
+          <a:bodyPr/>
+          <a:lstStyle/>
+          <a:p>
+            <a:pPr>
+              <a:defRPr/>
+            </a:pPr>
+            <a:endParaRPr/>
+          </a:p>
+        </p:txBody>
+      </p:sp>
+      <p:pic>
+        <p:nvPicPr>
+          <p:cNvPr id="2003032634" name=""/>
+          <p:cNvPicPr>
+            <a:picLocks noChangeAspect="1"/>
+          </p:cNvPicPr>
+          <p:nvPr/>
+        </p:nvPicPr>
+        <p:blipFill rotWithShape="1">
           <a:blip r:embed="rId3"/>
           <a:stretch/>
         </p:blipFill>
@@ -5071,13 +5768,13 @@
       </p:pic>
       <p:pic>
         <p:nvPicPr>
-          <p:cNvPr id="1944508818" name=""/>
+          <p:cNvPr id="2017797509" name=""/>
           <p:cNvPicPr>
             <a:picLocks noChangeAspect="1"/>
           </p:cNvPicPr>
           <p:nvPr/>
         </p:nvPicPr>
-        <p:blipFill>
+        <p:blipFill rotWithShape="1">
           <a:blip r:embed="rId4"/>
           <a:stretch/>
         </p:blipFill>
@@ -5093,7 +5790,7 @@
       </p:pic>
       <p:sp>
         <p:nvSpPr>
-          <p:cNvPr id="492230" name=""/>
+          <p:cNvPr id="1912391866" name=""/>
           <p:cNvSpPr txBox="1"/>
           <p:nvPr/>
         </p:nvSpPr>
@@ -5171,7 +5868,7 @@
       </p:grpSpPr>
       <p:sp>
         <p:nvSpPr>
-          <p:cNvPr id="258764173" name="Заголовок 1"/>
+          <p:cNvPr id="1720827377" name="Заголовок 1"/>
           <p:cNvSpPr>
             <a:spLocks noGrp="1"/>
           </p:cNvSpPr>
@@ -5193,13 +5890,13 @@
       </p:sp>
       <p:pic>
         <p:nvPicPr>
-          <p:cNvPr id="2078824084" name=""/>
+          <p:cNvPr id="282678948" name=""/>
           <p:cNvPicPr>
             <a:picLocks noChangeAspect="1"/>
           </p:cNvPicPr>
           <p:nvPr/>
         </p:nvPicPr>
-        <p:blipFill>
+        <p:blipFill rotWithShape="1">
           <a:blip r:embed="rId3"/>
           <a:stretch/>
         </p:blipFill>
@@ -5215,7 +5912,7 @@
       </p:pic>
       <p:sp>
         <p:nvSpPr>
-          <p:cNvPr id="1216073389" name=""/>
+          <p:cNvPr id="1973597818" name=""/>
           <p:cNvSpPr txBox="1"/>
           <p:nvPr/>
         </p:nvSpPr>
@@ -5265,7 +5962,7 @@
       </p:sp>
       <p:sp>
         <p:nvSpPr>
-          <p:cNvPr id="208346454" name=""/>
+          <p:cNvPr id="1319947528" name=""/>
           <p:cNvSpPr txBox="1"/>
           <p:nvPr/>
         </p:nvSpPr>
@@ -5629,13 +6326,13 @@
       </p:sp>
       <p:pic>
         <p:nvPicPr>
-          <p:cNvPr id="392072051" name=""/>
+          <p:cNvPr id="410618815" name=""/>
           <p:cNvPicPr>
             <a:picLocks noChangeAspect="1"/>
           </p:cNvPicPr>
           <p:nvPr/>
         </p:nvPicPr>
-        <p:blipFill>
+        <p:blipFill rotWithShape="1">
           <a:blip r:embed="rId4"/>
           <a:stretch/>
         </p:blipFill>
@@ -5684,7 +6381,7 @@
       </p:grpSpPr>
       <p:sp>
         <p:nvSpPr>
-          <p:cNvPr id="1610404126" name="Заголовок 1"/>
+          <p:cNvPr id="1703265406" name="Заголовок 1"/>
           <p:cNvSpPr>
             <a:spLocks noGrp="1"/>
           </p:cNvSpPr>
@@ -5706,13 +6403,13 @@
       </p:sp>
       <p:pic>
         <p:nvPicPr>
-          <p:cNvPr id="1430237427" name=""/>
+          <p:cNvPr id="956101142" name=""/>
           <p:cNvPicPr>
             <a:picLocks noChangeAspect="1"/>
           </p:cNvPicPr>
           <p:nvPr/>
         </p:nvPicPr>
-        <p:blipFill>
+        <p:blipFill rotWithShape="1">
           <a:blip r:embed="rId3"/>
           <a:stretch/>
         </p:blipFill>
@@ -5728,7 +6425,7 @@
       </p:pic>
       <p:sp>
         <p:nvSpPr>
-          <p:cNvPr id="718921" name=""/>
+          <p:cNvPr id="1918730258" name=""/>
           <p:cNvSpPr txBox="1"/>
           <p:nvPr/>
         </p:nvSpPr>
@@ -5767,7 +6464,7 @@
       </p:sp>
       <p:sp>
         <p:nvSpPr>
-          <p:cNvPr id="856210980" name=""/>
+          <p:cNvPr id="1546448335" name=""/>
           <p:cNvSpPr txBox="1"/>
           <p:nvPr/>
         </p:nvSpPr>
@@ -6111,7 +6808,7 @@
       </p:grpSpPr>
       <p:sp>
         <p:nvSpPr>
-          <p:cNvPr id="1446459856" name="Заголовок 1"/>
+          <p:cNvPr id="553182409" name="Заголовок 1"/>
           <p:cNvSpPr>
             <a:spLocks noGrp="1"/>
           </p:cNvSpPr>
@@ -6133,13 +6830,13 @@
       </p:sp>
       <p:pic>
         <p:nvPicPr>
-          <p:cNvPr id="1395436766" name=""/>
+          <p:cNvPr id="583224771" name=""/>
           <p:cNvPicPr>
             <a:picLocks noChangeAspect="1"/>
           </p:cNvPicPr>
           <p:nvPr/>
         </p:nvPicPr>
-        <p:blipFill>
+        <p:blipFill rotWithShape="1">
           <a:blip r:embed="rId3"/>
           <a:stretch/>
         </p:blipFill>
@@ -6155,7 +6852,7 @@
       </p:pic>
       <p:sp>
         <p:nvSpPr>
-          <p:cNvPr id="743601758" name=""/>
+          <p:cNvPr id="33570309" name=""/>
           <p:cNvSpPr txBox="1"/>
           <p:nvPr/>
         </p:nvSpPr>
@@ -6207,14 +6904,14 @@
       </p:sp>
       <p:sp>
         <p:nvSpPr>
-          <p:cNvPr id="1581584488" name=""/>
+          <p:cNvPr id="1830357572" name=""/>
           <p:cNvSpPr txBox="1"/>
           <p:nvPr/>
         </p:nvSpPr>
         <p:spPr bwMode="auto">
           <a:xfrm rot="0" flipH="0" flipV="0">
-            <a:off x="395427" y="1690687"/>
-            <a:ext cx="6719431" cy="4167903"/>
+            <a:off x="395426" y="1690686"/>
+            <a:ext cx="11459931" cy="4846679"/>
           </a:xfrm>
           <a:prstGeom prst="rect">
             <a:avLst/>
@@ -6260,28 +6957,6 @@
               </a:rPr>
               <a:t> Сносим платный репозиторий: rm -</a:t>
             </a:r>
-            <a:endParaRPr lang="ru-RU" sz="2400" b="0" i="0" u="none" strike="noStrike" cap="none" spc="0">
-              <a:solidFill>
-                <a:schemeClr val="bg1"/>
-              </a:solidFill>
-              <a:latin typeface="Segoe UI Semibold"/>
-              <a:ea typeface="Segoe UI Semibold"/>
-              <a:cs typeface="Segoe UI Semibold"/>
-            </a:endParaRPr>
-          </a:p>
-          <a:p>
-            <a:pPr marL="0" marR="0" indent="0" algn="l">
-              <a:lnSpc>
-                <a:spcPct val="100000"/>
-              </a:lnSpc>
-              <a:spcBef>
-                <a:spcPts val="0"/>
-              </a:spcBef>
-              <a:spcAft>
-                <a:spcPts val="0"/>
-              </a:spcAft>
-              <a:defRPr/>
-            </a:pPr>
             <a:r>
               <a:rPr lang="ru-RU" sz="2400" b="0" i="0" u="none" strike="noStrike" cap="none" spc="0">
                 <a:solidFill>
@@ -6324,6 +6999,96 @@
             </a:endParaRPr>
           </a:p>
           <a:p>
+            <a:pPr>
+              <a:defRPr/>
+            </a:pPr>
+            <a:r>
+              <a:rPr lang="ru-RU" sz="2400" b="0" i="0" u="none" strike="noStrike" cap="none" spc="0">
+                <a:solidFill>
+                  <a:schemeClr val="bg1"/>
+                </a:solidFill>
+                <a:latin typeface="Segoe UI Semibold"/>
+                <a:ea typeface="Segoe UI Semibold"/>
+                <a:cs typeface="Segoe UI Semibold"/>
+              </a:rPr>
+              <a:t>2.</a:t>
+            </a:r>
+            <a:r>
+              <a:rPr lang="ru-RU" sz="2400" b="0" i="0" u="none" strike="noStrike" cap="none" spc="0">
+                <a:solidFill>
+                  <a:schemeClr val="bg1"/>
+                </a:solidFill>
+                <a:latin typeface="Segoe UI Semibold"/>
+                <a:ea typeface="Segoe UI Semibold"/>
+                <a:cs typeface="Segoe UI Semibold"/>
+              </a:rPr>
+              <a:t> Подключаем бесплатный: pve-no-subscription</a:t>
+            </a:r>
+            <a:br>
+              <a:rPr lang="ru-RU" sz="2400" b="0" i="0" u="none" strike="noStrike" cap="none" spc="0">
+                <a:solidFill>
+                  <a:schemeClr val="bg1"/>
+                </a:solidFill>
+                <a:latin typeface="Segoe UI Semibold"/>
+                <a:ea typeface="Segoe UI Semibold"/>
+                <a:cs typeface="Segoe UI Semibold"/>
+              </a:rPr>
+            </a:br>
+            <a:endParaRPr lang="ru-RU" sz="2400" b="0" i="0" u="none" strike="noStrike" cap="none" spc="0">
+              <a:solidFill>
+                <a:schemeClr val="bg1"/>
+              </a:solidFill>
+              <a:latin typeface="Segoe UI Semibold"/>
+              <a:cs typeface="Segoe UI Semibold"/>
+            </a:endParaRPr>
+          </a:p>
+          <a:p>
+            <a:pPr>
+              <a:defRPr/>
+            </a:pPr>
+            <a:r>
+              <a:rPr lang="ru-RU" sz="2400" b="0" i="0" u="none" strike="noStrike" cap="none" spc="0">
+                <a:solidFill>
+                  <a:schemeClr val="bg1"/>
+                </a:solidFill>
+                <a:latin typeface="Segoe UI Semibold"/>
+                <a:ea typeface="Segoe UI Semibold"/>
+                <a:cs typeface="Segoe UI Semibold"/>
+              </a:rPr>
+              <a:t># PVE no-subscription repository</a:t>
+            </a:r>
+            <a:endParaRPr lang="ru-RU" sz="2400" b="0" i="0" u="none" strike="noStrike" cap="none" spc="0">
+              <a:solidFill>
+                <a:schemeClr val="bg1"/>
+              </a:solidFill>
+              <a:latin typeface="Segoe UI Semibold"/>
+              <a:cs typeface="Segoe UI Semibold"/>
+            </a:endParaRPr>
+          </a:p>
+          <a:p>
+            <a:pPr>
+              <a:defRPr/>
+            </a:pPr>
+            <a:r>
+              <a:rPr lang="ru-RU" sz="2400" b="0" i="0" u="none" strike="noStrike" cap="none" spc="0">
+                <a:solidFill>
+                  <a:schemeClr val="bg1"/>
+                </a:solidFill>
+                <a:latin typeface="Segoe UI Semibold"/>
+                <a:ea typeface="Segoe UI Semibold"/>
+                <a:cs typeface="Segoe UI Semibold"/>
+              </a:rPr>
+              <a:t>deb http://download.proxmox.com/debian/pve bookworm pve-no-subscription</a:t>
+            </a:r>
+            <a:endParaRPr lang="ru-RU" sz="2400" b="0" i="0" u="none" strike="noStrike" cap="none" spc="0">
+              <a:solidFill>
+                <a:schemeClr val="bg1"/>
+              </a:solidFill>
+              <a:latin typeface="Segoe UI Semibold"/>
+              <a:cs typeface="Segoe UI Semibold"/>
+            </a:endParaRPr>
+          </a:p>
+          <a:p>
             <a:pPr marL="0" marR="0" indent="0" algn="l">
               <a:lnSpc>
                 <a:spcPct val="100000"/>
@@ -6336,6 +7101,28 @@
               </a:spcAft>
               <a:defRPr/>
             </a:pPr>
+            <a:endParaRPr lang="ru-RU" sz="2400" b="0" i="0" u="none" strike="noStrike" cap="none" spc="0">
+              <a:solidFill>
+                <a:schemeClr val="bg1"/>
+              </a:solidFill>
+              <a:latin typeface="Segoe UI Semibold"/>
+              <a:ea typeface="Segoe UI Semibold"/>
+              <a:cs typeface="Segoe UI Semibold"/>
+            </a:endParaRPr>
+          </a:p>
+          <a:p>
+            <a:pPr marL="0" marR="0" indent="0" algn="l">
+              <a:lnSpc>
+                <a:spcPct val="100000"/>
+              </a:lnSpc>
+              <a:spcBef>
+                <a:spcPts val="0"/>
+              </a:spcBef>
+              <a:spcAft>
+                <a:spcPts val="0"/>
+              </a:spcAft>
+              <a:defRPr/>
+            </a:pPr>
             <a:r>
               <a:rPr lang="ru-RU" sz="2400" b="0" i="0" u="none" strike="noStrike" cap="none" spc="0">
                 <a:solidFill>
@@ -6345,7 +7132,7 @@
                 <a:ea typeface="Segoe UI Semibold"/>
                 <a:cs typeface="Segoe UI Semibold"/>
               </a:rPr>
-              <a:t>2.</a:t>
+              <a:t>3.</a:t>
             </a:r>
             <a:r>
               <a:rPr lang="ru-RU" sz="2400" b="0" i="0" u="none" strike="noStrike" cap="none" spc="0">
@@ -6356,7 +7143,7 @@
                 <a:ea typeface="Segoe UI Semibold"/>
                 <a:cs typeface="Segoe UI Semibold"/>
               </a:rPr>
-              <a:t> Подключаем бесплатный: pve-no-subscription</a:t>
+              <a:t> Глушим окно подписки: скрипт sed в один клик</a:t>
             </a:r>
             <a:br>
               <a:rPr lang="ru-RU" sz="2400" b="0" i="0" u="none" strike="noStrike" cap="none" spc="0">
@@ -6399,39 +7186,8 @@
                 <a:ea typeface="Segoe UI Semibold"/>
                 <a:cs typeface="Segoe UI Semibold"/>
               </a:rPr>
-              <a:t>3.</a:t>
-            </a:r>
-            <a:r>
-              <a:rPr lang="ru-RU" sz="2400" b="0" i="0" u="none" strike="noStrike" cap="none" spc="0">
-                <a:solidFill>
-                  <a:schemeClr val="bg1"/>
-                </a:solidFill>
-                <a:latin typeface="Segoe UI Semibold"/>
-                <a:ea typeface="Segoe UI Semibold"/>
-                <a:cs typeface="Segoe UI Semibold"/>
-              </a:rPr>
-              <a:t> Глушим окно подписки: скрипт sed в один клик</a:t>
-            </a:r>
-            <a:br>
-              <a:rPr lang="ru-RU" sz="2400" b="0" i="0" u="none" strike="noStrike" cap="none" spc="0">
-                <a:solidFill>
-                  <a:schemeClr val="bg1"/>
-                </a:solidFill>
-                <a:latin typeface="Segoe UI Semibold"/>
-                <a:ea typeface="Segoe UI Semibold"/>
-                <a:cs typeface="Segoe UI Semibold"/>
-              </a:rPr>
-            </a:br>
-            <a:br>
-              <a:rPr lang="ru-RU" sz="2400" b="0" i="0" u="none" strike="noStrike" cap="none" spc="0">
-                <a:solidFill>
-                  <a:schemeClr val="bg1"/>
-                </a:solidFill>
-                <a:latin typeface="Segoe UI Semibold"/>
-                <a:ea typeface="Segoe UI Semibold"/>
-                <a:cs typeface="Segoe UI Semibold"/>
-              </a:rPr>
-            </a:br>
+              <a:t>sed -Ezi.bak "s/(Ext.Msg.show\(\{\s+title: gettext\('No valid sub)/void\(\{ \/\/\1/g" /usr/share/javascript/proxmox-widget-toolkit/proxmoxlib.js &amp;&amp; systemctl restart pveproxy.service</a:t>
+            </a:r>
             <a:endParaRPr lang="ru-RU" sz="2400" b="0" i="0" u="none" strike="noStrike" cap="none" spc="0">
               <a:solidFill>
                 <a:schemeClr val="bg1"/>
@@ -6441,183 +7197,8 @@
               <a:cs typeface="Segoe UI Semibold"/>
             </a:endParaRPr>
           </a:p>
-          <a:p>
-            <a:pPr marL="0" marR="0" indent="0" algn="l">
-              <a:lnSpc>
-                <a:spcPct val="100000"/>
-              </a:lnSpc>
-              <a:spcBef>
-                <a:spcPts val="0"/>
-              </a:spcBef>
-              <a:spcAft>
-                <a:spcPts val="0"/>
-              </a:spcAft>
-              <a:defRPr/>
-            </a:pPr>
-            <a:r>
-              <a:rPr lang="ru-RU" sz="2400" b="0" i="0" u="none" strike="noStrike" cap="none" spc="0">
-                <a:solidFill>
-                  <a:schemeClr val="bg1"/>
-                </a:solidFill>
-                <a:latin typeface="Segoe UI Semibold"/>
-                <a:ea typeface="Segoe UI Semibold"/>
-                <a:cs typeface="Segoe UI Semibold"/>
-              </a:rPr>
-              <a:t>⚠️ ALARM! ACHTUNG! WARNING! </a:t>
-            </a:r>
-            <a:r>
-              <a:rPr lang="ru-RU" sz="2400" b="0" i="0" u="none" strike="noStrike" cap="none" spc="0">
-                <a:solidFill>
-                  <a:schemeClr val="bg1"/>
-                </a:solidFill>
-                <a:latin typeface="Segoe UI Semibold"/>
-                <a:ea typeface="Segoe UI Semibold"/>
-                <a:cs typeface="Segoe UI Semibold"/>
-              </a:rPr>
-              <a:t>⚠️ </a:t>
-            </a:r>
-            <a:endParaRPr lang="ru-RU" sz="2400" b="0" i="0" u="none" strike="noStrike" cap="none" spc="0">
-              <a:solidFill>
-                <a:schemeClr val="bg1"/>
-              </a:solidFill>
-              <a:latin typeface="Segoe UI Semibold"/>
-              <a:ea typeface="Segoe UI Semibold"/>
-              <a:cs typeface="Segoe UI Semibold"/>
-            </a:endParaRPr>
-          </a:p>
-          <a:p>
-            <a:pPr marL="0" marR="0" indent="0" algn="l">
-              <a:lnSpc>
-                <a:spcPct val="100000"/>
-              </a:lnSpc>
-              <a:spcBef>
-                <a:spcPts val="0"/>
-              </a:spcBef>
-              <a:spcAft>
-                <a:spcPts val="0"/>
-              </a:spcAft>
-              <a:defRPr/>
-            </a:pPr>
-            <a:r>
-              <a:rPr lang="ru-RU" sz="2400" b="0" i="0" u="none" strike="noStrike" cap="none" spc="0">
-                <a:solidFill>
-                  <a:schemeClr val="bg1"/>
-                </a:solidFill>
-                <a:latin typeface="Segoe UI Semibold"/>
-                <a:ea typeface="Segoe UI Semibold"/>
-                <a:cs typeface="Segoe UI Semibold"/>
-              </a:rPr>
-              <a:t>Забудь про </a:t>
-            </a:r>
-            <a:r>
-              <a:rPr lang="ru-RU" sz="2400" b="0" i="0" u="none" strike="noStrike" cap="none" spc="0">
-                <a:solidFill>
-                  <a:schemeClr val="bg1"/>
-                </a:solidFill>
-                <a:latin typeface="Segoe UI Semibold"/>
-                <a:ea typeface="Segoe UI Semibold"/>
-                <a:cs typeface="Segoe UI Semibold"/>
-              </a:rPr>
-              <a:t>apt upgrade</a:t>
-            </a:r>
-            <a:r>
-              <a:rPr lang="ru-RU" sz="2400" b="0" i="0" u="none" strike="noStrike" cap="none" spc="0">
-                <a:solidFill>
-                  <a:schemeClr val="bg1"/>
-                </a:solidFill>
-                <a:latin typeface="Segoe UI Semibold"/>
-                <a:ea typeface="Segoe UI Semibold"/>
-                <a:cs typeface="Segoe UI Semibold"/>
-              </a:rPr>
-              <a:t>! </a:t>
-            </a:r>
-            <a:endParaRPr lang="ru-RU" sz="2400" b="0" i="0" u="none" strike="noStrike" cap="none" spc="0">
-              <a:solidFill>
-                <a:schemeClr val="bg1"/>
-              </a:solidFill>
-              <a:latin typeface="Segoe UI Semibold"/>
-              <a:ea typeface="Segoe UI Semibold"/>
-              <a:cs typeface="Segoe UI Semibold"/>
-            </a:endParaRPr>
-          </a:p>
-          <a:p>
-            <a:pPr marL="0" marR="0" indent="0" algn="l">
-              <a:lnSpc>
-                <a:spcPct val="100000"/>
-              </a:lnSpc>
-              <a:spcBef>
-                <a:spcPts val="0"/>
-              </a:spcBef>
-              <a:spcAft>
-                <a:spcPts val="0"/>
-              </a:spcAft>
-              <a:defRPr/>
-            </a:pPr>
-            <a:r>
-              <a:rPr lang="ru-RU" sz="2400" b="0" i="0" u="none" strike="noStrike" cap="none" spc="0">
-                <a:solidFill>
-                  <a:schemeClr val="bg1"/>
-                </a:solidFill>
-                <a:latin typeface="Segoe UI Semibold"/>
-                <a:ea typeface="Segoe UI Semibold"/>
-                <a:cs typeface="Segoe UI Semibold"/>
-              </a:rPr>
-              <a:t>Только </a:t>
-            </a:r>
-            <a:r>
-              <a:rPr lang="ru-RU" sz="2400" b="0" i="0" u="none" strike="noStrike" cap="none" spc="0">
-                <a:solidFill>
-                  <a:schemeClr val="bg1"/>
-                </a:solidFill>
-                <a:latin typeface="Segoe UI Semibold"/>
-                <a:ea typeface="Segoe UI Semibold"/>
-                <a:cs typeface="Segoe UI Semibold"/>
-              </a:rPr>
-              <a:t>apt dist-upgrade</a:t>
-            </a:r>
-            <a:r>
-              <a:rPr lang="ru-RU" sz="2400" b="0" i="0" u="none" strike="noStrike" cap="none" spc="0">
-                <a:solidFill>
-                  <a:schemeClr val="bg1"/>
-                </a:solidFill>
-                <a:latin typeface="Segoe UI Semibold"/>
-                <a:ea typeface="Segoe UI Semibold"/>
-                <a:cs typeface="Segoe UI Semibold"/>
-              </a:rPr>
-              <a:t>! Иначе: сломанные зависимости и Kernel Panic после  перезагрузки. </a:t>
-            </a:r>
-            <a:endParaRPr lang="ru-RU" sz="2400" b="0" i="0" u="none" strike="noStrike" cap="none" spc="0">
-              <a:solidFill>
-                <a:schemeClr val="bg1"/>
-              </a:solidFill>
-              <a:latin typeface="Segoe UI Semibold"/>
-              <a:cs typeface="Segoe UI Semibold"/>
-            </a:endParaRPr>
-          </a:p>
-        </p:txBody>
-      </p:sp>
-      <p:pic>
-        <p:nvPicPr>
-          <p:cNvPr id="279396751" name=""/>
-          <p:cNvPicPr>
-            <a:picLocks noChangeAspect="1"/>
-          </p:cNvPicPr>
-          <p:nvPr/>
-        </p:nvPicPr>
-        <p:blipFill>
-          <a:blip r:embed="rId4"/>
-          <a:stretch/>
-        </p:blipFill>
-        <p:spPr bwMode="auto">
-          <a:xfrm>
-            <a:off x="7294144" y="838930"/>
-            <a:ext cx="4762499" cy="5438774"/>
-          </a:xfrm>
-          <a:prstGeom prst="rect">
-            <a:avLst/>
-          </a:prstGeom>
-        </p:spPr>
-      </p:pic>
+        </p:txBody>
+      </p:sp>
     </p:spTree>
   </p:cSld>
   <p:clrMapOvr>
@@ -6653,7 +7234,7 @@
       </p:grpSpPr>
       <p:sp>
         <p:nvSpPr>
-          <p:cNvPr id="1486378456" name="Заголовок 1"/>
+          <p:cNvPr id="354537846" name="Заголовок 1"/>
           <p:cNvSpPr>
             <a:spLocks noGrp="1"/>
           </p:cNvSpPr>
@@ -6675,20 +7256,20 @@
       </p:sp>
       <p:pic>
         <p:nvPicPr>
-          <p:cNvPr id="2106891192" name=""/>
+          <p:cNvPr id="388157908" name=""/>
           <p:cNvPicPr>
             <a:picLocks noChangeAspect="1"/>
           </p:cNvPicPr>
           <p:nvPr/>
         </p:nvPicPr>
-        <p:blipFill>
+        <p:blipFill rotWithShape="1">
           <a:blip r:embed="rId3"/>
           <a:stretch/>
         </p:blipFill>
         <p:spPr bwMode="auto">
           <a:xfrm flipH="0" flipV="0">
-            <a:off x="-1573" y="6266"/>
-            <a:ext cx="12195147" cy="6879883"/>
+            <a:off x="-1572" y="6265"/>
+            <a:ext cx="12195146" cy="8123602"/>
           </a:xfrm>
           <a:prstGeom prst="rect">
             <a:avLst/>
@@ -6697,14 +7278,14 @@
       </p:pic>
       <p:sp>
         <p:nvSpPr>
-          <p:cNvPr id="1507413696" name=""/>
+          <p:cNvPr id="516608480" name=""/>
           <p:cNvSpPr txBox="1"/>
           <p:nvPr/>
         </p:nvSpPr>
         <p:spPr bwMode="auto">
           <a:xfrm rot="0" flipH="0" flipV="0">
-            <a:off x="464358" y="244390"/>
-            <a:ext cx="8652017" cy="1189079"/>
+            <a:off x="464357" y="244389"/>
+            <a:ext cx="8652376" cy="1189078"/>
           </a:xfrm>
           <a:prstGeom prst="rect">
             <a:avLst/>
@@ -6737,22 +7318,26 @@
                 <a:ea typeface="Segoe UI Semibold"/>
                 <a:cs typeface="Segoe UI Semibold"/>
               </a:rPr>
-              <a:t>ШАГ 1: Разделение сети и подготовка к роутеру</a:t>
-            </a:r>
-            <a:endParaRPr/>
-          </a:p>
-        </p:txBody>
-      </p:sp>
-      <p:sp>
-        <p:nvSpPr>
-          <p:cNvPr id="913788398" name=""/>
+              <a:t>ШАГ 0: Первые команды после установки</a:t>
+            </a:r>
+            <a:endParaRPr>
+              <a:solidFill>
+                <a:schemeClr val="bg1"/>
+              </a:solidFill>
+            </a:endParaRPr>
+          </a:p>
+        </p:txBody>
+      </p:sp>
+      <p:sp>
+        <p:nvSpPr>
+          <p:cNvPr id="2073000615" name=""/>
           <p:cNvSpPr txBox="1"/>
           <p:nvPr/>
         </p:nvSpPr>
         <p:spPr bwMode="auto">
           <a:xfrm rot="0" flipH="0" flipV="0">
-            <a:off x="608486" y="1690687"/>
-            <a:ext cx="5127393" cy="4237079"/>
+            <a:off x="395426" y="1690686"/>
+            <a:ext cx="6724110" cy="4480919"/>
           </a:xfrm>
           <a:prstGeom prst="rect">
             <a:avLst/>
@@ -6777,17 +7362,193 @@
               <a:defRPr/>
             </a:pPr>
             <a:r>
-              <a:rPr lang="ru-RU" sz="1600" b="0" i="0" u="none" strike="noStrike" cap="none" spc="0">
-                <a:solidFill>
-                  <a:schemeClr val="bg1"/>
-                </a:solidFill>
-                <a:latin typeface="Segoe UI Semibold"/>
-                <a:ea typeface="Segoe UI Semibold"/>
-                <a:cs typeface="Segoe UI Semibold"/>
-              </a:rPr>
-              <a:t>auto lo</a:t>
-            </a:r>
-            <a:endParaRPr sz="1600" b="0" i="0" u="none" strike="noStrike" cap="none" spc="0">
+              <a:rPr lang="ru-RU" sz="2400" b="0" i="0" u="none" strike="noStrike" cap="none" spc="0">
+                <a:solidFill>
+                  <a:schemeClr val="bg1"/>
+                </a:solidFill>
+                <a:latin typeface="Segoe UI Semibold"/>
+                <a:ea typeface="Segoe UI Semibold"/>
+                <a:cs typeface="Segoe UI Semibold"/>
+              </a:rPr>
+              <a:t>apt update &amp;&amp; apt dist-upgrade -y</a:t>
+            </a:r>
+            <a:endParaRPr lang="ru-RU" sz="2400" b="0" i="0" u="none" strike="noStrike" cap="none" spc="0">
+              <a:solidFill>
+                <a:schemeClr val="bg1"/>
+              </a:solidFill>
+              <a:latin typeface="Segoe UI Semibold"/>
+              <a:ea typeface="Segoe UI Semibold"/>
+              <a:cs typeface="Segoe UI Semibold"/>
+            </a:endParaRPr>
+          </a:p>
+          <a:p>
+            <a:pPr marL="0" marR="0" indent="0" algn="l">
+              <a:lnSpc>
+                <a:spcPct val="100000"/>
+              </a:lnSpc>
+              <a:spcBef>
+                <a:spcPts val="0"/>
+              </a:spcBef>
+              <a:spcAft>
+                <a:spcPts val="0"/>
+              </a:spcAft>
+              <a:defRPr/>
+            </a:pPr>
+            <a:endParaRPr lang="ru-RU" sz="2400" b="0" i="0" u="none" strike="noStrike" cap="none" spc="0">
+              <a:solidFill>
+                <a:schemeClr val="bg1"/>
+              </a:solidFill>
+              <a:latin typeface="Segoe UI Semibold"/>
+              <a:ea typeface="Segoe UI Semibold"/>
+              <a:cs typeface="Segoe UI Semibold"/>
+            </a:endParaRPr>
+          </a:p>
+          <a:p>
+            <a:pPr marL="0" marR="0" indent="0" algn="l">
+              <a:lnSpc>
+                <a:spcPct val="100000"/>
+              </a:lnSpc>
+              <a:spcBef>
+                <a:spcPts val="0"/>
+              </a:spcBef>
+              <a:spcAft>
+                <a:spcPts val="0"/>
+              </a:spcAft>
+              <a:defRPr/>
+            </a:pPr>
+            <a:r>
+              <a:rPr lang="ru-RU" sz="2400" b="0" i="0" u="none" strike="noStrike" cap="none" spc="0">
+                <a:solidFill>
+                  <a:schemeClr val="bg1"/>
+                </a:solidFill>
+                <a:latin typeface="Segoe UI Semibold"/>
+                <a:ea typeface="Segoe UI Semibold"/>
+                <a:cs typeface="Segoe UI Semibold"/>
+              </a:rPr>
+              <a:t>⚠️ ALARM! ACHTUNG! WARNING! </a:t>
+            </a:r>
+            <a:r>
+              <a:rPr lang="ru-RU" sz="2400" b="0" i="0" u="none" strike="noStrike" cap="none" spc="0">
+                <a:solidFill>
+                  <a:schemeClr val="bg1"/>
+                </a:solidFill>
+                <a:latin typeface="Segoe UI Semibold"/>
+                <a:ea typeface="Segoe UI Semibold"/>
+                <a:cs typeface="Segoe UI Semibold"/>
+              </a:rPr>
+              <a:t>⚠️ </a:t>
+            </a:r>
+            <a:endParaRPr lang="ru-RU" sz="2400" b="0" i="0" u="none" strike="noStrike" cap="none" spc="0">
+              <a:solidFill>
+                <a:schemeClr val="bg1"/>
+              </a:solidFill>
+              <a:latin typeface="Segoe UI Semibold"/>
+              <a:ea typeface="Segoe UI Semibold"/>
+              <a:cs typeface="Segoe UI Semibold"/>
+            </a:endParaRPr>
+          </a:p>
+          <a:p>
+            <a:pPr marL="0" marR="0" indent="0" algn="l">
+              <a:lnSpc>
+                <a:spcPct val="100000"/>
+              </a:lnSpc>
+              <a:spcBef>
+                <a:spcPts val="0"/>
+              </a:spcBef>
+              <a:spcAft>
+                <a:spcPts val="0"/>
+              </a:spcAft>
+              <a:defRPr/>
+            </a:pPr>
+            <a:r>
+              <a:rPr lang="ru-RU" sz="2400" b="0" i="0" u="none" strike="noStrike" cap="none" spc="0">
+                <a:solidFill>
+                  <a:schemeClr val="bg1"/>
+                </a:solidFill>
+                <a:latin typeface="Segoe UI Semibold"/>
+                <a:ea typeface="Segoe UI Semibold"/>
+                <a:cs typeface="Segoe UI Semibold"/>
+              </a:rPr>
+              <a:t>Забудь про </a:t>
+            </a:r>
+            <a:r>
+              <a:rPr lang="ru-RU" sz="2400" b="0" i="0" u="none" strike="noStrike" cap="none" spc="0">
+                <a:solidFill>
+                  <a:schemeClr val="bg1"/>
+                </a:solidFill>
+                <a:latin typeface="Segoe UI Semibold"/>
+                <a:ea typeface="Segoe UI Semibold"/>
+                <a:cs typeface="Segoe UI Semibold"/>
+              </a:rPr>
+              <a:t>apt upgrade</a:t>
+            </a:r>
+            <a:r>
+              <a:rPr lang="ru-RU" sz="2400" b="0" i="0" u="none" strike="noStrike" cap="none" spc="0">
+                <a:solidFill>
+                  <a:schemeClr val="bg1"/>
+                </a:solidFill>
+                <a:latin typeface="Segoe UI Semibold"/>
+                <a:ea typeface="Segoe UI Semibold"/>
+                <a:cs typeface="Segoe UI Semibold"/>
+              </a:rPr>
+              <a:t>! </a:t>
+            </a:r>
+            <a:endParaRPr lang="ru-RU" sz="2400" b="0" i="0" u="none" strike="noStrike" cap="none" spc="0">
+              <a:solidFill>
+                <a:schemeClr val="bg1"/>
+              </a:solidFill>
+              <a:latin typeface="Segoe UI Semibold"/>
+              <a:ea typeface="Segoe UI Semibold"/>
+              <a:cs typeface="Segoe UI Semibold"/>
+            </a:endParaRPr>
+          </a:p>
+          <a:p>
+            <a:pPr marL="0" marR="0" indent="0" algn="l">
+              <a:lnSpc>
+                <a:spcPct val="100000"/>
+              </a:lnSpc>
+              <a:spcBef>
+                <a:spcPts val="0"/>
+              </a:spcBef>
+              <a:spcAft>
+                <a:spcPts val="0"/>
+              </a:spcAft>
+              <a:defRPr/>
+            </a:pPr>
+            <a:r>
+              <a:rPr lang="ru-RU" sz="2400" b="0" i="0" u="none" strike="noStrike" cap="none" spc="0">
+                <a:solidFill>
+                  <a:schemeClr val="bg1"/>
+                </a:solidFill>
+                <a:latin typeface="Segoe UI Semibold"/>
+                <a:ea typeface="Segoe UI Semibold"/>
+                <a:cs typeface="Segoe UI Semibold"/>
+              </a:rPr>
+              <a:t>Только </a:t>
+            </a:r>
+            <a:r>
+              <a:rPr lang="ru-RU" sz="2400" b="0" i="0" u="none" strike="noStrike" cap="none" spc="0">
+                <a:solidFill>
+                  <a:schemeClr val="bg1"/>
+                </a:solidFill>
+                <a:latin typeface="Segoe UI Semibold"/>
+                <a:ea typeface="Segoe UI Semibold"/>
+                <a:cs typeface="Segoe UI Semibold"/>
+              </a:rPr>
+              <a:t>apt dist-upgrade</a:t>
+            </a:r>
+            <a:r>
+              <a:rPr lang="ru-RU" sz="2400" b="0" i="0" u="none" strike="noStrike" cap="none" spc="0">
+                <a:solidFill>
+                  <a:schemeClr val="bg1"/>
+                </a:solidFill>
+                <a:latin typeface="Segoe UI Semibold"/>
+                <a:ea typeface="Segoe UI Semibold"/>
+                <a:cs typeface="Segoe UI Semibold"/>
+              </a:rPr>
+              <a:t>! Иначе: сломанные зависимости и Kernel Panic после  перезагрузки. </a:t>
+            </a:r>
+            <a:endParaRPr lang="ru-RU" sz="2400" b="0" i="0" u="none" strike="noStrike" cap="none" spc="0">
               <a:solidFill>
                 <a:schemeClr val="bg1"/>
               </a:solidFill>
@@ -6808,28 +7569,7 @@
               </a:spcAft>
               <a:defRPr/>
             </a:pPr>
-            <a:r>
-              <a:rPr lang="ru-RU" sz="1600" b="0" i="0" u="none" strike="noStrike" cap="none" spc="0">
-                <a:solidFill>
-                  <a:schemeClr val="bg1"/>
-                </a:solidFill>
-                <a:latin typeface="Segoe UI Semibold"/>
-                <a:ea typeface="Segoe UI Semibold"/>
-                <a:cs typeface="Segoe UI Semibold"/>
-              </a:rPr>
-              <a:t>iface lo inet loopback</a:t>
-            </a:r>
-            <a:br>
-              <a:rPr lang="ru-RU" sz="1600" b="0" i="0" u="none" strike="noStrike" cap="none" spc="0">
-                <a:solidFill>
-                  <a:schemeClr val="bg1"/>
-                </a:solidFill>
-                <a:latin typeface="Segoe UI Semibold"/>
-                <a:ea typeface="Segoe UI Semibold"/>
-                <a:cs typeface="Segoe UI Semibold"/>
-              </a:rPr>
-            </a:br>
-            <a:endParaRPr sz="1600" b="0" i="0" u="none" strike="noStrike" cap="none" spc="0">
+            <a:endParaRPr lang="ru-RU" sz="2400" b="0" i="0" u="none" strike="noStrike" cap="none" spc="0">
               <a:solidFill>
                 <a:schemeClr val="bg1"/>
               </a:solidFill>
@@ -6851,27 +7591,17 @@
               <a:defRPr/>
             </a:pPr>
             <a:r>
-              <a:rPr lang="ru-RU" sz="1600" b="0" i="0" u="none" strike="noStrike" cap="none" spc="0">
-                <a:solidFill>
-                  <a:schemeClr val="bg1"/>
-                </a:solidFill>
-                <a:latin typeface="Segoe UI Semibold"/>
-                <a:ea typeface="Segoe UI Semibold"/>
-                <a:cs typeface="Segoe UI Semibold"/>
-              </a:rPr>
-              <a:t>iface eno1 inet manual</a:t>
-            </a:r>
-            <a:br>
-              <a:rPr lang="ru-RU" sz="1600" b="0" i="0" u="none" strike="noStrike" cap="none" spc="0">
-                <a:solidFill>
-                  <a:schemeClr val="bg1"/>
-                </a:solidFill>
-                <a:latin typeface="Segoe UI Semibold"/>
-                <a:ea typeface="Segoe UI Semibold"/>
-                <a:cs typeface="Segoe UI Semibold"/>
-              </a:rPr>
-            </a:br>
-            <a:endParaRPr sz="1600" b="0" i="0" u="none" strike="noStrike" cap="none" spc="0">
+              <a:rPr lang="ru-RU" sz="2400" b="0" i="0" u="none" strike="noStrike" cap="none" spc="0">
+                <a:solidFill>
+                  <a:schemeClr val="bg1"/>
+                </a:solidFill>
+                <a:latin typeface="Segoe UI Semibold"/>
+                <a:ea typeface="Segoe UI Semibold"/>
+                <a:cs typeface="Segoe UI Semibold"/>
+              </a:rPr>
+              <a:t>Докидываем набор для выживания: </a:t>
+            </a:r>
+            <a:endParaRPr lang="ru-RU" sz="2400" b="0" i="0" u="none" strike="noStrike" cap="none" spc="0">
               <a:solidFill>
                 <a:schemeClr val="bg1"/>
               </a:solidFill>
@@ -6892,28 +7622,7 @@
               </a:spcAft>
               <a:defRPr/>
             </a:pPr>
-            <a:r>
-              <a:rPr lang="ru-RU" sz="1600" b="0" i="0" u="none" strike="noStrike" cap="none" spc="0">
-                <a:solidFill>
-                  <a:schemeClr val="bg1"/>
-                </a:solidFill>
-                <a:latin typeface="Segoe UI Semibold"/>
-                <a:ea typeface="Segoe UI Semibold"/>
-                <a:cs typeface="Segoe UI Semibold"/>
-              </a:rPr>
-              <a:t>iface eno2 inet manual</a:t>
-            </a:r>
-            <a:br>
-              <a:rPr lang="ru-RU" sz="1600" b="0" i="0" u="none" strike="noStrike" cap="none" spc="0">
-                <a:solidFill>
-                  <a:schemeClr val="bg1"/>
-                </a:solidFill>
-                <a:latin typeface="Segoe UI Semibold"/>
-                <a:ea typeface="Segoe UI Semibold"/>
-                <a:cs typeface="Segoe UI Semibold"/>
-              </a:rPr>
-            </a:br>
-            <a:endParaRPr sz="1600" b="0" i="0" u="none" strike="noStrike" cap="none" spc="0">
+            <a:endParaRPr lang="ru-RU" sz="2400" b="0" i="0" u="none" strike="noStrike" cap="none" spc="0">
               <a:solidFill>
                 <a:schemeClr val="bg1"/>
               </a:solidFill>
@@ -6935,17 +7644,17 @@
               <a:defRPr/>
             </a:pPr>
             <a:r>
-              <a:rPr lang="ru-RU" sz="1600" b="0" i="0" u="none" strike="noStrike" cap="none" spc="0">
-                <a:solidFill>
-                  <a:schemeClr val="bg1"/>
-                </a:solidFill>
-                <a:latin typeface="Segoe UI Semibold"/>
-                <a:ea typeface="Segoe UI Semibold"/>
-                <a:cs typeface="Segoe UI Semibold"/>
-              </a:rPr>
-              <a:t>auto vmbr0</a:t>
-            </a:r>
-            <a:endParaRPr sz="1600" b="0" i="0" u="none" strike="noStrike" cap="none" spc="0">
+              <a:rPr lang="ru-RU" sz="2400" b="0" i="0" u="none" strike="noStrike" cap="none" spc="0">
+                <a:solidFill>
+                  <a:schemeClr val="bg1"/>
+                </a:solidFill>
+                <a:latin typeface="Segoe UI Semibold"/>
+                <a:ea typeface="Segoe UI Semibold"/>
+                <a:cs typeface="Segoe UI Semibold"/>
+              </a:rPr>
+              <a:t>apt install curl sudo htop iftop ethtool traceroute tcpdump</a:t>
+            </a:r>
+            <a:endParaRPr lang="ru-RU" sz="2400" b="0" i="0" u="none" strike="noStrike" cap="none" spc="0">
               <a:solidFill>
                 <a:schemeClr val="bg1"/>
               </a:solidFill>
@@ -6953,526 +7662,24 @@
               <a:cs typeface="Segoe UI Semibold"/>
             </a:endParaRPr>
           </a:p>
-          <a:p>
-            <a:pPr marL="0" marR="0" indent="0" algn="l">
-              <a:lnSpc>
-                <a:spcPct val="100000"/>
-              </a:lnSpc>
-              <a:spcBef>
-                <a:spcPts val="0"/>
-              </a:spcBef>
-              <a:spcAft>
-                <a:spcPts val="0"/>
-              </a:spcAft>
-              <a:defRPr/>
-            </a:pPr>
-            <a:r>
-              <a:rPr lang="ru-RU" sz="1600" b="0" i="0" u="none" strike="noStrike" cap="none" spc="0">
-                <a:solidFill>
-                  <a:schemeClr val="bg1"/>
-                </a:solidFill>
-                <a:latin typeface="Segoe UI Semibold"/>
-                <a:ea typeface="Segoe UI Semibold"/>
-                <a:cs typeface="Segoe UI Semibold"/>
-              </a:rPr>
-              <a:t>iface vmbr0 inet static</a:t>
-            </a:r>
-            <a:endParaRPr sz="1600" b="0" i="0" u="none" strike="noStrike" cap="none" spc="0">
-              <a:solidFill>
-                <a:schemeClr val="bg1"/>
-              </a:solidFill>
-              <a:latin typeface="Segoe UI Semibold"/>
-              <a:cs typeface="Segoe UI Semibold"/>
-            </a:endParaRPr>
-          </a:p>
-          <a:p>
-            <a:pPr marL="0" marR="0" indent="0" algn="l">
-              <a:lnSpc>
-                <a:spcPct val="100000"/>
-              </a:lnSpc>
-              <a:spcBef>
-                <a:spcPts val="0"/>
-              </a:spcBef>
-              <a:spcAft>
-                <a:spcPts val="0"/>
-              </a:spcAft>
-              <a:defRPr/>
-            </a:pPr>
-            <a:r>
-              <a:rPr lang="ru-RU" sz="1600" b="0" i="0" u="none" strike="noStrike" cap="none" spc="0">
-                <a:solidFill>
-                  <a:schemeClr val="bg1"/>
-                </a:solidFill>
-                <a:latin typeface="Segoe UI Semibold"/>
-                <a:ea typeface="Segoe UI Semibold"/>
-                <a:cs typeface="Segoe UI Semibold"/>
-              </a:rPr>
-              <a:t>    address 192.168.1.10/24</a:t>
-            </a:r>
-            <a:endParaRPr sz="1600" b="0" i="0" u="none" strike="noStrike" cap="none" spc="0">
-              <a:solidFill>
-                <a:schemeClr val="bg1"/>
-              </a:solidFill>
-              <a:latin typeface="Segoe UI Semibold"/>
-              <a:cs typeface="Segoe UI Semibold"/>
-            </a:endParaRPr>
-          </a:p>
-          <a:p>
-            <a:pPr marL="0" marR="0" indent="0" algn="l">
-              <a:lnSpc>
-                <a:spcPct val="100000"/>
-              </a:lnSpc>
-              <a:spcBef>
-                <a:spcPts val="0"/>
-              </a:spcBef>
-              <a:spcAft>
-                <a:spcPts val="0"/>
-              </a:spcAft>
-              <a:defRPr/>
-            </a:pPr>
-            <a:r>
-              <a:rPr lang="ru-RU" sz="1600" b="0" i="0" u="none" strike="noStrike" cap="none" spc="0">
-                <a:solidFill>
-                  <a:schemeClr val="bg1"/>
-                </a:solidFill>
-                <a:latin typeface="Segoe UI Semibold"/>
-                <a:ea typeface="Segoe UI Semibold"/>
-                <a:cs typeface="Segoe UI Semibold"/>
-              </a:rPr>
-              <a:t>    gateway 192.168.1.1</a:t>
-            </a:r>
-            <a:endParaRPr sz="1600" b="0" i="0" u="none" strike="noStrike" cap="none" spc="0">
-              <a:solidFill>
-                <a:schemeClr val="bg1"/>
-              </a:solidFill>
-              <a:latin typeface="Segoe UI Semibold"/>
-              <a:cs typeface="Segoe UI Semibold"/>
-            </a:endParaRPr>
-          </a:p>
-          <a:p>
-            <a:pPr marL="0" marR="0" indent="0" algn="l">
-              <a:lnSpc>
-                <a:spcPct val="100000"/>
-              </a:lnSpc>
-              <a:spcBef>
-                <a:spcPts val="0"/>
-              </a:spcBef>
-              <a:spcAft>
-                <a:spcPts val="0"/>
-              </a:spcAft>
-              <a:defRPr/>
-            </a:pPr>
-            <a:r>
-              <a:rPr lang="ru-RU" sz="1600" b="0" i="0" u="none" strike="noStrike" cap="none" spc="0">
-                <a:solidFill>
-                  <a:schemeClr val="bg1"/>
-                </a:solidFill>
-                <a:latin typeface="Segoe UI Semibold"/>
-                <a:ea typeface="Segoe UI Semibold"/>
-                <a:cs typeface="Segoe UI Semibold"/>
-              </a:rPr>
-              <a:t>    bridge-ports eno1</a:t>
-            </a:r>
-            <a:endParaRPr sz="1600" b="0" i="0" u="none" strike="noStrike" cap="none" spc="0">
-              <a:solidFill>
-                <a:schemeClr val="bg1"/>
-              </a:solidFill>
-              <a:latin typeface="Segoe UI Semibold"/>
-              <a:cs typeface="Segoe UI Semibold"/>
-            </a:endParaRPr>
-          </a:p>
-          <a:p>
-            <a:pPr marL="0" marR="0" indent="0" algn="l">
-              <a:lnSpc>
-                <a:spcPct val="100000"/>
-              </a:lnSpc>
-              <a:spcBef>
-                <a:spcPts val="0"/>
-              </a:spcBef>
-              <a:spcAft>
-                <a:spcPts val="0"/>
-              </a:spcAft>
-              <a:defRPr/>
-            </a:pPr>
-            <a:r>
-              <a:rPr lang="ru-RU" sz="1600" b="0" i="0" u="none" strike="noStrike" cap="none" spc="0">
-                <a:solidFill>
-                  <a:schemeClr val="bg1"/>
-                </a:solidFill>
-                <a:latin typeface="Segoe UI Semibold"/>
-                <a:ea typeface="Segoe UI Semibold"/>
-                <a:cs typeface="Segoe UI Semibold"/>
-              </a:rPr>
-              <a:t>    bridge-stp off</a:t>
-            </a:r>
-            <a:endParaRPr sz="1600" b="0" i="0" u="none" strike="noStrike" cap="none" spc="0">
-              <a:solidFill>
-                <a:schemeClr val="bg1"/>
-              </a:solidFill>
-              <a:latin typeface="Segoe UI Semibold"/>
-              <a:cs typeface="Segoe UI Semibold"/>
-            </a:endParaRPr>
-          </a:p>
-          <a:p>
-            <a:pPr marL="0" marR="0" indent="0" algn="l">
-              <a:lnSpc>
-                <a:spcPct val="100000"/>
-              </a:lnSpc>
-              <a:spcBef>
-                <a:spcPts val="0"/>
-              </a:spcBef>
-              <a:spcAft>
-                <a:spcPts val="0"/>
-              </a:spcAft>
-              <a:defRPr/>
-            </a:pPr>
-            <a:r>
-              <a:rPr lang="ru-RU" sz="1600" b="0" i="0" u="none" strike="noStrike" cap="none" spc="0">
-                <a:solidFill>
-                  <a:schemeClr val="bg1"/>
-                </a:solidFill>
-                <a:latin typeface="Segoe UI Semibold"/>
-                <a:ea typeface="Segoe UI Semibold"/>
-                <a:cs typeface="Segoe UI Semibold"/>
-              </a:rPr>
-              <a:t>    bridge-fd 0</a:t>
-            </a:r>
-            <a:endParaRPr sz="1600" b="0" i="0" u="none" strike="noStrike" cap="none" spc="0">
-              <a:solidFill>
-                <a:schemeClr val="bg1"/>
-              </a:solidFill>
-              <a:latin typeface="Segoe UI Semibold"/>
-              <a:cs typeface="Segoe UI Semibold"/>
-            </a:endParaRPr>
-          </a:p>
-          <a:p>
-            <a:pPr marL="0" marR="0" indent="0" algn="l">
-              <a:lnSpc>
-                <a:spcPct val="100000"/>
-              </a:lnSpc>
-              <a:spcBef>
-                <a:spcPts val="0"/>
-              </a:spcBef>
-              <a:spcAft>
-                <a:spcPts val="0"/>
-              </a:spcAft>
-              <a:defRPr/>
-            </a:pPr>
-            <a:r>
-              <a:rPr lang="ru-RU" sz="1600" b="0" i="0" u="none" strike="noStrike" cap="none" spc="0">
-                <a:solidFill>
-                  <a:schemeClr val="bg1"/>
-                </a:solidFill>
-                <a:latin typeface="Segoe UI Semibold"/>
-                <a:ea typeface="Segoe UI Semibold"/>
-                <a:cs typeface="Segoe UI Semibold"/>
-              </a:rPr>
-              <a:t>    bridge-vlan-aware yes</a:t>
-            </a:r>
-            <a:endParaRPr sz="1600" b="0" i="0" u="none" strike="noStrike" cap="none" spc="0">
-              <a:solidFill>
-                <a:schemeClr val="bg1"/>
-              </a:solidFill>
-              <a:latin typeface="Segoe UI Semibold"/>
-              <a:cs typeface="Segoe UI Semibold"/>
-            </a:endParaRPr>
-          </a:p>
-          <a:p>
-            <a:pPr marL="0" marR="0" indent="0" algn="l">
-              <a:lnSpc>
-                <a:spcPct val="100000"/>
-              </a:lnSpc>
-              <a:spcBef>
-                <a:spcPts val="0"/>
-              </a:spcBef>
-              <a:spcAft>
-                <a:spcPts val="0"/>
-              </a:spcAft>
-              <a:defRPr/>
-            </a:pPr>
-            <a:r>
-              <a:rPr lang="ru-RU" sz="1600" b="0" i="0" u="none" strike="noStrike" cap="none" spc="0">
-                <a:solidFill>
-                  <a:schemeClr val="bg1"/>
-                </a:solidFill>
-                <a:latin typeface="Segoe UI Semibold"/>
-                <a:ea typeface="Segoe UI Semibold"/>
-                <a:cs typeface="Segoe UI Semibold"/>
-              </a:rPr>
-              <a:t>    bridge-vids 2-4094</a:t>
-            </a:r>
-            <a:endParaRPr sz="1600" b="0" i="0" u="none" strike="noStrike" cap="none" spc="0">
-              <a:solidFill>
-                <a:schemeClr val="bg1"/>
-              </a:solidFill>
-              <a:latin typeface="Segoe UI Semibold"/>
-              <a:cs typeface="Segoe UI Semibold"/>
-            </a:endParaRPr>
-          </a:p>
-          <a:p>
-            <a:pPr marL="0" marR="0" indent="0" algn="l">
-              <a:lnSpc>
-                <a:spcPct val="100000"/>
-              </a:lnSpc>
-              <a:spcBef>
-                <a:spcPts val="0"/>
-              </a:spcBef>
-              <a:spcAft>
-                <a:spcPts val="0"/>
-              </a:spcAft>
-              <a:defRPr/>
-            </a:pPr>
-            <a:r>
-              <a:rPr lang="ru-RU" sz="1600" b="0" i="0" u="none" strike="noStrike" cap="none" spc="0">
-                <a:solidFill>
-                  <a:schemeClr val="bg1"/>
-                </a:solidFill>
-                <a:latin typeface="Segoe UI Semibold"/>
-                <a:ea typeface="Segoe UI Semibold"/>
-                <a:cs typeface="Segoe UI Semibold"/>
-              </a:rPr>
-              <a:t>    comment "LAN"</a:t>
-            </a:r>
-            <a:endParaRPr sz="1600" b="0" i="0" u="none" strike="noStrike" cap="none" spc="0">
-              <a:solidFill>
-                <a:schemeClr val="bg1"/>
-              </a:solidFill>
-              <a:latin typeface="Segoe UI Semibold"/>
-              <a:cs typeface="Segoe UI Semibold"/>
-            </a:endParaRPr>
-          </a:p>
-        </p:txBody>
-      </p:sp>
-      <p:sp>
-        <p:nvSpPr>
-          <p:cNvPr id="1478534322" name=""/>
-          <p:cNvSpPr txBox="1"/>
-          <p:nvPr/>
-        </p:nvSpPr>
-        <p:spPr bwMode="auto">
-          <a:xfrm rot="0" flipH="0" flipV="0">
-            <a:off x="4790367" y="1690687"/>
-            <a:ext cx="2655708" cy="1737359"/>
-          </a:xfrm>
-          <a:prstGeom prst="rect">
-            <a:avLst/>
-          </a:prstGeom>
-          <a:noFill/>
-        </p:spPr>
-        <p:txBody>
-          <a:bodyPr vertOverflow="overflow" horzOverflow="overflow" vert="horz" wrap="square" lIns="91440" tIns="45720" rIns="91440" bIns="45720" numCol="1" spcCol="0" rtlCol="0" fromWordArt="0" anchor="t" anchorCtr="0" forceAA="0" upright="0" compatLnSpc="0">
-            <a:spAutoFit/>
-          </a:bodyPr>
-          <a:p>
-            <a:pPr marL="0" marR="0" indent="0" algn="l">
-              <a:lnSpc>
-                <a:spcPct val="100000"/>
-              </a:lnSpc>
-              <a:spcBef>
-                <a:spcPts val="0"/>
-              </a:spcBef>
-              <a:spcAft>
-                <a:spcPts val="0"/>
-              </a:spcAft>
-              <a:defRPr/>
-            </a:pPr>
-            <a:r>
-              <a:rPr lang="ru-RU" b="0" i="0" u="none" strike="noStrike" cap="none" spc="0">
-                <a:solidFill>
-                  <a:schemeClr val="bg1"/>
-                </a:solidFill>
-                <a:latin typeface="Segoe UI Semibold"/>
-                <a:ea typeface="Segoe UI Semibold"/>
-                <a:cs typeface="Segoe UI Semibold"/>
-              </a:rPr>
-              <a:t>auto vmbr1</a:t>
-            </a:r>
-            <a:endParaRPr sz="1600" b="0" i="0" u="none" strike="noStrike" cap="none" spc="0">
-              <a:solidFill>
-                <a:schemeClr val="bg1"/>
-              </a:solidFill>
-              <a:latin typeface="Segoe UI Semibold"/>
-              <a:cs typeface="Segoe UI Semibold"/>
-            </a:endParaRPr>
-          </a:p>
-          <a:p>
-            <a:pPr marL="0" marR="0" indent="0" algn="l">
-              <a:lnSpc>
-                <a:spcPct val="100000"/>
-              </a:lnSpc>
-              <a:spcBef>
-                <a:spcPts val="0"/>
-              </a:spcBef>
-              <a:spcAft>
-                <a:spcPts val="0"/>
-              </a:spcAft>
-              <a:defRPr/>
-            </a:pPr>
-            <a:r>
-              <a:rPr lang="ru-RU" b="0" i="0" u="none" strike="noStrike" cap="none" spc="0">
-                <a:solidFill>
-                  <a:schemeClr val="bg1"/>
-                </a:solidFill>
-                <a:latin typeface="Segoe UI Semibold"/>
-                <a:ea typeface="Segoe UI Semibold"/>
-                <a:cs typeface="Segoe UI Semibold"/>
-              </a:rPr>
-              <a:t>iface vmbr1 inet manual</a:t>
-            </a:r>
-            <a:endParaRPr sz="1600" b="0" i="0" u="none" strike="noStrike" cap="none" spc="0">
-              <a:solidFill>
-                <a:schemeClr val="bg1"/>
-              </a:solidFill>
-              <a:latin typeface="Segoe UI Semibold"/>
-              <a:cs typeface="Segoe UI Semibold"/>
-            </a:endParaRPr>
-          </a:p>
-          <a:p>
-            <a:pPr marL="0" marR="0" indent="0" algn="l">
-              <a:lnSpc>
-                <a:spcPct val="100000"/>
-              </a:lnSpc>
-              <a:spcBef>
-                <a:spcPts val="0"/>
-              </a:spcBef>
-              <a:spcAft>
-                <a:spcPts val="0"/>
-              </a:spcAft>
-              <a:defRPr/>
-            </a:pPr>
-            <a:r>
-              <a:rPr lang="ru-RU" b="0" i="0" u="none" strike="noStrike" cap="none" spc="0">
-                <a:solidFill>
-                  <a:schemeClr val="bg1"/>
-                </a:solidFill>
-                <a:latin typeface="Segoe UI Semibold"/>
-                <a:ea typeface="Segoe UI Semibold"/>
-                <a:cs typeface="Segoe UI Semibold"/>
-              </a:rPr>
-              <a:t>    bridge-ports eno2</a:t>
-            </a:r>
-            <a:endParaRPr sz="1600" b="0" i="0" u="none" strike="noStrike" cap="none" spc="0">
-              <a:solidFill>
-                <a:schemeClr val="bg1"/>
-              </a:solidFill>
-              <a:latin typeface="Segoe UI Semibold"/>
-              <a:cs typeface="Segoe UI Semibold"/>
-            </a:endParaRPr>
-          </a:p>
-          <a:p>
-            <a:pPr marL="0" marR="0" indent="0" algn="l">
-              <a:lnSpc>
-                <a:spcPct val="100000"/>
-              </a:lnSpc>
-              <a:spcBef>
-                <a:spcPts val="0"/>
-              </a:spcBef>
-              <a:spcAft>
-                <a:spcPts val="0"/>
-              </a:spcAft>
-              <a:defRPr/>
-            </a:pPr>
-            <a:r>
-              <a:rPr lang="ru-RU" b="0" i="0" u="none" strike="noStrike" cap="none" spc="0">
-                <a:solidFill>
-                  <a:schemeClr val="bg1"/>
-                </a:solidFill>
-                <a:latin typeface="Segoe UI Semibold"/>
-                <a:ea typeface="Segoe UI Semibold"/>
-                <a:cs typeface="Segoe UI Semibold"/>
-              </a:rPr>
-              <a:t>    bridge-stp off</a:t>
-            </a:r>
-            <a:endParaRPr sz="1600" b="0" i="0" u="none" strike="noStrike" cap="none" spc="0">
-              <a:solidFill>
-                <a:schemeClr val="bg1"/>
-              </a:solidFill>
-              <a:latin typeface="Segoe UI Semibold"/>
-              <a:cs typeface="Segoe UI Semibold"/>
-            </a:endParaRPr>
-          </a:p>
-          <a:p>
-            <a:pPr marL="0" marR="0" indent="0" algn="l">
-              <a:lnSpc>
-                <a:spcPct val="100000"/>
-              </a:lnSpc>
-              <a:spcBef>
-                <a:spcPts val="0"/>
-              </a:spcBef>
-              <a:spcAft>
-                <a:spcPts val="0"/>
-              </a:spcAft>
-              <a:defRPr/>
-            </a:pPr>
-            <a:r>
-              <a:rPr lang="ru-RU" b="0" i="0" u="none" strike="noStrike" cap="none" spc="0">
-                <a:solidFill>
-                  <a:schemeClr val="bg1"/>
-                </a:solidFill>
-                <a:latin typeface="Segoe UI Semibold"/>
-                <a:ea typeface="Segoe UI Semibold"/>
-                <a:cs typeface="Segoe UI Semibold"/>
-              </a:rPr>
-              <a:t>    bridge-fd 0</a:t>
-            </a:r>
-            <a:endParaRPr sz="1600" b="0" i="0" u="none" strike="noStrike" cap="none" spc="0">
-              <a:solidFill>
-                <a:schemeClr val="bg1"/>
-              </a:solidFill>
-              <a:latin typeface="Segoe UI Semibold"/>
-              <a:cs typeface="Segoe UI Semibold"/>
-            </a:endParaRPr>
-          </a:p>
-          <a:p>
-            <a:pPr marL="0" marR="0" indent="0" algn="l">
-              <a:lnSpc>
-                <a:spcPct val="100000"/>
-              </a:lnSpc>
-              <a:spcBef>
-                <a:spcPts val="0"/>
-              </a:spcBef>
-              <a:spcAft>
-                <a:spcPts val="0"/>
-              </a:spcAft>
-              <a:defRPr/>
-            </a:pPr>
-            <a:r>
-              <a:rPr lang="ru-RU" b="0" i="0" u="none" strike="noStrike" cap="none" spc="0">
-                <a:solidFill>
-                  <a:schemeClr val="bg1"/>
-                </a:solidFill>
-                <a:latin typeface="Segoe UI Semibold"/>
-                <a:ea typeface="Segoe UI Semibold"/>
-                <a:cs typeface="Segoe UI Semibold"/>
-              </a:rPr>
-              <a:t>    comment "WAN"</a:t>
-            </a:r>
-            <a:endParaRPr sz="1600">
-              <a:solidFill>
-                <a:schemeClr val="bg1"/>
-              </a:solidFill>
-              <a:latin typeface="Segoe UI Semibold"/>
-              <a:cs typeface="Segoe UI Semibold"/>
-            </a:endParaRPr>
-          </a:p>
         </p:txBody>
       </p:sp>
       <p:pic>
         <p:nvPicPr>
-          <p:cNvPr id="1215127001" name=""/>
+          <p:cNvPr id="1253486237" name=""/>
           <p:cNvPicPr>
             <a:picLocks noChangeAspect="1"/>
           </p:cNvPicPr>
           <p:nvPr/>
         </p:nvPicPr>
-        <p:blipFill>
+        <p:blipFill rotWithShape="1">
           <a:blip r:embed="rId4"/>
           <a:stretch/>
         </p:blipFill>
         <p:spPr bwMode="auto">
-          <a:xfrm flipH="0" flipV="0">
-            <a:off x="7446074" y="3446207"/>
-            <a:ext cx="4325713" cy="2865499"/>
+          <a:xfrm>
+            <a:off x="7294143" y="838929"/>
+            <a:ext cx="4762498" cy="5438773"/>
           </a:xfrm>
           <a:prstGeom prst="rect">
             <a:avLst/>
@@ -7514,7 +7721,7 @@
       </p:grpSpPr>
       <p:sp>
         <p:nvSpPr>
-          <p:cNvPr id="680850521" name="Заголовок 1"/>
+          <p:cNvPr id="68836444" name="Заголовок 1"/>
           <p:cNvSpPr>
             <a:spLocks noGrp="1"/>
           </p:cNvSpPr>
@@ -7536,20 +7743,20 @@
       </p:sp>
       <p:pic>
         <p:nvPicPr>
-          <p:cNvPr id="1778503868" name=""/>
+          <p:cNvPr id="1200859366" name=""/>
           <p:cNvPicPr>
             <a:picLocks noChangeAspect="1"/>
           </p:cNvPicPr>
           <p:nvPr/>
         </p:nvPicPr>
-        <p:blipFill>
+        <p:blipFill rotWithShape="1">
           <a:blip r:embed="rId3"/>
           <a:stretch/>
         </p:blipFill>
         <p:spPr bwMode="auto">
           <a:xfrm flipH="0" flipV="0">
             <a:off x="-1573" y="6266"/>
-            <a:ext cx="12195147" cy="6861759"/>
+            <a:ext cx="12195147" cy="6879883"/>
           </a:xfrm>
           <a:prstGeom prst="rect">
             <a:avLst/>
@@ -7558,14 +7765,14 @@
       </p:pic>
       <p:sp>
         <p:nvSpPr>
-          <p:cNvPr id="468973679" name=""/>
+          <p:cNvPr id="1782071545" name=""/>
           <p:cNvSpPr txBox="1"/>
           <p:nvPr/>
         </p:nvSpPr>
         <p:spPr bwMode="auto">
           <a:xfrm rot="0" flipH="0" flipV="0">
             <a:off x="464358" y="244390"/>
-            <a:ext cx="8653817" cy="1189079"/>
+            <a:ext cx="8652017" cy="1189079"/>
           </a:xfrm>
           <a:prstGeom prst="rect">
             <a:avLst/>
@@ -7598,11 +7805,7 @@
                 <a:ea typeface="Segoe UI Semibold"/>
                 <a:cs typeface="Segoe UI Semibold"/>
               </a:rPr>
-              <a:t>ШАГ 2: Тонкий тюнинг OPNsense и «грабля века»</a:t>
-            </a:r>
-            <a:r>
-              <a:rPr/>
-              <a:t>    </a:t>
+              <a:t>ШАГ 1: Разделение сети и подготовка к роутеру</a:t>
             </a:r>
             <a:endParaRPr/>
           </a:p>
@@ -7610,14 +7813,14 @@
       </p:sp>
       <p:sp>
         <p:nvSpPr>
-          <p:cNvPr id="1298836921" name=""/>
+          <p:cNvPr id="1517821315" name=""/>
           <p:cNvSpPr txBox="1"/>
           <p:nvPr/>
         </p:nvSpPr>
         <p:spPr bwMode="auto">
           <a:xfrm rot="0" flipH="0" flipV="0">
-            <a:off x="608486" y="1461907"/>
-            <a:ext cx="5396131" cy="4755240"/>
+            <a:off x="608486" y="1690687"/>
+            <a:ext cx="5127393" cy="4237079"/>
           </a:xfrm>
           <a:prstGeom prst="rect">
             <a:avLst/>
@@ -7642,82 +7845,17 @@
               <a:defRPr/>
             </a:pPr>
             <a:r>
-              <a:rPr lang="ru-RU" sz="1800" b="0" i="0" u="none" strike="noStrike" cap="none" spc="0">
-                <a:solidFill>
-                  <a:schemeClr val="bg1"/>
-                </a:solidFill>
-                <a:latin typeface="Segoe UI Semibold"/>
-                <a:ea typeface="Segoe UI Semibold"/>
-                <a:cs typeface="Segoe UI Semibold"/>
-              </a:rPr>
-              <a:t>CPU Type = </a:t>
-            </a:r>
-            <a:r>
-              <a:rPr lang="ru-RU" sz="1800" b="0" i="0" u="none" strike="noStrike" cap="none" spc="0">
-                <a:solidFill>
-                  <a:schemeClr val="bg1"/>
-                </a:solidFill>
-                <a:latin typeface="Segoe UI Semibold"/>
-                <a:ea typeface="Segoe UI Semibold"/>
-                <a:cs typeface="Segoe UI Semibold"/>
-              </a:rPr>
-              <a:t>host</a:t>
-            </a:r>
-            <a:r>
-              <a:rPr lang="ru-RU" sz="1800" b="0" i="0" u="none" strike="noStrike" cap="none" spc="0">
-                <a:solidFill>
-                  <a:schemeClr val="bg1"/>
-                </a:solidFill>
-                <a:latin typeface="Segoe UI Semibold"/>
-                <a:ea typeface="Segoe UI Semibold"/>
-                <a:cs typeface="Segoe UI Semibold"/>
-              </a:rPr>
-              <a:t> (ОБЯЗАТЕЛЬНО!):</a:t>
-            </a:r>
-            <a:br>
-              <a:rPr lang="ru-RU" sz="1800" b="0" i="0" u="none" strike="noStrike" cap="none" spc="0">
-                <a:solidFill>
-                  <a:schemeClr val="bg1"/>
-                </a:solidFill>
-                <a:latin typeface="Segoe UI Semibold"/>
-                <a:ea typeface="Segoe UI Semibold"/>
-                <a:cs typeface="Segoe UI Semibold"/>
-              </a:rPr>
-            </a:br>
-            <a:r>
-              <a:rPr lang="ru-RU" sz="1800" b="0" i="0" u="none" strike="noStrike" cap="none" spc="0">
-                <a:solidFill>
-                  <a:schemeClr val="bg1"/>
-                </a:solidFill>
-                <a:latin typeface="Segoe UI Semibold"/>
-                <a:ea typeface="Segoe UI Semibold"/>
-                <a:cs typeface="Segoe UI Semibold"/>
-              </a:rPr>
-              <a:t>Пробрасывает инструкции процессора и </a:t>
-            </a:r>
-            <a:r>
-              <a:rPr lang="ru-RU" sz="1800" b="0" i="0" u="none" strike="noStrike" cap="none" spc="0">
-                <a:solidFill>
-                  <a:schemeClr val="bg1"/>
-                </a:solidFill>
-                <a:latin typeface="Segoe UI Semibold"/>
-                <a:ea typeface="Segoe UI Semibold"/>
-                <a:cs typeface="Segoe UI Semibold"/>
-              </a:rPr>
-              <a:t>AES-NI</a:t>
-            </a:r>
-            <a:r>
-              <a:rPr lang="ru-RU" sz="1800" b="0" i="0" u="none" strike="noStrike" cap="none" spc="0">
-                <a:solidFill>
-                  <a:schemeClr val="bg1"/>
-                </a:solidFill>
-                <a:latin typeface="Segoe UI Semibold"/>
-                <a:ea typeface="Segoe UI Semibold"/>
-                <a:cs typeface="Segoe UI Semibold"/>
-              </a:rPr>
-              <a:t>. Без этого WireGuard или OpenVPN сожрут процессор уже на скорости 100 Мбит/с.</a:t>
-            </a:r>
-            <a:endParaRPr sz="1800" b="0" i="0" u="none" strike="noStrike" cap="none" spc="0">
+              <a:rPr lang="ru-RU" sz="1600" b="0" i="0" u="none" strike="noStrike" cap="none" spc="0">
+                <a:solidFill>
+                  <a:schemeClr val="bg1"/>
+                </a:solidFill>
+                <a:latin typeface="Segoe UI Semibold"/>
+                <a:ea typeface="Segoe UI Semibold"/>
+                <a:cs typeface="Segoe UI Semibold"/>
+              </a:rPr>
+              <a:t>auto lo</a:t>
+            </a:r>
+            <a:endParaRPr sz="1600" b="0" i="0" u="none" strike="noStrike" cap="none" spc="0">
               <a:solidFill>
                 <a:schemeClr val="bg1"/>
               </a:solidFill>
@@ -7739,18 +7877,18 @@
               <a:defRPr/>
             </a:pPr>
             <a:r>
-              <a:rPr lang="ru-RU" sz="1800" b="0" i="0" u="none" strike="noStrike" cap="none" spc="0">
-                <a:solidFill>
-                  <a:schemeClr val="bg1"/>
-                </a:solidFill>
-                <a:latin typeface="Segoe UI Semibold"/>
-                <a:ea typeface="Segoe UI Semibold"/>
-                <a:cs typeface="Segoe UI Semibold"/>
-              </a:rPr>
-              <a:t>Сеть: VirtIO + Multiqueue:</a:t>
+              <a:rPr lang="ru-RU" sz="1600" b="0" i="0" u="none" strike="noStrike" cap="none" spc="0">
+                <a:solidFill>
+                  <a:schemeClr val="bg1"/>
+                </a:solidFill>
+                <a:latin typeface="Segoe UI Semibold"/>
+                <a:ea typeface="Segoe UI Semibold"/>
+                <a:cs typeface="Segoe UI Semibold"/>
+              </a:rPr>
+              <a:t>iface lo inet loopback</a:t>
             </a:r>
             <a:br>
-              <a:rPr lang="ru-RU" sz="1800" b="0" i="0" u="none" strike="noStrike" cap="none" spc="0">
+              <a:rPr lang="ru-RU" sz="1600" b="0" i="0" u="none" strike="noStrike" cap="none" spc="0">
                 <a:solidFill>
                   <a:schemeClr val="bg1"/>
                 </a:solidFill>
@@ -7759,18 +7897,7 @@
                 <a:cs typeface="Segoe UI Semibold"/>
               </a:rPr>
             </a:br>
-            <a:r>
-              <a:rPr lang="ru-RU" sz="1800" b="0" i="0" u="none" strike="noStrike" cap="none" spc="0">
-                <a:solidFill>
-                  <a:schemeClr val="bg1"/>
-                </a:solidFill>
-                <a:latin typeface="Segoe UI Semibold"/>
-                <a:ea typeface="Segoe UI Semibold"/>
-                <a:cs typeface="Segoe UI Semibold"/>
-              </a:rPr>
-              <a:t>Включаем Multiqueue = числу ядер CPU. Гипервизор начинает параллелить поток пакетов по всем ядрам, а не долбить одно.</a:t>
-            </a:r>
-            <a:endParaRPr sz="1800" b="0" i="0" u="none" strike="noStrike" cap="none" spc="0">
+            <a:endParaRPr sz="1600" b="0" i="0" u="none" strike="noStrike" cap="none" spc="0">
               <a:solidFill>
                 <a:schemeClr val="bg1"/>
               </a:solidFill>
@@ -7792,40 +7919,18 @@
               <a:defRPr/>
             </a:pPr>
             <a:r>
-              <a:rPr lang="ru-RU" sz="1800" b="0" i="0" u="none" strike="noStrike" cap="none" spc="0">
-                <a:solidFill>
-                  <a:schemeClr val="bg1"/>
-                </a:solidFill>
-                <a:latin typeface="Segoe UI Semibold"/>
-                <a:ea typeface="Segoe UI Semibold"/>
-                <a:cs typeface="Segoe UI Semibold"/>
-              </a:rPr>
-              <a:t>Диск: VirtIO SCSI + галка </a:t>
-            </a:r>
-            <a:r>
-              <a:rPr lang="ru-RU" sz="1800" b="0" i="0" u="none" strike="noStrike" cap="none" spc="0">
-                <a:solidFill>
-                  <a:schemeClr val="bg1"/>
-                </a:solidFill>
-                <a:latin typeface="Segoe UI Semibold"/>
-                <a:ea typeface="Segoe UI Semibold"/>
-                <a:cs typeface="Segoe UI Semibold"/>
-              </a:rPr>
-              <a:t>Discard</a:t>
-            </a:r>
-            <a:r>
-              <a:rPr lang="ru-RU" sz="1800" b="0" i="0" u="none" strike="noStrike" cap="none" spc="0">
-                <a:solidFill>
-                  <a:schemeClr val="bg1"/>
-                </a:solidFill>
-                <a:latin typeface="Segoe UI Semibold"/>
-                <a:ea typeface="Segoe UI Semibold"/>
-                <a:cs typeface="Segoe UI Semibold"/>
-              </a:rPr>
-              <a:t>:</a:t>
+              <a:rPr lang="ru-RU" sz="1600" b="0" i="0" u="none" strike="noStrike" cap="none" spc="0">
+                <a:solidFill>
+                  <a:schemeClr val="bg1"/>
+                </a:solidFill>
+                <a:latin typeface="Segoe UI Semibold"/>
+                <a:ea typeface="Segoe UI Semibold"/>
+                <a:cs typeface="Segoe UI Semibold"/>
+              </a:rPr>
+              <a:t>iface eno1 inet manual</a:t>
             </a:r>
             <a:br>
-              <a:rPr lang="ru-RU" sz="1800" b="0" i="0" u="none" strike="noStrike" cap="none" spc="0">
+              <a:rPr lang="ru-RU" sz="1600" b="0" i="0" u="none" strike="noStrike" cap="none" spc="0">
                 <a:solidFill>
                   <a:schemeClr val="bg1"/>
                 </a:solidFill>
@@ -7834,18 +7939,7 @@
                 <a:cs typeface="Segoe UI Semibold"/>
               </a:rPr>
             </a:br>
-            <a:r>
-              <a:rPr lang="ru-RU" sz="1800" b="0" i="0" u="none" strike="noStrike" cap="none" spc="0">
-                <a:solidFill>
-                  <a:schemeClr val="bg1"/>
-                </a:solidFill>
-                <a:latin typeface="Segoe UI Semibold"/>
-                <a:ea typeface="Segoe UI Semibold"/>
-                <a:cs typeface="Segoe UI Semibold"/>
-              </a:rPr>
-              <a:t>Включает команду TRIM для нашего LVM-Thin, чтобы удаленные логи роутера реально освобождали место на SSD.</a:t>
-            </a:r>
-            <a:endParaRPr sz="1800" b="0" i="0" u="none" strike="noStrike" cap="none" spc="0">
+            <a:endParaRPr sz="1600" b="0" i="0" u="none" strike="noStrike" cap="none" spc="0">
               <a:solidFill>
                 <a:schemeClr val="bg1"/>
               </a:solidFill>
@@ -7867,18 +7961,18 @@
               <a:defRPr/>
             </a:pPr>
             <a:r>
-              <a:rPr lang="ru-RU" sz="1800" b="0" i="0" u="none" strike="noStrike" cap="none" spc="0">
-                <a:solidFill>
-                  <a:schemeClr val="bg1"/>
-                </a:solidFill>
-                <a:latin typeface="Segoe UI Semibold"/>
-                <a:ea typeface="Segoe UI Semibold"/>
-                <a:cs typeface="Segoe UI Semibold"/>
-              </a:rPr>
-              <a:t>QEMU Guest Agent:</a:t>
+              <a:rPr lang="ru-RU" sz="1600" b="0" i="0" u="none" strike="noStrike" cap="none" spc="0">
+                <a:solidFill>
+                  <a:schemeClr val="bg1"/>
+                </a:solidFill>
+                <a:latin typeface="Segoe UI Semibold"/>
+                <a:ea typeface="Segoe UI Semibold"/>
+                <a:cs typeface="Segoe UI Semibold"/>
+              </a:rPr>
+              <a:t>iface eno2 inet manual</a:t>
             </a:r>
             <a:br>
-              <a:rPr lang="ru-RU" sz="1800" b="0" i="0" u="none" strike="noStrike" cap="none" spc="0">
+              <a:rPr lang="ru-RU" sz="1600" b="0" i="0" u="none" strike="noStrike" cap="none" spc="0">
                 <a:solidFill>
                   <a:schemeClr val="bg1"/>
                 </a:solidFill>
@@ -7887,40 +7981,7 @@
                 <a:cs typeface="Segoe UI Semibold"/>
               </a:rPr>
             </a:br>
-            <a:r>
-              <a:rPr lang="ru-RU" sz="1800" b="0" i="0" u="none" strike="noStrike" cap="none" spc="0">
-                <a:solidFill>
-                  <a:schemeClr val="bg1"/>
-                </a:solidFill>
-                <a:latin typeface="Segoe UI Semibold"/>
-                <a:ea typeface="Segoe UI Semibold"/>
-                <a:cs typeface="Segoe UI Semibold"/>
-              </a:rPr>
-              <a:t>Ставим плагин </a:t>
-            </a:r>
-            <a:r>
-              <a:rPr lang="ru-RU" sz="1800" b="0" i="0" u="none" strike="noStrike" cap="none" spc="0">
-                <a:solidFill>
-                  <a:schemeClr val="bg1"/>
-                </a:solidFill>
-                <a:latin typeface="Segoe UI Semibold"/>
-                <a:ea typeface="Segoe UI Semibold"/>
-                <a:cs typeface="Segoe UI Semibold"/>
-              </a:rPr>
-              <a:t>os-qemu-guest-agent</a:t>
-            </a:r>
-            <a:r>
-              <a:rPr lang="ru-RU" sz="1800" b="0" i="0" u="none" strike="noStrike" cap="none" spc="0">
-                <a:solidFill>
-                  <a:schemeClr val="bg1"/>
-                </a:solidFill>
-                <a:latin typeface="Segoe UI Semibold"/>
-                <a:ea typeface="Segoe UI Semibold"/>
-                <a:cs typeface="Segoe UI Semibold"/>
-              </a:rPr>
-              <a:t> в OPNsense для красивого отображения IP в вебке PVE и мягкого выключения без повреждения базы.</a:t>
-            </a:r>
-            <a:endParaRPr sz="1800">
+            <a:endParaRPr sz="1600" b="0" i="0" u="none" strike="noStrike" cap="none" spc="0">
               <a:solidFill>
                 <a:schemeClr val="bg1"/>
               </a:solidFill>
@@ -7928,18 +7989,338 @@
               <a:cs typeface="Segoe UI Semibold"/>
             </a:endParaRPr>
           </a:p>
-        </p:txBody>
-      </p:sp>
-      <p:sp>
-        <p:nvSpPr>
-          <p:cNvPr id="635571759" name=""/>
+          <a:p>
+            <a:pPr marL="0" marR="0" indent="0" algn="l">
+              <a:lnSpc>
+                <a:spcPct val="100000"/>
+              </a:lnSpc>
+              <a:spcBef>
+                <a:spcPts val="0"/>
+              </a:spcBef>
+              <a:spcAft>
+                <a:spcPts val="0"/>
+              </a:spcAft>
+              <a:defRPr/>
+            </a:pPr>
+            <a:r>
+              <a:rPr lang="ru-RU" sz="1600" b="0" i="0" u="none" strike="noStrike" cap="none" spc="0">
+                <a:solidFill>
+                  <a:schemeClr val="bg1"/>
+                </a:solidFill>
+                <a:latin typeface="Segoe UI Semibold"/>
+                <a:ea typeface="Segoe UI Semibold"/>
+                <a:cs typeface="Segoe UI Semibold"/>
+              </a:rPr>
+              <a:t>auto vmbr0</a:t>
+            </a:r>
+            <a:endParaRPr sz="1600" b="0" i="0" u="none" strike="noStrike" cap="none" spc="0">
+              <a:solidFill>
+                <a:schemeClr val="bg1"/>
+              </a:solidFill>
+              <a:latin typeface="Segoe UI Semibold"/>
+              <a:cs typeface="Segoe UI Semibold"/>
+            </a:endParaRPr>
+          </a:p>
+          <a:p>
+            <a:pPr marL="0" marR="0" indent="0" algn="l">
+              <a:lnSpc>
+                <a:spcPct val="100000"/>
+              </a:lnSpc>
+              <a:spcBef>
+                <a:spcPts val="0"/>
+              </a:spcBef>
+              <a:spcAft>
+                <a:spcPts val="0"/>
+              </a:spcAft>
+              <a:defRPr/>
+            </a:pPr>
+            <a:r>
+              <a:rPr lang="ru-RU" sz="1600" b="0" i="0" u="none" strike="noStrike" cap="none" spc="0">
+                <a:solidFill>
+                  <a:schemeClr val="bg1"/>
+                </a:solidFill>
+                <a:latin typeface="Segoe UI Semibold"/>
+                <a:ea typeface="Segoe UI Semibold"/>
+                <a:cs typeface="Segoe UI Semibold"/>
+              </a:rPr>
+              <a:t>iface vmbr0 inet static</a:t>
+            </a:r>
+            <a:endParaRPr sz="1600" b="0" i="0" u="none" strike="noStrike" cap="none" spc="0">
+              <a:solidFill>
+                <a:schemeClr val="bg1"/>
+              </a:solidFill>
+              <a:latin typeface="Segoe UI Semibold"/>
+              <a:cs typeface="Segoe UI Semibold"/>
+            </a:endParaRPr>
+          </a:p>
+          <a:p>
+            <a:pPr marL="0" marR="0" indent="0" algn="l">
+              <a:lnSpc>
+                <a:spcPct val="100000"/>
+              </a:lnSpc>
+              <a:spcBef>
+                <a:spcPts val="0"/>
+              </a:spcBef>
+              <a:spcAft>
+                <a:spcPts val="0"/>
+              </a:spcAft>
+              <a:defRPr/>
+            </a:pPr>
+            <a:r>
+              <a:rPr lang="ru-RU" sz="1600" b="0" i="0" u="none" strike="noStrike" cap="none" spc="0">
+                <a:solidFill>
+                  <a:schemeClr val="bg1"/>
+                </a:solidFill>
+                <a:latin typeface="Segoe UI Semibold"/>
+                <a:ea typeface="Segoe UI Semibold"/>
+                <a:cs typeface="Segoe UI Semibold"/>
+              </a:rPr>
+              <a:t>    address 192.168.1.10/24</a:t>
+            </a:r>
+            <a:endParaRPr sz="1600" b="0" i="0" u="none" strike="noStrike" cap="none" spc="0">
+              <a:solidFill>
+                <a:schemeClr val="bg1"/>
+              </a:solidFill>
+              <a:latin typeface="Segoe UI Semibold"/>
+              <a:cs typeface="Segoe UI Semibold"/>
+            </a:endParaRPr>
+          </a:p>
+          <a:p>
+            <a:pPr marL="0" marR="0" indent="0" algn="l">
+              <a:lnSpc>
+                <a:spcPct val="100000"/>
+              </a:lnSpc>
+              <a:spcBef>
+                <a:spcPts val="0"/>
+              </a:spcBef>
+              <a:spcAft>
+                <a:spcPts val="0"/>
+              </a:spcAft>
+              <a:defRPr/>
+            </a:pPr>
+            <a:r>
+              <a:rPr lang="ru-RU" sz="1600" b="0" i="0" u="none" strike="noStrike" cap="none" spc="0">
+                <a:solidFill>
+                  <a:schemeClr val="bg1"/>
+                </a:solidFill>
+                <a:latin typeface="Segoe UI Semibold"/>
+                <a:ea typeface="Segoe UI Semibold"/>
+                <a:cs typeface="Segoe UI Semibold"/>
+              </a:rPr>
+              <a:t>    gateway 192.168.1.1</a:t>
+            </a:r>
+            <a:endParaRPr sz="1600" b="0" i="0" u="none" strike="noStrike" cap="none" spc="0">
+              <a:solidFill>
+                <a:schemeClr val="bg1"/>
+              </a:solidFill>
+              <a:latin typeface="Segoe UI Semibold"/>
+              <a:cs typeface="Segoe UI Semibold"/>
+            </a:endParaRPr>
+          </a:p>
+          <a:p>
+            <a:pPr marL="0" marR="0" indent="0" algn="l">
+              <a:lnSpc>
+                <a:spcPct val="100000"/>
+              </a:lnSpc>
+              <a:spcBef>
+                <a:spcPts val="0"/>
+              </a:spcBef>
+              <a:spcAft>
+                <a:spcPts val="0"/>
+              </a:spcAft>
+              <a:defRPr/>
+            </a:pPr>
+            <a:r>
+              <a:rPr lang="ru-RU" sz="1600" b="0" i="0" u="none" strike="noStrike" cap="none" spc="0">
+                <a:solidFill>
+                  <a:schemeClr val="bg1"/>
+                </a:solidFill>
+                <a:latin typeface="Segoe UI Semibold"/>
+                <a:ea typeface="Segoe UI Semibold"/>
+                <a:cs typeface="Segoe UI Semibold"/>
+              </a:rPr>
+              <a:t>    bridge-ports eno1</a:t>
+            </a:r>
+            <a:endParaRPr sz="1600" b="0" i="0" u="none" strike="noStrike" cap="none" spc="0">
+              <a:solidFill>
+                <a:schemeClr val="bg1"/>
+              </a:solidFill>
+              <a:latin typeface="Segoe UI Semibold"/>
+              <a:cs typeface="Segoe UI Semibold"/>
+            </a:endParaRPr>
+          </a:p>
+          <a:p>
+            <a:pPr marL="0" marR="0" indent="0" algn="l">
+              <a:lnSpc>
+                <a:spcPct val="100000"/>
+              </a:lnSpc>
+              <a:spcBef>
+                <a:spcPts val="0"/>
+              </a:spcBef>
+              <a:spcAft>
+                <a:spcPts val="0"/>
+              </a:spcAft>
+              <a:defRPr/>
+            </a:pPr>
+            <a:r>
+              <a:rPr lang="ru-RU" sz="1600" b="0" i="0" u="none" strike="noStrike" cap="none" spc="0">
+                <a:solidFill>
+                  <a:schemeClr val="bg1"/>
+                </a:solidFill>
+                <a:latin typeface="Segoe UI Semibold"/>
+                <a:ea typeface="Segoe UI Semibold"/>
+                <a:cs typeface="Segoe UI Semibold"/>
+              </a:rPr>
+              <a:t>    bridge-stp off</a:t>
+            </a:r>
+            <a:endParaRPr sz="1600" b="0" i="0" u="none" strike="noStrike" cap="none" spc="0">
+              <a:solidFill>
+                <a:schemeClr val="bg1"/>
+              </a:solidFill>
+              <a:latin typeface="Segoe UI Semibold"/>
+              <a:cs typeface="Segoe UI Semibold"/>
+            </a:endParaRPr>
+          </a:p>
+          <a:p>
+            <a:pPr marL="0" marR="0" indent="0" algn="l">
+              <a:lnSpc>
+                <a:spcPct val="100000"/>
+              </a:lnSpc>
+              <a:spcBef>
+                <a:spcPts val="0"/>
+              </a:spcBef>
+              <a:spcAft>
+                <a:spcPts val="0"/>
+              </a:spcAft>
+              <a:defRPr/>
+            </a:pPr>
+            <a:r>
+              <a:rPr lang="ru-RU" sz="1600" b="0" i="0" u="none" strike="noStrike" cap="none" spc="0">
+                <a:solidFill>
+                  <a:schemeClr val="bg1"/>
+                </a:solidFill>
+                <a:latin typeface="Segoe UI Semibold"/>
+                <a:ea typeface="Segoe UI Semibold"/>
+                <a:cs typeface="Segoe UI Semibold"/>
+              </a:rPr>
+              <a:t>    bridge-fd 0</a:t>
+            </a:r>
+            <a:endParaRPr sz="1600" b="0" i="0" u="none" strike="noStrike" cap="none" spc="0">
+              <a:solidFill>
+                <a:schemeClr val="bg1"/>
+              </a:solidFill>
+              <a:latin typeface="Segoe UI Semibold"/>
+              <a:cs typeface="Segoe UI Semibold"/>
+            </a:endParaRPr>
+          </a:p>
+          <a:p>
+            <a:pPr marL="0" marR="0" indent="0" algn="l">
+              <a:lnSpc>
+                <a:spcPct val="100000"/>
+              </a:lnSpc>
+              <a:spcBef>
+                <a:spcPts val="0"/>
+              </a:spcBef>
+              <a:spcAft>
+                <a:spcPts val="0"/>
+              </a:spcAft>
+              <a:defRPr/>
+            </a:pPr>
+            <a:r>
+              <a:rPr lang="ru-RU" sz="1600" b="0" i="0" u="none" strike="noStrike" cap="none" spc="0">
+                <a:solidFill>
+                  <a:schemeClr val="bg1"/>
+                </a:solidFill>
+                <a:latin typeface="Segoe UI Semibold"/>
+                <a:ea typeface="Segoe UI Semibold"/>
+                <a:cs typeface="Segoe UI Semibold"/>
+              </a:rPr>
+              <a:t>    bridge-vlan-aware yes</a:t>
+            </a:r>
+            <a:endParaRPr sz="1600" b="0" i="0" u="none" strike="noStrike" cap="none" spc="0">
+              <a:solidFill>
+                <a:schemeClr val="bg1"/>
+              </a:solidFill>
+              <a:latin typeface="Segoe UI Semibold"/>
+              <a:cs typeface="Segoe UI Semibold"/>
+            </a:endParaRPr>
+          </a:p>
+          <a:p>
+            <a:pPr marL="0" marR="0" indent="0" algn="l">
+              <a:lnSpc>
+                <a:spcPct val="100000"/>
+              </a:lnSpc>
+              <a:spcBef>
+                <a:spcPts val="0"/>
+              </a:spcBef>
+              <a:spcAft>
+                <a:spcPts val="0"/>
+              </a:spcAft>
+              <a:defRPr/>
+            </a:pPr>
+            <a:r>
+              <a:rPr lang="ru-RU" sz="1600" b="0" i="0" u="none" strike="noStrike" cap="none" spc="0">
+                <a:solidFill>
+                  <a:schemeClr val="bg1"/>
+                </a:solidFill>
+                <a:latin typeface="Segoe UI Semibold"/>
+                <a:ea typeface="Segoe UI Semibold"/>
+                <a:cs typeface="Segoe UI Semibold"/>
+              </a:rPr>
+              <a:t>    bridge-vids 2-4094</a:t>
+            </a:r>
+            <a:endParaRPr sz="1600" b="0" i="0" u="none" strike="noStrike" cap="none" spc="0">
+              <a:solidFill>
+                <a:schemeClr val="bg1"/>
+              </a:solidFill>
+              <a:latin typeface="Segoe UI Semibold"/>
+              <a:cs typeface="Segoe UI Semibold"/>
+            </a:endParaRPr>
+          </a:p>
+          <a:p>
+            <a:pPr marL="0" marR="0" indent="0" algn="l">
+              <a:lnSpc>
+                <a:spcPct val="100000"/>
+              </a:lnSpc>
+              <a:spcBef>
+                <a:spcPts val="0"/>
+              </a:spcBef>
+              <a:spcAft>
+                <a:spcPts val="0"/>
+              </a:spcAft>
+              <a:defRPr/>
+            </a:pPr>
+            <a:r>
+              <a:rPr lang="ru-RU" sz="1600" b="0" i="0" u="none" strike="noStrike" cap="none" spc="0">
+                <a:solidFill>
+                  <a:schemeClr val="bg1"/>
+                </a:solidFill>
+                <a:latin typeface="Segoe UI Semibold"/>
+                <a:ea typeface="Segoe UI Semibold"/>
+                <a:cs typeface="Segoe UI Semibold"/>
+              </a:rPr>
+              <a:t>    comment "LAN"</a:t>
+            </a:r>
+            <a:endParaRPr sz="1600" b="0" i="0" u="none" strike="noStrike" cap="none" spc="0">
+              <a:solidFill>
+                <a:schemeClr val="bg1"/>
+              </a:solidFill>
+              <a:latin typeface="Segoe UI Semibold"/>
+              <a:cs typeface="Segoe UI Semibold"/>
+            </a:endParaRPr>
+          </a:p>
+        </p:txBody>
+      </p:sp>
+      <p:sp>
+        <p:nvSpPr>
+          <p:cNvPr id="1184039900" name=""/>
           <p:cNvSpPr txBox="1"/>
           <p:nvPr/>
         </p:nvSpPr>
         <p:spPr bwMode="auto">
           <a:xfrm rot="0" flipH="0" flipV="0">
-            <a:off x="6328179" y="1385357"/>
-            <a:ext cx="5865394" cy="4831790"/>
+            <a:off x="4790367" y="1690687"/>
+            <a:ext cx="2655708" cy="1737359"/>
           </a:xfrm>
           <a:prstGeom prst="rect">
             <a:avLst/>
@@ -7947,32 +8328,7 @@
           <a:noFill/>
         </p:spPr>
         <p:txBody>
-          <a:bodyPr vertOverflow="overflow" horzOverflow="overflow" vert="vert" wrap="square" lIns="91440" tIns="45720" rIns="91440" bIns="45720" numCol="1" spcCol="0" rtlCol="0" fromWordArt="0" anchor="t" anchorCtr="0" forceAA="0" upright="0" compatLnSpc="0">
-            <a:spAutoFit/>
-          </a:bodyPr>
-          <a:p>
-            <a:pPr>
-              <a:defRPr/>
-            </a:pPr>
-            <a:endParaRPr/>
-          </a:p>
-        </p:txBody>
-      </p:sp>
-      <p:sp>
-        <p:nvSpPr>
-          <p:cNvPr id="1398111944" name=""/>
-          <p:cNvSpPr/>
-          <p:nvPr/>
-        </p:nvSpPr>
-        <p:spPr bwMode="auto">
-          <a:xfrm flipH="0" flipV="0">
-            <a:off x="6561611" y="1461907"/>
-            <a:ext cx="5586857" cy="3396825"/>
-          </a:xfrm>
-        </p:spPr>
-        <p:txBody>
-          <a:bodyPr rot="0" spcFirstLastPara="0" vertOverflow="overflow" horzOverflow="overflow" vert="horz" wrap="square" lIns="91440" tIns="45720" rIns="91440" bIns="45720" numCol="1" spcCol="0" rtlCol="0" fromWordArt="0" anchor="t" anchorCtr="0" forceAA="0" upright="0" compatLnSpc="1">
-            <a:prstTxWarp prst="textNoShape"/>
+          <a:bodyPr vertOverflow="overflow" horzOverflow="overflow" vert="horz" wrap="square" lIns="91440" tIns="45720" rIns="91440" bIns="45720" numCol="1" spcCol="0" rtlCol="0" fromWordArt="0" anchor="t" anchorCtr="0" forceAA="0" upright="0" compatLnSpc="0">
             <a:spAutoFit/>
           </a:bodyPr>
           <a:p>
@@ -7989,17 +8345,17 @@
               <a:defRPr/>
             </a:pPr>
             <a:r>
-              <a:rPr lang="ru-RU" sz="1800" b="0" i="0" u="none" strike="noStrike" cap="none" spc="0">
-                <a:solidFill>
-                  <a:schemeClr val="bg1"/>
-                </a:solidFill>
-                <a:latin typeface="Segoe UI Semibold"/>
-                <a:ea typeface="Segoe UI Semibold"/>
-                <a:cs typeface="Segoe UI Semibold"/>
-              </a:rPr>
-              <a:t> ⚠️ ГРАБЛЯ ВЕКА: Checksum Offloading                                                       Симптом: Роутер работает, но интернет на клиентах умирает, картинки не грузятся, сайты открываются через один.                                           </a:t>
-            </a:r>
-            <a:endParaRPr lang="ru-RU" sz="1800" b="0" i="0" u="none" strike="noStrike" cap="none" spc="0">
+              <a:rPr lang="ru-RU" b="0" i="0" u="none" strike="noStrike" cap="none" spc="0">
+                <a:solidFill>
+                  <a:schemeClr val="bg1"/>
+                </a:solidFill>
+                <a:latin typeface="Segoe UI Semibold"/>
+                <a:ea typeface="Segoe UI Semibold"/>
+                <a:cs typeface="Segoe UI Semibold"/>
+              </a:rPr>
+              <a:t>auto vmbr1</a:t>
+            </a:r>
+            <a:endParaRPr sz="1600" b="0" i="0" u="none" strike="noStrike" cap="none" spc="0">
               <a:solidFill>
                 <a:schemeClr val="bg1"/>
               </a:solidFill>
@@ -8021,17 +8377,17 @@
               <a:defRPr/>
             </a:pPr>
             <a:r>
-              <a:rPr lang="ru-RU" sz="1800" b="0" i="0" u="none" strike="noStrike" cap="none" spc="0">
-                <a:solidFill>
-                  <a:schemeClr val="bg1"/>
-                </a:solidFill>
-                <a:latin typeface="Segoe UI Semibold"/>
-                <a:ea typeface="Segoe UI Semibold"/>
-                <a:cs typeface="Segoe UI Semibold"/>
-              </a:rPr>
-              <a:t>Причина: FreeBSD пытается переложить расчет сумм на чип сетевухи, а у нас VirtIO. Пакеты бьются и дропаются.                                                   ЛЕЧЕНИЕ В OPNsense: </a:t>
-            </a:r>
-            <a:endParaRPr lang="ru-RU" sz="1800" b="0" i="0" u="none" strike="noStrike" cap="none" spc="0">
+              <a:rPr lang="ru-RU" b="0" i="0" u="none" strike="noStrike" cap="none" spc="0">
+                <a:solidFill>
+                  <a:schemeClr val="bg1"/>
+                </a:solidFill>
+                <a:latin typeface="Segoe UI Semibold"/>
+                <a:ea typeface="Segoe UI Semibold"/>
+                <a:cs typeface="Segoe UI Semibold"/>
+              </a:rPr>
+              <a:t>iface vmbr1 inet manual</a:t>
+            </a:r>
+            <a:endParaRPr sz="1600" b="0" i="0" u="none" strike="noStrike" cap="none" spc="0">
               <a:solidFill>
                 <a:schemeClr val="bg1"/>
               </a:solidFill>
@@ -8053,28 +8409,17 @@
               <a:defRPr/>
             </a:pPr>
             <a:r>
-              <a:rPr lang="ru-RU" sz="1800" b="0" i="0" u="none" strike="noStrike" cap="none" spc="0">
-                <a:solidFill>
-                  <a:schemeClr val="bg1"/>
-                </a:solidFill>
-                <a:latin typeface="Segoe UI Semibold"/>
-                <a:ea typeface="Segoe UI Semibold"/>
-                <a:cs typeface="Segoe UI Semibold"/>
-              </a:rPr>
-              <a:t>System</a:t>
-            </a:r>
-            <a:r>
-              <a:rPr lang="ru-RU" sz="1800" b="0" i="0" u="none" strike="noStrike" cap="none" spc="0">
-                <a:solidFill>
-                  <a:schemeClr val="bg1"/>
-                </a:solidFill>
-                <a:latin typeface="Segoe UI Semibold"/>
-                <a:ea typeface="Segoe UI Semibold"/>
-                <a:cs typeface="Segoe UI Semibold"/>
-              </a:rPr>
-              <a:t> ➔ Settings ➔ Networking:                  </a:t>
-            </a:r>
-            <a:endParaRPr lang="ru-RU" sz="1800" b="0" i="0" u="none" strike="noStrike" cap="none" spc="0">
+              <a:rPr lang="ru-RU" b="0" i="0" u="none" strike="noStrike" cap="none" spc="0">
+                <a:solidFill>
+                  <a:schemeClr val="bg1"/>
+                </a:solidFill>
+                <a:latin typeface="Segoe UI Semibold"/>
+                <a:ea typeface="Segoe UI Semibold"/>
+                <a:cs typeface="Segoe UI Semibold"/>
+              </a:rPr>
+              <a:t>    bridge-ports eno2</a:t>
+            </a:r>
+            <a:endParaRPr sz="1600" b="0" i="0" u="none" strike="noStrike" cap="none" spc="0">
               <a:solidFill>
                 <a:schemeClr val="bg1"/>
               </a:solidFill>
@@ -8096,17 +8441,17 @@
               <a:defRPr/>
             </a:pPr>
             <a:r>
-              <a:rPr lang="ru-RU" sz="1800" b="0" i="0" u="none" strike="noStrike" cap="none" spc="0">
-                <a:solidFill>
-                  <a:schemeClr val="bg1"/>
-                </a:solidFill>
-                <a:latin typeface="Segoe UI Semibold"/>
-                <a:ea typeface="Segoe UI Semibold"/>
-                <a:cs typeface="Segoe UI Semibold"/>
-              </a:rPr>
-              <a:t>Disable Hardware Checksum Offload            </a:t>
-            </a:r>
-            <a:endParaRPr lang="ru-RU" sz="1800" b="0" i="0" u="none" strike="noStrike" cap="none" spc="0">
+              <a:rPr lang="ru-RU" b="0" i="0" u="none" strike="noStrike" cap="none" spc="0">
+                <a:solidFill>
+                  <a:schemeClr val="bg1"/>
+                </a:solidFill>
+                <a:latin typeface="Segoe UI Semibold"/>
+                <a:ea typeface="Segoe UI Semibold"/>
+                <a:cs typeface="Segoe UI Semibold"/>
+              </a:rPr>
+              <a:t>    bridge-stp off</a:t>
+            </a:r>
+            <a:endParaRPr sz="1600" b="0" i="0" u="none" strike="noStrike" cap="none" spc="0">
               <a:solidFill>
                 <a:schemeClr val="bg1"/>
               </a:solidFill>
@@ -8128,17 +8473,17 @@
               <a:defRPr/>
             </a:pPr>
             <a:r>
-              <a:rPr lang="ru-RU" sz="1800" b="0" i="0" u="none" strike="noStrike" cap="none" spc="0">
-                <a:solidFill>
-                  <a:schemeClr val="bg1"/>
-                </a:solidFill>
-                <a:latin typeface="Segoe UI Semibold"/>
-                <a:ea typeface="Segoe UI Semibold"/>
-                <a:cs typeface="Segoe UI Semibold"/>
-              </a:rPr>
-              <a:t>Disable Hardware TCP Segmentation Offload (TSO) </a:t>
-            </a:r>
-            <a:endParaRPr lang="ru-RU" sz="1800" b="0" i="0" u="none" strike="noStrike" cap="none" spc="0">
+              <a:rPr lang="ru-RU" b="0" i="0" u="none" strike="noStrike" cap="none" spc="0">
+                <a:solidFill>
+                  <a:schemeClr val="bg1"/>
+                </a:solidFill>
+                <a:latin typeface="Segoe UI Semibold"/>
+                <a:ea typeface="Segoe UI Semibold"/>
+                <a:cs typeface="Segoe UI Semibold"/>
+              </a:rPr>
+              <a:t>    bridge-fd 0</a:t>
+            </a:r>
+            <a:endParaRPr sz="1600" b="0" i="0" u="none" strike="noStrike" cap="none" spc="0">
               <a:solidFill>
                 <a:schemeClr val="bg1"/>
               </a:solidFill>
@@ -8160,53 +8505,48 @@
               <a:defRPr/>
             </a:pPr>
             <a:r>
-              <a:rPr lang="ru-RU" sz="1800" b="0" i="0" u="none" strike="noStrike" cap="none" spc="0">
-                <a:solidFill>
-                  <a:schemeClr val="bg1"/>
-                </a:solidFill>
-                <a:latin typeface="Segoe UI Semibold"/>
-                <a:ea typeface="Segoe UI Semibold"/>
-                <a:cs typeface="Segoe UI Semibold"/>
-              </a:rPr>
-              <a:t>Disable Hardware </a:t>
-            </a:r>
-            <a:r>
-              <a:rPr lang="ru-RU" sz="1800" b="0" i="0" u="none" strike="noStrike" cap="none" spc="0">
-                <a:solidFill>
-                  <a:schemeClr val="bg1"/>
-                </a:solidFill>
-                <a:latin typeface="Segoe UI Semibold"/>
-                <a:ea typeface="Segoe UI Semibold"/>
-                <a:cs typeface="Segoe UI Semibold"/>
-              </a:rPr>
-              <a:t>Large</a:t>
-            </a:r>
-            <a:r>
-              <a:rPr lang="ru-RU" sz="1800" b="0" i="0" u="none" strike="noStrike" cap="none" spc="0">
-                <a:solidFill>
-                  <a:schemeClr val="bg1"/>
-                </a:solidFill>
-                <a:latin typeface="Segoe UI Semibold"/>
-                <a:ea typeface="Segoe UI Semibold"/>
-                <a:cs typeface="Segoe UI Semibold"/>
-              </a:rPr>
-              <a:t> Receive Offload (LRO)   </a:t>
-            </a:r>
-            <a:r>
-              <a:rPr sz="1000" b="0" i="0" u="none">
-                <a:solidFill>
-                  <a:srgbClr val="D4D4D4"/>
-                </a:solidFill>
-                <a:latin typeface="Courier New"/>
-                <a:ea typeface="Courier New"/>
-                <a:cs typeface="Courier New"/>
-              </a:rPr>
-              <a:t>    </a:t>
-            </a:r>
-            <a:endParaRPr/>
-          </a:p>
-        </p:txBody>
-      </p:sp>
+              <a:rPr lang="ru-RU" b="0" i="0" u="none" strike="noStrike" cap="none" spc="0">
+                <a:solidFill>
+                  <a:schemeClr val="bg1"/>
+                </a:solidFill>
+                <a:latin typeface="Segoe UI Semibold"/>
+                <a:ea typeface="Segoe UI Semibold"/>
+                <a:cs typeface="Segoe UI Semibold"/>
+              </a:rPr>
+              <a:t>    comment "WAN"</a:t>
+            </a:r>
+            <a:endParaRPr sz="1600">
+              <a:solidFill>
+                <a:schemeClr val="bg1"/>
+              </a:solidFill>
+              <a:latin typeface="Segoe UI Semibold"/>
+              <a:cs typeface="Segoe UI Semibold"/>
+            </a:endParaRPr>
+          </a:p>
+        </p:txBody>
+      </p:sp>
+      <p:pic>
+        <p:nvPicPr>
+          <p:cNvPr id="675403935" name=""/>
+          <p:cNvPicPr>
+            <a:picLocks noChangeAspect="1"/>
+          </p:cNvPicPr>
+          <p:nvPr/>
+        </p:nvPicPr>
+        <p:blipFill rotWithShape="1">
+          <a:blip r:embed="rId4"/>
+          <a:stretch/>
+        </p:blipFill>
+        <p:spPr bwMode="auto">
+          <a:xfrm flipH="0" flipV="0">
+            <a:off x="7446074" y="3446207"/>
+            <a:ext cx="4325713" cy="2865499"/>
+          </a:xfrm>
+          <a:prstGeom prst="rect">
+            <a:avLst/>
+          </a:prstGeom>
+        </p:spPr>
+      </p:pic>
     </p:spTree>
   </p:cSld>
   <p:clrMapOvr>
@@ -8242,7 +8582,7 @@
       </p:grpSpPr>
       <p:sp>
         <p:nvSpPr>
-          <p:cNvPr id="1582233496" name="Заголовок 1"/>
+          <p:cNvPr id="1409465019" name="Заголовок 1"/>
           <p:cNvSpPr>
             <a:spLocks noGrp="1"/>
           </p:cNvSpPr>
@@ -8264,13 +8604,13 @@
       </p:sp>
       <p:pic>
         <p:nvPicPr>
-          <p:cNvPr id="2047618653" name=""/>
+          <p:cNvPr id="1683196019" name=""/>
           <p:cNvPicPr>
             <a:picLocks noChangeAspect="1"/>
           </p:cNvPicPr>
           <p:nvPr/>
         </p:nvPicPr>
-        <p:blipFill>
+        <p:blipFill rotWithShape="1">
           <a:blip r:embed="rId3"/>
           <a:stretch/>
         </p:blipFill>
@@ -8286,14 +8626,14 @@
       </p:pic>
       <p:sp>
         <p:nvSpPr>
-          <p:cNvPr id="1416534852" name=""/>
+          <p:cNvPr id="240895364" name=""/>
           <p:cNvSpPr txBox="1"/>
           <p:nvPr/>
         </p:nvSpPr>
         <p:spPr bwMode="auto">
           <a:xfrm rot="0" flipH="0" flipV="0">
             <a:off x="464358" y="244390"/>
-            <a:ext cx="8654177" cy="1189079"/>
+            <a:ext cx="8653817" cy="1189079"/>
           </a:xfrm>
           <a:prstGeom prst="rect">
             <a:avLst/>
@@ -8326,7 +8666,11 @@
                 <a:ea typeface="Segoe UI Semibold"/>
                 <a:cs typeface="Segoe UI Semibold"/>
               </a:rPr>
-              <a:t>ШАГ 3: Кластеризация, кворум и ловушка двух нод</a:t>
+              <a:t>ШАГ 2: Тонкий тюнинг OPNsense и «грабля века»</a:t>
+            </a:r>
+            <a:r>
+              <a:rPr/>
+              <a:t>    </a:t>
             </a:r>
             <a:endParaRPr/>
           </a:p>
@@ -8334,14 +8678,14 @@
       </p:sp>
       <p:sp>
         <p:nvSpPr>
-          <p:cNvPr id="1334405894" name=""/>
+          <p:cNvPr id="297649900" name=""/>
           <p:cNvSpPr txBox="1"/>
           <p:nvPr/>
         </p:nvSpPr>
         <p:spPr bwMode="auto">
           <a:xfrm rot="0" flipH="0" flipV="0">
-            <a:off x="608486" y="1433471"/>
-            <a:ext cx="8022852" cy="5288050"/>
+            <a:off x="608486" y="1461907"/>
+            <a:ext cx="5396131" cy="4755240"/>
           </a:xfrm>
           <a:prstGeom prst="rect">
             <a:avLst/>
@@ -8366,18 +8710,40 @@
               <a:defRPr/>
             </a:pPr>
             <a:r>
-              <a:rPr lang="ru-RU" sz="2000" b="0" i="0" u="none" strike="noStrike" cap="none" spc="0">
-                <a:solidFill>
-                  <a:schemeClr val="bg1"/>
-                </a:solidFill>
-                <a:latin typeface="Segoe UI Semibold"/>
-                <a:ea typeface="Segoe UI Semibold"/>
-                <a:cs typeface="Segoe UI Semibold"/>
-              </a:rPr>
-              <a:t>Демократия серверов (Кворум):</a:t>
+              <a:rPr lang="ru-RU" sz="1800" b="0" i="0" u="none" strike="noStrike" cap="none" spc="0">
+                <a:solidFill>
+                  <a:schemeClr val="bg1"/>
+                </a:solidFill>
+                <a:latin typeface="Segoe UI Semibold"/>
+                <a:ea typeface="Segoe UI Semibold"/>
+                <a:cs typeface="Segoe UI Semibold"/>
+              </a:rPr>
+              <a:t>CPU Type = </a:t>
+            </a:r>
+            <a:r>
+              <a:rPr lang="ru-RU" sz="1800" b="0" i="0" u="none" strike="noStrike" cap="none" spc="0">
+                <a:solidFill>
+                  <a:schemeClr val="bg1"/>
+                </a:solidFill>
+                <a:latin typeface="Segoe UI Semibold"/>
+                <a:ea typeface="Segoe UI Semibold"/>
+                <a:cs typeface="Segoe UI Semibold"/>
+              </a:rPr>
+              <a:t>host</a:t>
+            </a:r>
+            <a:r>
+              <a:rPr lang="ru-RU" sz="1800" b="0" i="0" u="none" strike="noStrike" cap="none" spc="0">
+                <a:solidFill>
+                  <a:schemeClr val="bg1"/>
+                </a:solidFill>
+                <a:latin typeface="Segoe UI Semibold"/>
+                <a:ea typeface="Segoe UI Semibold"/>
+                <a:cs typeface="Segoe UI Semibold"/>
+              </a:rPr>
+              <a:t> (ОБЯЗАТЕЛЬНО!):</a:t>
             </a:r>
             <a:br>
-              <a:rPr lang="ru-RU" sz="2000" b="0" i="0" u="none" strike="noStrike" cap="none" spc="0">
+              <a:rPr lang="ru-RU" sz="1800" b="0" i="0" u="none" strike="noStrike" cap="none" spc="0">
                 <a:solidFill>
                   <a:schemeClr val="bg1"/>
                 </a:solidFill>
@@ -8387,61 +8753,39 @@
               </a:rPr>
             </a:br>
             <a:r>
-              <a:rPr lang="ru-RU" sz="2000" b="0" i="0" u="none" strike="noStrike" cap="none" spc="0">
-                <a:solidFill>
-                  <a:schemeClr val="bg1"/>
-                </a:solidFill>
-                <a:latin typeface="Segoe UI Semibold"/>
-                <a:ea typeface="Segoe UI Semibold"/>
-                <a:cs typeface="Segoe UI Semibold"/>
-              </a:rPr>
-              <a:t>Для принятия решений и записи конфигов в кластере должно быть строго </a:t>
-            </a:r>
-            <a:r>
-              <a:rPr lang="ru-RU" sz="2000" b="0" i="0" u="none" strike="noStrike" cap="none" spc="0">
-                <a:solidFill>
-                  <a:schemeClr val="bg1"/>
-                </a:solidFill>
-                <a:latin typeface="Segoe UI Semibold"/>
-                <a:ea typeface="Segoe UI Semibold"/>
-                <a:cs typeface="Segoe UI Semibold"/>
-              </a:rPr>
-              <a:t>больше половины</a:t>
-            </a:r>
-            <a:r>
-              <a:rPr lang="ru-RU" sz="2000" b="0" i="0" u="none" strike="noStrike" cap="none" spc="0">
-                <a:solidFill>
-                  <a:schemeClr val="bg1"/>
-                </a:solidFill>
-                <a:latin typeface="Segoe UI Semibold"/>
-                <a:ea typeface="Segoe UI Semibold"/>
-                <a:cs typeface="Segoe UI Semibold"/>
-              </a:rPr>
-              <a:t> живых голосов (</a:t>
-            </a:r>
-            <a:r>
-              <a:rPr lang="ru-RU" sz="2000" b="0" i="0" u="none" strike="noStrike" cap="none" spc="0">
-                <a:solidFill>
-                  <a:schemeClr val="bg1"/>
-                </a:solidFill>
-                <a:latin typeface="Segoe UI Semibold"/>
-                <a:ea typeface="Segoe UI Semibold"/>
-                <a:cs typeface="Segoe UI Semibold"/>
-              </a:rPr>
-              <a:t>50% + 1</a:t>
-            </a:r>
-            <a:r>
-              <a:rPr lang="ru-RU" sz="2000" b="0" i="0" u="none" strike="noStrike" cap="none" spc="0">
-                <a:solidFill>
-                  <a:schemeClr val="bg1"/>
-                </a:solidFill>
-                <a:latin typeface="Segoe UI Semibold"/>
-                <a:ea typeface="Segoe UI Semibold"/>
-                <a:cs typeface="Segoe UI Semibold"/>
-              </a:rPr>
-              <a:t>).</a:t>
-            </a:r>
-            <a:endParaRPr sz="2000" b="0" i="0" u="none" strike="noStrike" cap="none" spc="0">
+              <a:rPr lang="ru-RU" sz="1800" b="0" i="0" u="none" strike="noStrike" cap="none" spc="0">
+                <a:solidFill>
+                  <a:schemeClr val="bg1"/>
+                </a:solidFill>
+                <a:latin typeface="Segoe UI Semibold"/>
+                <a:ea typeface="Segoe UI Semibold"/>
+                <a:cs typeface="Segoe UI Semibold"/>
+              </a:rPr>
+              <a:t>Пробрасывает инструкции процессора и </a:t>
+            </a:r>
+            <a:r>
+              <a:rPr lang="ru-RU" sz="1800" b="0" i="0" u="none" strike="noStrike" cap="none" spc="0">
+                <a:solidFill>
+                  <a:schemeClr val="bg1"/>
+                </a:solidFill>
+                <a:latin typeface="Segoe UI Semibold"/>
+                <a:ea typeface="Segoe UI Semibold"/>
+                <a:cs typeface="Segoe UI Semibold"/>
+              </a:rPr>
+              <a:t>AES-NI</a:t>
+            </a:r>
+            <a:r>
+              <a:rPr lang="ru-RU" sz="1800" b="0" i="0" u="none" strike="noStrike" cap="none" spc="0">
+                <a:solidFill>
+                  <a:schemeClr val="bg1"/>
+                </a:solidFill>
+                <a:latin typeface="Segoe UI Semibold"/>
+                <a:ea typeface="Segoe UI Semibold"/>
+                <a:cs typeface="Segoe UI Semibold"/>
+              </a:rPr>
+              <a:t>. Без этого WireGuard или OpenVPN сожрут процессор уже на скорости 100 Мбит/с.</a:t>
+            </a:r>
+            <a:endParaRPr sz="1800" b="0" i="0" u="none" strike="noStrike" cap="none" spc="0">
               <a:solidFill>
                 <a:schemeClr val="bg1"/>
               </a:solidFill>
@@ -8463,18 +8807,18 @@
               <a:defRPr/>
             </a:pPr>
             <a:r>
-              <a:rPr lang="ru-RU" sz="2000" b="0" i="0" u="none" strike="noStrike" cap="none" spc="0">
-                <a:solidFill>
-                  <a:schemeClr val="bg1"/>
-                </a:solidFill>
-                <a:latin typeface="Segoe UI Semibold"/>
-                <a:ea typeface="Segoe UI Semibold"/>
-                <a:cs typeface="Segoe UI Semibold"/>
-              </a:rPr>
-              <a:t>Ловушка двух нод (Split-Brain):</a:t>
+              <a:rPr lang="ru-RU" sz="1800" b="0" i="0" u="none" strike="noStrike" cap="none" spc="0">
+                <a:solidFill>
+                  <a:schemeClr val="bg1"/>
+                </a:solidFill>
+                <a:latin typeface="Segoe UI Semibold"/>
+                <a:ea typeface="Segoe UI Semibold"/>
+                <a:cs typeface="Segoe UI Semibold"/>
+              </a:rPr>
+              <a:t>Сеть: VirtIO + Multiqueue:</a:t>
             </a:r>
             <a:br>
-              <a:rPr lang="ru-RU" sz="2000" b="0" i="0" u="none" strike="noStrike" cap="none" spc="0">
+              <a:rPr lang="ru-RU" sz="1800" b="0" i="0" u="none" strike="noStrike" cap="none" spc="0">
                 <a:solidFill>
                   <a:schemeClr val="bg1"/>
                 </a:solidFill>
@@ -8484,60 +8828,17 @@
               </a:rPr>
             </a:br>
             <a:r>
-              <a:rPr lang="ru-RU" sz="2000" b="0" i="0" u="none" strike="noStrike" cap="none" spc="0">
-                <a:solidFill>
-                  <a:schemeClr val="bg1"/>
-                </a:solidFill>
-                <a:latin typeface="Segoe UI Semibold"/>
-                <a:ea typeface="Segoe UI Semibold"/>
-                <a:cs typeface="Segoe UI Semibold"/>
-              </a:rPr>
-              <a:t>Если серверов всего два, моргание сетевого свитча делит кластер пополам (1:1).</a:t>
-            </a:r>
-            <a:br>
-              <a:rPr lang="ru-RU" sz="2000" b="0" i="0" u="none" strike="noStrike" cap="none" spc="0">
-                <a:solidFill>
-                  <a:schemeClr val="bg1"/>
-                </a:solidFill>
-                <a:latin typeface="Segoe UI Semibold"/>
-                <a:ea typeface="Segoe UI Semibold"/>
-                <a:cs typeface="Segoe UI Semibold"/>
-              </a:rPr>
-            </a:br>
-            <a:r>
-              <a:rPr lang="ru-RU" sz="2000" b="0" i="0" u="none" strike="noStrike" cap="none" spc="0">
-                <a:solidFill>
-                  <a:schemeClr val="bg1"/>
-                </a:solidFill>
-                <a:latin typeface="Segoe UI Semibold"/>
-                <a:ea typeface="Segoe UI Semibold"/>
-                <a:cs typeface="Segoe UI Semibold"/>
-              </a:rPr>
-              <a:t>Ни у кого нет большинства ➔ кворум потерян ➔ кластер блокирует запись конфигов (</a:t>
-            </a:r>
-            <a:r>
-              <a:rPr lang="ru-RU" sz="2000" b="0" i="0" u="none" strike="noStrike" cap="none" spc="0">
-                <a:solidFill>
-                  <a:schemeClr val="bg1"/>
-                </a:solidFill>
-                <a:latin typeface="Segoe UI Semibold"/>
-                <a:ea typeface="Segoe UI Semibold"/>
-                <a:cs typeface="Segoe UI Semibold"/>
-              </a:rPr>
-              <a:t>read-only</a:t>
-            </a:r>
-            <a:r>
-              <a:rPr lang="ru-RU" sz="2000" b="0" i="0" u="none" strike="noStrike" cap="none" spc="0">
-                <a:solidFill>
-                  <a:schemeClr val="bg1"/>
-                </a:solidFill>
-                <a:latin typeface="Segoe UI Semibold"/>
-                <a:ea typeface="Segoe UI Semibold"/>
-                <a:cs typeface="Segoe UI Semibold"/>
-              </a:rPr>
-              <a:t>) и замирает в панике.</a:t>
-            </a:r>
-            <a:endParaRPr sz="2000" b="0" i="0" u="none" strike="noStrike" cap="none" spc="0">
+              <a:rPr lang="ru-RU" sz="1800" b="0" i="0" u="none" strike="noStrike" cap="none" spc="0">
+                <a:solidFill>
+                  <a:schemeClr val="bg1"/>
+                </a:solidFill>
+                <a:latin typeface="Segoe UI Semibold"/>
+                <a:ea typeface="Segoe UI Semibold"/>
+                <a:cs typeface="Segoe UI Semibold"/>
+              </a:rPr>
+              <a:t>Включаем Multiqueue = числу ядер CPU. Гипервизор начинает параллелить поток пакетов по всем ядрам, а не долбить одно.</a:t>
+            </a:r>
+            <a:endParaRPr sz="1800" b="0" i="0" u="none" strike="noStrike" cap="none" spc="0">
               <a:solidFill>
                 <a:schemeClr val="bg1"/>
               </a:solidFill>
@@ -8559,18 +8860,40 @@
               <a:defRPr/>
             </a:pPr>
             <a:r>
-              <a:rPr lang="ru-RU" sz="2000" b="0" i="0" u="none" strike="noStrike" cap="none" spc="0">
-                <a:solidFill>
-                  <a:schemeClr val="bg1"/>
-                </a:solidFill>
-                <a:latin typeface="Segoe UI Semibold"/>
-                <a:ea typeface="Segoe UI Semibold"/>
-                <a:cs typeface="Segoe UI Semibold"/>
-              </a:rPr>
-              <a:t>Костыль-спаситель QDevice:</a:t>
+              <a:rPr lang="ru-RU" sz="1800" b="0" i="0" u="none" strike="noStrike" cap="none" spc="0">
+                <a:solidFill>
+                  <a:schemeClr val="bg1"/>
+                </a:solidFill>
+                <a:latin typeface="Segoe UI Semibold"/>
+                <a:ea typeface="Segoe UI Semibold"/>
+                <a:cs typeface="Segoe UI Semibold"/>
+              </a:rPr>
+              <a:t>Диск: VirtIO SCSI + галка </a:t>
+            </a:r>
+            <a:r>
+              <a:rPr lang="ru-RU" sz="1800" b="0" i="0" u="none" strike="noStrike" cap="none" spc="0">
+                <a:solidFill>
+                  <a:schemeClr val="bg1"/>
+                </a:solidFill>
+                <a:latin typeface="Segoe UI Semibold"/>
+                <a:ea typeface="Segoe UI Semibold"/>
+                <a:cs typeface="Segoe UI Semibold"/>
+              </a:rPr>
+              <a:t>Discard</a:t>
+            </a:r>
+            <a:r>
+              <a:rPr lang="ru-RU" sz="1800" b="0" i="0" u="none" strike="noStrike" cap="none" spc="0">
+                <a:solidFill>
+                  <a:schemeClr val="bg1"/>
+                </a:solidFill>
+                <a:latin typeface="Segoe UI Semibold"/>
+                <a:ea typeface="Segoe UI Semibold"/>
+                <a:cs typeface="Segoe UI Semibold"/>
+              </a:rPr>
+              <a:t>:</a:t>
             </a:r>
             <a:br>
-              <a:rPr lang="ru-RU" sz="2000" b="0" i="0" u="none" strike="noStrike" cap="none" spc="0">
+              <a:rPr lang="ru-RU" sz="1800" b="0" i="0" u="none" strike="noStrike" cap="none" spc="0">
                 <a:solidFill>
                   <a:schemeClr val="bg1"/>
                 </a:solidFill>
@@ -8580,147 +8903,17 @@
               </a:rPr>
             </a:br>
             <a:r>
-              <a:rPr lang="ru-RU" sz="2000" b="0" i="0" u="none" strike="noStrike" cap="none" spc="0">
-                <a:solidFill>
-                  <a:schemeClr val="bg1"/>
-                </a:solidFill>
-                <a:latin typeface="Segoe UI Semibold"/>
-                <a:ea typeface="Segoe UI Semibold"/>
-                <a:cs typeface="Segoe UI Semibold"/>
-              </a:rPr>
-              <a:t>Легковесный демон на Raspberry Pi или копеечной VPS за 100 рублей. Отдаёт кластеру </a:t>
-            </a:r>
-            <a:r>
-              <a:rPr lang="ru-RU" sz="2000" b="0" i="0" u="none" strike="noStrike" cap="none" spc="0">
-                <a:solidFill>
-                  <a:schemeClr val="bg1"/>
-                </a:solidFill>
-                <a:latin typeface="Segoe UI Semibold"/>
-                <a:ea typeface="Segoe UI Semibold"/>
-                <a:cs typeface="Segoe UI Semibold"/>
-              </a:rPr>
-              <a:t>третий голос</a:t>
-            </a:r>
-            <a:r>
-              <a:rPr lang="ru-RU" sz="2000" b="0" i="0" u="none" strike="noStrike" cap="none" spc="0">
-                <a:solidFill>
-                  <a:schemeClr val="bg1"/>
-                </a:solidFill>
-                <a:latin typeface="Segoe UI Semibold"/>
-                <a:ea typeface="Segoe UI Semibold"/>
-                <a:cs typeface="Segoe UI Semibold"/>
-              </a:rPr>
-              <a:t> (</a:t>
-            </a:r>
-            <a:r>
-              <a:rPr lang="ru-RU" sz="2000" b="0" i="0" u="none" strike="noStrike" cap="none" spc="0">
-                <a:solidFill>
-                  <a:schemeClr val="bg1"/>
-                </a:solidFill>
-                <a:latin typeface="Segoe UI Semibold"/>
-                <a:ea typeface="Segoe UI Semibold"/>
-                <a:cs typeface="Segoe UI Semibold"/>
-              </a:rPr>
-              <a:t>2 ноды + 1 арбитр = 3</a:t>
-            </a:r>
-            <a:r>
-              <a:rPr lang="ru-RU" sz="2000" b="0" i="0" u="none" strike="noStrike" cap="none" spc="0">
-                <a:solidFill>
-                  <a:schemeClr val="bg1"/>
-                </a:solidFill>
-                <a:latin typeface="Segoe UI Semibold"/>
-                <a:ea typeface="Segoe UI Semibold"/>
-                <a:cs typeface="Segoe UI Semibold"/>
-              </a:rPr>
-              <a:t>).</a:t>
-            </a:r>
-            <a:br>
-              <a:rPr lang="ru-RU" sz="2000" b="0" i="0" u="none" strike="noStrike" cap="none" spc="0">
-                <a:solidFill>
-                  <a:schemeClr val="bg1"/>
-                </a:solidFill>
-                <a:latin typeface="Segoe UI Semibold"/>
-                <a:ea typeface="Segoe UI Semibold"/>
-                <a:cs typeface="Segoe UI Semibold"/>
-              </a:rPr>
-            </a:br>
-            <a:r>
-              <a:rPr lang="ru-RU" sz="2000" b="0" i="0" u="none" strike="noStrike" cap="none" spc="0">
-                <a:solidFill>
-                  <a:schemeClr val="bg1"/>
-                </a:solidFill>
-                <a:latin typeface="Segoe UI Semibold"/>
-                <a:ea typeface="Segoe UI Semibold"/>
-                <a:cs typeface="Segoe UI Semibold"/>
-              </a:rPr>
-              <a:t>При падении одного сервера у второго </a:t>
-            </a:r>
-            <a:r>
-              <a:rPr lang="ru-RU" sz="2000" b="0" i="0" u="none" strike="noStrike" cap="none" spc="0">
-                <a:solidFill>
-                  <a:schemeClr val="bg1"/>
-                </a:solidFill>
-                <a:latin typeface="Segoe UI Semibold"/>
-                <a:ea typeface="Segoe UI Semibold"/>
-                <a:cs typeface="Segoe UI Semibold"/>
-              </a:rPr>
-              <a:t>остаётся 2 голоса из 3 -кворум есть, кластер живёт!</a:t>
-            </a:r>
-            <a:endParaRPr lang="ru-RU" sz="2000" b="0" i="0" u="none" strike="noStrike" cap="none" spc="0">
-              <a:solidFill>
-                <a:schemeClr val="bg1"/>
-              </a:solidFill>
-              <a:latin typeface="Segoe UI Semibold"/>
-              <a:ea typeface="Segoe UI Semibold"/>
-              <a:cs typeface="Segoe UI Semibold"/>
-            </a:endParaRPr>
-          </a:p>
-          <a:p>
-            <a:pPr marL="0" marR="0" indent="0" algn="l">
-              <a:lnSpc>
-                <a:spcPct val="100000"/>
-              </a:lnSpc>
-              <a:spcBef>
-                <a:spcPts val="0"/>
-              </a:spcBef>
-              <a:spcAft>
-                <a:spcPts val="0"/>
-              </a:spcAft>
-              <a:defRPr/>
-            </a:pPr>
-            <a:r>
-              <a:rPr lang="ru-RU" sz="2000" b="0" i="0" u="none" strike="noStrike" cap="none" spc="0">
-                <a:solidFill>
-                  <a:schemeClr val="bg1"/>
-                </a:solidFill>
-                <a:latin typeface="Segoe UI Semibold"/>
-                <a:ea typeface="Segoe UI Semibold"/>
-                <a:cs typeface="Segoe UI Semibold"/>
-              </a:rPr>
-              <a:t>Сеть Corosync:</a:t>
-            </a:r>
-            <a:br>
-              <a:rPr lang="ru-RU" sz="2000" b="0" i="0" u="none" strike="noStrike" cap="none" spc="0">
-                <a:solidFill>
-                  <a:schemeClr val="bg1"/>
-                </a:solidFill>
-                <a:latin typeface="Segoe UI Semibold"/>
-                <a:ea typeface="Segoe UI Semibold"/>
-                <a:cs typeface="Segoe UI Semibold"/>
-              </a:rPr>
-            </a:br>
-            <a:r>
-              <a:rPr lang="ru-RU" sz="2000" b="0" i="0" u="none" strike="noStrike" cap="none" spc="0">
-                <a:solidFill>
-                  <a:schemeClr val="bg1"/>
-                </a:solidFill>
-                <a:latin typeface="Segoe UI Semibold"/>
-                <a:ea typeface="Segoe UI Semibold"/>
-                <a:cs typeface="Segoe UI Semibold"/>
-              </a:rPr>
-              <a:t>Шлёт heartbeat-пакеты каждые пару миллисекунд. Задержка выше 30-50 мс = смерть ноды. Не гоняйте по этому линку бэкапы!</a:t>
-            </a:r>
-            <a:endParaRPr sz="2000">
+              <a:rPr lang="ru-RU" sz="1800" b="0" i="0" u="none" strike="noStrike" cap="none" spc="0">
+                <a:solidFill>
+                  <a:schemeClr val="bg1"/>
+                </a:solidFill>
+                <a:latin typeface="Segoe UI Semibold"/>
+                <a:ea typeface="Segoe UI Semibold"/>
+                <a:cs typeface="Segoe UI Semibold"/>
+              </a:rPr>
+              <a:t>Включает команду TRIM для нашего LVM-Thin, чтобы удаленные логи роутера реально освобождали место на SSD.</a:t>
+            </a:r>
+            <a:endParaRPr sz="1800" b="0" i="0" u="none" strike="noStrike" cap="none" spc="0">
               <a:solidFill>
                 <a:schemeClr val="bg1"/>
               </a:solidFill>
@@ -8728,30 +8921,360 @@
               <a:cs typeface="Segoe UI Semibold"/>
             </a:endParaRPr>
           </a:p>
-        </p:txBody>
-      </p:sp>
-      <p:pic>
-        <p:nvPicPr>
-          <p:cNvPr id="938387843" name=""/>
-          <p:cNvPicPr>
-            <a:picLocks noChangeAspect="1"/>
-          </p:cNvPicPr>
+          <a:p>
+            <a:pPr marL="0" marR="0" indent="0" algn="l">
+              <a:lnSpc>
+                <a:spcPct val="100000"/>
+              </a:lnSpc>
+              <a:spcBef>
+                <a:spcPts val="0"/>
+              </a:spcBef>
+              <a:spcAft>
+                <a:spcPts val="0"/>
+              </a:spcAft>
+              <a:defRPr/>
+            </a:pPr>
+            <a:r>
+              <a:rPr lang="ru-RU" sz="1800" b="0" i="0" u="none" strike="noStrike" cap="none" spc="0">
+                <a:solidFill>
+                  <a:schemeClr val="bg1"/>
+                </a:solidFill>
+                <a:latin typeface="Segoe UI Semibold"/>
+                <a:ea typeface="Segoe UI Semibold"/>
+                <a:cs typeface="Segoe UI Semibold"/>
+              </a:rPr>
+              <a:t>QEMU Guest Agent:</a:t>
+            </a:r>
+            <a:br>
+              <a:rPr lang="ru-RU" sz="1800" b="0" i="0" u="none" strike="noStrike" cap="none" spc="0">
+                <a:solidFill>
+                  <a:schemeClr val="bg1"/>
+                </a:solidFill>
+                <a:latin typeface="Segoe UI Semibold"/>
+                <a:ea typeface="Segoe UI Semibold"/>
+                <a:cs typeface="Segoe UI Semibold"/>
+              </a:rPr>
+            </a:br>
+            <a:r>
+              <a:rPr lang="ru-RU" sz="1800" b="0" i="0" u="none" strike="noStrike" cap="none" spc="0">
+                <a:solidFill>
+                  <a:schemeClr val="bg1"/>
+                </a:solidFill>
+                <a:latin typeface="Segoe UI Semibold"/>
+                <a:ea typeface="Segoe UI Semibold"/>
+                <a:cs typeface="Segoe UI Semibold"/>
+              </a:rPr>
+              <a:t>Ставим плагин </a:t>
+            </a:r>
+            <a:r>
+              <a:rPr lang="ru-RU" sz="1800" b="0" i="0" u="none" strike="noStrike" cap="none" spc="0">
+                <a:solidFill>
+                  <a:schemeClr val="bg1"/>
+                </a:solidFill>
+                <a:latin typeface="Segoe UI Semibold"/>
+                <a:ea typeface="Segoe UI Semibold"/>
+                <a:cs typeface="Segoe UI Semibold"/>
+              </a:rPr>
+              <a:t>os-qemu-guest-agent</a:t>
+            </a:r>
+            <a:r>
+              <a:rPr lang="ru-RU" sz="1800" b="0" i="0" u="none" strike="noStrike" cap="none" spc="0">
+                <a:solidFill>
+                  <a:schemeClr val="bg1"/>
+                </a:solidFill>
+                <a:latin typeface="Segoe UI Semibold"/>
+                <a:ea typeface="Segoe UI Semibold"/>
+                <a:cs typeface="Segoe UI Semibold"/>
+              </a:rPr>
+              <a:t> в OPNsense для красивого отображения IP в вебке PVE и мягкого выключения без повреждения базы.</a:t>
+            </a:r>
+            <a:endParaRPr sz="1800">
+              <a:solidFill>
+                <a:schemeClr val="bg1"/>
+              </a:solidFill>
+              <a:latin typeface="Segoe UI Semibold"/>
+              <a:cs typeface="Segoe UI Semibold"/>
+            </a:endParaRPr>
+          </a:p>
+        </p:txBody>
+      </p:sp>
+      <p:sp>
+        <p:nvSpPr>
+          <p:cNvPr id="1463696113" name=""/>
+          <p:cNvSpPr txBox="1"/>
           <p:nvPr/>
-        </p:nvPicPr>
-        <p:blipFill>
-          <a:blip r:embed="rId4"/>
-          <a:stretch/>
-        </p:blipFill>
+        </p:nvSpPr>
         <p:spPr bwMode="auto">
-          <a:xfrm flipH="0" flipV="0">
-            <a:off x="8630259" y="1153026"/>
-            <a:ext cx="3410200" cy="3410200"/>
+          <a:xfrm rot="0" flipH="0" flipV="0">
+            <a:off x="6328179" y="1385357"/>
+            <a:ext cx="5865394" cy="4831790"/>
           </a:xfrm>
           <a:prstGeom prst="rect">
             <a:avLst/>
           </a:prstGeom>
+          <a:noFill/>
         </p:spPr>
-      </p:pic>
+        <p:txBody>
+          <a:bodyPr vertOverflow="overflow" horzOverflow="overflow" vert="vert" wrap="square" lIns="91440" tIns="45720" rIns="91440" bIns="45720" numCol="1" spcCol="0" rtlCol="0" fromWordArt="0" anchor="t" anchorCtr="0" forceAA="0" upright="0" compatLnSpc="0">
+            <a:spAutoFit/>
+          </a:bodyPr>
+          <a:p>
+            <a:pPr>
+              <a:defRPr/>
+            </a:pPr>
+            <a:endParaRPr/>
+          </a:p>
+        </p:txBody>
+      </p:sp>
+      <p:sp>
+        <p:nvSpPr>
+          <p:cNvPr id="2031259750" name=""/>
+          <p:cNvSpPr/>
+          <p:nvPr/>
+        </p:nvSpPr>
+        <p:spPr bwMode="auto">
+          <a:xfrm flipH="0" flipV="0">
+            <a:off x="6561611" y="1461907"/>
+            <a:ext cx="5586857" cy="3396825"/>
+          </a:xfrm>
+        </p:spPr>
+        <p:txBody>
+          <a:bodyPr rot="0" spcFirstLastPara="0" vertOverflow="overflow" horzOverflow="overflow" vert="horz" wrap="square" lIns="91440" tIns="45720" rIns="91440" bIns="45720" numCol="1" spcCol="0" rtlCol="0" fromWordArt="0" anchor="t" anchorCtr="0" forceAA="0" upright="0" compatLnSpc="1">
+            <a:prstTxWarp prst="textNoShape"/>
+            <a:spAutoFit/>
+          </a:bodyPr>
+          <a:p>
+            <a:pPr marL="0" marR="0" indent="0" algn="l">
+              <a:lnSpc>
+                <a:spcPct val="100000"/>
+              </a:lnSpc>
+              <a:spcBef>
+                <a:spcPts val="0"/>
+              </a:spcBef>
+              <a:spcAft>
+                <a:spcPts val="0"/>
+              </a:spcAft>
+              <a:defRPr/>
+            </a:pPr>
+            <a:r>
+              <a:rPr lang="ru-RU" sz="1800" b="0" i="0" u="none" strike="noStrike" cap="none" spc="0">
+                <a:solidFill>
+                  <a:schemeClr val="bg1"/>
+                </a:solidFill>
+                <a:latin typeface="Segoe UI Semibold"/>
+                <a:ea typeface="Segoe UI Semibold"/>
+                <a:cs typeface="Segoe UI Semibold"/>
+              </a:rPr>
+              <a:t> ⚠️ ГРАБЛЯ ВЕКА: Checksum Offloading                                                       Симптом: Роутер работает, но интернет на клиентах умирает, картинки не грузятся, сайты открываются через один.                                           </a:t>
+            </a:r>
+            <a:endParaRPr lang="ru-RU" sz="1800" b="0" i="0" u="none" strike="noStrike" cap="none" spc="0">
+              <a:solidFill>
+                <a:schemeClr val="bg1"/>
+              </a:solidFill>
+              <a:latin typeface="Segoe UI Semibold"/>
+              <a:cs typeface="Segoe UI Semibold"/>
+            </a:endParaRPr>
+          </a:p>
+          <a:p>
+            <a:pPr marL="0" marR="0" indent="0" algn="l">
+              <a:lnSpc>
+                <a:spcPct val="100000"/>
+              </a:lnSpc>
+              <a:spcBef>
+                <a:spcPts val="0"/>
+              </a:spcBef>
+              <a:spcAft>
+                <a:spcPts val="0"/>
+              </a:spcAft>
+              <a:defRPr/>
+            </a:pPr>
+            <a:r>
+              <a:rPr lang="ru-RU" sz="1800" b="0" i="0" u="none" strike="noStrike" cap="none" spc="0">
+                <a:solidFill>
+                  <a:schemeClr val="bg1"/>
+                </a:solidFill>
+                <a:latin typeface="Segoe UI Semibold"/>
+                <a:ea typeface="Segoe UI Semibold"/>
+                <a:cs typeface="Segoe UI Semibold"/>
+              </a:rPr>
+              <a:t>Причина: FreeBSD пытается переложить расчет сумм на чип сетевухи, а у нас VirtIO. Пакеты бьются и дропаются.                                                   ЛЕЧЕНИЕ В OPNsense: </a:t>
+            </a:r>
+            <a:endParaRPr lang="ru-RU" sz="1800" b="0" i="0" u="none" strike="noStrike" cap="none" spc="0">
+              <a:solidFill>
+                <a:schemeClr val="bg1"/>
+              </a:solidFill>
+              <a:latin typeface="Segoe UI Semibold"/>
+              <a:cs typeface="Segoe UI Semibold"/>
+            </a:endParaRPr>
+          </a:p>
+          <a:p>
+            <a:pPr marL="0" marR="0" indent="0" algn="l">
+              <a:lnSpc>
+                <a:spcPct val="100000"/>
+              </a:lnSpc>
+              <a:spcBef>
+                <a:spcPts val="0"/>
+              </a:spcBef>
+              <a:spcAft>
+                <a:spcPts val="0"/>
+              </a:spcAft>
+              <a:defRPr/>
+            </a:pPr>
+            <a:r>
+              <a:rPr lang="ru-RU" sz="1800" b="0" i="0" u="none" strike="noStrike" cap="none" spc="0">
+                <a:solidFill>
+                  <a:schemeClr val="bg1"/>
+                </a:solidFill>
+                <a:latin typeface="Segoe UI Semibold"/>
+                <a:ea typeface="Segoe UI Semibold"/>
+                <a:cs typeface="Segoe UI Semibold"/>
+              </a:rPr>
+              <a:t>System</a:t>
+            </a:r>
+            <a:r>
+              <a:rPr lang="ru-RU" sz="1800" b="0" i="0" u="none" strike="noStrike" cap="none" spc="0">
+                <a:solidFill>
+                  <a:schemeClr val="bg1"/>
+                </a:solidFill>
+                <a:latin typeface="Segoe UI Semibold"/>
+                <a:ea typeface="Segoe UI Semibold"/>
+                <a:cs typeface="Segoe UI Semibold"/>
+              </a:rPr>
+              <a:t> ➔ Settings ➔ Networking:                  </a:t>
+            </a:r>
+            <a:endParaRPr lang="ru-RU" sz="1800" b="0" i="0" u="none" strike="noStrike" cap="none" spc="0">
+              <a:solidFill>
+                <a:schemeClr val="bg1"/>
+              </a:solidFill>
+              <a:latin typeface="Segoe UI Semibold"/>
+              <a:cs typeface="Segoe UI Semibold"/>
+            </a:endParaRPr>
+          </a:p>
+          <a:p>
+            <a:pPr marL="0" marR="0" indent="0" algn="l">
+              <a:lnSpc>
+                <a:spcPct val="100000"/>
+              </a:lnSpc>
+              <a:spcBef>
+                <a:spcPts val="0"/>
+              </a:spcBef>
+              <a:spcAft>
+                <a:spcPts val="0"/>
+              </a:spcAft>
+              <a:defRPr/>
+            </a:pPr>
+            <a:r>
+              <a:rPr lang="ru-RU" sz="1800" b="0" i="0" u="none" strike="noStrike" cap="none" spc="0">
+                <a:solidFill>
+                  <a:schemeClr val="bg1"/>
+                </a:solidFill>
+                <a:latin typeface="Segoe UI Semibold"/>
+                <a:ea typeface="Segoe UI Semibold"/>
+                <a:cs typeface="Segoe UI Semibold"/>
+              </a:rPr>
+              <a:t>Disable Hardware Checksum Offload            </a:t>
+            </a:r>
+            <a:endParaRPr lang="ru-RU" sz="1800" b="0" i="0" u="none" strike="noStrike" cap="none" spc="0">
+              <a:solidFill>
+                <a:schemeClr val="bg1"/>
+              </a:solidFill>
+              <a:latin typeface="Segoe UI Semibold"/>
+              <a:cs typeface="Segoe UI Semibold"/>
+            </a:endParaRPr>
+          </a:p>
+          <a:p>
+            <a:pPr marL="0" marR="0" indent="0" algn="l">
+              <a:lnSpc>
+                <a:spcPct val="100000"/>
+              </a:lnSpc>
+              <a:spcBef>
+                <a:spcPts val="0"/>
+              </a:spcBef>
+              <a:spcAft>
+                <a:spcPts val="0"/>
+              </a:spcAft>
+              <a:defRPr/>
+            </a:pPr>
+            <a:r>
+              <a:rPr lang="ru-RU" sz="1800" b="0" i="0" u="none" strike="noStrike" cap="none" spc="0">
+                <a:solidFill>
+                  <a:schemeClr val="bg1"/>
+                </a:solidFill>
+                <a:latin typeface="Segoe UI Semibold"/>
+                <a:ea typeface="Segoe UI Semibold"/>
+                <a:cs typeface="Segoe UI Semibold"/>
+              </a:rPr>
+              <a:t>Disable Hardware TCP Segmentation Offload (TSO) </a:t>
+            </a:r>
+            <a:endParaRPr lang="ru-RU" sz="1800" b="0" i="0" u="none" strike="noStrike" cap="none" spc="0">
+              <a:solidFill>
+                <a:schemeClr val="bg1"/>
+              </a:solidFill>
+              <a:latin typeface="Segoe UI Semibold"/>
+              <a:cs typeface="Segoe UI Semibold"/>
+            </a:endParaRPr>
+          </a:p>
+          <a:p>
+            <a:pPr marL="0" marR="0" indent="0" algn="l">
+              <a:lnSpc>
+                <a:spcPct val="100000"/>
+              </a:lnSpc>
+              <a:spcBef>
+                <a:spcPts val="0"/>
+              </a:spcBef>
+              <a:spcAft>
+                <a:spcPts val="0"/>
+              </a:spcAft>
+              <a:defRPr/>
+            </a:pPr>
+            <a:r>
+              <a:rPr lang="ru-RU" sz="1800" b="0" i="0" u="none" strike="noStrike" cap="none" spc="0">
+                <a:solidFill>
+                  <a:schemeClr val="bg1"/>
+                </a:solidFill>
+                <a:latin typeface="Segoe UI Semibold"/>
+                <a:ea typeface="Segoe UI Semibold"/>
+                <a:cs typeface="Segoe UI Semibold"/>
+              </a:rPr>
+              <a:t>Disable Hardware </a:t>
+            </a:r>
+            <a:r>
+              <a:rPr lang="ru-RU" sz="1800" b="0" i="0" u="none" strike="noStrike" cap="none" spc="0">
+                <a:solidFill>
+                  <a:schemeClr val="bg1"/>
+                </a:solidFill>
+                <a:latin typeface="Segoe UI Semibold"/>
+                <a:ea typeface="Segoe UI Semibold"/>
+                <a:cs typeface="Segoe UI Semibold"/>
+              </a:rPr>
+              <a:t>Large</a:t>
+            </a:r>
+            <a:r>
+              <a:rPr lang="ru-RU" sz="1800" b="0" i="0" u="none" strike="noStrike" cap="none" spc="0">
+                <a:solidFill>
+                  <a:schemeClr val="bg1"/>
+                </a:solidFill>
+                <a:latin typeface="Segoe UI Semibold"/>
+                <a:ea typeface="Segoe UI Semibold"/>
+                <a:cs typeface="Segoe UI Semibold"/>
+              </a:rPr>
+              <a:t> Receive Offload (LRO)   </a:t>
+            </a:r>
+            <a:r>
+              <a:rPr sz="1000" b="0" i="0" u="none">
+                <a:solidFill>
+                  <a:srgbClr val="D4D4D4"/>
+                </a:solidFill>
+                <a:latin typeface="Courier New"/>
+                <a:ea typeface="Courier New"/>
+                <a:cs typeface="Courier New"/>
+              </a:rPr>
+              <a:t>    </a:t>
+            </a:r>
+            <a:endParaRPr/>
+          </a:p>
+        </p:txBody>
+      </p:sp>
     </p:spTree>
   </p:cSld>
   <p:clrMapOvr>
@@ -8787,7 +9310,7 @@
       </p:grpSpPr>
       <p:sp>
         <p:nvSpPr>
-          <p:cNvPr id="310153311" name="Заголовок 1"/>
+          <p:cNvPr id="1078458298" name="Заголовок 1"/>
           <p:cNvSpPr>
             <a:spLocks noGrp="1"/>
           </p:cNvSpPr>
@@ -8809,13 +9332,13 @@
       </p:sp>
       <p:pic>
         <p:nvPicPr>
-          <p:cNvPr id="1456079345" name=""/>
+          <p:cNvPr id="1807210108" name=""/>
           <p:cNvPicPr>
             <a:picLocks noChangeAspect="1"/>
           </p:cNvPicPr>
           <p:nvPr/>
         </p:nvPicPr>
-        <p:blipFill>
+        <p:blipFill rotWithShape="1">
           <a:blip r:embed="rId3"/>
           <a:stretch/>
         </p:blipFill>
@@ -8831,14 +9354,14 @@
       </p:pic>
       <p:sp>
         <p:nvSpPr>
-          <p:cNvPr id="263333424" name=""/>
+          <p:cNvPr id="1786436191" name=""/>
           <p:cNvSpPr txBox="1"/>
           <p:nvPr/>
         </p:nvSpPr>
         <p:spPr bwMode="auto">
           <a:xfrm rot="0" flipH="0" flipV="0">
             <a:off x="464358" y="244390"/>
-            <a:ext cx="8653457" cy="1189079"/>
+            <a:ext cx="8654177" cy="1189079"/>
           </a:xfrm>
           <a:prstGeom prst="rect">
             <a:avLst/>
@@ -8871,9 +9394,122 @@
                 <a:ea typeface="Segoe UI Semibold"/>
                 <a:cs typeface="Segoe UI Semibold"/>
               </a:rPr>
-              <a:t>Роутер в кластере: Что делать, если нода сгорела?</a:t>
-            </a:r>
-            <a:endParaRPr lang="ru-RU" sz="3600" b="0" i="0" u="none" strike="noStrike" cap="none" spc="0">
+              <a:t>ШАГ 3: Кластеризация, кворум и ловушка двух нод</a:t>
+            </a:r>
+            <a:endParaRPr/>
+          </a:p>
+        </p:txBody>
+      </p:sp>
+      <p:sp>
+        <p:nvSpPr>
+          <p:cNvPr id="806203112" name=""/>
+          <p:cNvSpPr txBox="1"/>
+          <p:nvPr/>
+        </p:nvSpPr>
+        <p:spPr bwMode="auto">
+          <a:xfrm rot="0" flipH="0" flipV="0">
+            <a:off x="608485" y="1433470"/>
+            <a:ext cx="8023212" cy="4755239"/>
+          </a:xfrm>
+          <a:prstGeom prst="rect">
+            <a:avLst/>
+          </a:prstGeom>
+          <a:noFill/>
+        </p:spPr>
+        <p:txBody>
+          <a:bodyPr vertOverflow="overflow" horzOverflow="overflow" vert="horz" wrap="square" lIns="91440" tIns="45720" rIns="91440" bIns="45720" numCol="1" spcCol="0" rtlCol="0" fromWordArt="0" anchor="t" anchorCtr="0" forceAA="0" upright="0" compatLnSpc="0">
+            <a:spAutoFit/>
+          </a:bodyPr>
+          <a:p>
+            <a:pPr marL="0" marR="0" indent="0" algn="l">
+              <a:lnSpc>
+                <a:spcPct val="100000"/>
+              </a:lnSpc>
+              <a:spcBef>
+                <a:spcPts val="0"/>
+              </a:spcBef>
+              <a:spcAft>
+                <a:spcPts val="0"/>
+              </a:spcAft>
+              <a:defRPr/>
+            </a:pPr>
+            <a:r>
+              <a:rPr lang="ru-RU" sz="1800" b="0" i="0" u="none" strike="noStrike" cap="none" spc="0">
+                <a:solidFill>
+                  <a:schemeClr val="bg1"/>
+                </a:solidFill>
+                <a:latin typeface="Segoe UI Semibold"/>
+                <a:ea typeface="Segoe UI Semibold"/>
+                <a:cs typeface="Segoe UI Semibold"/>
+              </a:rPr>
+              <a:t>Демократия серверов (Кворум):</a:t>
+            </a:r>
+            <a:br>
+              <a:rPr lang="ru-RU" sz="1800" b="0" i="0" u="none" strike="noStrike" cap="none" spc="0">
+                <a:solidFill>
+                  <a:schemeClr val="bg1"/>
+                </a:solidFill>
+                <a:latin typeface="Segoe UI Semibold"/>
+                <a:ea typeface="Segoe UI Semibold"/>
+                <a:cs typeface="Segoe UI Semibold"/>
+              </a:rPr>
+            </a:br>
+            <a:r>
+              <a:rPr lang="ru-RU" sz="1800" b="0" i="0" u="none" strike="noStrike" cap="none" spc="0">
+                <a:solidFill>
+                  <a:schemeClr val="bg1"/>
+                </a:solidFill>
+                <a:latin typeface="Segoe UI Semibold"/>
+                <a:ea typeface="Segoe UI Semibold"/>
+                <a:cs typeface="Segoe UI Semibold"/>
+              </a:rPr>
+              <a:t>Для принятия решений и записи конфигов в кластере должно быть строго </a:t>
+            </a:r>
+            <a:r>
+              <a:rPr lang="ru-RU" sz="1800" b="0" i="0" u="none" strike="noStrike" cap="none" spc="0">
+                <a:solidFill>
+                  <a:schemeClr val="bg1"/>
+                </a:solidFill>
+                <a:latin typeface="Segoe UI Semibold"/>
+                <a:ea typeface="Segoe UI Semibold"/>
+                <a:cs typeface="Segoe UI Semibold"/>
+              </a:rPr>
+              <a:t>больше половины</a:t>
+            </a:r>
+            <a:r>
+              <a:rPr lang="ru-RU" sz="1800" b="0" i="0" u="none" strike="noStrike" cap="none" spc="0">
+                <a:solidFill>
+                  <a:schemeClr val="bg1"/>
+                </a:solidFill>
+                <a:latin typeface="Segoe UI Semibold"/>
+                <a:ea typeface="Segoe UI Semibold"/>
+                <a:cs typeface="Segoe UI Semibold"/>
+              </a:rPr>
+              <a:t> живых голосов (</a:t>
+            </a:r>
+            <a:r>
+              <a:rPr lang="ru-RU" sz="1800" b="0" i="0" u="none" strike="noStrike" cap="none" spc="0">
+                <a:solidFill>
+                  <a:schemeClr val="bg1"/>
+                </a:solidFill>
+                <a:latin typeface="Segoe UI Semibold"/>
+                <a:ea typeface="Segoe UI Semibold"/>
+                <a:cs typeface="Segoe UI Semibold"/>
+              </a:rPr>
+              <a:t>50% + 1</a:t>
+            </a:r>
+            <a:r>
+              <a:rPr lang="ru-RU" sz="1800" b="0" i="0" u="none" strike="noStrike" cap="none" spc="0">
+                <a:solidFill>
+                  <a:schemeClr val="bg1"/>
+                </a:solidFill>
+                <a:latin typeface="Segoe UI Semibold"/>
+                <a:ea typeface="Segoe UI Semibold"/>
+                <a:cs typeface="Segoe UI Semibold"/>
+              </a:rPr>
+              <a:t>).</a:t>
+            </a:r>
+            <a:endParaRPr sz="1800" b="0" i="0" u="none" strike="noStrike" cap="none" spc="0">
               <a:solidFill>
                 <a:schemeClr val="bg1"/>
               </a:solidFill>
@@ -8881,28 +9517,6 @@
               <a:cs typeface="Segoe UI Semibold"/>
             </a:endParaRPr>
           </a:p>
-        </p:txBody>
-      </p:sp>
-      <p:sp>
-        <p:nvSpPr>
-          <p:cNvPr id="1088996587" name=""/>
-          <p:cNvSpPr txBox="1"/>
-          <p:nvPr/>
-        </p:nvSpPr>
-        <p:spPr bwMode="auto">
-          <a:xfrm rot="0" flipH="0" flipV="0">
-            <a:off x="608486" y="1585520"/>
-            <a:ext cx="11237753" cy="4748201"/>
-          </a:xfrm>
-          <a:prstGeom prst="rect">
-            <a:avLst/>
-          </a:prstGeom>
-          <a:noFill/>
-        </p:spPr>
-        <p:txBody>
-          <a:bodyPr vertOverflow="overflow" horzOverflow="overflow" vert="horz" wrap="square" lIns="91440" tIns="45720" rIns="91440" bIns="45720" numCol="1" spcCol="0" rtlCol="0" fromWordArt="0" anchor="t" anchorCtr="0" forceAA="0" upright="0" compatLnSpc="0">
-            <a:spAutoFit/>
-          </a:bodyPr>
           <a:p>
             <a:pPr marL="0" marR="0" indent="0" algn="l">
               <a:lnSpc>
@@ -8917,17 +9531,81 @@
               <a:defRPr/>
             </a:pPr>
             <a:r>
-              <a:rPr lang="ru-RU" sz="1600" b="0" i="0" u="none" strike="noStrike" cap="none" spc="0">
-                <a:solidFill>
-                  <a:schemeClr val="bg1"/>
-                </a:solidFill>
-                <a:latin typeface="Segoe UI Semibold"/>
-                <a:ea typeface="Segoe UI Semibold"/>
-                <a:cs typeface="Segoe UI Semibold"/>
-              </a:rPr>
-              <a:t>Вариант 1: Встроенный Proxmox HA (Путь ленивых)</a:t>
-            </a:r>
-            <a:endParaRPr sz="1600" b="0" i="0" u="none" strike="noStrike" cap="none" spc="0">
+              <a:rPr lang="ru-RU" sz="1800" b="0" i="0" u="none" strike="noStrike" cap="none" spc="0">
+                <a:solidFill>
+                  <a:schemeClr val="bg1"/>
+                </a:solidFill>
+                <a:latin typeface="Segoe UI Semibold"/>
+                <a:ea typeface="Segoe UI Semibold"/>
+                <a:cs typeface="Segoe UI Semibold"/>
+              </a:rPr>
+              <a:t>Ловушка двух нод (Split-Brain):</a:t>
+            </a:r>
+            <a:br>
+              <a:rPr lang="ru-RU" sz="1800" b="0" i="0" u="none" strike="noStrike" cap="none" spc="0">
+                <a:solidFill>
+                  <a:schemeClr val="bg1"/>
+                </a:solidFill>
+                <a:latin typeface="Segoe UI Semibold"/>
+                <a:ea typeface="Segoe UI Semibold"/>
+                <a:cs typeface="Segoe UI Semibold"/>
+              </a:rPr>
+            </a:br>
+            <a:r>
+              <a:rPr lang="ru-RU" sz="1800" b="0" i="0" u="none" strike="noStrike" cap="none" spc="0">
+                <a:solidFill>
+                  <a:schemeClr val="bg1"/>
+                </a:solidFill>
+                <a:latin typeface="Segoe UI Semibold"/>
+                <a:ea typeface="Segoe UI Semibold"/>
+                <a:cs typeface="Segoe UI Semibold"/>
+              </a:rPr>
+              <a:t>Если серверов всего два, моргание сетевого свитча делит кластер пополам (1:1).</a:t>
+            </a:r>
+            <a:br>
+              <a:rPr lang="ru-RU" sz="1800" b="0" i="0" u="none" strike="noStrike" cap="none" spc="0">
+                <a:solidFill>
+                  <a:schemeClr val="bg1"/>
+                </a:solidFill>
+                <a:latin typeface="Segoe UI Semibold"/>
+                <a:ea typeface="Segoe UI Semibold"/>
+                <a:cs typeface="Segoe UI Semibold"/>
+              </a:rPr>
+            </a:br>
+            <a:r>
+              <a:rPr lang="ru-RU" sz="1800" b="0" i="0" u="none" strike="noStrike" cap="none" spc="0">
+                <a:solidFill>
+                  <a:schemeClr val="bg1"/>
+                </a:solidFill>
+                <a:latin typeface="Segoe UI Semibold"/>
+                <a:ea typeface="Segoe UI Semibold"/>
+                <a:cs typeface="Segoe UI Semibold"/>
+              </a:rPr>
+              <a:t>Ни у кого нет большинства ➔ кворум потерян ➔ кластер блокирует запись конфигов (</a:t>
+            </a:r>
+            <a:r>
+              <a:rPr lang="ru-RU" sz="1800" b="0" i="0" u="none" strike="noStrike" cap="none" spc="0">
+                <a:solidFill>
+                  <a:schemeClr val="bg1"/>
+                </a:solidFill>
+                <a:latin typeface="Segoe UI Semibold"/>
+                <a:ea typeface="Segoe UI Semibold"/>
+                <a:cs typeface="Segoe UI Semibold"/>
+              </a:rPr>
+              <a:t>read-only</a:t>
+            </a:r>
+            <a:r>
+              <a:rPr lang="ru-RU" sz="1800" b="0" i="0" u="none" strike="noStrike" cap="none" spc="0">
+                <a:solidFill>
+                  <a:schemeClr val="bg1"/>
+                </a:solidFill>
+                <a:latin typeface="Segoe UI Semibold"/>
+                <a:ea typeface="Segoe UI Semibold"/>
+                <a:cs typeface="Segoe UI Semibold"/>
+              </a:rPr>
+              <a:t>) и замирает в панике.</a:t>
+            </a:r>
+            <a:endParaRPr sz="1800" b="0" i="0" u="none" strike="noStrike" cap="none" spc="0">
               <a:solidFill>
                 <a:schemeClr val="bg1"/>
               </a:solidFill>
@@ -8949,60 +9627,114 @@
               <a:defRPr/>
             </a:pPr>
             <a:r>
-              <a:rPr lang="ru-RU" sz="1600" b="0" i="0" u="none" strike="noStrike" cap="none" spc="0">
-                <a:solidFill>
-                  <a:schemeClr val="bg1"/>
-                </a:solidFill>
-                <a:latin typeface="Segoe UI Semibold"/>
-                <a:ea typeface="Segoe UI Semibold"/>
-                <a:cs typeface="Segoe UI Semibold"/>
-              </a:rPr>
-              <a:t>PVE видит смерть ноды ➔ ждет таймаут 1-2 минуты ➔ стартует роутер на соседнем сервере.</a:t>
-            </a:r>
-            <a:endParaRPr sz="1600" b="0" i="0" u="none" strike="noStrike" cap="none" spc="0">
-              <a:solidFill>
-                <a:schemeClr val="bg1"/>
-              </a:solidFill>
-              <a:latin typeface="Segoe UI Semibold"/>
-              <a:cs typeface="Segoe UI Semibold"/>
-            </a:endParaRPr>
-          </a:p>
-          <a:p>
-            <a:pPr marL="0" marR="0" indent="0" algn="l">
-              <a:lnSpc>
-                <a:spcPct val="100000"/>
-              </a:lnSpc>
-              <a:spcBef>
-                <a:spcPts val="0"/>
-              </a:spcBef>
-              <a:spcAft>
-                <a:spcPts val="0"/>
-              </a:spcAft>
-              <a:defRPr/>
-            </a:pPr>
-            <a:r>
-              <a:rPr lang="ru-RU" sz="1600" b="0" i="0" u="none" strike="noStrike" cap="none" spc="0">
-                <a:solidFill>
-                  <a:schemeClr val="bg1"/>
-                </a:solidFill>
-                <a:latin typeface="Segoe UI Semibold"/>
-                <a:ea typeface="Segoe UI Semibold"/>
-                <a:cs typeface="Segoe UI Semibold"/>
-              </a:rPr>
-              <a:t>Минусы:</a:t>
-            </a:r>
-            <a:r>
-              <a:rPr lang="ru-RU" sz="1600" b="0" i="0" u="none" strike="noStrike" cap="none" spc="0">
-                <a:solidFill>
-                  <a:schemeClr val="bg1"/>
-                </a:solidFill>
-                <a:latin typeface="Segoe UI Semibold"/>
-                <a:ea typeface="Segoe UI Semibold"/>
-                <a:cs typeface="Segoe UI Semibold"/>
-              </a:rPr>
-              <a:t> Простой сети 2-3 минуты, обрыв всех сессий и VPN, юзеры орут.</a:t>
-            </a:r>
-            <a:endParaRPr sz="1600" b="0" i="0" u="none" strike="noStrike" cap="none" spc="0">
+              <a:rPr lang="ru-RU" sz="1800" b="0" i="0" u="none" strike="noStrike" cap="none" spc="0">
+                <a:solidFill>
+                  <a:schemeClr val="bg1"/>
+                </a:solidFill>
+                <a:latin typeface="Segoe UI Semibold"/>
+                <a:ea typeface="Segoe UI Semibold"/>
+                <a:cs typeface="Segoe UI Semibold"/>
+              </a:rPr>
+              <a:t>Костыль-спаситель QDevice:</a:t>
+            </a:r>
+            <a:br>
+              <a:rPr lang="ru-RU" sz="1800" b="0" i="0" u="none" strike="noStrike" cap="none" spc="0">
+                <a:solidFill>
+                  <a:schemeClr val="bg1"/>
+                </a:solidFill>
+                <a:latin typeface="Segoe UI Semibold"/>
+                <a:ea typeface="Segoe UI Semibold"/>
+                <a:cs typeface="Segoe UI Semibold"/>
+              </a:rPr>
+            </a:br>
+            <a:r>
+              <a:rPr lang="ru-RU" sz="1800" b="0" i="0" u="none" strike="noStrike" cap="none" spc="0">
+                <a:solidFill>
+                  <a:schemeClr val="bg1"/>
+                </a:solidFill>
+                <a:latin typeface="Segoe UI Semibold"/>
+                <a:ea typeface="Segoe UI Semibold"/>
+                <a:cs typeface="Segoe UI Semibold"/>
+              </a:rPr>
+              <a:t>Легковесный демон на Raspberry Pi или копеечной VPS за 100 рублей. Отдаёт кластеру </a:t>
+            </a:r>
+            <a:r>
+              <a:rPr lang="ru-RU" sz="1800" b="0" i="0" u="none" strike="noStrike" cap="none" spc="0">
+                <a:solidFill>
+                  <a:schemeClr val="bg1"/>
+                </a:solidFill>
+                <a:latin typeface="Segoe UI Semibold"/>
+                <a:ea typeface="Segoe UI Semibold"/>
+                <a:cs typeface="Segoe UI Semibold"/>
+              </a:rPr>
+              <a:t>третий голос</a:t>
+            </a:r>
+            <a:r>
+              <a:rPr lang="ru-RU" sz="1800" b="0" i="0" u="none" strike="noStrike" cap="none" spc="0">
+                <a:solidFill>
+                  <a:schemeClr val="bg1"/>
+                </a:solidFill>
+                <a:latin typeface="Segoe UI Semibold"/>
+                <a:ea typeface="Segoe UI Semibold"/>
+                <a:cs typeface="Segoe UI Semibold"/>
+              </a:rPr>
+              <a:t> (</a:t>
+            </a:r>
+            <a:r>
+              <a:rPr lang="ru-RU" sz="1800" b="0" i="0" u="none" strike="noStrike" cap="none" spc="0">
+                <a:solidFill>
+                  <a:schemeClr val="bg1"/>
+                </a:solidFill>
+                <a:latin typeface="Segoe UI Semibold"/>
+                <a:ea typeface="Segoe UI Semibold"/>
+                <a:cs typeface="Segoe UI Semibold"/>
+              </a:rPr>
+              <a:t>2 ноды + 1 арбитр = 3</a:t>
+            </a:r>
+            <a:r>
+              <a:rPr lang="ru-RU" sz="1800" b="0" i="0" u="none" strike="noStrike" cap="none" spc="0">
+                <a:solidFill>
+                  <a:schemeClr val="bg1"/>
+                </a:solidFill>
+                <a:latin typeface="Segoe UI Semibold"/>
+                <a:ea typeface="Segoe UI Semibold"/>
+                <a:cs typeface="Segoe UI Semibold"/>
+              </a:rPr>
+              <a:t>).</a:t>
+            </a:r>
+            <a:br>
+              <a:rPr lang="ru-RU" sz="1800" b="0" i="0" u="none" strike="noStrike" cap="none" spc="0">
+                <a:solidFill>
+                  <a:schemeClr val="bg1"/>
+                </a:solidFill>
+                <a:latin typeface="Segoe UI Semibold"/>
+                <a:ea typeface="Segoe UI Semibold"/>
+                <a:cs typeface="Segoe UI Semibold"/>
+              </a:rPr>
+            </a:br>
+            <a:r>
+              <a:rPr lang="ru-RU" sz="1800" b="0" i="0" u="none" strike="noStrike" cap="none" spc="0">
+                <a:solidFill>
+                  <a:schemeClr val="bg1"/>
+                </a:solidFill>
+                <a:latin typeface="Segoe UI Semibold"/>
+                <a:ea typeface="Segoe UI Semibold"/>
+                <a:cs typeface="Segoe UI Semibold"/>
+              </a:rPr>
+              <a:t>При падении одного сервера у второго </a:t>
+            </a:r>
+            <a:r>
+              <a:rPr lang="ru-RU" sz="1800" b="0" i="0" u="none" strike="noStrike" cap="none" spc="0">
+                <a:solidFill>
+                  <a:schemeClr val="bg1"/>
+                </a:solidFill>
+                <a:latin typeface="Segoe UI Semibold"/>
+                <a:ea typeface="Segoe UI Semibold"/>
+                <a:cs typeface="Segoe UI Semibold"/>
+              </a:rPr>
+              <a:t>остаётся 2 голоса из 3 -кворум есть, кластер живёт!</a:t>
+            </a:r>
+            <a:endParaRPr sz="1800" b="0" i="0" u="none" strike="noStrike" cap="none" spc="0">
               <a:solidFill>
                 <a:schemeClr val="bg1"/>
               </a:solidFill>
@@ -9024,7 +9756,39 @@
               </a:spcAft>
               <a:defRPr/>
             </a:pPr>
-            <a:endParaRPr sz="1600" b="0" i="0" u="none" strike="noStrike" cap="none" spc="0">
+            <a:r>
+              <a:rPr lang="ru-RU" sz="1800" b="0" i="0" u="none" strike="noStrike" cap="none" spc="0">
+                <a:solidFill>
+                  <a:schemeClr val="bg1"/>
+                </a:solidFill>
+                <a:latin typeface="Segoe UI Semibold"/>
+                <a:ea typeface="Segoe UI Semibold"/>
+                <a:cs typeface="Segoe UI Semibold"/>
+              </a:rPr>
+              <a:t>Сеть Corosync:</a:t>
+            </a:r>
+            <a:br>
+              <a:rPr lang="ru-RU" sz="1800" b="0" i="0" u="none" strike="noStrike" cap="none" spc="0">
+                <a:solidFill>
+                  <a:schemeClr val="bg1"/>
+                </a:solidFill>
+                <a:latin typeface="Segoe UI Semibold"/>
+                <a:ea typeface="Segoe UI Semibold"/>
+                <a:cs typeface="Segoe UI Semibold"/>
+              </a:rPr>
+            </a:br>
+            <a:r>
+              <a:rPr lang="ru-RU" sz="1800" b="0" i="0" u="none" strike="noStrike" cap="none" spc="0">
+                <a:solidFill>
+                  <a:schemeClr val="bg1"/>
+                </a:solidFill>
+                <a:latin typeface="Segoe UI Semibold"/>
+                <a:ea typeface="Segoe UI Semibold"/>
+                <a:cs typeface="Segoe UI Semibold"/>
+              </a:rPr>
+              <a:t>Шлёт heartbeat-пакеты каждые пару миллисекунд. Задержка выше 30-50 мс = смерть ноды. Не гоняйте по этому линку бэкапы!</a:t>
+            </a:r>
+            <a:endParaRPr sz="1800">
               <a:solidFill>
                 <a:schemeClr val="bg1"/>
               </a:solidFill>
@@ -9032,539 +9796,30 @@
               <a:cs typeface="Segoe UI Semibold"/>
             </a:endParaRPr>
           </a:p>
-          <a:p>
-            <a:pPr marL="0" marR="0" indent="0" algn="l">
-              <a:lnSpc>
-                <a:spcPct val="100000"/>
-              </a:lnSpc>
-              <a:spcBef>
-                <a:spcPts val="0"/>
-              </a:spcBef>
-              <a:spcAft>
-                <a:spcPts val="0"/>
-              </a:spcAft>
-              <a:defRPr/>
-            </a:pPr>
-            <a:r>
-              <a:rPr lang="ru-RU" sz="1600" b="0" i="0" u="none" strike="noStrike" cap="none" spc="0">
-                <a:solidFill>
-                  <a:schemeClr val="bg1"/>
-                </a:solidFill>
-                <a:latin typeface="Segoe UI Semibold"/>
-                <a:ea typeface="Segoe UI Semibold"/>
-                <a:cs typeface="Segoe UI Semibold"/>
-              </a:rPr>
-              <a:t>Нюанс LVM-Thin:</a:t>
-            </a:r>
-            <a:r>
-              <a:rPr lang="ru-RU" sz="1600" b="0" i="0" u="none" strike="noStrike" cap="none" spc="0">
-                <a:solidFill>
-                  <a:schemeClr val="bg1"/>
-                </a:solidFill>
-                <a:latin typeface="Segoe UI Semibold"/>
-                <a:ea typeface="Segoe UI Semibold"/>
-                <a:cs typeface="Segoe UI Semibold"/>
-              </a:rPr>
-              <a:t> Диск роутера должен лежать на общем сетевом хранилище (NFS/NAS), иначе виртуалке тупо неоткуда запуститься.</a:t>
-            </a:r>
-            <a:endParaRPr sz="1600" b="0" i="0" u="none" strike="noStrike" cap="none" spc="0">
-              <a:solidFill>
-                <a:schemeClr val="bg1"/>
-              </a:solidFill>
-              <a:latin typeface="Segoe UI Semibold"/>
-              <a:ea typeface="Segoe UI Semibold"/>
-              <a:cs typeface="Segoe UI Semibold"/>
-            </a:endParaRPr>
-          </a:p>
-          <a:p>
-            <a:pPr marL="0" marR="0" indent="0" algn="l">
-              <a:lnSpc>
-                <a:spcPct val="100000"/>
-              </a:lnSpc>
-              <a:spcBef>
-                <a:spcPts val="0"/>
-              </a:spcBef>
-              <a:spcAft>
-                <a:spcPts val="0"/>
-              </a:spcAft>
-              <a:defRPr/>
-            </a:pPr>
-            <a:endParaRPr sz="1600" b="0" i="0" u="none" strike="noStrike" cap="none" spc="0">
-              <a:solidFill>
-                <a:schemeClr val="bg1"/>
-              </a:solidFill>
-              <a:latin typeface="Segoe UI Semibold"/>
-              <a:cs typeface="Segoe UI Semibold"/>
-            </a:endParaRPr>
-          </a:p>
-          <a:p>
-            <a:pPr marL="0" marR="0" indent="0" algn="l">
-              <a:lnSpc>
-                <a:spcPct val="100000"/>
-              </a:lnSpc>
-              <a:spcBef>
-                <a:spcPts val="0"/>
-              </a:spcBef>
-              <a:spcAft>
-                <a:spcPts val="0"/>
-              </a:spcAft>
-              <a:defRPr/>
-            </a:pPr>
-            <a:r>
-              <a:rPr lang="ru-RU" sz="1600" b="0" i="0" u="none" strike="noStrike" cap="none" spc="0">
-                <a:solidFill>
-                  <a:schemeClr val="bg1"/>
-                </a:solidFill>
-                <a:latin typeface="Segoe UI Semibold"/>
-                <a:ea typeface="Segoe UI Semibold"/>
-                <a:cs typeface="Segoe UI Semibold"/>
-              </a:rPr>
-              <a:t>Вариант 2: Два роутера + CARP (Инженерный путь самурая)</a:t>
-            </a:r>
-            <a:endParaRPr sz="1600" b="0" i="0" u="none" strike="noStrike" cap="none" spc="0">
-              <a:solidFill>
-                <a:schemeClr val="bg1"/>
-              </a:solidFill>
-              <a:latin typeface="Segoe UI Semibold"/>
-              <a:ea typeface="Segoe UI Semibold"/>
-              <a:cs typeface="Segoe UI Semibold"/>
-            </a:endParaRPr>
-          </a:p>
-          <a:p>
-            <a:pPr marL="0" marR="0" indent="0" algn="l">
-              <a:lnSpc>
-                <a:spcPct val="100000"/>
-              </a:lnSpc>
-              <a:spcBef>
-                <a:spcPts val="0"/>
-              </a:spcBef>
-              <a:spcAft>
-                <a:spcPts val="0"/>
-              </a:spcAft>
-              <a:defRPr/>
-            </a:pPr>
-            <a:endParaRPr sz="1600" b="0" i="0" u="none" strike="noStrike" cap="none" spc="0">
-              <a:solidFill>
-                <a:schemeClr val="bg1"/>
-              </a:solidFill>
-              <a:latin typeface="Segoe UI Semibold"/>
-              <a:cs typeface="Segoe UI Semibold"/>
-            </a:endParaRPr>
-          </a:p>
-          <a:p>
-            <a:pPr marL="0" marR="0" indent="0" algn="l">
-              <a:lnSpc>
-                <a:spcPct val="100000"/>
-              </a:lnSpc>
-              <a:spcBef>
-                <a:spcPts val="0"/>
-              </a:spcBef>
-              <a:spcAft>
-                <a:spcPts val="0"/>
-              </a:spcAft>
-              <a:defRPr/>
-            </a:pPr>
-            <a:r>
-              <a:rPr lang="ru-RU" sz="1600" b="0" i="0" u="none" strike="noStrike" cap="none" spc="0">
-                <a:solidFill>
-                  <a:schemeClr val="bg1"/>
-                </a:solidFill>
-                <a:latin typeface="Segoe UI Semibold"/>
-                <a:ea typeface="Segoe UI Semibold"/>
-                <a:cs typeface="Segoe UI Semibold"/>
-              </a:rPr>
-              <a:t>Поднимаем </a:t>
-            </a:r>
-            <a:r>
-              <a:rPr lang="ru-RU" sz="1600" b="0" i="0" u="none" strike="noStrike" cap="none" spc="0">
-                <a:solidFill>
-                  <a:schemeClr val="bg1"/>
-                </a:solidFill>
-                <a:latin typeface="Segoe UI Semibold"/>
-                <a:ea typeface="Segoe UI Semibold"/>
-                <a:cs typeface="Segoe UI Semibold"/>
-              </a:rPr>
-              <a:t>два независимых OPNsense</a:t>
-            </a:r>
-            <a:r>
-              <a:rPr lang="ru-RU" sz="1600" b="0" i="0" u="none" strike="noStrike" cap="none" spc="0">
-                <a:solidFill>
-                  <a:schemeClr val="bg1"/>
-                </a:solidFill>
-                <a:latin typeface="Segoe UI Semibold"/>
-                <a:ea typeface="Segoe UI Semibold"/>
-                <a:cs typeface="Segoe UI Semibold"/>
-              </a:rPr>
-              <a:t> на разных серверах:</a:t>
-            </a:r>
-            <a:endParaRPr lang="ru-RU" sz="1600" b="0" i="0" u="none" strike="noStrike" cap="none" spc="0">
-              <a:solidFill>
-                <a:schemeClr val="bg1"/>
-              </a:solidFill>
-              <a:latin typeface="Segoe UI Semibold"/>
-              <a:ea typeface="Segoe UI Semibold"/>
-              <a:cs typeface="Segoe UI Semibold"/>
-            </a:endParaRPr>
-          </a:p>
-          <a:p>
-            <a:pPr marL="0" marR="0" indent="0" algn="l">
-              <a:lnSpc>
-                <a:spcPct val="100000"/>
-              </a:lnSpc>
-              <a:spcBef>
-                <a:spcPts val="0"/>
-              </a:spcBef>
-              <a:spcAft>
-                <a:spcPts val="0"/>
-              </a:spcAft>
-              <a:defRPr/>
-            </a:pPr>
-            <a:endParaRPr sz="1600" b="0" i="0" u="none" strike="noStrike" cap="none" spc="0">
-              <a:solidFill>
-                <a:schemeClr val="bg1"/>
-              </a:solidFill>
-              <a:latin typeface="Segoe UI Semibold"/>
-              <a:cs typeface="Segoe UI Semibold"/>
-            </a:endParaRPr>
-          </a:p>
-          <a:p>
-            <a:pPr marL="0" marR="0" indent="0" algn="l">
-              <a:lnSpc>
-                <a:spcPct val="100000"/>
-              </a:lnSpc>
-              <a:spcBef>
-                <a:spcPts val="0"/>
-              </a:spcBef>
-              <a:spcAft>
-                <a:spcPts val="0"/>
-              </a:spcAft>
-              <a:defRPr/>
-            </a:pPr>
-            <a:r>
-              <a:rPr lang="ru-RU" sz="1600" b="0" i="0" u="none" strike="noStrike" cap="none" spc="0">
-                <a:solidFill>
-                  <a:schemeClr val="bg1"/>
-                </a:solidFill>
-                <a:latin typeface="Segoe UI Semibold"/>
-                <a:ea typeface="Segoe UI Semibold"/>
-                <a:cs typeface="Segoe UI Semibold"/>
-              </a:rPr>
-              <a:t>OPNsense-Master</a:t>
-            </a:r>
-            <a:r>
-              <a:rPr lang="ru-RU" sz="1600" b="0" i="0" u="none" strike="noStrike" cap="none" spc="0">
-                <a:solidFill>
-                  <a:schemeClr val="bg1"/>
-                </a:solidFill>
-                <a:latin typeface="Segoe UI Semibold"/>
-                <a:ea typeface="Segoe UI Semibold"/>
-                <a:cs typeface="Segoe UI Semibold"/>
-              </a:rPr>
-              <a:t> на Ноде 1 (LAN IP: </a:t>
-            </a:r>
-            <a:r>
-              <a:rPr lang="ru-RU" sz="1600" b="0" i="0" u="none" strike="noStrike" cap="none" spc="0">
-                <a:solidFill>
-                  <a:schemeClr val="bg1"/>
-                </a:solidFill>
-                <a:latin typeface="Segoe UI Semibold"/>
-                <a:ea typeface="Segoe UI Semibold"/>
-                <a:cs typeface="Segoe UI Semibold"/>
-              </a:rPr>
-              <a:t>192.168.1.2</a:t>
-            </a:r>
-            <a:r>
-              <a:rPr lang="ru-RU" sz="1600" b="0" i="0" u="none" strike="noStrike" cap="none" spc="0">
-                <a:solidFill>
-                  <a:schemeClr val="bg1"/>
-                </a:solidFill>
-                <a:latin typeface="Segoe UI Semibold"/>
-                <a:ea typeface="Segoe UI Semibold"/>
-                <a:cs typeface="Segoe UI Semibold"/>
-              </a:rPr>
-              <a:t>)</a:t>
-            </a:r>
-            <a:endParaRPr sz="1600" b="0" i="0" u="none" strike="noStrike" cap="none" spc="0">
-              <a:solidFill>
-                <a:schemeClr val="bg1"/>
-              </a:solidFill>
-              <a:latin typeface="Segoe UI Semibold"/>
-              <a:cs typeface="Segoe UI Semibold"/>
-            </a:endParaRPr>
-          </a:p>
-          <a:p>
-            <a:pPr marL="0" marR="0" indent="0" algn="l">
-              <a:lnSpc>
-                <a:spcPct val="100000"/>
-              </a:lnSpc>
-              <a:spcBef>
-                <a:spcPts val="0"/>
-              </a:spcBef>
-              <a:spcAft>
-                <a:spcPts val="0"/>
-              </a:spcAft>
-              <a:defRPr/>
-            </a:pPr>
-            <a:r>
-              <a:rPr lang="ru-RU" sz="1600" b="0" i="0" u="none" strike="noStrike" cap="none" spc="0">
-                <a:solidFill>
-                  <a:schemeClr val="bg1"/>
-                </a:solidFill>
-                <a:latin typeface="Segoe UI Semibold"/>
-                <a:ea typeface="Segoe UI Semibold"/>
-                <a:cs typeface="Segoe UI Semibold"/>
-              </a:rPr>
-              <a:t>OPNsense-Backup</a:t>
-            </a:r>
-            <a:r>
-              <a:rPr lang="ru-RU" sz="1600" b="0" i="0" u="none" strike="noStrike" cap="none" spc="0">
-                <a:solidFill>
-                  <a:schemeClr val="bg1"/>
-                </a:solidFill>
-                <a:latin typeface="Segoe UI Semibold"/>
-                <a:ea typeface="Segoe UI Semibold"/>
-                <a:cs typeface="Segoe UI Semibold"/>
-              </a:rPr>
-              <a:t> на Ноде 2 (LAN IP: </a:t>
-            </a:r>
-            <a:r>
-              <a:rPr lang="ru-RU" sz="1600" b="0" i="0" u="none" strike="noStrike" cap="none" spc="0">
-                <a:solidFill>
-                  <a:schemeClr val="bg1"/>
-                </a:solidFill>
-                <a:latin typeface="Segoe UI Semibold"/>
-                <a:ea typeface="Segoe UI Semibold"/>
-                <a:cs typeface="Segoe UI Semibold"/>
-              </a:rPr>
-              <a:t>192.168.1.3</a:t>
-            </a:r>
-            <a:r>
-              <a:rPr lang="ru-RU" sz="1600" b="0" i="0" u="none" strike="noStrike" cap="none" spc="0">
-                <a:solidFill>
-                  <a:schemeClr val="bg1"/>
-                </a:solidFill>
-                <a:latin typeface="Segoe UI Semibold"/>
-                <a:ea typeface="Segoe UI Semibold"/>
-                <a:cs typeface="Segoe UI Semibold"/>
-              </a:rPr>
-              <a:t>)</a:t>
-            </a:r>
-            <a:endParaRPr sz="1600" b="0" i="0" u="none" strike="noStrike" cap="none" spc="0">
-              <a:solidFill>
-                <a:schemeClr val="bg1"/>
-              </a:solidFill>
-              <a:latin typeface="Segoe UI Semibold"/>
-              <a:cs typeface="Segoe UI Semibold"/>
-            </a:endParaRPr>
-          </a:p>
-          <a:p>
-            <a:pPr marL="0" marR="0" indent="0" algn="l">
-              <a:lnSpc>
-                <a:spcPct val="100000"/>
-              </a:lnSpc>
-              <a:spcBef>
-                <a:spcPts val="0"/>
-              </a:spcBef>
-              <a:spcAft>
-                <a:spcPts val="0"/>
-              </a:spcAft>
-              <a:defRPr/>
-            </a:pPr>
-            <a:r>
-              <a:rPr lang="ru-RU" sz="1600" b="0" i="0" u="none" strike="noStrike" cap="none" spc="0">
-                <a:solidFill>
-                  <a:schemeClr val="bg1"/>
-                </a:solidFill>
-                <a:latin typeface="Segoe UI Semibold"/>
-                <a:ea typeface="Segoe UI Semibold"/>
-                <a:cs typeface="Segoe UI Semibold"/>
-              </a:rPr>
-              <a:t>Плавающий Virtual IP (VIP):</a:t>
-            </a:r>
-            <a:r>
-              <a:rPr lang="ru-RU" sz="1600" b="0" i="0" u="none" strike="noStrike" cap="none" spc="0">
-                <a:solidFill>
-                  <a:schemeClr val="bg1"/>
-                </a:solidFill>
-                <a:latin typeface="Segoe UI Semibold"/>
-                <a:ea typeface="Segoe UI Semibold"/>
-                <a:cs typeface="Segoe UI Semibold"/>
-              </a:rPr>
-              <a:t> например </a:t>
-            </a:r>
-            <a:r>
-              <a:rPr lang="ru-RU" sz="1600" b="0" i="0" u="none" strike="noStrike" cap="none" spc="0">
-                <a:solidFill>
-                  <a:schemeClr val="bg1"/>
-                </a:solidFill>
-                <a:latin typeface="Segoe UI Semibold"/>
-                <a:ea typeface="Segoe UI Semibold"/>
-                <a:cs typeface="Segoe UI Semibold"/>
-              </a:rPr>
-              <a:t>192.168.1.1</a:t>
-            </a:r>
-            <a:r>
-              <a:rPr lang="ru-RU" sz="1600" b="0" i="0" u="none" strike="noStrike" cap="none" spc="0">
-                <a:solidFill>
-                  <a:schemeClr val="bg1"/>
-                </a:solidFill>
-                <a:latin typeface="Segoe UI Semibold"/>
-                <a:ea typeface="Segoe UI Semibold"/>
-                <a:cs typeface="Segoe UI Semibold"/>
-              </a:rPr>
-              <a:t> - общий шлюз для клиентов.</a:t>
-            </a:r>
-            <a:endParaRPr lang="ru-RU" sz="1600" b="0" i="0" u="none" strike="noStrike" cap="none" spc="0">
-              <a:solidFill>
-                <a:schemeClr val="bg1"/>
-              </a:solidFill>
-              <a:latin typeface="Segoe UI Semibold"/>
-              <a:ea typeface="Segoe UI Semibold"/>
-              <a:cs typeface="Segoe UI Semibold"/>
-            </a:endParaRPr>
-          </a:p>
-          <a:p>
-            <a:pPr marL="0" marR="0" indent="0" algn="l">
-              <a:lnSpc>
-                <a:spcPct val="100000"/>
-              </a:lnSpc>
-              <a:spcBef>
-                <a:spcPts val="0"/>
-              </a:spcBef>
-              <a:spcAft>
-                <a:spcPts val="0"/>
-              </a:spcAft>
-              <a:defRPr/>
-            </a:pPr>
-            <a:r>
-              <a:rPr lang="ru-RU" sz="1600" b="0" i="0" u="none" strike="noStrike" cap="none" spc="0">
-                <a:solidFill>
-                  <a:schemeClr val="bg1"/>
-                </a:solidFill>
-                <a:latin typeface="Segoe UI Semibold"/>
-                <a:ea typeface="Segoe UI Semibold"/>
-                <a:cs typeface="Segoe UI Semibold"/>
-              </a:rPr>
-              <a:t>Протокол pfsync:</a:t>
-            </a:r>
-            <a:r>
-              <a:rPr lang="ru-RU" sz="1600" b="0" i="0" u="none" strike="noStrike" cap="none" spc="0">
-                <a:solidFill>
-                  <a:schemeClr val="bg1"/>
-                </a:solidFill>
-                <a:latin typeface="Segoe UI Semibold"/>
-                <a:ea typeface="Segoe UI Semibold"/>
-                <a:cs typeface="Segoe UI Semibold"/>
-              </a:rPr>
-              <a:t> роутеры непрерывно синхронизируют таблицу открытых соединений фаервола по сети.</a:t>
-            </a:r>
-            <a:endParaRPr sz="1600" b="0" i="0" u="none" strike="noStrike" cap="none" spc="0">
-              <a:solidFill>
-                <a:schemeClr val="bg1"/>
-              </a:solidFill>
-              <a:latin typeface="Segoe UI Semibold"/>
-              <a:ea typeface="Segoe UI Semibold"/>
-              <a:cs typeface="Segoe UI Semibold"/>
-            </a:endParaRPr>
-          </a:p>
-          <a:p>
-            <a:pPr marL="0" marR="0" indent="0" algn="l">
-              <a:lnSpc>
-                <a:spcPct val="100000"/>
-              </a:lnSpc>
-              <a:spcBef>
-                <a:spcPts val="0"/>
-              </a:spcBef>
-              <a:spcAft>
-                <a:spcPts val="0"/>
-              </a:spcAft>
-              <a:defRPr/>
-            </a:pPr>
-            <a:endParaRPr sz="1600" b="0" i="0" u="none" strike="noStrike" cap="none" spc="0">
-              <a:solidFill>
-                <a:schemeClr val="bg1"/>
-              </a:solidFill>
-              <a:latin typeface="Segoe UI Semibold"/>
-              <a:cs typeface="Segoe UI Semibold"/>
-            </a:endParaRPr>
-          </a:p>
-          <a:p>
-            <a:pPr marL="0" marR="0" indent="0" algn="l">
-              <a:lnSpc>
-                <a:spcPct val="100000"/>
-              </a:lnSpc>
-              <a:spcBef>
-                <a:spcPts val="0"/>
-              </a:spcBef>
-              <a:spcAft>
-                <a:spcPts val="0"/>
-              </a:spcAft>
-              <a:defRPr/>
-            </a:pPr>
-            <a:r>
-              <a:rPr lang="ru-RU" sz="1600" b="0" i="0" u="none" strike="noStrike" cap="none" spc="0">
-                <a:solidFill>
-                  <a:schemeClr val="bg1"/>
-                </a:solidFill>
-                <a:latin typeface="Segoe UI Semibold"/>
-                <a:ea typeface="Segoe UI Semibold"/>
-                <a:cs typeface="Segoe UI Semibold"/>
-              </a:rPr>
-              <a:t>Результат при аварии ноды:</a:t>
-            </a:r>
-            <a:br>
-              <a:rPr lang="ru-RU" sz="1600" b="0" i="0" u="none" strike="noStrike" cap="none" spc="0">
-                <a:solidFill>
-                  <a:schemeClr val="bg1"/>
-                </a:solidFill>
-                <a:latin typeface="Segoe UI Semibold"/>
-                <a:ea typeface="Segoe UI Semibold"/>
-                <a:cs typeface="Segoe UI Semibold"/>
-              </a:rPr>
-            </a:br>
-            <a:r>
-              <a:rPr lang="ru-RU" sz="1600" b="0" i="0" u="none" strike="noStrike" cap="none" spc="0">
-                <a:solidFill>
-                  <a:schemeClr val="bg1"/>
-                </a:solidFill>
-                <a:latin typeface="Segoe UI Semibold"/>
-                <a:ea typeface="Segoe UI Semibold"/>
-                <a:cs typeface="Segoe UI Semibold"/>
-              </a:rPr>
-              <a:t>Нода 1 падает ➔ второй роутер перехватывает шлюз за </a:t>
-            </a:r>
-            <a:r>
-              <a:rPr lang="ru-RU" sz="1600" b="0" i="0" u="none" strike="noStrike" cap="none" spc="0">
-                <a:solidFill>
-                  <a:schemeClr val="bg1"/>
-                </a:solidFill>
-                <a:latin typeface="Segoe UI Semibold"/>
-                <a:ea typeface="Segoe UI Semibold"/>
-                <a:cs typeface="Segoe UI Semibold"/>
-              </a:rPr>
-              <a:t>0.5 секунды</a:t>
-            </a:r>
-            <a:r>
-              <a:rPr lang="ru-RU" sz="1600" b="0" i="0" u="none" strike="noStrike" cap="none" spc="0">
-                <a:solidFill>
-                  <a:schemeClr val="bg1"/>
-                </a:solidFill>
-                <a:latin typeface="Segoe UI Semibold"/>
-                <a:ea typeface="Segoe UI Semibold"/>
-                <a:cs typeface="Segoe UI Semibold"/>
-              </a:rPr>
-              <a:t>. Звонки в Zoom и видеопотоки даже не заикаются.</a:t>
-            </a:r>
-            <a:endParaRPr sz="1600" b="0" i="0" u="none" strike="noStrike" cap="none" spc="0">
-              <a:solidFill>
-                <a:schemeClr val="bg1"/>
-              </a:solidFill>
-              <a:latin typeface="Segoe UI Semibold"/>
-              <a:cs typeface="Segoe UI Semibold"/>
-            </a:endParaRPr>
-          </a:p>
-        </p:txBody>
-      </p:sp>
+        </p:txBody>
+      </p:sp>
+      <p:pic>
+        <p:nvPicPr>
+          <p:cNvPr id="1445941379" name=""/>
+          <p:cNvPicPr>
+            <a:picLocks noChangeAspect="1"/>
+          </p:cNvPicPr>
+          <p:nvPr/>
+        </p:nvPicPr>
+        <p:blipFill rotWithShape="1">
+          <a:blip r:embed="rId4"/>
+          <a:stretch/>
+        </p:blipFill>
+        <p:spPr bwMode="auto">
+          <a:xfrm flipH="0" flipV="0">
+            <a:off x="8630259" y="1153026"/>
+            <a:ext cx="3410200" cy="3410200"/>
+          </a:xfrm>
+          <a:prstGeom prst="rect">
+            <a:avLst/>
+          </a:prstGeom>
+        </p:spPr>
+      </p:pic>
     </p:spTree>
   </p:cSld>
   <p:clrMapOvr>
@@ -9600,7 +9855,7 @@
       </p:grpSpPr>
       <p:sp>
         <p:nvSpPr>
-          <p:cNvPr id="478448870" name="Заголовок 1"/>
+          <p:cNvPr id="1382983548" name="Заголовок 1"/>
           <p:cNvSpPr>
             <a:spLocks noGrp="1"/>
           </p:cNvSpPr>
@@ -9622,13 +9877,13 @@
       </p:sp>
       <p:pic>
         <p:nvPicPr>
-          <p:cNvPr id="1907412919" name=""/>
+          <p:cNvPr id="1348018392" name=""/>
           <p:cNvPicPr>
             <a:picLocks noChangeAspect="1"/>
           </p:cNvPicPr>
           <p:nvPr/>
         </p:nvPicPr>
-        <p:blipFill>
+        <p:blipFill rotWithShape="1">
           <a:blip r:embed="rId3"/>
           <a:stretch/>
         </p:blipFill>
@@ -9644,14 +9899,14 @@
       </p:pic>
       <p:sp>
         <p:nvSpPr>
-          <p:cNvPr id="778770773" name=""/>
+          <p:cNvPr id="723005600" name=""/>
           <p:cNvSpPr txBox="1"/>
           <p:nvPr/>
         </p:nvSpPr>
         <p:spPr bwMode="auto">
           <a:xfrm rot="0" flipH="0" flipV="0">
             <a:off x="464358" y="244390"/>
-            <a:ext cx="8652377" cy="1189079"/>
+            <a:ext cx="8653457" cy="1189079"/>
           </a:xfrm>
           <a:prstGeom prst="rect">
             <a:avLst/>
@@ -9684,26 +9939,28 @@
                 <a:ea typeface="Segoe UI Semibold"/>
                 <a:cs typeface="Segoe UI Semibold"/>
               </a:rPr>
-              <a:t>Автоматизация: Шаблоны VM и магия Linked Clone</a:t>
-            </a:r>
-            <a:r>
-              <a:rPr/>
-              <a:t> </a:t>
-            </a:r>
-            <a:endParaRPr/>
-          </a:p>
-        </p:txBody>
-      </p:sp>
-      <p:sp>
-        <p:nvSpPr>
-          <p:cNvPr id="69261195" name=""/>
+              <a:t>Роутер в кластере: Что делать, если нода сгорела?</a:t>
+            </a:r>
+            <a:endParaRPr lang="ru-RU" sz="3600" b="0" i="0" u="none" strike="noStrike" cap="none" spc="0">
+              <a:solidFill>
+                <a:schemeClr val="bg1"/>
+              </a:solidFill>
+              <a:latin typeface="Segoe UI Semibold"/>
+              <a:cs typeface="Segoe UI Semibold"/>
+            </a:endParaRPr>
+          </a:p>
+        </p:txBody>
+      </p:sp>
+      <p:sp>
+        <p:nvSpPr>
+          <p:cNvPr id="1310627276" name=""/>
           <p:cNvSpPr txBox="1"/>
           <p:nvPr/>
         </p:nvSpPr>
         <p:spPr bwMode="auto">
           <a:xfrm rot="0" flipH="0" flipV="0">
-            <a:off x="608486" y="1433471"/>
-            <a:ext cx="11234513" cy="4755240"/>
+            <a:off x="608486" y="1585520"/>
+            <a:ext cx="11237753" cy="4748201"/>
           </a:xfrm>
           <a:prstGeom prst="rect">
             <a:avLst/>
@@ -9728,38 +9985,17 @@
               <a:defRPr/>
             </a:pPr>
             <a:r>
-              <a:rPr lang="ru-RU" sz="1800" b="0" i="0" u="none" strike="noStrike" cap="none" spc="0">
-                <a:solidFill>
-                  <a:schemeClr val="bg1"/>
-                </a:solidFill>
-                <a:latin typeface="Segoe UI Semibold"/>
-                <a:ea typeface="Segoe UI Semibold"/>
-                <a:cs typeface="Segoe UI Semibold"/>
-              </a:rPr>
-              <a:t>Зачем нужны шаблоны (Templates)?</a:t>
-            </a:r>
-            <a:br>
-              <a:rPr lang="ru-RU" sz="1800" b="0" i="0" u="none" strike="noStrike" cap="none" spc="0">
-                <a:solidFill>
-                  <a:schemeClr val="bg1"/>
-                </a:solidFill>
-                <a:latin typeface="Segoe UI Semibold"/>
-                <a:ea typeface="Segoe UI Semibold"/>
-                <a:cs typeface="Segoe UI Semibold"/>
-              </a:rPr>
-            </a:br>
-            <a:r>
-              <a:rPr lang="ru-RU" sz="1800" b="0" i="0" u="none" strike="noStrike" cap="none" spc="0">
-                <a:solidFill>
-                  <a:schemeClr val="bg1"/>
-                </a:solidFill>
-                <a:latin typeface="Segoe UI Semibold"/>
-                <a:ea typeface="Segoe UI Semibold"/>
-                <a:cs typeface="Segoe UI Semibold"/>
-              </a:rPr>
-              <a:t>Конец ручной установке ОС через ISO. Чистый образ настраивается один раз, превращается в шаблон, а дальше новые серверы клонируются за секунды.</a:t>
-            </a:r>
-            <a:endParaRPr sz="1800" b="0" i="0" u="none" strike="noStrike" cap="none" spc="0">
+              <a:rPr lang="ru-RU" sz="1600" b="0" i="0" u="none" strike="noStrike" cap="none" spc="0">
+                <a:solidFill>
+                  <a:schemeClr val="bg1"/>
+                </a:solidFill>
+                <a:latin typeface="Segoe UI Semibold"/>
+                <a:ea typeface="Segoe UI Semibold"/>
+                <a:cs typeface="Segoe UI Semibold"/>
+              </a:rPr>
+              <a:t>Вариант 1: Встроенный Proxmox HA (Путь ленивых)</a:t>
+            </a:r>
+            <a:endParaRPr sz="1600" b="0" i="0" u="none" strike="noStrike" cap="none" spc="0">
               <a:solidFill>
                 <a:schemeClr val="bg1"/>
               </a:solidFill>
@@ -9781,17 +10017,17 @@
               <a:defRPr/>
             </a:pPr>
             <a:r>
-              <a:rPr lang="ru-RU" sz="1800" b="0" i="0" u="none" strike="noStrike" cap="none" spc="0">
-                <a:solidFill>
-                  <a:schemeClr val="bg1"/>
-                </a:solidFill>
-                <a:latin typeface="Segoe UI Semibold"/>
-                <a:ea typeface="Segoe UI Semibold"/>
-                <a:cs typeface="Segoe UI Semibold"/>
-              </a:rPr>
-              <a:t>Связанный клон (Linked Clone) против Полного (Full Clone):</a:t>
-            </a:r>
-            <a:endParaRPr sz="1800" b="0" i="0" u="none" strike="noStrike" cap="none" spc="0">
+              <a:rPr lang="ru-RU" sz="1600" b="0" i="0" u="none" strike="noStrike" cap="none" spc="0">
+                <a:solidFill>
+                  <a:schemeClr val="bg1"/>
+                </a:solidFill>
+                <a:latin typeface="Segoe UI Semibold"/>
+                <a:ea typeface="Segoe UI Semibold"/>
+                <a:cs typeface="Segoe UI Semibold"/>
+              </a:rPr>
+              <a:t>PVE видит смерть ноды ➔ ждет таймаут 1-2 минуты ➔ стартует роутер на соседнем сервере.</a:t>
+            </a:r>
+            <a:endParaRPr sz="1600" b="0" i="0" u="none" strike="noStrike" cap="none" spc="0">
               <a:solidFill>
                 <a:schemeClr val="bg1"/>
               </a:solidFill>
@@ -9813,28 +10049,50 @@
               <a:defRPr/>
             </a:pPr>
             <a:r>
-              <a:rPr lang="ru-RU" sz="1800" b="0" i="0" u="none" strike="noStrike" cap="none" spc="0">
-                <a:solidFill>
-                  <a:schemeClr val="bg1"/>
-                </a:solidFill>
-                <a:latin typeface="Segoe UI Semibold"/>
-                <a:ea typeface="Segoe UI Semibold"/>
-                <a:cs typeface="Segoe UI Semibold"/>
-              </a:rPr>
-              <a:t>Full Clone:</a:t>
-            </a:r>
-            <a:r>
-              <a:rPr lang="ru-RU" sz="1800" b="0" i="0" u="none" strike="noStrike" cap="none" spc="0">
-                <a:solidFill>
-                  <a:schemeClr val="bg1"/>
-                </a:solidFill>
-                <a:latin typeface="Segoe UI Semibold"/>
-                <a:ea typeface="Segoe UI Semibold"/>
-                <a:cs typeface="Segoe UI Semibold"/>
-              </a:rPr>
-              <a:t> Независимая копия диска. Клонируется дольше, дублирует размер оригинала (жрёт место на LVM-Thin).</a:t>
-            </a:r>
-            <a:endParaRPr sz="1800" b="0" i="0" u="none" strike="noStrike" cap="none" spc="0">
+              <a:rPr lang="ru-RU" sz="1600" b="0" i="0" u="none" strike="noStrike" cap="none" spc="0">
+                <a:solidFill>
+                  <a:schemeClr val="bg1"/>
+                </a:solidFill>
+                <a:latin typeface="Segoe UI Semibold"/>
+                <a:ea typeface="Segoe UI Semibold"/>
+                <a:cs typeface="Segoe UI Semibold"/>
+              </a:rPr>
+              <a:t>Минусы:</a:t>
+            </a:r>
+            <a:r>
+              <a:rPr lang="ru-RU" sz="1600" b="0" i="0" u="none" strike="noStrike" cap="none" spc="0">
+                <a:solidFill>
+                  <a:schemeClr val="bg1"/>
+                </a:solidFill>
+                <a:latin typeface="Segoe UI Semibold"/>
+                <a:ea typeface="Segoe UI Semibold"/>
+                <a:cs typeface="Segoe UI Semibold"/>
+              </a:rPr>
+              <a:t> Простой сети 2-3 минуты, обрыв всех сессий и VPN, юзеры орут.</a:t>
+            </a:r>
+            <a:endParaRPr sz="1600" b="0" i="0" u="none" strike="noStrike" cap="none" spc="0">
+              <a:solidFill>
+                <a:schemeClr val="bg1"/>
+              </a:solidFill>
+              <a:latin typeface="Segoe UI Semibold"/>
+              <a:ea typeface="Segoe UI Semibold"/>
+              <a:cs typeface="Segoe UI Semibold"/>
+            </a:endParaRPr>
+          </a:p>
+          <a:p>
+            <a:pPr marL="0" marR="0" indent="0" algn="l">
+              <a:lnSpc>
+                <a:spcPct val="100000"/>
+              </a:lnSpc>
+              <a:spcBef>
+                <a:spcPts val="0"/>
+              </a:spcBef>
+              <a:spcAft>
+                <a:spcPts val="0"/>
+              </a:spcAft>
+              <a:defRPr/>
+            </a:pPr>
+            <a:endParaRPr sz="1600" b="0" i="0" u="none" strike="noStrike" cap="none" spc="0">
               <a:solidFill>
                 <a:schemeClr val="bg1"/>
               </a:solidFill>
@@ -9856,93 +10114,50 @@
               <a:defRPr/>
             </a:pPr>
             <a:r>
-              <a:rPr lang="ru-RU" sz="1800" b="0" i="0" u="none" strike="noStrike" cap="none" spc="0">
-                <a:solidFill>
-                  <a:schemeClr val="bg1"/>
-                </a:solidFill>
-                <a:latin typeface="Segoe UI Semibold"/>
-                <a:ea typeface="Segoe UI Semibold"/>
-                <a:cs typeface="Segoe UI Semibold"/>
-              </a:rPr>
-              <a:t>Linked Clone:</a:t>
-            </a:r>
-            <a:r>
-              <a:rPr lang="ru-RU" sz="1800" b="0" i="0" u="none" strike="noStrike" cap="none" spc="0">
-                <a:solidFill>
-                  <a:schemeClr val="bg1"/>
-                </a:solidFill>
-                <a:latin typeface="Segoe UI Semibold"/>
-                <a:ea typeface="Segoe UI Semibold"/>
-                <a:cs typeface="Segoe UI Semibold"/>
-              </a:rPr>
-              <a:t> Базируется на механизме </a:t>
-            </a:r>
-            <a:r>
-              <a:rPr lang="ru-RU" sz="1800" b="0" i="0" u="none" strike="noStrike" cap="none" spc="0">
-                <a:solidFill>
-                  <a:schemeClr val="bg1"/>
-                </a:solidFill>
-                <a:latin typeface="Segoe UI Semibold"/>
-                <a:ea typeface="Segoe UI Semibold"/>
-                <a:cs typeface="Segoe UI Semibold"/>
-              </a:rPr>
-              <a:t>Copy-on-Write</a:t>
-            </a:r>
-            <a:r>
-              <a:rPr lang="ru-RU" sz="1800" b="0" i="0" u="none" strike="noStrike" cap="none" spc="0">
-                <a:solidFill>
-                  <a:schemeClr val="bg1"/>
-                </a:solidFill>
-                <a:latin typeface="Segoe UI Semibold"/>
-                <a:ea typeface="Segoe UI Semibold"/>
-                <a:cs typeface="Segoe UI Semibold"/>
-              </a:rPr>
-              <a:t>. Клон создаётся ровно за </a:t>
-            </a:r>
-            <a:r>
-              <a:rPr lang="ru-RU" sz="1800" b="0" i="0" u="none" strike="noStrike" cap="none" spc="0">
-                <a:solidFill>
-                  <a:schemeClr val="bg1"/>
-                </a:solidFill>
-                <a:latin typeface="Segoe UI Semibold"/>
-                <a:ea typeface="Segoe UI Semibold"/>
-                <a:cs typeface="Segoe UI Semibold"/>
-              </a:rPr>
-              <a:t>2 секунды</a:t>
-            </a:r>
-            <a:r>
-              <a:rPr lang="ru-RU" sz="1800" b="0" i="0" u="none" strike="noStrike" cap="none" spc="0">
-                <a:solidFill>
-                  <a:schemeClr val="bg1"/>
-                </a:solidFill>
-                <a:latin typeface="Segoe UI Semibold"/>
-                <a:ea typeface="Segoe UI Semibold"/>
-                <a:cs typeface="Segoe UI Semibold"/>
-              </a:rPr>
-              <a:t>!</a:t>
-            </a:r>
-            <a:br>
-              <a:rPr lang="ru-RU" sz="1800" b="0" i="0" u="none" strike="noStrike" cap="none" spc="0">
-                <a:solidFill>
-                  <a:schemeClr val="bg1"/>
-                </a:solidFill>
-                <a:latin typeface="Segoe UI Semibold"/>
-                <a:ea typeface="Segoe UI Semibold"/>
-                <a:cs typeface="Segoe UI Semibold"/>
-              </a:rPr>
-            </a:br>
-            <a:r>
-              <a:rPr lang="ru-RU" sz="1800" b="0" i="0" u="none" strike="noStrike" cap="none" spc="0">
-                <a:solidFill>
-                  <a:schemeClr val="bg1"/>
-                </a:solidFill>
-                <a:latin typeface="Segoe UI Semibold"/>
-                <a:ea typeface="Segoe UI Semibold"/>
-                <a:cs typeface="Segoe UI Semibold"/>
-              </a:rPr>
-              <a:t>Виртуалка читает базовую ОС из шаблона, а пишет только изменения. 10 серверов занимают не 200 ГБ, а всего 5–10 ГБ.</a:t>
-            </a:r>
-            <a:endParaRPr sz="1800" b="0" i="0" u="none" strike="noStrike" cap="none" spc="0">
+              <a:rPr lang="ru-RU" sz="1600" b="0" i="0" u="none" strike="noStrike" cap="none" spc="0">
+                <a:solidFill>
+                  <a:schemeClr val="bg1"/>
+                </a:solidFill>
+                <a:latin typeface="Segoe UI Semibold"/>
+                <a:ea typeface="Segoe UI Semibold"/>
+                <a:cs typeface="Segoe UI Semibold"/>
+              </a:rPr>
+              <a:t>Нюанс LVM-Thin:</a:t>
+            </a:r>
+            <a:r>
+              <a:rPr lang="ru-RU" sz="1600" b="0" i="0" u="none" strike="noStrike" cap="none" spc="0">
+                <a:solidFill>
+                  <a:schemeClr val="bg1"/>
+                </a:solidFill>
+                <a:latin typeface="Segoe UI Semibold"/>
+                <a:ea typeface="Segoe UI Semibold"/>
+                <a:cs typeface="Segoe UI Semibold"/>
+              </a:rPr>
+              <a:t> Диск роутера должен лежать на общем сетевом хранилище (NFS/NAS), иначе виртуалке тупо неоткуда запуститься.</a:t>
+            </a:r>
+            <a:endParaRPr sz="1600" b="0" i="0" u="none" strike="noStrike" cap="none" spc="0">
+              <a:solidFill>
+                <a:schemeClr val="bg1"/>
+              </a:solidFill>
+              <a:latin typeface="Segoe UI Semibold"/>
+              <a:ea typeface="Segoe UI Semibold"/>
+              <a:cs typeface="Segoe UI Semibold"/>
+            </a:endParaRPr>
+          </a:p>
+          <a:p>
+            <a:pPr marL="0" marR="0" indent="0" algn="l">
+              <a:lnSpc>
+                <a:spcPct val="100000"/>
+              </a:lnSpc>
+              <a:spcBef>
+                <a:spcPts val="0"/>
+              </a:spcBef>
+              <a:spcAft>
+                <a:spcPts val="0"/>
+              </a:spcAft>
+              <a:defRPr/>
+            </a:pPr>
+            <a:endParaRPr sz="1600" b="0" i="0" u="none" strike="noStrike" cap="none" spc="0">
               <a:solidFill>
                 <a:schemeClr val="bg1"/>
               </a:solidFill>
@@ -9964,38 +10179,39 @@
               <a:defRPr/>
             </a:pPr>
             <a:r>
-              <a:rPr lang="ru-RU" sz="1800" b="0" i="0" u="none" strike="noStrike" cap="none" spc="0">
-                <a:solidFill>
-                  <a:schemeClr val="bg1"/>
-                </a:solidFill>
-                <a:latin typeface="Segoe UI Semibold"/>
-                <a:ea typeface="Segoe UI Semibold"/>
-                <a:cs typeface="Segoe UI Semibold"/>
-              </a:rPr>
-              <a:t>Магия Cloud-Init (Автоконфигурация на лету):</a:t>
-            </a:r>
-            <a:br>
-              <a:rPr lang="ru-RU" sz="1800" b="0" i="0" u="none" strike="noStrike" cap="none" spc="0">
-                <a:solidFill>
-                  <a:schemeClr val="bg1"/>
-                </a:solidFill>
-                <a:latin typeface="Segoe UI Semibold"/>
-                <a:ea typeface="Segoe UI Semibold"/>
-                <a:cs typeface="Segoe UI Semibold"/>
-              </a:rPr>
-            </a:br>
-            <a:r>
-              <a:rPr lang="ru-RU" sz="1800" b="0" i="0" u="none" strike="noStrike" cap="none" spc="0">
-                <a:solidFill>
-                  <a:schemeClr val="bg1"/>
-                </a:solidFill>
-                <a:latin typeface="Segoe UI Semibold"/>
-                <a:ea typeface="Segoe UI Semibold"/>
-                <a:cs typeface="Segoe UI Semibold"/>
-              </a:rPr>
-              <a:t>Прямо из веб-интерфейса Proxmox без входа в виртуалку нарезаются:</a:t>
-            </a:r>
-            <a:endParaRPr sz="1800" b="0" i="0" u="none" strike="noStrike" cap="none" spc="0">
+              <a:rPr lang="ru-RU" sz="1600" b="0" i="0" u="none" strike="noStrike" cap="none" spc="0">
+                <a:solidFill>
+                  <a:schemeClr val="bg1"/>
+                </a:solidFill>
+                <a:latin typeface="Segoe UI Semibold"/>
+                <a:ea typeface="Segoe UI Semibold"/>
+                <a:cs typeface="Segoe UI Semibold"/>
+              </a:rPr>
+              <a:t>Вариант 2: Два роутера + CARP (Инженерный путь самурая)</a:t>
+            </a:r>
+            <a:endParaRPr sz="1600" b="0" i="0" u="none" strike="noStrike" cap="none" spc="0">
+              <a:solidFill>
+                <a:schemeClr val="bg1"/>
+              </a:solidFill>
+              <a:latin typeface="Segoe UI Semibold"/>
+              <a:ea typeface="Segoe UI Semibold"/>
+              <a:cs typeface="Segoe UI Semibold"/>
+            </a:endParaRPr>
+          </a:p>
+          <a:p>
+            <a:pPr marL="0" marR="0" indent="0" algn="l">
+              <a:lnSpc>
+                <a:spcPct val="100000"/>
+              </a:lnSpc>
+              <a:spcBef>
+                <a:spcPts val="0"/>
+              </a:spcBef>
+              <a:spcAft>
+                <a:spcPts val="0"/>
+              </a:spcAft>
+              <a:defRPr/>
+            </a:pPr>
+            <a:endParaRPr sz="1600" b="0" i="0" u="none" strike="noStrike" cap="none" spc="0">
               <a:solidFill>
                 <a:schemeClr val="bg1"/>
               </a:solidFill>
@@ -10017,17 +10233,61 @@
               <a:defRPr/>
             </a:pPr>
             <a:r>
-              <a:rPr lang="ru-RU" sz="1800" b="0" i="0" u="none" strike="noStrike" cap="none" spc="0">
-                <a:solidFill>
-                  <a:schemeClr val="bg1"/>
-                </a:solidFill>
-                <a:latin typeface="Segoe UI Semibold"/>
-                <a:ea typeface="Segoe UI Semibold"/>
-                <a:cs typeface="Segoe UI Semibold"/>
-              </a:rPr>
-              <a:t>Имя хоста и пользователь.</a:t>
-            </a:r>
-            <a:endParaRPr sz="1800" b="0" i="0" u="none" strike="noStrike" cap="none" spc="0">
+              <a:rPr lang="ru-RU" sz="1600" b="0" i="0" u="none" strike="noStrike" cap="none" spc="0">
+                <a:solidFill>
+                  <a:schemeClr val="bg1"/>
+                </a:solidFill>
+                <a:latin typeface="Segoe UI Semibold"/>
+                <a:ea typeface="Segoe UI Semibold"/>
+                <a:cs typeface="Segoe UI Semibold"/>
+              </a:rPr>
+              <a:t>Поднимаем </a:t>
+            </a:r>
+            <a:r>
+              <a:rPr lang="ru-RU" sz="1600" b="0" i="0" u="none" strike="noStrike" cap="none" spc="0">
+                <a:solidFill>
+                  <a:schemeClr val="bg1"/>
+                </a:solidFill>
+                <a:latin typeface="Segoe UI Semibold"/>
+                <a:ea typeface="Segoe UI Semibold"/>
+                <a:cs typeface="Segoe UI Semibold"/>
+              </a:rPr>
+              <a:t>два независимых OPNsense</a:t>
+            </a:r>
+            <a:r>
+              <a:rPr lang="ru-RU" sz="1600" b="0" i="0" u="none" strike="noStrike" cap="none" spc="0">
+                <a:solidFill>
+                  <a:schemeClr val="bg1"/>
+                </a:solidFill>
+                <a:latin typeface="Segoe UI Semibold"/>
+                <a:ea typeface="Segoe UI Semibold"/>
+                <a:cs typeface="Segoe UI Semibold"/>
+              </a:rPr>
+              <a:t> на разных серверах:</a:t>
+            </a:r>
+            <a:endParaRPr lang="ru-RU" sz="1600" b="0" i="0" u="none" strike="noStrike" cap="none" spc="0">
+              <a:solidFill>
+                <a:schemeClr val="bg1"/>
+              </a:solidFill>
+              <a:latin typeface="Segoe UI Semibold"/>
+              <a:ea typeface="Segoe UI Semibold"/>
+              <a:cs typeface="Segoe UI Semibold"/>
+            </a:endParaRPr>
+          </a:p>
+          <a:p>
+            <a:pPr marL="0" marR="0" indent="0" algn="l">
+              <a:lnSpc>
+                <a:spcPct val="100000"/>
+              </a:lnSpc>
+              <a:spcBef>
+                <a:spcPts val="0"/>
+              </a:spcBef>
+              <a:spcAft>
+                <a:spcPts val="0"/>
+              </a:spcAft>
+              <a:defRPr/>
+            </a:pPr>
+            <a:endParaRPr sz="1600" b="0" i="0" u="none" strike="noStrike" cap="none" spc="0">
               <a:solidFill>
                 <a:schemeClr val="bg1"/>
               </a:solidFill>
@@ -10049,17 +10309,50 @@
               <a:defRPr/>
             </a:pPr>
             <a:r>
-              <a:rPr lang="ru-RU" sz="1800" b="0" i="0" u="none" strike="noStrike" cap="none" spc="0">
-                <a:solidFill>
-                  <a:schemeClr val="bg1"/>
-                </a:solidFill>
-                <a:latin typeface="Segoe UI Semibold"/>
-                <a:ea typeface="Segoe UI Semibold"/>
-                <a:cs typeface="Segoe UI Semibold"/>
-              </a:rPr>
-              <a:t>Пароли и SSH-ключи.</a:t>
-            </a:r>
-            <a:endParaRPr sz="1800" b="0" i="0" u="none" strike="noStrike" cap="none" spc="0">
+              <a:rPr lang="ru-RU" sz="1600" b="0" i="0" u="none" strike="noStrike" cap="none" spc="0">
+                <a:solidFill>
+                  <a:schemeClr val="bg1"/>
+                </a:solidFill>
+                <a:latin typeface="Segoe UI Semibold"/>
+                <a:ea typeface="Segoe UI Semibold"/>
+                <a:cs typeface="Segoe UI Semibold"/>
+              </a:rPr>
+              <a:t>OPNsense-Master</a:t>
+            </a:r>
+            <a:r>
+              <a:rPr lang="ru-RU" sz="1600" b="0" i="0" u="none" strike="noStrike" cap="none" spc="0">
+                <a:solidFill>
+                  <a:schemeClr val="bg1"/>
+                </a:solidFill>
+                <a:latin typeface="Segoe UI Semibold"/>
+                <a:ea typeface="Segoe UI Semibold"/>
+                <a:cs typeface="Segoe UI Semibold"/>
+              </a:rPr>
+              <a:t> на Ноде 1 (LAN IP: </a:t>
+            </a:r>
+            <a:r>
+              <a:rPr lang="ru-RU" sz="1600" b="0" i="0" u="none" strike="noStrike" cap="none" spc="0">
+                <a:solidFill>
+                  <a:schemeClr val="bg1"/>
+                </a:solidFill>
+                <a:latin typeface="Segoe UI Semibold"/>
+                <a:ea typeface="Segoe UI Semibold"/>
+                <a:cs typeface="Segoe UI Semibold"/>
+              </a:rPr>
+              <a:t>192.168.1.2</a:t>
+            </a:r>
+            <a:r>
+              <a:rPr lang="ru-RU" sz="1600" b="0" i="0" u="none" strike="noStrike" cap="none" spc="0">
+                <a:solidFill>
+                  <a:schemeClr val="bg1"/>
+                </a:solidFill>
+                <a:latin typeface="Segoe UI Semibold"/>
+                <a:ea typeface="Segoe UI Semibold"/>
+                <a:cs typeface="Segoe UI Semibold"/>
+              </a:rPr>
+              <a:t>)</a:t>
+            </a:r>
+            <a:endParaRPr sz="1600" b="0" i="0" u="none" strike="noStrike" cap="none" spc="0">
               <a:solidFill>
                 <a:schemeClr val="bg1"/>
               </a:solidFill>
@@ -10081,17 +10374,50 @@
               <a:defRPr/>
             </a:pPr>
             <a:r>
-              <a:rPr lang="ru-RU" sz="1800" b="0" i="0" u="none" strike="noStrike" cap="none" spc="0">
-                <a:solidFill>
-                  <a:schemeClr val="bg1"/>
-                </a:solidFill>
-                <a:latin typeface="Segoe UI Semibold"/>
-                <a:ea typeface="Segoe UI Semibold"/>
-                <a:cs typeface="Segoe UI Semibold"/>
-              </a:rPr>
-              <a:t>Статическая сеть или DHCP.</a:t>
-            </a:r>
-            <a:endParaRPr sz="1800" b="0" i="0" u="none" strike="noStrike" cap="none" spc="0">
+              <a:rPr lang="ru-RU" sz="1600" b="0" i="0" u="none" strike="noStrike" cap="none" spc="0">
+                <a:solidFill>
+                  <a:schemeClr val="bg1"/>
+                </a:solidFill>
+                <a:latin typeface="Segoe UI Semibold"/>
+                <a:ea typeface="Segoe UI Semibold"/>
+                <a:cs typeface="Segoe UI Semibold"/>
+              </a:rPr>
+              <a:t>OPNsense-Backup</a:t>
+            </a:r>
+            <a:r>
+              <a:rPr lang="ru-RU" sz="1600" b="0" i="0" u="none" strike="noStrike" cap="none" spc="0">
+                <a:solidFill>
+                  <a:schemeClr val="bg1"/>
+                </a:solidFill>
+                <a:latin typeface="Segoe UI Semibold"/>
+                <a:ea typeface="Segoe UI Semibold"/>
+                <a:cs typeface="Segoe UI Semibold"/>
+              </a:rPr>
+              <a:t> на Ноде 2 (LAN IP: </a:t>
+            </a:r>
+            <a:r>
+              <a:rPr lang="ru-RU" sz="1600" b="0" i="0" u="none" strike="noStrike" cap="none" spc="0">
+                <a:solidFill>
+                  <a:schemeClr val="bg1"/>
+                </a:solidFill>
+                <a:latin typeface="Segoe UI Semibold"/>
+                <a:ea typeface="Segoe UI Semibold"/>
+                <a:cs typeface="Segoe UI Semibold"/>
+              </a:rPr>
+              <a:t>192.168.1.3</a:t>
+            </a:r>
+            <a:r>
+              <a:rPr lang="ru-RU" sz="1600" b="0" i="0" u="none" strike="noStrike" cap="none" spc="0">
+                <a:solidFill>
+                  <a:schemeClr val="bg1"/>
+                </a:solidFill>
+                <a:latin typeface="Segoe UI Semibold"/>
+                <a:ea typeface="Segoe UI Semibold"/>
+                <a:cs typeface="Segoe UI Semibold"/>
+              </a:rPr>
+              <a:t>)</a:t>
+            </a:r>
+            <a:endParaRPr sz="1600" b="0" i="0" u="none" strike="noStrike" cap="none" spc="0">
               <a:solidFill>
                 <a:schemeClr val="bg1"/>
               </a:solidFill>
@@ -10113,51 +10439,149 @@
               <a:defRPr/>
             </a:pPr>
             <a:r>
-              <a:rPr lang="ru-RU" sz="1800" b="0" i="0" u="none" strike="noStrike" cap="none" spc="0">
-                <a:solidFill>
-                  <a:schemeClr val="bg1"/>
-                </a:solidFill>
-                <a:latin typeface="Segoe UI Semibold"/>
-                <a:ea typeface="Segoe UI Semibold"/>
-                <a:cs typeface="Segoe UI Semibold"/>
-              </a:rPr>
-              <a:t>Результат:</a:t>
-            </a:r>
-            <a:r>
-              <a:rPr lang="ru-RU" sz="1800" b="0" i="0" u="none" strike="noStrike" cap="none" spc="0">
-                <a:solidFill>
-                  <a:schemeClr val="bg1"/>
-                </a:solidFill>
-                <a:latin typeface="Segoe UI Semibold"/>
-                <a:ea typeface="Segoe UI Semibold"/>
-                <a:cs typeface="Segoe UI Semibold"/>
-              </a:rPr>
-              <a:t> Развёртывание нового боевого сервера с Docker или базой данных занимает меньше </a:t>
-            </a:r>
-            <a:r>
-              <a:rPr lang="ru-RU" sz="1800" b="0" i="0" u="none" strike="noStrike" cap="none" spc="0">
-                <a:solidFill>
-                  <a:schemeClr val="bg1"/>
-                </a:solidFill>
-                <a:latin typeface="Segoe UI Semibold"/>
-                <a:ea typeface="Segoe UI Semibold"/>
-                <a:cs typeface="Segoe UI Semibold"/>
-              </a:rPr>
-              <a:t>10 секунд</a:t>
-            </a:r>
-            <a:r>
-              <a:rPr lang="ru-RU" sz="1800" b="0" i="0" u="none" strike="noStrike" cap="none" spc="0">
-                <a:solidFill>
-                  <a:schemeClr val="bg1"/>
-                </a:solidFill>
-                <a:latin typeface="Segoe UI Semibold"/>
-                <a:ea typeface="Segoe UI Semibold"/>
-                <a:cs typeface="Segoe UI Semibold"/>
-              </a:rPr>
-              <a:t> в пару кликов мыши.</a:t>
+              <a:rPr lang="ru-RU" sz="1600" b="0" i="0" u="none" strike="noStrike" cap="none" spc="0">
+                <a:solidFill>
+                  <a:schemeClr val="bg1"/>
+                </a:solidFill>
+                <a:latin typeface="Segoe UI Semibold"/>
+                <a:ea typeface="Segoe UI Semibold"/>
+                <a:cs typeface="Segoe UI Semibold"/>
+              </a:rPr>
+              <a:t>Плавающий Virtual IP (VIP):</a:t>
+            </a:r>
+            <a:r>
+              <a:rPr lang="ru-RU" sz="1600" b="0" i="0" u="none" strike="noStrike" cap="none" spc="0">
+                <a:solidFill>
+                  <a:schemeClr val="bg1"/>
+                </a:solidFill>
+                <a:latin typeface="Segoe UI Semibold"/>
+                <a:ea typeface="Segoe UI Semibold"/>
+                <a:cs typeface="Segoe UI Semibold"/>
+              </a:rPr>
+              <a:t> например </a:t>
+            </a:r>
+            <a:r>
+              <a:rPr lang="ru-RU" sz="1600" b="0" i="0" u="none" strike="noStrike" cap="none" spc="0">
+                <a:solidFill>
+                  <a:schemeClr val="bg1"/>
+                </a:solidFill>
+                <a:latin typeface="Segoe UI Semibold"/>
+                <a:ea typeface="Segoe UI Semibold"/>
+                <a:cs typeface="Segoe UI Semibold"/>
+              </a:rPr>
+              <a:t>192.168.1.1</a:t>
+            </a:r>
+            <a:r>
+              <a:rPr lang="ru-RU" sz="1600" b="0" i="0" u="none" strike="noStrike" cap="none" spc="0">
+                <a:solidFill>
+                  <a:schemeClr val="bg1"/>
+                </a:solidFill>
+                <a:latin typeface="Segoe UI Semibold"/>
+                <a:ea typeface="Segoe UI Semibold"/>
+                <a:cs typeface="Segoe UI Semibold"/>
+              </a:rPr>
+              <a:t> - общий шлюз для клиентов.</a:t>
+            </a:r>
+            <a:endParaRPr lang="ru-RU" sz="1600" b="0" i="0" u="none" strike="noStrike" cap="none" spc="0">
+              <a:solidFill>
+                <a:schemeClr val="bg1"/>
+              </a:solidFill>
+              <a:latin typeface="Segoe UI Semibold"/>
+              <a:ea typeface="Segoe UI Semibold"/>
+              <a:cs typeface="Segoe UI Semibold"/>
+            </a:endParaRPr>
+          </a:p>
+          <a:p>
+            <a:pPr marL="0" marR="0" indent="0" algn="l">
+              <a:lnSpc>
+                <a:spcPct val="100000"/>
+              </a:lnSpc>
+              <a:spcBef>
+                <a:spcPts val="0"/>
+              </a:spcBef>
+              <a:spcAft>
+                <a:spcPts val="0"/>
+              </a:spcAft>
+              <a:defRPr/>
+            </a:pPr>
+            <a:r>
+              <a:rPr lang="ru-RU" sz="1600" b="0" i="0" u="none" strike="noStrike" cap="none" spc="0">
+                <a:solidFill>
+                  <a:schemeClr val="bg1"/>
+                </a:solidFill>
+                <a:latin typeface="Segoe UI Semibold"/>
+                <a:ea typeface="Segoe UI Semibold"/>
+                <a:cs typeface="Segoe UI Semibold"/>
+              </a:rPr>
+              <a:t>Протокол pfsync:</a:t>
+            </a:r>
+            <a:r>
+              <a:rPr lang="ru-RU" sz="1600" b="0" i="0" u="none" strike="noStrike" cap="none" spc="0">
+                <a:solidFill>
+                  <a:schemeClr val="bg1"/>
+                </a:solidFill>
+                <a:latin typeface="Segoe UI Semibold"/>
+                <a:ea typeface="Segoe UI Semibold"/>
+                <a:cs typeface="Segoe UI Semibold"/>
+              </a:rPr>
+              <a:t> роутеры непрерывно синхронизируют таблицу открытых соединений фаервола по сети.</a:t>
+            </a:r>
+            <a:endParaRPr sz="1600" b="0" i="0" u="none" strike="noStrike" cap="none" spc="0">
+              <a:solidFill>
+                <a:schemeClr val="bg1"/>
+              </a:solidFill>
+              <a:latin typeface="Segoe UI Semibold"/>
+              <a:ea typeface="Segoe UI Semibold"/>
+              <a:cs typeface="Segoe UI Semibold"/>
+            </a:endParaRPr>
+          </a:p>
+          <a:p>
+            <a:pPr marL="0" marR="0" indent="0" algn="l">
+              <a:lnSpc>
+                <a:spcPct val="100000"/>
+              </a:lnSpc>
+              <a:spcBef>
+                <a:spcPts val="0"/>
+              </a:spcBef>
+              <a:spcAft>
+                <a:spcPts val="0"/>
+              </a:spcAft>
+              <a:defRPr/>
+            </a:pPr>
+            <a:endParaRPr sz="1600" b="0" i="0" u="none" strike="noStrike" cap="none" spc="0">
+              <a:solidFill>
+                <a:schemeClr val="bg1"/>
+              </a:solidFill>
+              <a:latin typeface="Segoe UI Semibold"/>
+              <a:cs typeface="Segoe UI Semibold"/>
+            </a:endParaRPr>
+          </a:p>
+          <a:p>
+            <a:pPr marL="0" marR="0" indent="0" algn="l">
+              <a:lnSpc>
+                <a:spcPct val="100000"/>
+              </a:lnSpc>
+              <a:spcBef>
+                <a:spcPts val="0"/>
+              </a:spcBef>
+              <a:spcAft>
+                <a:spcPts val="0"/>
+              </a:spcAft>
+              <a:defRPr/>
+            </a:pPr>
+            <a:r>
+              <a:rPr lang="ru-RU" sz="1600" b="0" i="0" u="none" strike="noStrike" cap="none" spc="0">
+                <a:solidFill>
+                  <a:schemeClr val="bg1"/>
+                </a:solidFill>
+                <a:latin typeface="Segoe UI Semibold"/>
+                <a:ea typeface="Segoe UI Semibold"/>
+                <a:cs typeface="Segoe UI Semibold"/>
+              </a:rPr>
+              <a:t>Результат при аварии ноды:</a:t>
             </a:r>
             <a:br>
-              <a:rPr lang="ru-RU" sz="1800" b="0" i="0" u="none" strike="noStrike" cap="none" spc="0">
+              <a:rPr lang="ru-RU" sz="1600" b="0" i="0" u="none" strike="noStrike" cap="none" spc="0">
                 <a:solidFill>
                   <a:schemeClr val="bg1"/>
                 </a:solidFill>
@@ -10166,7 +10590,40 @@
                 <a:cs typeface="Segoe UI Semibold"/>
               </a:rPr>
             </a:br>
-            <a:endParaRPr sz="1800" b="0" i="0" u="none" strike="noStrike" cap="none" spc="0">
+            <a:r>
+              <a:rPr lang="ru-RU" sz="1600" b="0" i="0" u="none" strike="noStrike" cap="none" spc="0">
+                <a:solidFill>
+                  <a:schemeClr val="bg1"/>
+                </a:solidFill>
+                <a:latin typeface="Segoe UI Semibold"/>
+                <a:ea typeface="Segoe UI Semibold"/>
+                <a:cs typeface="Segoe UI Semibold"/>
+              </a:rPr>
+              <a:t>Нода 1 падает ➔ второй роутер перехватывает шлюз за </a:t>
+            </a:r>
+            <a:r>
+              <a:rPr lang="ru-RU" sz="1600" b="0" i="0" u="none" strike="noStrike" cap="none" spc="0">
+                <a:solidFill>
+                  <a:schemeClr val="bg1"/>
+                </a:solidFill>
+                <a:latin typeface="Segoe UI Semibold"/>
+                <a:ea typeface="Segoe UI Semibold"/>
+                <a:cs typeface="Segoe UI Semibold"/>
+              </a:rPr>
+              <a:t>0.5 секунды</a:t>
+            </a:r>
+            <a:r>
+              <a:rPr lang="ru-RU" sz="1600" b="0" i="0" u="none" strike="noStrike" cap="none" spc="0">
+                <a:solidFill>
+                  <a:schemeClr val="bg1"/>
+                </a:solidFill>
+                <a:latin typeface="Segoe UI Semibold"/>
+                <a:ea typeface="Segoe UI Semibold"/>
+                <a:cs typeface="Segoe UI Semibold"/>
+              </a:rPr>
+              <a:t>. Звонки в Zoom и видеопотоки даже не заикаются.</a:t>
+            </a:r>
+            <a:endParaRPr sz="1600" b="0" i="0" u="none" strike="noStrike" cap="none" spc="0">
               <a:solidFill>
                 <a:schemeClr val="bg1"/>
               </a:solidFill>
